--- a/Grafové databáze – přehled a srovnání.pptx
+++ b/Grafové databáze – přehled a srovnání.pptx
@@ -5,7 +5,7 @@
     <p:sldMasterId id="2147483672" r:id="rId1"/>
   </p:sldMasterIdLst>
   <p:notesMasterIdLst>
-    <p:notesMasterId r:id="rId10"/>
+    <p:notesMasterId r:id="rId14"/>
   </p:notesMasterIdLst>
   <p:sldIdLst>
     <p:sldId id="258" r:id="rId2"/>
@@ -15,7 +15,11 @@
     <p:sldId id="264" r:id="rId6"/>
     <p:sldId id="265" r:id="rId7"/>
     <p:sldId id="266" r:id="rId8"/>
-    <p:sldId id="260" r:id="rId9"/>
+    <p:sldId id="267" r:id="rId9"/>
+    <p:sldId id="270" r:id="rId10"/>
+    <p:sldId id="268" r:id="rId11"/>
+    <p:sldId id="269" r:id="rId12"/>
+    <p:sldId id="260" r:id="rId13"/>
   </p:sldIdLst>
   <p:sldSz cx="8999538" cy="6840538"/>
   <p:notesSz cx="6858000" cy="9144000"/>
@@ -215,7 +219,7 @@
           <a:p>
             <a:fld id="{17DC1901-92BB-4FDD-BA03-8B5D36861ACA}" type="datetimeFigureOut">
               <a:rPr lang="cs-CZ" smtClean="0"/>
-              <a:t>05.03.2024</a:t>
+              <a:t>09.03.2024</a:t>
             </a:fld>
             <a:endParaRPr lang="cs-CZ"/>
           </a:p>
@@ -1198,6 +1202,114 @@
         <p:cNvPr id="1" name="">
           <a:extLst>
             <a:ext uri="{FF2B5EF4-FFF2-40B4-BE49-F238E27FC236}">
+              <a16:creationId xmlns:a16="http://schemas.microsoft.com/office/drawing/2014/main" id="{8CE25431-BE6D-204D-91A6-6CE0466E6089}"/>
+            </a:ext>
+          </a:extLst>
+        </p:cNvPr>
+        <p:cNvGrpSpPr/>
+        <p:nvPr/>
+      </p:nvGrpSpPr>
+      <p:grpSpPr>
+        <a:xfrm>
+          <a:off x="0" y="0"/>
+          <a:ext cx="0" cy="0"/>
+          <a:chOff x="0" y="0"/>
+          <a:chExt cx="0" cy="0"/>
+        </a:xfrm>
+      </p:grpSpPr>
+      <p:sp>
+        <p:nvSpPr>
+          <p:cNvPr id="2" name="Zástupný symbol pro obrázek snímku 1">
+            <a:extLst>
+              <a:ext uri="{FF2B5EF4-FFF2-40B4-BE49-F238E27FC236}">
+                <a16:creationId xmlns:a16="http://schemas.microsoft.com/office/drawing/2014/main" id="{9926E129-3BBA-27E7-927B-ABB33D9A57A7}"/>
+              </a:ext>
+            </a:extLst>
+          </p:cNvPr>
+          <p:cNvSpPr>
+            <a:spLocks noGrp="1" noRot="1" noChangeAspect="1"/>
+          </p:cNvSpPr>
+          <p:nvPr>
+            <p:ph type="sldImg"/>
+          </p:nvPr>
+        </p:nvSpPr>
+        <p:spPr/>
+      </p:sp>
+      <p:sp>
+        <p:nvSpPr>
+          <p:cNvPr id="3" name="Zástupný symbol pro poznámky 2">
+            <a:extLst>
+              <a:ext uri="{FF2B5EF4-FFF2-40B4-BE49-F238E27FC236}">
+                <a16:creationId xmlns:a16="http://schemas.microsoft.com/office/drawing/2014/main" id="{FE1C7208-F38A-E574-A878-C4DF238CC19D}"/>
+              </a:ext>
+            </a:extLst>
+          </p:cNvPr>
+          <p:cNvSpPr>
+            <a:spLocks noGrp="1"/>
+          </p:cNvSpPr>
+          <p:nvPr>
+            <p:ph type="body" idx="1"/>
+          </p:nvPr>
+        </p:nvSpPr>
+        <p:spPr/>
+        <p:txBody>
+          <a:bodyPr/>
+          <a:lstStyle/>
+          <a:p>
+            <a:endParaRPr lang="cs-CZ"/>
+          </a:p>
+        </p:txBody>
+      </p:sp>
+      <p:sp>
+        <p:nvSpPr>
+          <p:cNvPr id="4" name="Zástupný symbol pro číslo snímku 3">
+            <a:extLst>
+              <a:ext uri="{FF2B5EF4-FFF2-40B4-BE49-F238E27FC236}">
+                <a16:creationId xmlns:a16="http://schemas.microsoft.com/office/drawing/2014/main" id="{9CD683B6-9BFF-C36D-32AE-461563E11721}"/>
+              </a:ext>
+            </a:extLst>
+          </p:cNvPr>
+          <p:cNvSpPr>
+            <a:spLocks noGrp="1"/>
+          </p:cNvSpPr>
+          <p:nvPr>
+            <p:ph type="sldNum" sz="quarter" idx="10"/>
+          </p:nvPr>
+        </p:nvSpPr>
+        <p:spPr/>
+        <p:txBody>
+          <a:bodyPr/>
+          <a:lstStyle/>
+          <a:p>
+            <a:fld id="{228EE4EC-FC1D-4A5C-A5BA-DA124659C1D1}" type="slidenum">
+              <a:rPr lang="cs-CZ" smtClean="0"/>
+              <a:t>10</a:t>
+            </a:fld>
+            <a:endParaRPr lang="cs-CZ"/>
+          </a:p>
+        </p:txBody>
+      </p:sp>
+    </p:spTree>
+    <p:extLst>
+      <p:ext uri="{BB962C8B-B14F-4D97-AF65-F5344CB8AC3E}">
+        <p14:creationId xmlns:p14="http://schemas.microsoft.com/office/powerpoint/2010/main" val="2389698998"/>
+      </p:ext>
+    </p:extLst>
+  </p:cSld>
+  <p:clrMapOvr>
+    <a:masterClrMapping/>
+  </p:clrMapOvr>
+</p:notes>
+</file>
+
+<file path=ppt/notesSlides/notesSlide9.xml><?xml version="1.0" encoding="utf-8"?>
+<p:notes xmlns:a="http://schemas.openxmlformats.org/drawingml/2006/main" xmlns:r="http://schemas.openxmlformats.org/officeDocument/2006/relationships" xmlns:p="http://schemas.openxmlformats.org/presentationml/2006/main">
+  <p:cSld>
+    <p:spTree>
+      <p:nvGrpSpPr>
+        <p:cNvPr id="1" name="">
+          <a:extLst>
+            <a:ext uri="{FF2B5EF4-FFF2-40B4-BE49-F238E27FC236}">
               <a16:creationId xmlns:a16="http://schemas.microsoft.com/office/drawing/2014/main" id="{07906907-2D51-CCF4-8B9B-2D50FC718C19}"/>
             </a:ext>
           </a:extLst>
@@ -1279,7 +1391,7 @@
           <a:p>
             <a:fld id="{228EE4EC-FC1D-4A5C-A5BA-DA124659C1D1}" type="slidenum">
               <a:rPr lang="cs-CZ" smtClean="0"/>
-              <a:t>8</a:t>
+              <a:t>12</a:t>
             </a:fld>
             <a:endParaRPr lang="cs-CZ"/>
           </a:p>
@@ -3599,6 +3711,2267 @@
 </p:sld>
 </file>
 
+<file path=ppt/slides/slide10.xml><?xml version="1.0" encoding="utf-8"?>
+<p:sld xmlns:a="http://schemas.openxmlformats.org/drawingml/2006/main" xmlns:r="http://schemas.openxmlformats.org/officeDocument/2006/relationships" xmlns:p="http://schemas.openxmlformats.org/presentationml/2006/main">
+  <p:cSld>
+    <p:bg>
+      <p:bgPr>
+        <a:blipFill dpi="0" rotWithShape="1">
+          <a:blip r:embed="rId3">
+            <a:alphaModFix amt="45000"/>
+            <a:lum/>
+          </a:blip>
+          <a:srcRect/>
+          <a:stretch>
+            <a:fillRect l="-17000" r="-17000"/>
+          </a:stretch>
+        </a:blipFill>
+        <a:effectLst/>
+      </p:bgPr>
+    </p:bg>
+    <p:spTree>
+      <p:nvGrpSpPr>
+        <p:cNvPr id="1" name="">
+          <a:extLst>
+            <a:ext uri="{FF2B5EF4-FFF2-40B4-BE49-F238E27FC236}">
+              <a16:creationId xmlns:a16="http://schemas.microsoft.com/office/drawing/2014/main" id="{FFF6E86D-DE4D-595E-7AFE-B0A3134D0947}"/>
+            </a:ext>
+          </a:extLst>
+        </p:cNvPr>
+        <p:cNvGrpSpPr/>
+        <p:nvPr/>
+      </p:nvGrpSpPr>
+      <p:grpSpPr>
+        <a:xfrm>
+          <a:off x="0" y="0"/>
+          <a:ext cx="0" cy="0"/>
+          <a:chOff x="0" y="0"/>
+          <a:chExt cx="0" cy="0"/>
+        </a:xfrm>
+      </p:grpSpPr>
+      <p:sp>
+        <p:nvSpPr>
+          <p:cNvPr id="2" name="Nadpis 1">
+            <a:extLst>
+              <a:ext uri="{FF2B5EF4-FFF2-40B4-BE49-F238E27FC236}">
+                <a16:creationId xmlns:a16="http://schemas.microsoft.com/office/drawing/2014/main" id="{8C78900E-D821-7A95-A8DC-1E308BB8D778}"/>
+              </a:ext>
+            </a:extLst>
+          </p:cNvPr>
+          <p:cNvSpPr>
+            <a:spLocks noGrp="1"/>
+          </p:cNvSpPr>
+          <p:nvPr>
+            <p:ph type="title"/>
+          </p:nvPr>
+        </p:nvSpPr>
+        <p:spPr/>
+        <p:txBody>
+          <a:bodyPr/>
+          <a:lstStyle/>
+          <a:p>
+            <a:r>
+              <a:rPr lang="cs-CZ" dirty="0"/>
+              <a:t>Dotazování v grafu</a:t>
+            </a:r>
+          </a:p>
+        </p:txBody>
+      </p:sp>
+      <p:sp>
+        <p:nvSpPr>
+          <p:cNvPr id="6" name="Text Placeholder 5">
+            <a:extLst>
+              <a:ext uri="{FF2B5EF4-FFF2-40B4-BE49-F238E27FC236}">
+                <a16:creationId xmlns:a16="http://schemas.microsoft.com/office/drawing/2014/main" id="{461B9056-D539-13F5-3A68-5C67810B717D}"/>
+              </a:ext>
+            </a:extLst>
+          </p:cNvPr>
+          <p:cNvSpPr>
+            <a:spLocks noGrp="1"/>
+          </p:cNvSpPr>
+          <p:nvPr>
+            <p:ph type="body" idx="1"/>
+          </p:nvPr>
+        </p:nvSpPr>
+        <p:spPr>
+          <a:xfrm>
+            <a:off x="719539" y="2135302"/>
+            <a:ext cx="3621600" cy="375179"/>
+          </a:xfrm>
+        </p:spPr>
+        <p:txBody>
+          <a:bodyPr/>
+          <a:lstStyle/>
+          <a:p>
+            <a:r>
+              <a:rPr lang="cs-CZ" dirty="0" err="1"/>
+              <a:t>Known</a:t>
+            </a:r>
+            <a:r>
+              <a:rPr lang="cs-CZ" dirty="0"/>
+              <a:t> </a:t>
+            </a:r>
+            <a:r>
+              <a:rPr lang="cs-CZ" dirty="0" err="1"/>
+              <a:t>walk</a:t>
+            </a:r>
+            <a:endParaRPr lang="en-GB" dirty="0"/>
+          </a:p>
+        </p:txBody>
+      </p:sp>
+      <p:sp>
+        <p:nvSpPr>
+          <p:cNvPr id="7" name="Text Placeholder 6">
+            <a:extLst>
+              <a:ext uri="{FF2B5EF4-FFF2-40B4-BE49-F238E27FC236}">
+                <a16:creationId xmlns:a16="http://schemas.microsoft.com/office/drawing/2014/main" id="{AE06FF20-3C33-D0C5-B969-C65EA421047B}"/>
+              </a:ext>
+            </a:extLst>
+          </p:cNvPr>
+          <p:cNvSpPr>
+            <a:spLocks noGrp="1"/>
+          </p:cNvSpPr>
+          <p:nvPr>
+            <p:ph type="body" sz="quarter" idx="3"/>
+          </p:nvPr>
+        </p:nvSpPr>
+        <p:spPr>
+          <a:xfrm>
+            <a:off x="4657938" y="2136555"/>
+            <a:ext cx="3621600" cy="373926"/>
+          </a:xfrm>
+        </p:spPr>
+        <p:txBody>
+          <a:bodyPr/>
+          <a:lstStyle/>
+          <a:p>
+            <a:r>
+              <a:rPr lang="cs-CZ" dirty="0"/>
+              <a:t>Hledání cesty</a:t>
+            </a:r>
+            <a:endParaRPr lang="en-GB" dirty="0"/>
+          </a:p>
+        </p:txBody>
+      </p:sp>
+      <p:sp>
+        <p:nvSpPr>
+          <p:cNvPr id="4" name="Zástupný symbol pro zápatí 3">
+            <a:extLst>
+              <a:ext uri="{FF2B5EF4-FFF2-40B4-BE49-F238E27FC236}">
+                <a16:creationId xmlns:a16="http://schemas.microsoft.com/office/drawing/2014/main" id="{401A1E59-1DA2-AB66-435B-890E300DEB8F}"/>
+              </a:ext>
+            </a:extLst>
+          </p:cNvPr>
+          <p:cNvSpPr>
+            <a:spLocks noGrp="1"/>
+          </p:cNvSpPr>
+          <p:nvPr>
+            <p:ph type="ftr" sz="quarter" idx="11"/>
+          </p:nvPr>
+        </p:nvSpPr>
+        <p:spPr/>
+        <p:txBody>
+          <a:bodyPr/>
+          <a:lstStyle/>
+          <a:p>
+            <a:r>
+              <a:rPr lang="cs-CZ" dirty="0"/>
+              <a:t>Jan Gaja, 21.3.2024, Katedra informatiky, Přírodovědecká fakulta, </a:t>
+            </a:r>
+            <a:r>
+              <a:rPr lang="en-GB" dirty="0" err="1"/>
+              <a:t>Univerzita</a:t>
+            </a:r>
+            <a:r>
+              <a:rPr lang="en-GB" dirty="0"/>
+              <a:t> </a:t>
+            </a:r>
+            <a:r>
+              <a:rPr lang="en-GB" dirty="0" err="1"/>
+              <a:t>Palackého</a:t>
+            </a:r>
+            <a:r>
+              <a:rPr lang="en-GB" dirty="0"/>
+              <a:t> v </a:t>
+            </a:r>
+            <a:r>
+              <a:rPr lang="en-GB" dirty="0" err="1"/>
+              <a:t>Olomouci</a:t>
+            </a:r>
+            <a:endParaRPr lang="cs-CZ" dirty="0"/>
+          </a:p>
+        </p:txBody>
+      </p:sp>
+      <p:sp>
+        <p:nvSpPr>
+          <p:cNvPr id="9" name="Flowchart: Connector 8">
+            <a:extLst>
+              <a:ext uri="{FF2B5EF4-FFF2-40B4-BE49-F238E27FC236}">
+                <a16:creationId xmlns:a16="http://schemas.microsoft.com/office/drawing/2014/main" id="{E723C606-40D4-CC24-CF70-EDEECFEAD0D8}"/>
+              </a:ext>
+            </a:extLst>
+          </p:cNvPr>
+          <p:cNvSpPr/>
+          <p:nvPr/>
+        </p:nvSpPr>
+        <p:spPr>
+          <a:xfrm>
+            <a:off x="2987279" y="5149688"/>
+            <a:ext cx="900000" cy="900000"/>
+          </a:xfrm>
+          <a:prstGeom prst="flowChartConnector">
+            <a:avLst/>
+          </a:prstGeom>
+          <a:solidFill>
+            <a:schemeClr val="bg1"/>
+          </a:solidFill>
+          <a:ln w="19050">
+            <a:solidFill>
+              <a:srgbClr val="C00000"/>
+            </a:solidFill>
+          </a:ln>
+        </p:spPr>
+        <p:style>
+          <a:lnRef idx="2">
+            <a:schemeClr val="accent1">
+              <a:shade val="15000"/>
+            </a:schemeClr>
+          </a:lnRef>
+          <a:fillRef idx="1">
+            <a:schemeClr val="accent1"/>
+          </a:fillRef>
+          <a:effectRef idx="0">
+            <a:schemeClr val="accent1"/>
+          </a:effectRef>
+          <a:fontRef idx="minor">
+            <a:schemeClr val="lt1"/>
+          </a:fontRef>
+        </p:style>
+        <p:txBody>
+          <a:bodyPr rtlCol="0" anchor="ctr"/>
+          <a:lstStyle/>
+          <a:p>
+            <a:pPr algn="ctr"/>
+            <a:r>
+              <a:rPr lang="cs-CZ" sz="1400" dirty="0">
+                <a:solidFill>
+                  <a:schemeClr val="tx1"/>
+                </a:solidFill>
+              </a:rPr>
+              <a:t>Sýr</a:t>
+            </a:r>
+            <a:endParaRPr lang="en-GB" sz="1400" dirty="0">
+              <a:solidFill>
+                <a:schemeClr val="tx1"/>
+              </a:solidFill>
+            </a:endParaRPr>
+          </a:p>
+        </p:txBody>
+      </p:sp>
+      <p:sp>
+        <p:nvSpPr>
+          <p:cNvPr id="12" name="Flowchart: Connector 11">
+            <a:extLst>
+              <a:ext uri="{FF2B5EF4-FFF2-40B4-BE49-F238E27FC236}">
+                <a16:creationId xmlns:a16="http://schemas.microsoft.com/office/drawing/2014/main" id="{5A576796-E006-F679-DC17-B24202AC971E}"/>
+              </a:ext>
+            </a:extLst>
+          </p:cNvPr>
+          <p:cNvSpPr/>
+          <p:nvPr/>
+        </p:nvSpPr>
+        <p:spPr>
+          <a:xfrm>
+            <a:off x="726479" y="3645168"/>
+            <a:ext cx="900000" cy="900000"/>
+          </a:xfrm>
+          <a:prstGeom prst="flowChartConnector">
+            <a:avLst/>
+          </a:prstGeom>
+          <a:solidFill>
+            <a:schemeClr val="bg1"/>
+          </a:solidFill>
+          <a:ln w="19050">
+            <a:solidFill>
+              <a:schemeClr val="accent1"/>
+            </a:solidFill>
+          </a:ln>
+        </p:spPr>
+        <p:style>
+          <a:lnRef idx="2">
+            <a:schemeClr val="accent1">
+              <a:shade val="15000"/>
+            </a:schemeClr>
+          </a:lnRef>
+          <a:fillRef idx="1">
+            <a:schemeClr val="accent1"/>
+          </a:fillRef>
+          <a:effectRef idx="0">
+            <a:schemeClr val="accent1"/>
+          </a:effectRef>
+          <a:fontRef idx="minor">
+            <a:schemeClr val="lt1"/>
+          </a:fontRef>
+        </p:style>
+        <p:txBody>
+          <a:bodyPr rtlCol="0" anchor="ctr"/>
+          <a:lstStyle/>
+          <a:p>
+            <a:pPr algn="ctr"/>
+            <a:r>
+              <a:rPr lang="cs-CZ" sz="1400" dirty="0">
+                <a:solidFill>
+                  <a:schemeClr val="tx1"/>
+                </a:solidFill>
+              </a:rPr>
+              <a:t>Petr</a:t>
+            </a:r>
+          </a:p>
+          <a:p>
+            <a:pPr algn="ctr"/>
+            <a:r>
+              <a:rPr lang="cs-CZ" sz="1400" dirty="0">
+                <a:solidFill>
+                  <a:schemeClr val="tx1"/>
+                </a:solidFill>
+              </a:rPr>
+              <a:t>Holý</a:t>
+            </a:r>
+          </a:p>
+        </p:txBody>
+      </p:sp>
+      <p:sp>
+        <p:nvSpPr>
+          <p:cNvPr id="13" name="Flowchart: Connector 12">
+            <a:extLst>
+              <a:ext uri="{FF2B5EF4-FFF2-40B4-BE49-F238E27FC236}">
+                <a16:creationId xmlns:a16="http://schemas.microsoft.com/office/drawing/2014/main" id="{A7CE6192-C6EB-D0B4-8F74-FF276812D05F}"/>
+              </a:ext>
+            </a:extLst>
+          </p:cNvPr>
+          <p:cNvSpPr/>
+          <p:nvPr/>
+        </p:nvSpPr>
+        <p:spPr>
+          <a:xfrm>
+            <a:off x="2987279" y="3645168"/>
+            <a:ext cx="900000" cy="900000"/>
+          </a:xfrm>
+          <a:prstGeom prst="flowChartConnector">
+            <a:avLst/>
+          </a:prstGeom>
+          <a:solidFill>
+            <a:schemeClr val="bg1"/>
+          </a:solidFill>
+          <a:ln w="19050">
+            <a:solidFill>
+              <a:srgbClr val="C00000"/>
+            </a:solidFill>
+          </a:ln>
+        </p:spPr>
+        <p:style>
+          <a:lnRef idx="2">
+            <a:schemeClr val="accent1">
+              <a:shade val="15000"/>
+            </a:schemeClr>
+          </a:lnRef>
+          <a:fillRef idx="1">
+            <a:schemeClr val="accent1"/>
+          </a:fillRef>
+          <a:effectRef idx="0">
+            <a:schemeClr val="accent1"/>
+          </a:effectRef>
+          <a:fontRef idx="minor">
+            <a:schemeClr val="lt1"/>
+          </a:fontRef>
+        </p:style>
+        <p:txBody>
+          <a:bodyPr rtlCol="0" anchor="ctr"/>
+          <a:lstStyle/>
+          <a:p>
+            <a:pPr algn="ctr"/>
+            <a:r>
+              <a:rPr lang="cs-CZ" sz="1400" dirty="0">
+                <a:solidFill>
+                  <a:schemeClr val="tx1"/>
+                </a:solidFill>
+              </a:rPr>
+              <a:t>Máslo</a:t>
+            </a:r>
+            <a:endParaRPr lang="en-GB" sz="1400" dirty="0">
+              <a:solidFill>
+                <a:schemeClr val="tx1"/>
+              </a:solidFill>
+            </a:endParaRPr>
+          </a:p>
+        </p:txBody>
+      </p:sp>
+      <p:sp>
+        <p:nvSpPr>
+          <p:cNvPr id="14" name="Flowchart: Connector 13">
+            <a:extLst>
+              <a:ext uri="{FF2B5EF4-FFF2-40B4-BE49-F238E27FC236}">
+                <a16:creationId xmlns:a16="http://schemas.microsoft.com/office/drawing/2014/main" id="{2A40266D-0811-1561-6B42-6B71A96CCEA5}"/>
+              </a:ext>
+            </a:extLst>
+          </p:cNvPr>
+          <p:cNvSpPr/>
+          <p:nvPr/>
+        </p:nvSpPr>
+        <p:spPr>
+          <a:xfrm>
+            <a:off x="720479" y="5094865"/>
+            <a:ext cx="900000" cy="900000"/>
+          </a:xfrm>
+          <a:prstGeom prst="flowChartConnector">
+            <a:avLst/>
+          </a:prstGeom>
+          <a:solidFill>
+            <a:schemeClr val="bg1"/>
+          </a:solidFill>
+          <a:ln w="19050">
+            <a:solidFill>
+              <a:srgbClr val="C00000"/>
+            </a:solidFill>
+          </a:ln>
+        </p:spPr>
+        <p:style>
+          <a:lnRef idx="2">
+            <a:schemeClr val="accent1">
+              <a:shade val="15000"/>
+            </a:schemeClr>
+          </a:lnRef>
+          <a:fillRef idx="1">
+            <a:schemeClr val="accent1"/>
+          </a:fillRef>
+          <a:effectRef idx="0">
+            <a:schemeClr val="accent1"/>
+          </a:effectRef>
+          <a:fontRef idx="minor">
+            <a:schemeClr val="lt1"/>
+          </a:fontRef>
+        </p:style>
+        <p:txBody>
+          <a:bodyPr rtlCol="0" anchor="ctr"/>
+          <a:lstStyle/>
+          <a:p>
+            <a:pPr algn="ctr"/>
+            <a:r>
+              <a:rPr lang="cs-CZ" sz="1400" dirty="0">
+                <a:solidFill>
+                  <a:schemeClr val="tx1"/>
+                </a:solidFill>
+              </a:rPr>
+              <a:t>Chléb</a:t>
+            </a:r>
+            <a:endParaRPr lang="en-GB" sz="1400" dirty="0">
+              <a:solidFill>
+                <a:schemeClr val="tx1"/>
+              </a:solidFill>
+            </a:endParaRPr>
+          </a:p>
+        </p:txBody>
+      </p:sp>
+      <p:cxnSp>
+        <p:nvCxnSpPr>
+          <p:cNvPr id="16" name="Straight Arrow Connector 15">
+            <a:extLst>
+              <a:ext uri="{FF2B5EF4-FFF2-40B4-BE49-F238E27FC236}">
+                <a16:creationId xmlns:a16="http://schemas.microsoft.com/office/drawing/2014/main" id="{BDC1FA48-50F4-0A25-697C-5486BCF45E0C}"/>
+              </a:ext>
+            </a:extLst>
+          </p:cNvPr>
+          <p:cNvCxnSpPr>
+            <a:stCxn id="12" idx="6"/>
+            <a:endCxn id="13" idx="2"/>
+          </p:cNvCxnSpPr>
+          <p:nvPr/>
+        </p:nvCxnSpPr>
+        <p:spPr>
+          <a:xfrm>
+            <a:off x="1626479" y="4095168"/>
+            <a:ext cx="1360800" cy="0"/>
+          </a:xfrm>
+          <a:prstGeom prst="straightConnector1">
+            <a:avLst/>
+          </a:prstGeom>
+          <a:ln w="28575">
+            <a:solidFill>
+              <a:schemeClr val="tx1"/>
+            </a:solidFill>
+            <a:tailEnd type="triangle"/>
+          </a:ln>
+        </p:spPr>
+        <p:style>
+          <a:lnRef idx="1">
+            <a:schemeClr val="accent1"/>
+          </a:lnRef>
+          <a:fillRef idx="0">
+            <a:schemeClr val="accent1"/>
+          </a:fillRef>
+          <a:effectRef idx="0">
+            <a:schemeClr val="accent1"/>
+          </a:effectRef>
+          <a:fontRef idx="minor">
+            <a:schemeClr val="tx1"/>
+          </a:fontRef>
+        </p:style>
+      </p:cxnSp>
+      <p:cxnSp>
+        <p:nvCxnSpPr>
+          <p:cNvPr id="17" name="Straight Arrow Connector 16">
+            <a:extLst>
+              <a:ext uri="{FF2B5EF4-FFF2-40B4-BE49-F238E27FC236}">
+                <a16:creationId xmlns:a16="http://schemas.microsoft.com/office/drawing/2014/main" id="{58ED35D6-C188-A630-E277-FA8A796EF670}"/>
+              </a:ext>
+            </a:extLst>
+          </p:cNvPr>
+          <p:cNvCxnSpPr>
+            <a:cxnSpLocks/>
+            <a:stCxn id="12" idx="4"/>
+            <a:endCxn id="14" idx="0"/>
+          </p:cNvCxnSpPr>
+          <p:nvPr/>
+        </p:nvCxnSpPr>
+        <p:spPr>
+          <a:xfrm flipH="1">
+            <a:off x="1170479" y="4545168"/>
+            <a:ext cx="6000" cy="549697"/>
+          </a:xfrm>
+          <a:prstGeom prst="straightConnector1">
+            <a:avLst/>
+          </a:prstGeom>
+          <a:ln w="28575">
+            <a:solidFill>
+              <a:schemeClr val="tx1"/>
+            </a:solidFill>
+            <a:tailEnd type="triangle"/>
+          </a:ln>
+        </p:spPr>
+        <p:style>
+          <a:lnRef idx="1">
+            <a:schemeClr val="accent1"/>
+          </a:lnRef>
+          <a:fillRef idx="0">
+            <a:schemeClr val="accent1"/>
+          </a:fillRef>
+          <a:effectRef idx="0">
+            <a:schemeClr val="accent1"/>
+          </a:effectRef>
+          <a:fontRef idx="minor">
+            <a:schemeClr val="tx1"/>
+          </a:fontRef>
+        </p:style>
+      </p:cxnSp>
+      <p:cxnSp>
+        <p:nvCxnSpPr>
+          <p:cNvPr id="20" name="Straight Arrow Connector 19">
+            <a:extLst>
+              <a:ext uri="{FF2B5EF4-FFF2-40B4-BE49-F238E27FC236}">
+                <a16:creationId xmlns:a16="http://schemas.microsoft.com/office/drawing/2014/main" id="{1C045F4A-CF09-3BD3-B530-ADE64F9D9959}"/>
+              </a:ext>
+            </a:extLst>
+          </p:cNvPr>
+          <p:cNvCxnSpPr>
+            <a:cxnSpLocks/>
+            <a:stCxn id="12" idx="5"/>
+            <a:endCxn id="9" idx="1"/>
+          </p:cNvCxnSpPr>
+          <p:nvPr/>
+        </p:nvCxnSpPr>
+        <p:spPr>
+          <a:xfrm>
+            <a:off x="1494677" y="4413366"/>
+            <a:ext cx="1624404" cy="868124"/>
+          </a:xfrm>
+          <a:prstGeom prst="straightConnector1">
+            <a:avLst/>
+          </a:prstGeom>
+          <a:ln w="28575">
+            <a:solidFill>
+              <a:schemeClr val="tx1"/>
+            </a:solidFill>
+            <a:tailEnd type="triangle"/>
+          </a:ln>
+        </p:spPr>
+        <p:style>
+          <a:lnRef idx="1">
+            <a:schemeClr val="accent1"/>
+          </a:lnRef>
+          <a:fillRef idx="0">
+            <a:schemeClr val="accent1"/>
+          </a:fillRef>
+          <a:effectRef idx="0">
+            <a:schemeClr val="accent1"/>
+          </a:effectRef>
+          <a:fontRef idx="minor">
+            <a:schemeClr val="tx1"/>
+          </a:fontRef>
+        </p:style>
+      </p:cxnSp>
+      <p:sp>
+        <p:nvSpPr>
+          <p:cNvPr id="26" name="Flowchart: Connector 25">
+            <a:extLst>
+              <a:ext uri="{FF2B5EF4-FFF2-40B4-BE49-F238E27FC236}">
+                <a16:creationId xmlns:a16="http://schemas.microsoft.com/office/drawing/2014/main" id="{0AE49666-F72A-97D5-8A0D-7E56743BA032}"/>
+              </a:ext>
+            </a:extLst>
+          </p:cNvPr>
+          <p:cNvSpPr/>
+          <p:nvPr/>
+        </p:nvSpPr>
+        <p:spPr>
+          <a:xfrm>
+            <a:off x="4656261" y="3644922"/>
+            <a:ext cx="900000" cy="900000"/>
+          </a:xfrm>
+          <a:prstGeom prst="flowChartConnector">
+            <a:avLst/>
+          </a:prstGeom>
+          <a:solidFill>
+            <a:schemeClr val="bg1"/>
+          </a:solidFill>
+          <a:ln w="19050">
+            <a:solidFill>
+              <a:schemeClr val="accent1"/>
+            </a:solidFill>
+          </a:ln>
+        </p:spPr>
+        <p:style>
+          <a:lnRef idx="2">
+            <a:schemeClr val="accent1">
+              <a:shade val="15000"/>
+            </a:schemeClr>
+          </a:lnRef>
+          <a:fillRef idx="1">
+            <a:schemeClr val="accent1"/>
+          </a:fillRef>
+          <a:effectRef idx="0">
+            <a:schemeClr val="accent1"/>
+          </a:effectRef>
+          <a:fontRef idx="minor">
+            <a:schemeClr val="lt1"/>
+          </a:fontRef>
+        </p:style>
+        <p:txBody>
+          <a:bodyPr rtlCol="0" anchor="ctr"/>
+          <a:lstStyle/>
+          <a:p>
+            <a:pPr algn="ctr"/>
+            <a:r>
+              <a:rPr lang="cs-CZ" sz="1400" dirty="0">
+                <a:solidFill>
+                  <a:schemeClr val="tx1"/>
+                </a:solidFill>
+              </a:rPr>
+              <a:t>Petr</a:t>
+            </a:r>
+          </a:p>
+          <a:p>
+            <a:pPr algn="ctr"/>
+            <a:r>
+              <a:rPr lang="cs-CZ" sz="1400" dirty="0">
+                <a:solidFill>
+                  <a:schemeClr val="tx1"/>
+                </a:solidFill>
+              </a:rPr>
+              <a:t>Novák</a:t>
+            </a:r>
+          </a:p>
+        </p:txBody>
+      </p:sp>
+      <p:sp>
+        <p:nvSpPr>
+          <p:cNvPr id="27" name="Flowchart: Connector 26">
+            <a:extLst>
+              <a:ext uri="{FF2B5EF4-FFF2-40B4-BE49-F238E27FC236}">
+                <a16:creationId xmlns:a16="http://schemas.microsoft.com/office/drawing/2014/main" id="{F3B78152-8552-DCA3-BD0B-9E88F14F5CEE}"/>
+              </a:ext>
+            </a:extLst>
+          </p:cNvPr>
+          <p:cNvSpPr/>
+          <p:nvPr/>
+        </p:nvSpPr>
+        <p:spPr>
+          <a:xfrm>
+            <a:off x="6923059" y="5149688"/>
+            <a:ext cx="900000" cy="900000"/>
+          </a:xfrm>
+          <a:prstGeom prst="flowChartConnector">
+            <a:avLst/>
+          </a:prstGeom>
+          <a:solidFill>
+            <a:schemeClr val="bg1"/>
+          </a:solidFill>
+          <a:ln w="19050">
+            <a:solidFill>
+              <a:schemeClr val="accent1"/>
+            </a:solidFill>
+          </a:ln>
+        </p:spPr>
+        <p:style>
+          <a:lnRef idx="2">
+            <a:schemeClr val="accent1">
+              <a:shade val="15000"/>
+            </a:schemeClr>
+          </a:lnRef>
+          <a:fillRef idx="1">
+            <a:schemeClr val="accent1"/>
+          </a:fillRef>
+          <a:effectRef idx="0">
+            <a:schemeClr val="accent1"/>
+          </a:effectRef>
+          <a:fontRef idx="minor">
+            <a:schemeClr val="lt1"/>
+          </a:fontRef>
+        </p:style>
+        <p:txBody>
+          <a:bodyPr rtlCol="0" anchor="ctr"/>
+          <a:lstStyle/>
+          <a:p>
+            <a:pPr algn="ctr"/>
+            <a:r>
+              <a:rPr lang="cs-CZ" sz="1400" dirty="0">
+                <a:solidFill>
+                  <a:schemeClr val="tx1"/>
+                </a:solidFill>
+              </a:rPr>
+              <a:t>Jiří</a:t>
+            </a:r>
+          </a:p>
+          <a:p>
+            <a:pPr algn="ctr"/>
+            <a:r>
+              <a:rPr lang="cs-CZ" sz="1400" dirty="0">
+                <a:solidFill>
+                  <a:schemeClr val="tx1"/>
+                </a:solidFill>
+              </a:rPr>
+              <a:t>Horák</a:t>
+            </a:r>
+          </a:p>
+        </p:txBody>
+      </p:sp>
+      <p:cxnSp>
+        <p:nvCxnSpPr>
+          <p:cNvPr id="30" name="Straight Arrow Connector 29">
+            <a:extLst>
+              <a:ext uri="{FF2B5EF4-FFF2-40B4-BE49-F238E27FC236}">
+                <a16:creationId xmlns:a16="http://schemas.microsoft.com/office/drawing/2014/main" id="{1DEF7C7D-113B-B4D8-2298-B01018C1C5E6}"/>
+              </a:ext>
+            </a:extLst>
+          </p:cNvPr>
+          <p:cNvCxnSpPr>
+            <a:cxnSpLocks/>
+            <a:endCxn id="27" idx="1"/>
+          </p:cNvCxnSpPr>
+          <p:nvPr/>
+        </p:nvCxnSpPr>
+        <p:spPr>
+          <a:xfrm>
+            <a:off x="6669053" y="5081094"/>
+            <a:ext cx="385808" cy="200396"/>
+          </a:xfrm>
+          <a:prstGeom prst="straightConnector1">
+            <a:avLst/>
+          </a:prstGeom>
+          <a:ln w="28575">
+            <a:solidFill>
+              <a:schemeClr val="tx1"/>
+            </a:solidFill>
+            <a:tailEnd type="triangle"/>
+          </a:ln>
+        </p:spPr>
+        <p:style>
+          <a:lnRef idx="1">
+            <a:schemeClr val="accent1"/>
+          </a:lnRef>
+          <a:fillRef idx="0">
+            <a:schemeClr val="accent1"/>
+          </a:fillRef>
+          <a:effectRef idx="0">
+            <a:schemeClr val="accent1"/>
+          </a:effectRef>
+          <a:fontRef idx="minor">
+            <a:schemeClr val="tx1"/>
+          </a:fontRef>
+        </p:style>
+      </p:cxnSp>
+      <p:pic>
+        <p:nvPicPr>
+          <p:cNvPr id="34" name="Graphic 33" descr="Question Mark with solid fill">
+            <a:extLst>
+              <a:ext uri="{FF2B5EF4-FFF2-40B4-BE49-F238E27FC236}">
+                <a16:creationId xmlns:a16="http://schemas.microsoft.com/office/drawing/2014/main" id="{5EEF865F-0324-EEA6-7767-B1322108A287}"/>
+              </a:ext>
+            </a:extLst>
+          </p:cNvPr>
+          <p:cNvPicPr>
+            <a:picLocks noChangeAspect="1"/>
+          </p:cNvPicPr>
+          <p:nvPr/>
+        </p:nvPicPr>
+        <p:blipFill>
+          <a:blip r:embed="rId4">
+            <a:extLst>
+              <a:ext uri="{28A0092B-C50C-407E-A947-70E740481C1C}">
+                <a14:useLocalDpi xmlns:a14="http://schemas.microsoft.com/office/drawing/2010/main" val="0"/>
+              </a:ext>
+              <a:ext uri="{96DAC541-7B7A-43D3-8B79-37D633B846F1}">
+                <asvg:svgBlip xmlns:asvg="http://schemas.microsoft.com/office/drawing/2016/SVG/main" r:embed="rId5"/>
+              </a:ext>
+            </a:extLst>
+          </a:blip>
+          <a:stretch>
+            <a:fillRect/>
+          </a:stretch>
+        </p:blipFill>
+        <p:spPr>
+          <a:xfrm>
+            <a:off x="5890429" y="4923651"/>
+            <a:ext cx="515282" cy="515282"/>
+          </a:xfrm>
+          <a:prstGeom prst="rect">
+            <a:avLst/>
+          </a:prstGeom>
+          <a:effectLst/>
+        </p:spPr>
+      </p:pic>
+      <p:cxnSp>
+        <p:nvCxnSpPr>
+          <p:cNvPr id="38" name="Straight Connector 37">
+            <a:extLst>
+              <a:ext uri="{FF2B5EF4-FFF2-40B4-BE49-F238E27FC236}">
+                <a16:creationId xmlns:a16="http://schemas.microsoft.com/office/drawing/2014/main" id="{9EC2E0F9-5C74-88B2-E4E3-1D6DD42EB379}"/>
+              </a:ext>
+            </a:extLst>
+          </p:cNvPr>
+          <p:cNvCxnSpPr>
+            <a:cxnSpLocks/>
+            <a:stCxn id="26" idx="5"/>
+          </p:cNvCxnSpPr>
+          <p:nvPr/>
+        </p:nvCxnSpPr>
+        <p:spPr>
+          <a:xfrm>
+            <a:off x="5424459" y="4413120"/>
+            <a:ext cx="421614" cy="228324"/>
+          </a:xfrm>
+          <a:prstGeom prst="line">
+            <a:avLst/>
+          </a:prstGeom>
+          <a:ln w="28575"/>
+        </p:spPr>
+        <p:style>
+          <a:lnRef idx="1">
+            <a:schemeClr val="dk1"/>
+          </a:lnRef>
+          <a:fillRef idx="0">
+            <a:schemeClr val="dk1"/>
+          </a:fillRef>
+          <a:effectRef idx="0">
+            <a:schemeClr val="dk1"/>
+          </a:effectRef>
+          <a:fontRef idx="minor">
+            <a:schemeClr val="tx1"/>
+          </a:fontRef>
+        </p:style>
+      </p:cxnSp>
+      <p:cxnSp>
+        <p:nvCxnSpPr>
+          <p:cNvPr id="39" name="Straight Connector 38">
+            <a:extLst>
+              <a:ext uri="{FF2B5EF4-FFF2-40B4-BE49-F238E27FC236}">
+                <a16:creationId xmlns:a16="http://schemas.microsoft.com/office/drawing/2014/main" id="{F6C759FE-0B4E-CF35-4775-B40845AF1F88}"/>
+              </a:ext>
+            </a:extLst>
+          </p:cNvPr>
+          <p:cNvCxnSpPr>
+            <a:cxnSpLocks/>
+          </p:cNvCxnSpPr>
+          <p:nvPr/>
+        </p:nvCxnSpPr>
+        <p:spPr>
+          <a:xfrm>
+            <a:off x="5890429" y="4655427"/>
+            <a:ext cx="737739" cy="411684"/>
+          </a:xfrm>
+          <a:prstGeom prst="line">
+            <a:avLst/>
+          </a:prstGeom>
+          <a:ln w="28575" cap="flat" cmpd="sng" algn="ctr">
+            <a:solidFill>
+              <a:schemeClr val="dk1"/>
+            </a:solidFill>
+            <a:prstDash val="dash"/>
+            <a:round/>
+            <a:headEnd type="none" w="med" len="med"/>
+            <a:tailEnd type="none" w="med" len="med"/>
+          </a:ln>
+        </p:spPr>
+        <p:style>
+          <a:lnRef idx="0">
+            <a:scrgbClr r="0" g="0" b="0"/>
+          </a:lnRef>
+          <a:fillRef idx="0">
+            <a:scrgbClr r="0" g="0" b="0"/>
+          </a:fillRef>
+          <a:effectRef idx="0">
+            <a:scrgbClr r="0" g="0" b="0"/>
+          </a:effectRef>
+          <a:fontRef idx="minor">
+            <a:schemeClr val="tx1"/>
+          </a:fontRef>
+        </p:style>
+      </p:cxnSp>
+      <p:sp>
+        <p:nvSpPr>
+          <p:cNvPr id="5" name="TextBox 4">
+            <a:extLst>
+              <a:ext uri="{FF2B5EF4-FFF2-40B4-BE49-F238E27FC236}">
+                <a16:creationId xmlns:a16="http://schemas.microsoft.com/office/drawing/2014/main" id="{AC1D3646-0EDB-0907-0A53-C3B55F9791AF}"/>
+              </a:ext>
+            </a:extLst>
+          </p:cNvPr>
+          <p:cNvSpPr txBox="1"/>
+          <p:nvPr/>
+        </p:nvSpPr>
+        <p:spPr>
+          <a:xfrm>
+            <a:off x="719539" y="2598342"/>
+            <a:ext cx="2385470" cy="640816"/>
+          </a:xfrm>
+          <a:prstGeom prst="rect">
+            <a:avLst/>
+          </a:prstGeom>
+          <a:noFill/>
+        </p:spPr>
+        <p:txBody>
+          <a:bodyPr wrap="square" rtlCol="0">
+            <a:spAutoFit/>
+          </a:bodyPr>
+          <a:lstStyle/>
+          <a:p>
+            <a:r>
+              <a:rPr lang="cs-CZ" dirty="0"/>
+              <a:t>Které produkty zakoupil jistý zákazník?</a:t>
+            </a:r>
+            <a:endParaRPr lang="en-GB" dirty="0"/>
+          </a:p>
+        </p:txBody>
+      </p:sp>
+      <p:sp>
+        <p:nvSpPr>
+          <p:cNvPr id="10" name="TextBox 9">
+            <a:extLst>
+              <a:ext uri="{FF2B5EF4-FFF2-40B4-BE49-F238E27FC236}">
+                <a16:creationId xmlns:a16="http://schemas.microsoft.com/office/drawing/2014/main" id="{B913DEE7-594A-B440-AE55-2592BC0B3FBE}"/>
+              </a:ext>
+            </a:extLst>
+          </p:cNvPr>
+          <p:cNvSpPr txBox="1"/>
+          <p:nvPr/>
+        </p:nvSpPr>
+        <p:spPr>
+          <a:xfrm>
+            <a:off x="4653338" y="2598342"/>
+            <a:ext cx="2385470" cy="640816"/>
+          </a:xfrm>
+          <a:prstGeom prst="rect">
+            <a:avLst/>
+          </a:prstGeom>
+          <a:noFill/>
+        </p:spPr>
+        <p:txBody>
+          <a:bodyPr wrap="square" rtlCol="0">
+            <a:spAutoFit/>
+          </a:bodyPr>
+          <a:lstStyle/>
+          <a:p>
+            <a:r>
+              <a:rPr lang="cs-CZ" dirty="0"/>
+              <a:t>Existuje cesta mezi 2 zákazníky?</a:t>
+            </a:r>
+            <a:endParaRPr lang="en-GB" dirty="0"/>
+          </a:p>
+        </p:txBody>
+      </p:sp>
+      <p:sp>
+        <p:nvSpPr>
+          <p:cNvPr id="11" name="TextBox 10">
+            <a:extLst>
+              <a:ext uri="{FF2B5EF4-FFF2-40B4-BE49-F238E27FC236}">
+                <a16:creationId xmlns:a16="http://schemas.microsoft.com/office/drawing/2014/main" id="{6F2A1F3B-0AD9-2B78-8FDD-A18A41B5A264}"/>
+              </a:ext>
+            </a:extLst>
+          </p:cNvPr>
+          <p:cNvSpPr txBox="1"/>
+          <p:nvPr/>
+        </p:nvSpPr>
+        <p:spPr>
+          <a:xfrm>
+            <a:off x="3063310" y="5832409"/>
+            <a:ext cx="747935" cy="276999"/>
+          </a:xfrm>
+          <a:prstGeom prst="rect">
+            <a:avLst/>
+          </a:prstGeom>
+          <a:solidFill>
+            <a:srgbClr val="C00000"/>
+          </a:solidFill>
+        </p:spPr>
+        <p:style>
+          <a:lnRef idx="3">
+            <a:schemeClr val="lt1"/>
+          </a:lnRef>
+          <a:fillRef idx="1">
+            <a:schemeClr val="accent1"/>
+          </a:fillRef>
+          <a:effectRef idx="1">
+            <a:schemeClr val="accent1"/>
+          </a:effectRef>
+          <a:fontRef idx="minor">
+            <a:schemeClr val="lt1"/>
+          </a:fontRef>
+        </p:style>
+        <p:txBody>
+          <a:bodyPr wrap="square" rtlCol="0">
+            <a:spAutoFit/>
+          </a:bodyPr>
+          <a:lstStyle/>
+          <a:p>
+            <a:pPr algn="ctr"/>
+            <a:r>
+              <a:rPr lang="cs-CZ" sz="1200" dirty="0"/>
+              <a:t>Produkt</a:t>
+            </a:r>
+            <a:endParaRPr lang="en-GB" sz="1200" dirty="0"/>
+          </a:p>
+        </p:txBody>
+      </p:sp>
+      <p:sp>
+        <p:nvSpPr>
+          <p:cNvPr id="15" name="TextBox 14">
+            <a:extLst>
+              <a:ext uri="{FF2B5EF4-FFF2-40B4-BE49-F238E27FC236}">
+                <a16:creationId xmlns:a16="http://schemas.microsoft.com/office/drawing/2014/main" id="{24830A41-7D74-234E-49E9-65BC165D324C}"/>
+              </a:ext>
+            </a:extLst>
+          </p:cNvPr>
+          <p:cNvSpPr txBox="1"/>
+          <p:nvPr/>
+        </p:nvSpPr>
+        <p:spPr>
+          <a:xfrm>
+            <a:off x="3063310" y="3563434"/>
+            <a:ext cx="747935" cy="276999"/>
+          </a:xfrm>
+          <a:prstGeom prst="rect">
+            <a:avLst/>
+          </a:prstGeom>
+          <a:solidFill>
+            <a:srgbClr val="C00000"/>
+          </a:solidFill>
+        </p:spPr>
+        <p:style>
+          <a:lnRef idx="3">
+            <a:schemeClr val="lt1"/>
+          </a:lnRef>
+          <a:fillRef idx="1">
+            <a:schemeClr val="accent1"/>
+          </a:fillRef>
+          <a:effectRef idx="1">
+            <a:schemeClr val="accent1"/>
+          </a:effectRef>
+          <a:fontRef idx="minor">
+            <a:schemeClr val="lt1"/>
+          </a:fontRef>
+        </p:style>
+        <p:txBody>
+          <a:bodyPr wrap="square" rtlCol="0">
+            <a:spAutoFit/>
+          </a:bodyPr>
+          <a:lstStyle/>
+          <a:p>
+            <a:pPr algn="ctr"/>
+            <a:r>
+              <a:rPr lang="cs-CZ" sz="1200" dirty="0"/>
+              <a:t>Produkt</a:t>
+            </a:r>
+            <a:endParaRPr lang="en-GB" sz="1200" dirty="0"/>
+          </a:p>
+        </p:txBody>
+      </p:sp>
+      <p:sp>
+        <p:nvSpPr>
+          <p:cNvPr id="18" name="TextBox 17">
+            <a:extLst>
+              <a:ext uri="{FF2B5EF4-FFF2-40B4-BE49-F238E27FC236}">
+                <a16:creationId xmlns:a16="http://schemas.microsoft.com/office/drawing/2014/main" id="{E5D469A5-C482-FD5A-B1BB-7A2640DBFFAE}"/>
+              </a:ext>
+            </a:extLst>
+          </p:cNvPr>
+          <p:cNvSpPr txBox="1"/>
+          <p:nvPr/>
+        </p:nvSpPr>
+        <p:spPr>
+          <a:xfrm>
+            <a:off x="796511" y="5832409"/>
+            <a:ext cx="747935" cy="276999"/>
+          </a:xfrm>
+          <a:prstGeom prst="rect">
+            <a:avLst/>
+          </a:prstGeom>
+          <a:solidFill>
+            <a:srgbClr val="C00000"/>
+          </a:solidFill>
+        </p:spPr>
+        <p:style>
+          <a:lnRef idx="3">
+            <a:schemeClr val="lt1"/>
+          </a:lnRef>
+          <a:fillRef idx="1">
+            <a:schemeClr val="accent1"/>
+          </a:fillRef>
+          <a:effectRef idx="1">
+            <a:schemeClr val="accent1"/>
+          </a:effectRef>
+          <a:fontRef idx="minor">
+            <a:schemeClr val="lt1"/>
+          </a:fontRef>
+        </p:style>
+        <p:txBody>
+          <a:bodyPr wrap="square" rtlCol="0">
+            <a:spAutoFit/>
+          </a:bodyPr>
+          <a:lstStyle/>
+          <a:p>
+            <a:pPr algn="ctr"/>
+            <a:r>
+              <a:rPr lang="cs-CZ" sz="1200" dirty="0"/>
+              <a:t>Produkt</a:t>
+            </a:r>
+            <a:endParaRPr lang="en-GB" sz="1200" dirty="0"/>
+          </a:p>
+        </p:txBody>
+      </p:sp>
+      <p:sp>
+        <p:nvSpPr>
+          <p:cNvPr id="22" name="TextBox 21">
+            <a:extLst>
+              <a:ext uri="{FF2B5EF4-FFF2-40B4-BE49-F238E27FC236}">
+                <a16:creationId xmlns:a16="http://schemas.microsoft.com/office/drawing/2014/main" id="{FD9CEA58-2187-F544-940A-24C30DD3A061}"/>
+              </a:ext>
+            </a:extLst>
+          </p:cNvPr>
+          <p:cNvSpPr txBox="1"/>
+          <p:nvPr/>
+        </p:nvSpPr>
+        <p:spPr>
+          <a:xfrm>
+            <a:off x="796511" y="3563434"/>
+            <a:ext cx="747935" cy="276999"/>
+          </a:xfrm>
+          <a:prstGeom prst="rect">
+            <a:avLst/>
+          </a:prstGeom>
+        </p:spPr>
+        <p:style>
+          <a:lnRef idx="3">
+            <a:schemeClr val="lt1"/>
+          </a:lnRef>
+          <a:fillRef idx="1">
+            <a:schemeClr val="accent1"/>
+          </a:fillRef>
+          <a:effectRef idx="1">
+            <a:schemeClr val="accent1"/>
+          </a:effectRef>
+          <a:fontRef idx="minor">
+            <a:schemeClr val="lt1"/>
+          </a:fontRef>
+        </p:style>
+        <p:txBody>
+          <a:bodyPr wrap="square" rtlCol="0">
+            <a:spAutoFit/>
+          </a:bodyPr>
+          <a:lstStyle/>
+          <a:p>
+            <a:pPr algn="ctr"/>
+            <a:r>
+              <a:rPr lang="cs-CZ" sz="1200" dirty="0"/>
+              <a:t>Zákazník</a:t>
+            </a:r>
+            <a:endParaRPr lang="en-GB" sz="1200" dirty="0"/>
+          </a:p>
+        </p:txBody>
+      </p:sp>
+      <p:sp>
+        <p:nvSpPr>
+          <p:cNvPr id="23" name="TextBox 22">
+            <a:extLst>
+              <a:ext uri="{FF2B5EF4-FFF2-40B4-BE49-F238E27FC236}">
+                <a16:creationId xmlns:a16="http://schemas.microsoft.com/office/drawing/2014/main" id="{8B1496EF-47E3-B669-01E5-DCAA39362A9F}"/>
+              </a:ext>
+            </a:extLst>
+          </p:cNvPr>
+          <p:cNvSpPr txBox="1"/>
+          <p:nvPr/>
+        </p:nvSpPr>
+        <p:spPr>
+          <a:xfrm>
+            <a:off x="4732293" y="3564410"/>
+            <a:ext cx="747935" cy="276999"/>
+          </a:xfrm>
+          <a:prstGeom prst="rect">
+            <a:avLst/>
+          </a:prstGeom>
+        </p:spPr>
+        <p:style>
+          <a:lnRef idx="3">
+            <a:schemeClr val="lt1"/>
+          </a:lnRef>
+          <a:fillRef idx="1">
+            <a:schemeClr val="accent1"/>
+          </a:fillRef>
+          <a:effectRef idx="1">
+            <a:schemeClr val="accent1"/>
+          </a:effectRef>
+          <a:fontRef idx="minor">
+            <a:schemeClr val="lt1"/>
+          </a:fontRef>
+        </p:style>
+        <p:txBody>
+          <a:bodyPr wrap="square" rtlCol="0">
+            <a:spAutoFit/>
+          </a:bodyPr>
+          <a:lstStyle/>
+          <a:p>
+            <a:pPr algn="ctr"/>
+            <a:r>
+              <a:rPr lang="cs-CZ" sz="1200" dirty="0"/>
+              <a:t>Zákazník</a:t>
+            </a:r>
+            <a:endParaRPr lang="en-GB" sz="1200" dirty="0"/>
+          </a:p>
+        </p:txBody>
+      </p:sp>
+      <p:sp>
+        <p:nvSpPr>
+          <p:cNvPr id="24" name="TextBox 23">
+            <a:extLst>
+              <a:ext uri="{FF2B5EF4-FFF2-40B4-BE49-F238E27FC236}">
+                <a16:creationId xmlns:a16="http://schemas.microsoft.com/office/drawing/2014/main" id="{1FF570B3-FD83-84BD-DD16-2F7291573D3F}"/>
+              </a:ext>
+            </a:extLst>
+          </p:cNvPr>
+          <p:cNvSpPr txBox="1"/>
+          <p:nvPr/>
+        </p:nvSpPr>
+        <p:spPr>
+          <a:xfrm>
+            <a:off x="6999093" y="5832163"/>
+            <a:ext cx="747935" cy="276999"/>
+          </a:xfrm>
+          <a:prstGeom prst="rect">
+            <a:avLst/>
+          </a:prstGeom>
+        </p:spPr>
+        <p:style>
+          <a:lnRef idx="3">
+            <a:schemeClr val="lt1"/>
+          </a:lnRef>
+          <a:fillRef idx="1">
+            <a:schemeClr val="accent1"/>
+          </a:fillRef>
+          <a:effectRef idx="1">
+            <a:schemeClr val="accent1"/>
+          </a:effectRef>
+          <a:fontRef idx="minor">
+            <a:schemeClr val="lt1"/>
+          </a:fontRef>
+        </p:style>
+        <p:txBody>
+          <a:bodyPr wrap="square" rtlCol="0">
+            <a:spAutoFit/>
+          </a:bodyPr>
+          <a:lstStyle/>
+          <a:p>
+            <a:pPr algn="ctr"/>
+            <a:r>
+              <a:rPr lang="cs-CZ" sz="1200" dirty="0"/>
+              <a:t>Zákazník</a:t>
+            </a:r>
+            <a:endParaRPr lang="en-GB" sz="1200" dirty="0"/>
+          </a:p>
+        </p:txBody>
+      </p:sp>
+    </p:spTree>
+    <p:extLst>
+      <p:ext uri="{BB962C8B-B14F-4D97-AF65-F5344CB8AC3E}">
+        <p14:creationId xmlns:p14="http://schemas.microsoft.com/office/powerpoint/2010/main" val="987597495"/>
+      </p:ext>
+    </p:extLst>
+  </p:cSld>
+  <p:clrMapOvr>
+    <a:masterClrMapping/>
+  </p:clrMapOvr>
+</p:sld>
+</file>
+
+<file path=ppt/slides/slide11.xml><?xml version="1.0" encoding="utf-8"?>
+<p:sld xmlns:a="http://schemas.openxmlformats.org/drawingml/2006/main" xmlns:r="http://schemas.openxmlformats.org/officeDocument/2006/relationships" xmlns:p="http://schemas.openxmlformats.org/presentationml/2006/main">
+  <p:cSld>
+    <p:spTree>
+      <p:nvGrpSpPr>
+        <p:cNvPr id="1" name=""/>
+        <p:cNvGrpSpPr/>
+        <p:nvPr/>
+      </p:nvGrpSpPr>
+      <p:grpSpPr>
+        <a:xfrm>
+          <a:off x="0" y="0"/>
+          <a:ext cx="0" cy="0"/>
+          <a:chOff x="0" y="0"/>
+          <a:chExt cx="0" cy="0"/>
+        </a:xfrm>
+      </p:grpSpPr>
+      <p:sp>
+        <p:nvSpPr>
+          <p:cNvPr id="12" name="Title 1">
+            <a:extLst>
+              <a:ext uri="{FF2B5EF4-FFF2-40B4-BE49-F238E27FC236}">
+                <a16:creationId xmlns:a16="http://schemas.microsoft.com/office/drawing/2014/main" id="{BB58D975-D21C-521F-2247-4616D54A8983}"/>
+              </a:ext>
+            </a:extLst>
+          </p:cNvPr>
+          <p:cNvSpPr>
+            <a:spLocks noGrp="1"/>
+          </p:cNvSpPr>
+          <p:nvPr>
+            <p:ph type="title"/>
+          </p:nvPr>
+        </p:nvSpPr>
+        <p:spPr>
+          <a:xfrm>
+            <a:off x="720000" y="1620000"/>
+            <a:ext cx="7560000" cy="748080"/>
+          </a:xfrm>
+        </p:spPr>
+        <p:txBody>
+          <a:bodyPr/>
+          <a:lstStyle/>
+          <a:p>
+            <a:r>
+              <a:rPr lang="cs-CZ" dirty="0"/>
+              <a:t>Algoritmy používané v grafových databázích</a:t>
+            </a:r>
+            <a:endParaRPr lang="en-US" dirty="0"/>
+          </a:p>
+        </p:txBody>
+      </p:sp>
+      <p:graphicFrame>
+        <p:nvGraphicFramePr>
+          <p:cNvPr id="8" name="Content Placeholder 7">
+            <a:extLst>
+              <a:ext uri="{FF2B5EF4-FFF2-40B4-BE49-F238E27FC236}">
+                <a16:creationId xmlns:a16="http://schemas.microsoft.com/office/drawing/2014/main" id="{6A7E717A-5C8F-08EA-D430-BE231BC3881C}"/>
+              </a:ext>
+            </a:extLst>
+          </p:cNvPr>
+          <p:cNvGraphicFramePr>
+            <a:graphicFrameLocks noGrp="1"/>
+          </p:cNvGraphicFramePr>
+          <p:nvPr>
+            <p:ph idx="1"/>
+            <p:extLst>
+              <p:ext uri="{D42A27DB-BD31-4B8C-83A1-F6EECF244321}">
+                <p14:modId xmlns:p14="http://schemas.microsoft.com/office/powerpoint/2010/main" val="1932073422"/>
+              </p:ext>
+            </p:extLst>
+          </p:nvPr>
+        </p:nvGraphicFramePr>
+        <p:xfrm>
+          <a:off x="719932" y="2684625"/>
+          <a:ext cx="7559673" cy="2535913"/>
+        </p:xfrm>
+        <a:graphic>
+          <a:graphicData uri="http://schemas.openxmlformats.org/drawingml/2006/table">
+            <a:tbl>
+              <a:tblPr firstRow="1" bandRow="1">
+                <a:noFill/>
+                <a:tableStyleId>{B301B821-A1FF-4177-AEE7-76D212191A09}</a:tableStyleId>
+              </a:tblPr>
+              <a:tblGrid>
+                <a:gridCol w="2519891">
+                  <a:extLst>
+                    <a:ext uri="{9D8B030D-6E8A-4147-A177-3AD203B41FA5}">
+                      <a16:colId xmlns:a16="http://schemas.microsoft.com/office/drawing/2014/main" val="2389372638"/>
+                    </a:ext>
+                  </a:extLst>
+                </a:gridCol>
+                <a:gridCol w="2519891">
+                  <a:extLst>
+                    <a:ext uri="{9D8B030D-6E8A-4147-A177-3AD203B41FA5}">
+                      <a16:colId xmlns:a16="http://schemas.microsoft.com/office/drawing/2014/main" val="1362157568"/>
+                    </a:ext>
+                  </a:extLst>
+                </a:gridCol>
+                <a:gridCol w="2519891">
+                  <a:extLst>
+                    <a:ext uri="{9D8B030D-6E8A-4147-A177-3AD203B41FA5}">
+                      <a16:colId xmlns:a16="http://schemas.microsoft.com/office/drawing/2014/main" val="4116906333"/>
+                    </a:ext>
+                  </a:extLst>
+                </a:gridCol>
+              </a:tblGrid>
+              <a:tr h="506863">
+                <a:tc>
+                  <a:txBody>
+                    <a:bodyPr/>
+                    <a:lstStyle/>
+                    <a:p>
+                      <a:pPr marL="0" marR="0" lvl="0" indent="0" algn="l" defTabSz="899952" rtl="0" eaLnBrk="1" fontAlgn="auto" latinLnBrk="0" hangingPunct="1">
+                        <a:lnSpc>
+                          <a:spcPct val="100000"/>
+                        </a:lnSpc>
+                        <a:spcBef>
+                          <a:spcPts val="0"/>
+                        </a:spcBef>
+                        <a:spcAft>
+                          <a:spcPts val="0"/>
+                        </a:spcAft>
+                        <a:buClrTx/>
+                        <a:buSzTx/>
+                        <a:buFont typeface="Arial" panose="020B0604020202020204" pitchFamily="34" charset="0"/>
+                        <a:buNone/>
+                        <a:tabLst/>
+                        <a:defRPr/>
+                      </a:pPr>
+                      <a:r>
+                        <a:rPr lang="cs-CZ" dirty="0"/>
+                        <a:t>Hledání cesty</a:t>
+                      </a:r>
+                    </a:p>
+                  </a:txBody>
+                  <a:tcPr/>
+                </a:tc>
+                <a:tc>
+                  <a:txBody>
+                    <a:bodyPr/>
+                    <a:lstStyle/>
+                    <a:p>
+                      <a:pPr marL="0" marR="0" lvl="0" indent="0" algn="l" defTabSz="899952" rtl="0" eaLnBrk="1" fontAlgn="auto" latinLnBrk="0" hangingPunct="1">
+                        <a:lnSpc>
+                          <a:spcPct val="100000"/>
+                        </a:lnSpc>
+                        <a:spcBef>
+                          <a:spcPts val="0"/>
+                        </a:spcBef>
+                        <a:spcAft>
+                          <a:spcPts val="0"/>
+                        </a:spcAft>
+                        <a:buClrTx/>
+                        <a:buSzTx/>
+                        <a:buFont typeface="Arial" panose="020B0604020202020204" pitchFamily="34" charset="0"/>
+                        <a:buNone/>
+                        <a:tabLst/>
+                        <a:defRPr/>
+                      </a:pPr>
+                      <a:r>
+                        <a:rPr lang="cs-CZ" dirty="0"/>
+                        <a:t>Míra centrality</a:t>
+                      </a:r>
+                    </a:p>
+                  </a:txBody>
+                  <a:tcPr/>
+                </a:tc>
+                <a:tc>
+                  <a:txBody>
+                    <a:bodyPr/>
+                    <a:lstStyle/>
+                    <a:p>
+                      <a:pPr marL="0" marR="0" lvl="0" indent="0" algn="l" defTabSz="899952" rtl="0" eaLnBrk="1" fontAlgn="auto" latinLnBrk="0" hangingPunct="1">
+                        <a:lnSpc>
+                          <a:spcPct val="100000"/>
+                        </a:lnSpc>
+                        <a:spcBef>
+                          <a:spcPts val="0"/>
+                        </a:spcBef>
+                        <a:spcAft>
+                          <a:spcPts val="0"/>
+                        </a:spcAft>
+                        <a:buClrTx/>
+                        <a:buSzTx/>
+                        <a:buFontTx/>
+                        <a:buNone/>
+                        <a:tabLst/>
+                        <a:defRPr/>
+                      </a:pPr>
+                      <a:r>
+                        <a:rPr lang="cs-CZ" dirty="0"/>
+                        <a:t>Detekce komunit</a:t>
+                      </a:r>
+                      <a:endParaRPr lang="en-GB" dirty="0"/>
+                    </a:p>
+                  </a:txBody>
+                  <a:tcPr/>
+                </a:tc>
+                <a:extLst>
+                  <a:ext uri="{0D108BD9-81ED-4DB2-BD59-A6C34878D82A}">
+                    <a16:rowId xmlns:a16="http://schemas.microsoft.com/office/drawing/2014/main" val="227333291"/>
+                  </a:ext>
+                </a:extLst>
+              </a:tr>
+              <a:tr h="506863">
+                <a:tc>
+                  <a:txBody>
+                    <a:bodyPr/>
+                    <a:lstStyle/>
+                    <a:p>
+                      <a:pPr marL="0" marR="0" lvl="0" indent="0" algn="l" defTabSz="899952" rtl="0" eaLnBrk="1" fontAlgn="auto" latinLnBrk="0" hangingPunct="1">
+                        <a:lnSpc>
+                          <a:spcPct val="100000"/>
+                        </a:lnSpc>
+                        <a:spcBef>
+                          <a:spcPts val="0"/>
+                        </a:spcBef>
+                        <a:spcAft>
+                          <a:spcPts val="0"/>
+                        </a:spcAft>
+                        <a:buClrTx/>
+                        <a:buSzTx/>
+                        <a:buFont typeface="Arial" panose="020B0604020202020204" pitchFamily="34" charset="0"/>
+                        <a:buNone/>
+                        <a:tabLst/>
+                        <a:defRPr/>
+                      </a:pPr>
+                      <a:r>
+                        <a:rPr lang="cs-CZ" dirty="0"/>
+                        <a:t>Nejkratší cesty v grafu. Minimální kostra.</a:t>
+                      </a:r>
+                    </a:p>
+                  </a:txBody>
+                  <a:tcPr/>
+                </a:tc>
+                <a:tc>
+                  <a:txBody>
+                    <a:bodyPr/>
+                    <a:lstStyle/>
+                    <a:p>
+                      <a:pPr marL="0" marR="0" lvl="0" indent="0" algn="l" defTabSz="899952" rtl="0" eaLnBrk="1" fontAlgn="auto" latinLnBrk="0" hangingPunct="1">
+                        <a:lnSpc>
+                          <a:spcPct val="100000"/>
+                        </a:lnSpc>
+                        <a:spcBef>
+                          <a:spcPts val="0"/>
+                        </a:spcBef>
+                        <a:spcAft>
+                          <a:spcPts val="0"/>
+                        </a:spcAft>
+                        <a:buClrTx/>
+                        <a:buSzTx/>
+                        <a:buFont typeface="Arial" panose="020B0604020202020204" pitchFamily="34" charset="0"/>
+                        <a:buNone/>
+                        <a:tabLst/>
+                        <a:defRPr/>
+                      </a:pPr>
+                      <a:r>
+                        <a:rPr lang="cs-CZ" dirty="0"/>
+                        <a:t>Jaký vrchol je v naší databázi nejdůležitější?</a:t>
+                      </a:r>
+                    </a:p>
+                  </a:txBody>
+                  <a:tcPr/>
+                </a:tc>
+                <a:tc>
+                  <a:txBody>
+                    <a:bodyPr/>
+                    <a:lstStyle/>
+                    <a:p>
+                      <a:pPr marL="0" marR="0" lvl="0" indent="0" algn="l" defTabSz="899952" rtl="0" eaLnBrk="1" fontAlgn="auto" latinLnBrk="0" hangingPunct="1">
+                        <a:lnSpc>
+                          <a:spcPct val="100000"/>
+                        </a:lnSpc>
+                        <a:spcBef>
+                          <a:spcPts val="0"/>
+                        </a:spcBef>
+                        <a:spcAft>
+                          <a:spcPts val="0"/>
+                        </a:spcAft>
+                        <a:buClrTx/>
+                        <a:buSzTx/>
+                        <a:buFontTx/>
+                        <a:buNone/>
+                        <a:tabLst/>
+                        <a:defRPr/>
+                      </a:pPr>
+                      <a:r>
+                        <a:rPr lang="cs-CZ" dirty="0"/>
+                        <a:t>Skupinky hustě propojených vrcholů.</a:t>
+                      </a:r>
+                      <a:endParaRPr lang="en-GB" dirty="0"/>
+                    </a:p>
+                  </a:txBody>
+                  <a:tcPr/>
+                </a:tc>
+                <a:extLst>
+                  <a:ext uri="{0D108BD9-81ED-4DB2-BD59-A6C34878D82A}">
+                    <a16:rowId xmlns:a16="http://schemas.microsoft.com/office/drawing/2014/main" val="1474326787"/>
+                  </a:ext>
+                </a:extLst>
+              </a:tr>
+              <a:tr h="1397479">
+                <a:tc>
+                  <a:txBody>
+                    <a:bodyPr/>
+                    <a:lstStyle/>
+                    <a:p>
+                      <a:pPr marL="285750" indent="-285750" algn="l" defTabSz="899952" rtl="0" eaLnBrk="1" latinLnBrk="0" hangingPunct="1">
+                        <a:lnSpc>
+                          <a:spcPct val="90000"/>
+                        </a:lnSpc>
+                        <a:buFont typeface="Arial" panose="020B0604020202020204" pitchFamily="34" charset="0"/>
+                        <a:buChar char="−"/>
+                      </a:pPr>
+                      <a:r>
+                        <a:rPr lang="cs-CZ" sz="1770" kern="1200" dirty="0" err="1">
+                          <a:solidFill>
+                            <a:schemeClr val="tx1"/>
+                          </a:solidFill>
+                          <a:latin typeface="+mn-lt"/>
+                          <a:ea typeface="+mn-ea"/>
+                          <a:cs typeface="Arial" panose="020B0604020202020204" pitchFamily="34" charset="0"/>
+                        </a:rPr>
+                        <a:t>Djikstrův</a:t>
+                      </a:r>
+                      <a:r>
+                        <a:rPr lang="cs-CZ" sz="1770" kern="1200" dirty="0">
+                          <a:solidFill>
+                            <a:schemeClr val="tx1"/>
+                          </a:solidFill>
+                          <a:latin typeface="+mn-lt"/>
+                          <a:ea typeface="+mn-ea"/>
+                          <a:cs typeface="Arial" panose="020B0604020202020204" pitchFamily="34" charset="0"/>
+                        </a:rPr>
+                        <a:t> algoritmus</a:t>
+                      </a:r>
+                    </a:p>
+                    <a:p>
+                      <a:pPr marL="285750" indent="-285750" algn="l" defTabSz="899952" rtl="0" eaLnBrk="1" latinLnBrk="0" hangingPunct="1">
+                        <a:lnSpc>
+                          <a:spcPct val="90000"/>
+                        </a:lnSpc>
+                        <a:buFont typeface="Arial" panose="020B0604020202020204" pitchFamily="34" charset="0"/>
+                        <a:buChar char="−"/>
+                      </a:pPr>
+                      <a:r>
+                        <a:rPr lang="cs-CZ" sz="1770" kern="1200" dirty="0">
+                          <a:solidFill>
+                            <a:schemeClr val="tx1"/>
+                          </a:solidFill>
+                          <a:latin typeface="+mn-lt"/>
+                          <a:ea typeface="+mn-ea"/>
+                          <a:cs typeface="Arial" panose="020B0604020202020204" pitchFamily="34" charset="0"/>
+                        </a:rPr>
+                        <a:t>A*</a:t>
+                      </a:r>
+                    </a:p>
+                    <a:p>
+                      <a:pPr marL="285750" indent="-285750" algn="l" defTabSz="899952" rtl="0" eaLnBrk="1" latinLnBrk="0" hangingPunct="1">
+                        <a:lnSpc>
+                          <a:spcPct val="90000"/>
+                        </a:lnSpc>
+                        <a:buFont typeface="Arial" panose="020B0604020202020204" pitchFamily="34" charset="0"/>
+                        <a:buChar char="−"/>
+                      </a:pPr>
+                      <a:r>
+                        <a:rPr lang="cs-CZ" sz="1770" kern="1200" dirty="0" err="1">
+                          <a:solidFill>
+                            <a:schemeClr val="tx1"/>
+                          </a:solidFill>
+                          <a:latin typeface="+mn-lt"/>
+                          <a:ea typeface="+mn-ea"/>
+                          <a:cs typeface="Arial" panose="020B0604020202020204" pitchFamily="34" charset="0"/>
+                        </a:rPr>
+                        <a:t>Random</a:t>
+                      </a:r>
+                      <a:r>
+                        <a:rPr lang="cs-CZ" sz="1770" kern="1200" dirty="0">
+                          <a:solidFill>
+                            <a:schemeClr val="tx1"/>
+                          </a:solidFill>
+                          <a:latin typeface="+mn-lt"/>
+                          <a:ea typeface="+mn-ea"/>
+                          <a:cs typeface="Arial" panose="020B0604020202020204" pitchFamily="34" charset="0"/>
+                        </a:rPr>
+                        <a:t> </a:t>
+                      </a:r>
+                      <a:r>
+                        <a:rPr lang="cs-CZ" sz="1770" kern="1200" dirty="0" err="1">
+                          <a:solidFill>
+                            <a:schemeClr val="tx1"/>
+                          </a:solidFill>
+                          <a:latin typeface="+mn-lt"/>
+                          <a:ea typeface="+mn-ea"/>
+                          <a:cs typeface="Arial" panose="020B0604020202020204" pitchFamily="34" charset="0"/>
+                        </a:rPr>
+                        <a:t>Walk</a:t>
+                      </a:r>
+                      <a:endParaRPr lang="cs-CZ" sz="1770" kern="1200" dirty="0">
+                        <a:solidFill>
+                          <a:schemeClr val="tx1"/>
+                        </a:solidFill>
+                        <a:latin typeface="+mn-lt"/>
+                        <a:ea typeface="+mn-ea"/>
+                        <a:cs typeface="Arial" panose="020B0604020202020204" pitchFamily="34" charset="0"/>
+                      </a:endParaRPr>
+                    </a:p>
+                    <a:p>
+                      <a:pPr marL="285750" indent="-285750" algn="l" defTabSz="899952" rtl="0" eaLnBrk="1" latinLnBrk="0" hangingPunct="1">
+                        <a:lnSpc>
+                          <a:spcPct val="90000"/>
+                        </a:lnSpc>
+                        <a:buFont typeface="Arial" panose="020B0604020202020204" pitchFamily="34" charset="0"/>
+                        <a:buChar char="−"/>
+                      </a:pPr>
+                      <a:r>
+                        <a:rPr lang="cs-CZ" sz="1770" kern="1200" dirty="0">
+                          <a:solidFill>
+                            <a:schemeClr val="tx1"/>
+                          </a:solidFill>
+                          <a:latin typeface="+mn-lt"/>
+                          <a:ea typeface="+mn-ea"/>
+                          <a:cs typeface="Arial" panose="020B0604020202020204" pitchFamily="34" charset="0"/>
+                        </a:rPr>
+                        <a:t>Minimum </a:t>
+                      </a:r>
+                      <a:r>
+                        <a:rPr lang="cs-CZ" sz="1770" kern="1200" dirty="0" err="1">
+                          <a:solidFill>
+                            <a:schemeClr val="tx1"/>
+                          </a:solidFill>
+                          <a:latin typeface="+mn-lt"/>
+                          <a:ea typeface="+mn-ea"/>
+                          <a:cs typeface="Arial" panose="020B0604020202020204" pitchFamily="34" charset="0"/>
+                        </a:rPr>
+                        <a:t>spanning</a:t>
+                      </a:r>
+                      <a:r>
+                        <a:rPr lang="cs-CZ" sz="1770" kern="1200" dirty="0">
+                          <a:solidFill>
+                            <a:schemeClr val="tx1"/>
+                          </a:solidFill>
+                          <a:latin typeface="+mn-lt"/>
+                          <a:ea typeface="+mn-ea"/>
+                          <a:cs typeface="Arial" panose="020B0604020202020204" pitchFamily="34" charset="0"/>
+                        </a:rPr>
+                        <a:t> </a:t>
+                      </a:r>
+                      <a:r>
+                        <a:rPr lang="cs-CZ" sz="1770" kern="1200" dirty="0" err="1">
+                          <a:solidFill>
+                            <a:schemeClr val="tx1"/>
+                          </a:solidFill>
+                          <a:latin typeface="+mn-lt"/>
+                          <a:ea typeface="+mn-ea"/>
+                          <a:cs typeface="Arial" panose="020B0604020202020204" pitchFamily="34" charset="0"/>
+                        </a:rPr>
+                        <a:t>tree</a:t>
+                      </a:r>
+                      <a:endParaRPr lang="en-GB" sz="1770" kern="1200" dirty="0">
+                        <a:solidFill>
+                          <a:schemeClr val="tx1"/>
+                        </a:solidFill>
+                        <a:latin typeface="+mn-lt"/>
+                        <a:ea typeface="+mn-ea"/>
+                        <a:cs typeface="Arial" panose="020B0604020202020204" pitchFamily="34" charset="0"/>
+                      </a:endParaRPr>
+                    </a:p>
+                  </a:txBody>
+                  <a:tcPr>
+                    <a:noFill/>
+                  </a:tcPr>
+                </a:tc>
+                <a:tc>
+                  <a:txBody>
+                    <a:bodyPr/>
+                    <a:lstStyle/>
+                    <a:p>
+                      <a:pPr marL="285750" indent="-285750" algn="l" defTabSz="899952" rtl="0" eaLnBrk="1" latinLnBrk="0" hangingPunct="1">
+                        <a:lnSpc>
+                          <a:spcPct val="90000"/>
+                        </a:lnSpc>
+                        <a:buFont typeface="Arial" panose="020B0604020202020204" pitchFamily="34" charset="0"/>
+                        <a:buChar char="−"/>
+                      </a:pPr>
+                      <a:r>
+                        <a:rPr lang="cs-CZ" sz="1770" kern="1200" dirty="0" err="1">
+                          <a:solidFill>
+                            <a:schemeClr val="tx1"/>
+                          </a:solidFill>
+                          <a:latin typeface="+mn-lt"/>
+                          <a:ea typeface="+mn-ea"/>
+                          <a:cs typeface="Arial" panose="020B0604020202020204" pitchFamily="34" charset="0"/>
+                        </a:rPr>
+                        <a:t>Degree</a:t>
+                      </a:r>
+                      <a:r>
+                        <a:rPr lang="cs-CZ" sz="1770" kern="1200" dirty="0">
+                          <a:solidFill>
+                            <a:schemeClr val="tx1"/>
+                          </a:solidFill>
+                          <a:latin typeface="+mn-lt"/>
+                          <a:ea typeface="+mn-ea"/>
+                          <a:cs typeface="Arial" panose="020B0604020202020204" pitchFamily="34" charset="0"/>
+                        </a:rPr>
+                        <a:t> centrality</a:t>
+                      </a:r>
+                    </a:p>
+                    <a:p>
+                      <a:pPr marL="285750" indent="-285750" algn="l" defTabSz="899952" rtl="0" eaLnBrk="1" latinLnBrk="0" hangingPunct="1">
+                        <a:lnSpc>
+                          <a:spcPct val="90000"/>
+                        </a:lnSpc>
+                        <a:buFont typeface="Arial" panose="020B0604020202020204" pitchFamily="34" charset="0"/>
+                        <a:buChar char="−"/>
+                      </a:pPr>
+                      <a:r>
+                        <a:rPr lang="cs-CZ" sz="1770" kern="1200" dirty="0" err="1">
+                          <a:solidFill>
+                            <a:schemeClr val="tx1"/>
+                          </a:solidFill>
+                          <a:latin typeface="+mn-lt"/>
+                          <a:ea typeface="+mn-ea"/>
+                          <a:cs typeface="Arial" panose="020B0604020202020204" pitchFamily="34" charset="0"/>
+                        </a:rPr>
+                        <a:t>Closeness</a:t>
+                      </a:r>
+                      <a:r>
+                        <a:rPr lang="cs-CZ" sz="1770" kern="1200" dirty="0">
+                          <a:solidFill>
+                            <a:schemeClr val="tx1"/>
+                          </a:solidFill>
+                          <a:latin typeface="+mn-lt"/>
+                          <a:ea typeface="+mn-ea"/>
+                          <a:cs typeface="Arial" panose="020B0604020202020204" pitchFamily="34" charset="0"/>
+                        </a:rPr>
+                        <a:t> centrality</a:t>
+                      </a:r>
+                    </a:p>
+                    <a:p>
+                      <a:pPr marL="285750" indent="-285750" algn="l" defTabSz="899952" rtl="0" eaLnBrk="1" latinLnBrk="0" hangingPunct="1">
+                        <a:lnSpc>
+                          <a:spcPct val="90000"/>
+                        </a:lnSpc>
+                        <a:buFont typeface="Arial" panose="020B0604020202020204" pitchFamily="34" charset="0"/>
+                        <a:buChar char="−"/>
+                      </a:pPr>
+                      <a:r>
+                        <a:rPr lang="cs-CZ" sz="1770" kern="1200" dirty="0" err="1">
+                          <a:solidFill>
+                            <a:schemeClr val="tx1"/>
+                          </a:solidFill>
+                          <a:latin typeface="+mn-lt"/>
+                          <a:ea typeface="+mn-ea"/>
+                          <a:cs typeface="Arial" panose="020B0604020202020204" pitchFamily="34" charset="0"/>
+                        </a:rPr>
+                        <a:t>Betweeness</a:t>
+                      </a:r>
+                      <a:r>
+                        <a:rPr lang="cs-CZ" sz="1770" kern="1200" dirty="0">
+                          <a:solidFill>
+                            <a:schemeClr val="tx1"/>
+                          </a:solidFill>
+                          <a:latin typeface="+mn-lt"/>
+                          <a:ea typeface="+mn-ea"/>
+                          <a:cs typeface="Arial" panose="020B0604020202020204" pitchFamily="34" charset="0"/>
+                        </a:rPr>
+                        <a:t> centrality</a:t>
+                      </a:r>
+                    </a:p>
+                    <a:p>
+                      <a:pPr marL="285750" indent="-285750" algn="l" defTabSz="899952" rtl="0" eaLnBrk="1" latinLnBrk="0" hangingPunct="1">
+                        <a:lnSpc>
+                          <a:spcPct val="90000"/>
+                        </a:lnSpc>
+                        <a:buFont typeface="Arial" panose="020B0604020202020204" pitchFamily="34" charset="0"/>
+                        <a:buChar char="−"/>
+                      </a:pPr>
+                      <a:r>
+                        <a:rPr lang="cs-CZ" sz="1770" kern="1200" dirty="0" err="1">
+                          <a:solidFill>
+                            <a:schemeClr val="tx1"/>
+                          </a:solidFill>
+                          <a:latin typeface="+mn-lt"/>
+                          <a:ea typeface="+mn-ea"/>
+                          <a:cs typeface="Arial" panose="020B0604020202020204" pitchFamily="34" charset="0"/>
+                        </a:rPr>
+                        <a:t>Page</a:t>
+                      </a:r>
+                      <a:r>
+                        <a:rPr lang="cs-CZ" sz="1770" kern="1200" dirty="0">
+                          <a:solidFill>
+                            <a:schemeClr val="tx1"/>
+                          </a:solidFill>
+                          <a:latin typeface="+mn-lt"/>
+                          <a:ea typeface="+mn-ea"/>
+                          <a:cs typeface="Arial" panose="020B0604020202020204" pitchFamily="34" charset="0"/>
+                        </a:rPr>
+                        <a:t> Rank</a:t>
+                      </a:r>
+                      <a:endParaRPr lang="en-GB" sz="1770" kern="1200" dirty="0">
+                        <a:solidFill>
+                          <a:schemeClr val="tx1"/>
+                        </a:solidFill>
+                        <a:latin typeface="+mn-lt"/>
+                        <a:ea typeface="+mn-ea"/>
+                        <a:cs typeface="Arial" panose="020B0604020202020204" pitchFamily="34" charset="0"/>
+                      </a:endParaRPr>
+                    </a:p>
+                  </a:txBody>
+                  <a:tcPr>
+                    <a:noFill/>
+                  </a:tcPr>
+                </a:tc>
+                <a:tc>
+                  <a:txBody>
+                    <a:bodyPr/>
+                    <a:lstStyle/>
+                    <a:p>
+                      <a:pPr marL="285750" indent="-285750" algn="l" defTabSz="899952" rtl="0" eaLnBrk="1" latinLnBrk="0" hangingPunct="1">
+                        <a:lnSpc>
+                          <a:spcPct val="90000"/>
+                        </a:lnSpc>
+                        <a:buFont typeface="Arial" panose="020B0604020202020204" pitchFamily="34" charset="0"/>
+                        <a:buChar char="−"/>
+                      </a:pPr>
+                      <a:r>
+                        <a:rPr lang="cs-CZ" sz="1770" kern="1200" dirty="0">
+                          <a:solidFill>
+                            <a:schemeClr val="tx1"/>
+                          </a:solidFill>
+                          <a:latin typeface="+mn-lt"/>
+                          <a:ea typeface="+mn-ea"/>
+                          <a:cs typeface="Arial" panose="020B0604020202020204" pitchFamily="34" charset="0"/>
+                        </a:rPr>
+                        <a:t>Počítání trojúhelníků</a:t>
+                      </a:r>
+                    </a:p>
+                    <a:p>
+                      <a:pPr marL="285750" indent="-285750" algn="l" defTabSz="899952" rtl="0" eaLnBrk="1" latinLnBrk="0" hangingPunct="1">
+                        <a:lnSpc>
+                          <a:spcPct val="90000"/>
+                        </a:lnSpc>
+                        <a:buFont typeface="Arial" panose="020B0604020202020204" pitchFamily="34" charset="0"/>
+                        <a:buChar char="−"/>
+                      </a:pPr>
+                      <a:r>
+                        <a:rPr lang="cs-CZ" sz="1770" kern="1200" dirty="0" err="1">
+                          <a:solidFill>
+                            <a:schemeClr val="tx1"/>
+                          </a:solidFill>
+                          <a:latin typeface="+mn-lt"/>
+                          <a:ea typeface="+mn-ea"/>
+                          <a:cs typeface="Arial" panose="020B0604020202020204" pitchFamily="34" charset="0"/>
+                        </a:rPr>
+                        <a:t>Clustering</a:t>
+                      </a:r>
+                      <a:r>
+                        <a:rPr lang="cs-CZ" sz="1770" kern="1200" dirty="0">
+                          <a:solidFill>
+                            <a:schemeClr val="tx1"/>
+                          </a:solidFill>
+                          <a:latin typeface="+mn-lt"/>
+                          <a:ea typeface="+mn-ea"/>
+                          <a:cs typeface="Arial" panose="020B0604020202020204" pitchFamily="34" charset="0"/>
+                        </a:rPr>
+                        <a:t> </a:t>
+                      </a:r>
+                      <a:r>
+                        <a:rPr lang="cs-CZ" sz="1770" kern="1200" dirty="0" err="1">
+                          <a:solidFill>
+                            <a:schemeClr val="tx1"/>
+                          </a:solidFill>
+                          <a:latin typeface="+mn-lt"/>
+                          <a:ea typeface="+mn-ea"/>
+                          <a:cs typeface="Arial" panose="020B0604020202020204" pitchFamily="34" charset="0"/>
+                        </a:rPr>
+                        <a:t>coefficient</a:t>
+                      </a:r>
+                      <a:endParaRPr lang="cs-CZ" sz="1770" kern="1200" dirty="0">
+                        <a:solidFill>
+                          <a:schemeClr val="tx1"/>
+                        </a:solidFill>
+                        <a:latin typeface="+mn-lt"/>
+                        <a:ea typeface="+mn-ea"/>
+                        <a:cs typeface="Arial" panose="020B0604020202020204" pitchFamily="34" charset="0"/>
+                      </a:endParaRPr>
+                    </a:p>
+                    <a:p>
+                      <a:pPr marL="285750" indent="-285750" algn="l" defTabSz="899952" rtl="0" eaLnBrk="1" latinLnBrk="0" hangingPunct="1">
+                        <a:lnSpc>
+                          <a:spcPct val="90000"/>
+                        </a:lnSpc>
+                        <a:buFont typeface="Arial" panose="020B0604020202020204" pitchFamily="34" charset="0"/>
+                        <a:buChar char="−"/>
+                      </a:pPr>
+                      <a:r>
+                        <a:rPr lang="cs-CZ" sz="1770" kern="1200" dirty="0">
+                          <a:solidFill>
+                            <a:schemeClr val="tx1"/>
+                          </a:solidFill>
+                          <a:latin typeface="+mn-lt"/>
+                          <a:ea typeface="+mn-ea"/>
+                          <a:cs typeface="Arial" panose="020B0604020202020204" pitchFamily="34" charset="0"/>
+                        </a:rPr>
+                        <a:t>Hledání komponent</a:t>
+                      </a:r>
+                    </a:p>
+                    <a:p>
+                      <a:pPr marL="285750" indent="-285750" algn="l" defTabSz="899952" rtl="0" eaLnBrk="1" latinLnBrk="0" hangingPunct="1">
+                        <a:lnSpc>
+                          <a:spcPct val="90000"/>
+                        </a:lnSpc>
+                        <a:buFont typeface="Arial" panose="020B0604020202020204" pitchFamily="34" charset="0"/>
+                        <a:buChar char="−"/>
+                      </a:pPr>
+                      <a:r>
+                        <a:rPr lang="cs-CZ" sz="1770" kern="1200" dirty="0">
+                          <a:solidFill>
+                            <a:schemeClr val="tx1"/>
+                          </a:solidFill>
+                          <a:latin typeface="+mn-lt"/>
+                          <a:ea typeface="+mn-ea"/>
+                          <a:cs typeface="Arial" panose="020B0604020202020204" pitchFamily="34" charset="0"/>
+                        </a:rPr>
+                        <a:t>Algoritmus </a:t>
+                      </a:r>
+                      <a:r>
+                        <a:rPr lang="cs-CZ" sz="1770" kern="1200" dirty="0" err="1">
+                          <a:solidFill>
+                            <a:schemeClr val="tx1"/>
+                          </a:solidFill>
+                          <a:latin typeface="+mn-lt"/>
+                          <a:ea typeface="+mn-ea"/>
+                          <a:cs typeface="Arial" panose="020B0604020202020204" pitchFamily="34" charset="0"/>
+                        </a:rPr>
+                        <a:t>Louvain</a:t>
+                      </a:r>
+                      <a:endParaRPr lang="en-GB" sz="1770" kern="1200" dirty="0">
+                        <a:solidFill>
+                          <a:schemeClr val="tx1"/>
+                        </a:solidFill>
+                        <a:latin typeface="+mn-lt"/>
+                        <a:ea typeface="+mn-ea"/>
+                        <a:cs typeface="Arial" panose="020B0604020202020204" pitchFamily="34" charset="0"/>
+                      </a:endParaRPr>
+                    </a:p>
+                  </a:txBody>
+                  <a:tcPr>
+                    <a:noFill/>
+                  </a:tcPr>
+                </a:tc>
+                <a:extLst>
+                  <a:ext uri="{0D108BD9-81ED-4DB2-BD59-A6C34878D82A}">
+                    <a16:rowId xmlns:a16="http://schemas.microsoft.com/office/drawing/2014/main" val="187777229"/>
+                  </a:ext>
+                </a:extLst>
+              </a:tr>
+            </a:tbl>
+          </a:graphicData>
+        </a:graphic>
+      </p:graphicFrame>
+      <p:sp>
+        <p:nvSpPr>
+          <p:cNvPr id="7" name="Footer Placeholder 6">
+            <a:extLst>
+              <a:ext uri="{FF2B5EF4-FFF2-40B4-BE49-F238E27FC236}">
+                <a16:creationId xmlns:a16="http://schemas.microsoft.com/office/drawing/2014/main" id="{569E7AD8-7DDA-B39F-48E5-F4E7FA7E32A6}"/>
+              </a:ext>
+            </a:extLst>
+          </p:cNvPr>
+          <p:cNvSpPr>
+            <a:spLocks noGrp="1"/>
+          </p:cNvSpPr>
+          <p:nvPr>
+            <p:ph type="ftr" sz="quarter" idx="11"/>
+          </p:nvPr>
+        </p:nvSpPr>
+        <p:spPr>
+          <a:xfrm>
+            <a:off x="720000" y="6450675"/>
+            <a:ext cx="7118902" cy="216000"/>
+          </a:xfrm>
+        </p:spPr>
+        <p:txBody>
+          <a:bodyPr anchor="b">
+            <a:normAutofit/>
+          </a:bodyPr>
+          <a:lstStyle/>
+          <a:p>
+            <a:r>
+              <a:rPr lang="cs-CZ" dirty="0"/>
+              <a:t>Jan Gaja, 21.3.2024, Katedra informatiky, Přírodovědecká fakulta, </a:t>
+            </a:r>
+            <a:r>
+              <a:rPr lang="en-GB" dirty="0" err="1"/>
+              <a:t>Univerzita</a:t>
+            </a:r>
+            <a:r>
+              <a:rPr lang="en-GB" dirty="0"/>
+              <a:t> </a:t>
+            </a:r>
+            <a:r>
+              <a:rPr lang="en-GB" dirty="0" err="1"/>
+              <a:t>Palackého</a:t>
+            </a:r>
+            <a:r>
+              <a:rPr lang="en-GB" dirty="0"/>
+              <a:t> v </a:t>
+            </a:r>
+            <a:r>
+              <a:rPr lang="en-GB" dirty="0" err="1"/>
+              <a:t>Olomouci</a:t>
+            </a:r>
+            <a:endParaRPr lang="cs-CZ" dirty="0"/>
+          </a:p>
+        </p:txBody>
+      </p:sp>
+    </p:spTree>
+    <p:extLst>
+      <p:ext uri="{BB962C8B-B14F-4D97-AF65-F5344CB8AC3E}">
+        <p14:creationId xmlns:p14="http://schemas.microsoft.com/office/powerpoint/2010/main" val="3323593169"/>
+      </p:ext>
+    </p:extLst>
+  </p:cSld>
+  <p:clrMapOvr>
+    <a:masterClrMapping/>
+  </p:clrMapOvr>
+</p:sld>
+</file>
+
+<file path=ppt/slides/slide12.xml><?xml version="1.0" encoding="utf-8"?>
+<p:sld xmlns:a="http://schemas.openxmlformats.org/drawingml/2006/main" xmlns:r="http://schemas.openxmlformats.org/officeDocument/2006/relationships" xmlns:p="http://schemas.openxmlformats.org/presentationml/2006/main">
+  <p:cSld>
+    <p:spTree>
+      <p:nvGrpSpPr>
+        <p:cNvPr id="1" name="">
+          <a:extLst>
+            <a:ext uri="{FF2B5EF4-FFF2-40B4-BE49-F238E27FC236}">
+              <a16:creationId xmlns:a16="http://schemas.microsoft.com/office/drawing/2014/main" id="{F4421AD6-1B99-6A32-110C-B829FFF5E162}"/>
+            </a:ext>
+          </a:extLst>
+        </p:cNvPr>
+        <p:cNvGrpSpPr/>
+        <p:nvPr/>
+      </p:nvGrpSpPr>
+      <p:grpSpPr>
+        <a:xfrm>
+          <a:off x="0" y="0"/>
+          <a:ext cx="0" cy="0"/>
+          <a:chOff x="0" y="0"/>
+          <a:chExt cx="0" cy="0"/>
+        </a:xfrm>
+      </p:grpSpPr>
+      <p:sp>
+        <p:nvSpPr>
+          <p:cNvPr id="2" name="Nadpis 1">
+            <a:extLst>
+              <a:ext uri="{FF2B5EF4-FFF2-40B4-BE49-F238E27FC236}">
+                <a16:creationId xmlns:a16="http://schemas.microsoft.com/office/drawing/2014/main" id="{537EFE1E-430B-D289-8B55-72FE25CB7A1C}"/>
+              </a:ext>
+            </a:extLst>
+          </p:cNvPr>
+          <p:cNvSpPr>
+            <a:spLocks noGrp="1"/>
+          </p:cNvSpPr>
+          <p:nvPr>
+            <p:ph type="ctrTitle"/>
+          </p:nvPr>
+        </p:nvSpPr>
+        <p:spPr/>
+        <p:txBody>
+          <a:bodyPr/>
+          <a:lstStyle/>
+          <a:p>
+            <a:r>
+              <a:rPr lang="cs-CZ" dirty="0"/>
+              <a:t>Grafové databáze – přehled a srovnání</a:t>
+            </a:r>
+          </a:p>
+        </p:txBody>
+      </p:sp>
+      <p:sp>
+        <p:nvSpPr>
+          <p:cNvPr id="3" name="Podnadpis 2">
+            <a:extLst>
+              <a:ext uri="{FF2B5EF4-FFF2-40B4-BE49-F238E27FC236}">
+                <a16:creationId xmlns:a16="http://schemas.microsoft.com/office/drawing/2014/main" id="{BF5AA5C9-A765-BAEF-8283-7EE9667030E8}"/>
+              </a:ext>
+            </a:extLst>
+          </p:cNvPr>
+          <p:cNvSpPr>
+            <a:spLocks noGrp="1"/>
+          </p:cNvSpPr>
+          <p:nvPr>
+            <p:ph type="subTitle" idx="1"/>
+          </p:nvPr>
+        </p:nvSpPr>
+        <p:spPr/>
+        <p:txBody>
+          <a:bodyPr/>
+          <a:lstStyle/>
+          <a:p>
+            <a:r>
+              <a:rPr lang="cs-CZ" dirty="0"/>
+              <a:t>Prezentace k obhajobě bakalářské práce</a:t>
+            </a:r>
+          </a:p>
+        </p:txBody>
+      </p:sp>
+      <p:sp>
+        <p:nvSpPr>
+          <p:cNvPr id="5" name="Zástupný symbol pro zápatí 4">
+            <a:extLst>
+              <a:ext uri="{FF2B5EF4-FFF2-40B4-BE49-F238E27FC236}">
+                <a16:creationId xmlns:a16="http://schemas.microsoft.com/office/drawing/2014/main" id="{63A29A68-FAAE-7437-F5DC-191E3C3A4708}"/>
+              </a:ext>
+            </a:extLst>
+          </p:cNvPr>
+          <p:cNvSpPr>
+            <a:spLocks noGrp="1"/>
+          </p:cNvSpPr>
+          <p:nvPr>
+            <p:ph type="ftr" sz="quarter" idx="11"/>
+          </p:nvPr>
+        </p:nvSpPr>
+        <p:spPr/>
+        <p:txBody>
+          <a:bodyPr/>
+          <a:lstStyle/>
+          <a:p>
+            <a:pPr algn="ctr"/>
+            <a:r>
+              <a:rPr lang="cs-CZ" dirty="0"/>
+              <a:t>Jan Gaja, 21.3.2024, Katedra informatiky, Přírodovědecká fakulta, Univerzita Palackého v Olomouci</a:t>
+            </a:r>
+          </a:p>
+        </p:txBody>
+      </p:sp>
+    </p:spTree>
+    <p:extLst>
+      <p:ext uri="{BB962C8B-B14F-4D97-AF65-F5344CB8AC3E}">
+        <p14:creationId xmlns:p14="http://schemas.microsoft.com/office/powerpoint/2010/main" val="960543191"/>
+      </p:ext>
+    </p:extLst>
+  </p:cSld>
+  <p:clrMapOvr>
+    <a:masterClrMapping/>
+  </p:clrMapOvr>
+</p:sld>
+</file>
+
 <file path=ppt/slides/slide2.xml><?xml version="1.0" encoding="utf-8"?>
 <p:sld xmlns:a="http://schemas.openxmlformats.org/drawingml/2006/main" xmlns:r="http://schemas.openxmlformats.org/officeDocument/2006/relationships" xmlns:p="http://schemas.openxmlformats.org/presentationml/2006/main">
   <p:cSld>
@@ -3671,6 +6044,12 @@
             <a:r>
               <a:rPr lang="cs-CZ" dirty="0"/>
               <a:t>Založené na oboru diskrétní matematiky – teorie grafů</a:t>
+            </a:r>
+          </a:p>
+          <a:p>
+            <a:r>
+              <a:rPr lang="cs-CZ" dirty="0"/>
+              <a:t>Vztahy mezi entitami jsou stejně důležité jako samotné entity</a:t>
             </a:r>
           </a:p>
           <a:p>
@@ -3906,22 +6285,6 @@
             </a:r>
           </a:p>
           <a:p>
-            <a:r>
-              <a:rPr lang="cs-CZ" dirty="0"/>
-              <a:t>Mnoho implementací nabízí horizontální škálování</a:t>
-            </a:r>
-          </a:p>
-          <a:p>
-            <a:pPr lvl="1"/>
-            <a:r>
-              <a:rPr lang="cs-CZ" dirty="0"/>
-              <a:t>Data jsou rozdělena mezi více strojů</a:t>
-            </a:r>
-          </a:p>
-          <a:p>
-            <a:endParaRPr lang="cs-CZ" dirty="0"/>
-          </a:p>
-          <a:p>
             <a:endParaRPr lang="cs-CZ" dirty="0"/>
           </a:p>
         </p:txBody>
@@ -4104,9 +6467,6 @@
               <a:t>Jak data rozdělit mezi více strojů?</a:t>
             </a:r>
           </a:p>
-          <a:p>
-            <a:endParaRPr lang="cs-CZ" dirty="0"/>
-          </a:p>
         </p:txBody>
       </p:sp>
       <p:sp>
@@ -4307,59 +6667,6 @@
             </a:r>
             <a:endParaRPr lang="cs-CZ" dirty="0"/>
           </a:p>
-          <a:p>
-            <a:r>
-              <a:rPr lang="cs-CZ" dirty="0"/>
-              <a:t>Další známé implementace</a:t>
-            </a:r>
-          </a:p>
-          <a:p>
-            <a:pPr lvl="1"/>
-            <a:r>
-              <a:rPr lang="cs-CZ" dirty="0"/>
-              <a:t>Amazon Neptune</a:t>
-            </a:r>
-          </a:p>
-          <a:p>
-            <a:pPr lvl="1"/>
-            <a:r>
-              <a:rPr lang="cs-CZ" dirty="0" err="1"/>
-              <a:t>Tiger</a:t>
-            </a:r>
-            <a:r>
-              <a:rPr lang="cs-CZ" dirty="0"/>
-              <a:t> </a:t>
-            </a:r>
-            <a:r>
-              <a:rPr lang="cs-CZ" dirty="0" err="1"/>
-              <a:t>Graph</a:t>
-            </a:r>
-            <a:endParaRPr lang="cs-CZ" dirty="0"/>
-          </a:p>
-          <a:p>
-            <a:pPr lvl="1"/>
-            <a:r>
-              <a:rPr lang="cs-CZ" dirty="0" err="1"/>
-              <a:t>AllegroGraph</a:t>
-            </a:r>
-            <a:endParaRPr lang="cs-CZ" dirty="0"/>
-          </a:p>
-          <a:p>
-            <a:pPr lvl="1"/>
-            <a:r>
-              <a:rPr lang="cs-CZ" dirty="0" err="1"/>
-              <a:t>FlockDB</a:t>
-            </a:r>
-            <a:endParaRPr lang="cs-CZ" dirty="0"/>
-          </a:p>
-          <a:p>
-            <a:pPr lvl="1"/>
-            <a:r>
-              <a:rPr lang="cs-CZ" dirty="0" err="1"/>
-              <a:t>JanusGraph</a:t>
-            </a:r>
-            <a:endParaRPr lang="cs-CZ" dirty="0"/>
-          </a:p>
         </p:txBody>
       </p:sp>
       <p:sp>
@@ -4539,7 +6846,10 @@
               <a:rPr lang="cs-CZ" dirty="0" err="1"/>
               <a:t>Cypher</a:t>
             </a:r>
-            <a:endParaRPr lang="cs-CZ" dirty="0"/>
+            <a:r>
+              <a:rPr lang="cs-CZ" dirty="0"/>
+              <a:t> – v databázi Neo4j</a:t>
+            </a:r>
           </a:p>
           <a:p>
             <a:pPr lvl="1"/>
@@ -4547,6 +6857,14 @@
               <a:rPr lang="cs-CZ" dirty="0" err="1"/>
               <a:t>Gremlin</a:t>
             </a:r>
+            <a:r>
+              <a:rPr lang="cs-CZ" dirty="0"/>
+              <a:t> – v databázi </a:t>
+            </a:r>
+            <a:r>
+              <a:rPr lang="cs-CZ" dirty="0" err="1"/>
+              <a:t>OrientDB</a:t>
+            </a:r>
             <a:endParaRPr lang="cs-CZ" dirty="0"/>
           </a:p>
           <a:p>
@@ -4577,43 +6895,13 @@
             </a:r>
             <a:r>
               <a:rPr lang="cs-CZ" dirty="0"/>
-              <a:t>)</a:t>
-            </a:r>
-          </a:p>
-          <a:p>
-            <a:r>
-              <a:rPr lang="cs-CZ" dirty="0"/>
-              <a:t>Další známé dotazovací jazyky</a:t>
-            </a:r>
-          </a:p>
-          <a:p>
-            <a:pPr lvl="1"/>
-            <a:r>
-              <a:rPr lang="cs-CZ" dirty="0"/>
-              <a:t>SPARQL</a:t>
-            </a:r>
-          </a:p>
-          <a:p>
-            <a:pPr lvl="1"/>
-            <a:r>
-              <a:rPr lang="cs-CZ" dirty="0"/>
-              <a:t>PGQL</a:t>
-            </a:r>
-          </a:p>
-          <a:p>
-            <a:pPr lvl="1"/>
+              <a:t>) – v databázi </a:t>
+            </a:r>
             <a:r>
               <a:rPr lang="cs-CZ" dirty="0" err="1"/>
-              <a:t>GraphQL</a:t>
+              <a:t>ArangoDB</a:t>
             </a:r>
             <a:endParaRPr lang="cs-CZ" dirty="0"/>
-          </a:p>
-          <a:p>
-            <a:pPr lvl="1"/>
-            <a:r>
-              <a:rPr lang="cs-CZ" dirty="0"/>
-              <a:t>GSQL</a:t>
-            </a:r>
           </a:p>
         </p:txBody>
       </p:sp>
@@ -4772,6 +7060,121 @@
             </a:r>
           </a:p>
           <a:p>
+            <a:r>
+              <a:rPr lang="en-GB" dirty="0" err="1"/>
+              <a:t>Dodržení</a:t>
+            </a:r>
+            <a:r>
+              <a:rPr lang="en-GB" dirty="0"/>
+              <a:t> </a:t>
+            </a:r>
+            <a:r>
+              <a:rPr lang="en-GB" dirty="0" err="1"/>
+              <a:t>základních</a:t>
+            </a:r>
+            <a:r>
+              <a:rPr lang="en-GB" dirty="0"/>
+              <a:t> </a:t>
+            </a:r>
+            <a:r>
+              <a:rPr lang="en-GB" dirty="0" err="1"/>
+              <a:t>principů</a:t>
+            </a:r>
+            <a:r>
+              <a:rPr lang="en-GB" dirty="0"/>
+              <a:t> </a:t>
+            </a:r>
+            <a:r>
+              <a:rPr lang="en-GB" dirty="0" err="1"/>
+              <a:t>modelování</a:t>
+            </a:r>
+            <a:r>
+              <a:rPr lang="en-GB" dirty="0"/>
+              <a:t> </a:t>
+            </a:r>
+            <a:r>
+              <a:rPr lang="en-GB" dirty="0" err="1"/>
+              <a:t>dat</a:t>
+            </a:r>
+            <a:r>
+              <a:rPr lang="en-GB" dirty="0"/>
+              <a:t> je </a:t>
+            </a:r>
+            <a:r>
+              <a:rPr lang="en-GB" dirty="0" err="1"/>
+              <a:t>důležité</a:t>
+            </a:r>
+            <a:r>
+              <a:rPr lang="en-GB" dirty="0"/>
+              <a:t> pro </a:t>
+            </a:r>
+            <a:r>
+              <a:rPr lang="en-GB" dirty="0" err="1"/>
+              <a:t>výslednou</a:t>
+            </a:r>
+            <a:r>
+              <a:rPr lang="en-GB" dirty="0"/>
+              <a:t> </a:t>
+            </a:r>
+            <a:r>
+              <a:rPr lang="en-GB" dirty="0" err="1"/>
+              <a:t>efektivitu</a:t>
+            </a:r>
+            <a:endParaRPr lang="cs-CZ" dirty="0"/>
+          </a:p>
+          <a:p>
+            <a:r>
+              <a:rPr lang="cs-CZ" dirty="0"/>
+              <a:t>N</a:t>
+            </a:r>
+            <a:r>
+              <a:rPr lang="en-GB" dirty="0"/>
+              <a:t>e </a:t>
+            </a:r>
+            <a:r>
+              <a:rPr lang="en-GB" dirty="0" err="1"/>
+              <a:t>všechna</a:t>
+            </a:r>
+            <a:r>
+              <a:rPr lang="en-GB" dirty="0"/>
+              <a:t> data </a:t>
+            </a:r>
+            <a:r>
+              <a:rPr lang="en-GB" dirty="0" err="1"/>
+              <a:t>jsou</a:t>
+            </a:r>
+            <a:r>
+              <a:rPr lang="en-GB" dirty="0"/>
+              <a:t> </a:t>
+            </a:r>
+            <a:r>
+              <a:rPr lang="en-GB" dirty="0" err="1"/>
+              <a:t>vhodná</a:t>
+            </a:r>
+            <a:r>
+              <a:rPr lang="en-GB" dirty="0"/>
+              <a:t> pro </a:t>
+            </a:r>
+            <a:r>
+              <a:rPr lang="en-GB" dirty="0" err="1"/>
+              <a:t>uchovávání</a:t>
+            </a:r>
+            <a:r>
+              <a:rPr lang="en-GB" dirty="0"/>
+              <a:t> v </a:t>
+            </a:r>
+            <a:r>
+              <a:rPr lang="en-GB" dirty="0" err="1"/>
+              <a:t>grafové</a:t>
+            </a:r>
+            <a:r>
+              <a:rPr lang="en-GB" dirty="0"/>
+              <a:t> </a:t>
+            </a:r>
+            <a:r>
+              <a:rPr lang="en-GB" dirty="0" err="1"/>
+              <a:t>podobě</a:t>
+            </a:r>
             <a:endParaRPr lang="cs-CZ" dirty="0"/>
           </a:p>
         </p:txBody>
@@ -4843,13 +7246,7 @@
   <p:cSld>
     <p:spTree>
       <p:nvGrpSpPr>
-        <p:cNvPr id="1" name="">
-          <a:extLst>
-            <a:ext uri="{FF2B5EF4-FFF2-40B4-BE49-F238E27FC236}">
-              <a16:creationId xmlns:a16="http://schemas.microsoft.com/office/drawing/2014/main" id="{F4421AD6-1B99-6A32-110C-B829FFF5E162}"/>
-            </a:ext>
-          </a:extLst>
-        </p:cNvPr>
+        <p:cNvPr id="1" name=""/>
         <p:cNvGrpSpPr/>
         <p:nvPr/>
       </p:nvGrpSpPr>
@@ -4863,10 +7260,10 @@
       </p:grpSpPr>
       <p:sp>
         <p:nvSpPr>
-          <p:cNvPr id="2" name="Nadpis 1">
-            <a:extLst>
-              <a:ext uri="{FF2B5EF4-FFF2-40B4-BE49-F238E27FC236}">
-                <a16:creationId xmlns:a16="http://schemas.microsoft.com/office/drawing/2014/main" id="{537EFE1E-430B-D289-8B55-72FE25CB7A1C}"/>
+          <p:cNvPr id="2" name="Title 1">
+            <a:extLst>
+              <a:ext uri="{FF2B5EF4-FFF2-40B4-BE49-F238E27FC236}">
+                <a16:creationId xmlns:a16="http://schemas.microsoft.com/office/drawing/2014/main" id="{077062AC-1C04-0148-F55D-C5E8266DB0A7}"/>
               </a:ext>
             </a:extLst>
           </p:cNvPr>
@@ -4874,7 +7271,7 @@
             <a:spLocks noGrp="1"/>
           </p:cNvSpPr>
           <p:nvPr>
-            <p:ph type="ctrTitle"/>
+            <p:ph type="title"/>
           </p:nvPr>
         </p:nvSpPr>
         <p:spPr/>
@@ -4884,45 +7281,275 @@
           <a:p>
             <a:r>
               <a:rPr lang="cs-CZ" dirty="0"/>
-              <a:t>Grafové databáze – přehled a srovnání</a:t>
-            </a:r>
-          </a:p>
-        </p:txBody>
-      </p:sp>
-      <p:sp>
-        <p:nvSpPr>
-          <p:cNvPr id="3" name="Podnadpis 2">
-            <a:extLst>
-              <a:ext uri="{FF2B5EF4-FFF2-40B4-BE49-F238E27FC236}">
-                <a16:creationId xmlns:a16="http://schemas.microsoft.com/office/drawing/2014/main" id="{BF5AA5C9-A765-BAEF-8283-7EE9667030E8}"/>
-              </a:ext>
-            </a:extLst>
-          </p:cNvPr>
-          <p:cNvSpPr>
-            <a:spLocks noGrp="1"/>
-          </p:cNvSpPr>
+              <a:t>Modelování lze rozdělit do 4 fází:</a:t>
+            </a:r>
+            <a:endParaRPr lang="en-GB" dirty="0"/>
+          </a:p>
+        </p:txBody>
+      </p:sp>
+      <p:graphicFrame>
+        <p:nvGraphicFramePr>
+          <p:cNvPr id="5" name="Content Placeholder 4">
+            <a:extLst>
+              <a:ext uri="{FF2B5EF4-FFF2-40B4-BE49-F238E27FC236}">
+                <a16:creationId xmlns:a16="http://schemas.microsoft.com/office/drawing/2014/main" id="{F5289832-C13B-BF13-93B3-550EB8191E0D}"/>
+              </a:ext>
+            </a:extLst>
+          </p:cNvPr>
+          <p:cNvGraphicFramePr>
+            <a:graphicFrameLocks noGrp="1"/>
+          </p:cNvGraphicFramePr>
           <p:nvPr>
-            <p:ph type="subTitle" idx="1"/>
+            <p:ph idx="1"/>
+            <p:extLst>
+              <p:ext uri="{D42A27DB-BD31-4B8C-83A1-F6EECF244321}">
+                <p14:modId xmlns:p14="http://schemas.microsoft.com/office/powerpoint/2010/main" val="1446578492"/>
+              </p:ext>
+            </p:extLst>
           </p:nvPr>
-        </p:nvSpPr>
-        <p:spPr/>
-        <p:txBody>
-          <a:bodyPr/>
-          <a:lstStyle/>
-          <a:p>
-            <a:r>
-              <a:rPr lang="cs-CZ" dirty="0"/>
-              <a:t>Prezentace k obhajobě bakalářské práce</a:t>
-            </a:r>
-          </a:p>
-        </p:txBody>
-      </p:sp>
-      <p:sp>
-        <p:nvSpPr>
-          <p:cNvPr id="5" name="Zástupný symbol pro zápatí 4">
-            <a:extLst>
-              <a:ext uri="{FF2B5EF4-FFF2-40B4-BE49-F238E27FC236}">
-                <a16:creationId xmlns:a16="http://schemas.microsoft.com/office/drawing/2014/main" id="{63A29A68-FAAE-7437-F5DC-191E3C3A4708}"/>
+        </p:nvGraphicFramePr>
+        <p:xfrm>
+          <a:off x="720725" y="2460625"/>
+          <a:ext cx="7559674" cy="3707262"/>
+        </p:xfrm>
+        <a:graphic>
+          <a:graphicData uri="http://schemas.openxmlformats.org/drawingml/2006/table">
+            <a:tbl>
+              <a:tblPr firstRow="1" bandRow="1">
+                <a:tableStyleId>{5940675A-B579-460E-94D1-54222C63F5DA}</a:tableStyleId>
+              </a:tblPr>
+              <a:tblGrid>
+                <a:gridCol w="3779837">
+                  <a:extLst>
+                    <a:ext uri="{9D8B030D-6E8A-4147-A177-3AD203B41FA5}">
+                      <a16:colId xmlns:a16="http://schemas.microsoft.com/office/drawing/2014/main" val="1664386865"/>
+                    </a:ext>
+                  </a:extLst>
+                </a:gridCol>
+                <a:gridCol w="3779837">
+                  <a:extLst>
+                    <a:ext uri="{9D8B030D-6E8A-4147-A177-3AD203B41FA5}">
+                      <a16:colId xmlns:a16="http://schemas.microsoft.com/office/drawing/2014/main" val="2137415250"/>
+                    </a:ext>
+                  </a:extLst>
+                </a:gridCol>
+              </a:tblGrid>
+              <a:tr h="1853631">
+                <a:tc>
+                  <a:txBody>
+                    <a:bodyPr/>
+                    <a:lstStyle/>
+                    <a:p>
+                      <a:r>
+                        <a:rPr lang="cs-CZ" dirty="0"/>
+                        <a:t>1. Definice problému</a:t>
+                      </a:r>
+                    </a:p>
+                    <a:p>
+                      <a:pPr marL="285750" indent="-285750" algn="l" defTabSz="899952" rtl="0" eaLnBrk="1" latinLnBrk="0" hangingPunct="1">
+                        <a:lnSpc>
+                          <a:spcPct val="90000"/>
+                        </a:lnSpc>
+                        <a:buFont typeface="Arial" panose="020B0604020202020204" pitchFamily="34" charset="0"/>
+                        <a:buChar char="−"/>
+                      </a:pPr>
+                      <a:r>
+                        <a:rPr lang="cs-CZ" sz="1770" kern="1200" dirty="0">
+                          <a:solidFill>
+                            <a:schemeClr val="tx1"/>
+                          </a:solidFill>
+                          <a:latin typeface="+mn-lt"/>
+                          <a:ea typeface="+mn-ea"/>
+                          <a:cs typeface="Arial" panose="020B0604020202020204" pitchFamily="34" charset="0"/>
+                        </a:rPr>
+                        <a:t>Budeme uchovávat informace o zákaznících a produktech, které nakoupili.</a:t>
+                      </a:r>
+                    </a:p>
+                    <a:p>
+                      <a:pPr marL="285750" indent="-285750" algn="l" defTabSz="899952" rtl="0" eaLnBrk="1" latinLnBrk="0" hangingPunct="1">
+                        <a:lnSpc>
+                          <a:spcPct val="90000"/>
+                        </a:lnSpc>
+                        <a:buFont typeface="Arial" panose="020B0604020202020204" pitchFamily="34" charset="0"/>
+                        <a:buChar char="−"/>
+                      </a:pPr>
+                      <a:r>
+                        <a:rPr lang="cs-CZ" sz="1770" b="1" kern="1200" dirty="0">
+                          <a:solidFill>
+                            <a:schemeClr val="tx1"/>
+                          </a:solidFill>
+                          <a:latin typeface="+mn-lt"/>
+                          <a:ea typeface="+mn-ea"/>
+                          <a:cs typeface="Arial" panose="020B0604020202020204" pitchFamily="34" charset="0"/>
+                        </a:rPr>
+                        <a:t>Entity</a:t>
+                      </a:r>
+                      <a:r>
+                        <a:rPr lang="cs-CZ" sz="1770" kern="1200" dirty="0">
+                          <a:solidFill>
+                            <a:schemeClr val="tx1"/>
+                          </a:solidFill>
+                          <a:latin typeface="+mn-lt"/>
+                          <a:ea typeface="+mn-ea"/>
+                          <a:cs typeface="Arial" panose="020B0604020202020204" pitchFamily="34" charset="0"/>
+                        </a:rPr>
+                        <a:t>: </a:t>
+                      </a:r>
+                      <a:r>
+                        <a:rPr lang="cs-CZ" sz="1770" b="0" i="1" kern="1200" dirty="0">
+                          <a:solidFill>
+                            <a:schemeClr val="tx1"/>
+                          </a:solidFill>
+                          <a:latin typeface="+mn-lt"/>
+                          <a:ea typeface="+mn-ea"/>
+                          <a:cs typeface="Arial" panose="020B0604020202020204" pitchFamily="34" charset="0"/>
+                        </a:rPr>
+                        <a:t>Zákazník</a:t>
+                      </a:r>
+                      <a:r>
+                        <a:rPr lang="cs-CZ" sz="1770" kern="1200" dirty="0">
+                          <a:solidFill>
+                            <a:schemeClr val="tx1"/>
+                          </a:solidFill>
+                          <a:latin typeface="+mn-lt"/>
+                          <a:ea typeface="+mn-ea"/>
+                          <a:cs typeface="Arial" panose="020B0604020202020204" pitchFamily="34" charset="0"/>
+                        </a:rPr>
+                        <a:t>, </a:t>
+                      </a:r>
+                      <a:r>
+                        <a:rPr lang="cs-CZ" sz="1770" b="0" i="1" kern="1200" dirty="0">
+                          <a:solidFill>
+                            <a:schemeClr val="tx1"/>
+                          </a:solidFill>
+                          <a:latin typeface="+mn-lt"/>
+                          <a:ea typeface="+mn-ea"/>
+                          <a:cs typeface="Arial" panose="020B0604020202020204" pitchFamily="34" charset="0"/>
+                        </a:rPr>
+                        <a:t>Produkt</a:t>
+                      </a:r>
+                    </a:p>
+                    <a:p>
+                      <a:pPr marL="285750" indent="-285750" algn="l" defTabSz="899952" rtl="0" eaLnBrk="1" latinLnBrk="0" hangingPunct="1">
+                        <a:lnSpc>
+                          <a:spcPct val="90000"/>
+                        </a:lnSpc>
+                        <a:buFont typeface="Arial" panose="020B0604020202020204" pitchFamily="34" charset="0"/>
+                        <a:buChar char="−"/>
+                      </a:pPr>
+                      <a:r>
+                        <a:rPr lang="cs-CZ" sz="1770" b="1" kern="1200" dirty="0">
+                          <a:solidFill>
+                            <a:schemeClr val="tx1"/>
+                          </a:solidFill>
+                          <a:latin typeface="+mn-lt"/>
+                          <a:ea typeface="+mn-ea"/>
+                          <a:cs typeface="Arial" panose="020B0604020202020204" pitchFamily="34" charset="0"/>
+                        </a:rPr>
+                        <a:t>Vztahy</a:t>
+                      </a:r>
+                      <a:r>
+                        <a:rPr lang="cs-CZ" sz="1770" kern="1200" dirty="0">
+                          <a:solidFill>
+                            <a:schemeClr val="tx1"/>
+                          </a:solidFill>
+                          <a:latin typeface="+mn-lt"/>
+                          <a:ea typeface="+mn-ea"/>
+                          <a:cs typeface="Arial" panose="020B0604020202020204" pitchFamily="34" charset="0"/>
+                        </a:rPr>
+                        <a:t>: Zákazník </a:t>
+                      </a:r>
+                      <a:r>
+                        <a:rPr lang="cs-CZ" sz="1770" b="0" i="1" kern="1200" dirty="0">
+                          <a:solidFill>
+                            <a:schemeClr val="tx1"/>
+                          </a:solidFill>
+                          <a:latin typeface="+mn-lt"/>
+                          <a:ea typeface="+mn-ea"/>
+                          <a:cs typeface="Arial" panose="020B0604020202020204" pitchFamily="34" charset="0"/>
+                        </a:rPr>
+                        <a:t>koupil</a:t>
+                      </a:r>
+                      <a:r>
+                        <a:rPr lang="cs-CZ" sz="1770" kern="1200" dirty="0">
+                          <a:solidFill>
+                            <a:schemeClr val="tx1"/>
+                          </a:solidFill>
+                          <a:latin typeface="+mn-lt"/>
+                          <a:ea typeface="+mn-ea"/>
+                          <a:cs typeface="Arial" panose="020B0604020202020204" pitchFamily="34" charset="0"/>
+                        </a:rPr>
+                        <a:t> produkt</a:t>
+                      </a:r>
+                    </a:p>
+                  </a:txBody>
+                  <a:tcPr/>
+                </a:tc>
+                <a:tc>
+                  <a:txBody>
+                    <a:bodyPr/>
+                    <a:lstStyle/>
+                    <a:p>
+                      <a:r>
+                        <a:rPr lang="cs-CZ" dirty="0"/>
+                        <a:t>2. Konceptuální model</a:t>
+                      </a:r>
+                      <a:endParaRPr lang="en-GB" dirty="0"/>
+                    </a:p>
+                  </a:txBody>
+                  <a:tcPr/>
+                </a:tc>
+                <a:extLst>
+                  <a:ext uri="{0D108BD9-81ED-4DB2-BD59-A6C34878D82A}">
+                    <a16:rowId xmlns:a16="http://schemas.microsoft.com/office/drawing/2014/main" val="3627093573"/>
+                  </a:ext>
+                </a:extLst>
+              </a:tr>
+              <a:tr h="1853631">
+                <a:tc>
+                  <a:txBody>
+                    <a:bodyPr/>
+                    <a:lstStyle/>
+                    <a:p>
+                      <a:r>
+                        <a:rPr lang="cs-CZ" dirty="0"/>
+                        <a:t>3. Logický model</a:t>
+                      </a:r>
+                      <a:endParaRPr lang="en-GB" dirty="0"/>
+                    </a:p>
+                  </a:txBody>
+                  <a:tcPr/>
+                </a:tc>
+                <a:tc>
+                  <a:txBody>
+                    <a:bodyPr/>
+                    <a:lstStyle/>
+                    <a:p>
+                      <a:r>
+                        <a:rPr lang="cs-CZ" dirty="0"/>
+                        <a:t>4. Testování</a:t>
+                      </a:r>
+                      <a:endParaRPr lang="en-GB" dirty="0"/>
+                    </a:p>
+                  </a:txBody>
+                  <a:tcPr/>
+                </a:tc>
+                <a:extLst>
+                  <a:ext uri="{0D108BD9-81ED-4DB2-BD59-A6C34878D82A}">
+                    <a16:rowId xmlns:a16="http://schemas.microsoft.com/office/drawing/2014/main" val="744811387"/>
+                  </a:ext>
+                </a:extLst>
+              </a:tr>
+            </a:tbl>
+          </a:graphicData>
+        </a:graphic>
+      </p:graphicFrame>
+      <p:sp>
+        <p:nvSpPr>
+          <p:cNvPr id="4" name="Footer Placeholder 3">
+            <a:extLst>
+              <a:ext uri="{FF2B5EF4-FFF2-40B4-BE49-F238E27FC236}">
+                <a16:creationId xmlns:a16="http://schemas.microsoft.com/office/drawing/2014/main" id="{DB4ECD23-4141-5B19-20FB-EC2F5BCB685D}"/>
               </a:ext>
             </a:extLst>
           </p:cNvPr>
@@ -4938,18 +7565,3025 @@
           <a:bodyPr/>
           <a:lstStyle/>
           <a:p>
+            <a:r>
+              <a:rPr lang="cs-CZ" dirty="0"/>
+              <a:t>Jan Gaja, 21.3.2024, Katedra informatiky, Přírodovědecká fakulta, </a:t>
+            </a:r>
+            <a:r>
+              <a:rPr lang="en-GB" dirty="0" err="1"/>
+              <a:t>Univerzita</a:t>
+            </a:r>
+            <a:r>
+              <a:rPr lang="en-GB" dirty="0"/>
+              <a:t> </a:t>
+            </a:r>
+            <a:r>
+              <a:rPr lang="en-GB" dirty="0" err="1"/>
+              <a:t>Palackého</a:t>
+            </a:r>
+            <a:r>
+              <a:rPr lang="en-GB" dirty="0"/>
+              <a:t> v </a:t>
+            </a:r>
+            <a:r>
+              <a:rPr lang="en-GB" dirty="0" err="1"/>
+              <a:t>Olomouci</a:t>
+            </a:r>
+            <a:endParaRPr lang="cs-CZ" dirty="0"/>
+          </a:p>
+        </p:txBody>
+      </p:sp>
+      <p:sp>
+        <p:nvSpPr>
+          <p:cNvPr id="6" name="Flowchart: Process 5">
+            <a:extLst>
+              <a:ext uri="{FF2B5EF4-FFF2-40B4-BE49-F238E27FC236}">
+                <a16:creationId xmlns:a16="http://schemas.microsoft.com/office/drawing/2014/main" id="{E6BB1336-54EE-A178-437C-F1B13980B3B6}"/>
+              </a:ext>
+            </a:extLst>
+          </p:cNvPr>
+          <p:cNvSpPr/>
+          <p:nvPr/>
+        </p:nvSpPr>
+        <p:spPr>
+          <a:xfrm>
+            <a:off x="4848046" y="3126046"/>
+            <a:ext cx="805035" cy="720000"/>
+          </a:xfrm>
+          <a:prstGeom prst="flowChartProcess">
+            <a:avLst/>
+          </a:prstGeom>
+          <a:ln w="19050"/>
+        </p:spPr>
+        <p:style>
+          <a:lnRef idx="2">
+            <a:schemeClr val="accent1"/>
+          </a:lnRef>
+          <a:fillRef idx="1">
+            <a:schemeClr val="lt1"/>
+          </a:fillRef>
+          <a:effectRef idx="0">
+            <a:schemeClr val="accent1"/>
+          </a:effectRef>
+          <a:fontRef idx="minor">
+            <a:schemeClr val="dk1"/>
+          </a:fontRef>
+        </p:style>
+        <p:txBody>
+          <a:bodyPr rtlCol="0" anchor="ctr"/>
+          <a:lstStyle/>
+          <a:p>
             <a:pPr algn="ctr"/>
             <a:r>
+              <a:rPr lang="cs-CZ" sz="1400" dirty="0"/>
+              <a:t>Zákazník</a:t>
+            </a:r>
+            <a:endParaRPr lang="en-GB" dirty="0"/>
+          </a:p>
+        </p:txBody>
+      </p:sp>
+      <p:sp>
+        <p:nvSpPr>
+          <p:cNvPr id="27" name="Flowchart: Process 26">
+            <a:extLst>
+              <a:ext uri="{FF2B5EF4-FFF2-40B4-BE49-F238E27FC236}">
+                <a16:creationId xmlns:a16="http://schemas.microsoft.com/office/drawing/2014/main" id="{728C0A3E-E7E2-5517-6949-5D6F2083F48E}"/>
+              </a:ext>
+            </a:extLst>
+          </p:cNvPr>
+          <p:cNvSpPr/>
+          <p:nvPr/>
+        </p:nvSpPr>
+        <p:spPr>
+          <a:xfrm>
+            <a:off x="7139669" y="3126046"/>
+            <a:ext cx="805035" cy="720000"/>
+          </a:xfrm>
+          <a:prstGeom prst="flowChartProcess">
+            <a:avLst/>
+          </a:prstGeom>
+          <a:ln w="19050"/>
+        </p:spPr>
+        <p:style>
+          <a:lnRef idx="2">
+            <a:schemeClr val="accent1"/>
+          </a:lnRef>
+          <a:fillRef idx="1">
+            <a:schemeClr val="lt1"/>
+          </a:fillRef>
+          <a:effectRef idx="0">
+            <a:schemeClr val="accent1"/>
+          </a:effectRef>
+          <a:fontRef idx="minor">
+            <a:schemeClr val="dk1"/>
+          </a:fontRef>
+        </p:style>
+        <p:txBody>
+          <a:bodyPr rtlCol="0" anchor="ctr"/>
+          <a:lstStyle/>
+          <a:p>
+            <a:pPr algn="ctr"/>
+            <a:r>
+              <a:rPr lang="cs-CZ" sz="1400" dirty="0"/>
+              <a:t>Produkt</a:t>
+            </a:r>
+            <a:endParaRPr lang="en-GB" dirty="0"/>
+          </a:p>
+        </p:txBody>
+      </p:sp>
+      <p:cxnSp>
+        <p:nvCxnSpPr>
+          <p:cNvPr id="29" name="Straight Arrow Connector 28">
+            <a:extLst>
+              <a:ext uri="{FF2B5EF4-FFF2-40B4-BE49-F238E27FC236}">
+                <a16:creationId xmlns:a16="http://schemas.microsoft.com/office/drawing/2014/main" id="{35F7C41C-E2B9-E836-0C76-C4BBC19E917A}"/>
+              </a:ext>
+            </a:extLst>
+          </p:cNvPr>
+          <p:cNvCxnSpPr>
+            <a:cxnSpLocks/>
+          </p:cNvCxnSpPr>
+          <p:nvPr/>
+        </p:nvCxnSpPr>
+        <p:spPr>
+          <a:xfrm>
+            <a:off x="5653081" y="3514960"/>
+            <a:ext cx="1486588" cy="0"/>
+          </a:xfrm>
+          <a:prstGeom prst="straightConnector1">
+            <a:avLst/>
+          </a:prstGeom>
+          <a:ln w="12700">
+            <a:tailEnd type="triangle"/>
+          </a:ln>
+        </p:spPr>
+        <p:style>
+          <a:lnRef idx="1">
+            <a:schemeClr val="accent1"/>
+          </a:lnRef>
+          <a:fillRef idx="0">
+            <a:schemeClr val="accent1"/>
+          </a:fillRef>
+          <a:effectRef idx="0">
+            <a:schemeClr val="accent1"/>
+          </a:effectRef>
+          <a:fontRef idx="minor">
+            <a:schemeClr val="tx1"/>
+          </a:fontRef>
+        </p:style>
+      </p:cxnSp>
+      <p:sp>
+        <p:nvSpPr>
+          <p:cNvPr id="26" name="TextBox 25">
+            <a:extLst>
+              <a:ext uri="{FF2B5EF4-FFF2-40B4-BE49-F238E27FC236}">
+                <a16:creationId xmlns:a16="http://schemas.microsoft.com/office/drawing/2014/main" id="{62260BA2-040A-6F08-3EF7-72AF4A39C473}"/>
+              </a:ext>
+            </a:extLst>
+          </p:cNvPr>
+          <p:cNvSpPr txBox="1"/>
+          <p:nvPr/>
+        </p:nvSpPr>
+        <p:spPr>
+          <a:xfrm>
+            <a:off x="6051286" y="3376460"/>
+            <a:ext cx="685865" cy="276999"/>
+          </a:xfrm>
+          <a:prstGeom prst="rect">
+            <a:avLst/>
+          </a:prstGeom>
+          <a:solidFill>
+            <a:schemeClr val="bg1"/>
+          </a:solidFill>
+        </p:spPr>
+        <p:txBody>
+          <a:bodyPr wrap="square" rtlCol="0">
+            <a:spAutoFit/>
+          </a:bodyPr>
+          <a:lstStyle/>
+          <a:p>
+            <a:pPr algn="ctr"/>
+            <a:r>
+              <a:rPr lang="cs-CZ" sz="1200" dirty="0"/>
+              <a:t>koupil</a:t>
+            </a:r>
+            <a:endParaRPr lang="en-GB" sz="1000" dirty="0"/>
+          </a:p>
+        </p:txBody>
+      </p:sp>
+      <p:sp>
+        <p:nvSpPr>
+          <p:cNvPr id="32" name="Flowchart: Connector 31">
+            <a:extLst>
+              <a:ext uri="{FF2B5EF4-FFF2-40B4-BE49-F238E27FC236}">
+                <a16:creationId xmlns:a16="http://schemas.microsoft.com/office/drawing/2014/main" id="{CA7393D1-03F2-AAA4-A7DB-F9A89C50B3C5}"/>
+              </a:ext>
+            </a:extLst>
+          </p:cNvPr>
+          <p:cNvSpPr/>
+          <p:nvPr/>
+        </p:nvSpPr>
+        <p:spPr>
+          <a:xfrm>
+            <a:off x="1211323" y="5389658"/>
+            <a:ext cx="664234" cy="664234"/>
+          </a:xfrm>
+          <a:prstGeom prst="flowChartConnector">
+            <a:avLst/>
+          </a:prstGeom>
+          <a:solidFill>
+            <a:schemeClr val="accent1"/>
+          </a:solidFill>
+          <a:ln w="19050"/>
+        </p:spPr>
+        <p:style>
+          <a:lnRef idx="2">
+            <a:schemeClr val="accent1"/>
+          </a:lnRef>
+          <a:fillRef idx="1">
+            <a:schemeClr val="lt1"/>
+          </a:fillRef>
+          <a:effectRef idx="0">
+            <a:schemeClr val="accent1"/>
+          </a:effectRef>
+          <a:fontRef idx="minor">
+            <a:schemeClr val="dk1"/>
+          </a:fontRef>
+        </p:style>
+        <p:txBody>
+          <a:bodyPr rtlCol="0" anchor="ctr"/>
+          <a:lstStyle/>
+          <a:p>
+            <a:pPr algn="ctr"/>
+            <a:r>
+              <a:rPr lang="cs-CZ" sz="1800" dirty="0">
+                <a:solidFill>
+                  <a:schemeClr val="bg1"/>
+                </a:solidFill>
+              </a:rPr>
+              <a:t>Z</a:t>
+            </a:r>
+            <a:endParaRPr lang="en-GB" sz="1800" dirty="0">
+              <a:solidFill>
+                <a:schemeClr val="bg1"/>
+              </a:solidFill>
+            </a:endParaRPr>
+          </a:p>
+        </p:txBody>
+      </p:sp>
+      <p:sp>
+        <p:nvSpPr>
+          <p:cNvPr id="33" name="Flowchart: Connector 32">
+            <a:extLst>
+              <a:ext uri="{FF2B5EF4-FFF2-40B4-BE49-F238E27FC236}">
+                <a16:creationId xmlns:a16="http://schemas.microsoft.com/office/drawing/2014/main" id="{CD513460-0F59-8AAB-E489-7F8EBEDA4C17}"/>
+              </a:ext>
+            </a:extLst>
+          </p:cNvPr>
+          <p:cNvSpPr/>
+          <p:nvPr/>
+        </p:nvSpPr>
+        <p:spPr>
+          <a:xfrm>
+            <a:off x="3382304" y="5389658"/>
+            <a:ext cx="664234" cy="664234"/>
+          </a:xfrm>
+          <a:prstGeom prst="flowChartConnector">
+            <a:avLst/>
+          </a:prstGeom>
+          <a:solidFill>
+            <a:schemeClr val="accent1"/>
+          </a:solidFill>
+          <a:ln w="19050"/>
+        </p:spPr>
+        <p:style>
+          <a:lnRef idx="2">
+            <a:schemeClr val="accent1"/>
+          </a:lnRef>
+          <a:fillRef idx="1">
+            <a:schemeClr val="lt1"/>
+          </a:fillRef>
+          <a:effectRef idx="0">
+            <a:schemeClr val="accent1"/>
+          </a:effectRef>
+          <a:fontRef idx="minor">
+            <a:schemeClr val="dk1"/>
+          </a:fontRef>
+        </p:style>
+        <p:txBody>
+          <a:bodyPr rtlCol="0" anchor="ctr"/>
+          <a:lstStyle/>
+          <a:p>
+            <a:pPr algn="ctr"/>
+            <a:r>
+              <a:rPr lang="cs-CZ" dirty="0">
+                <a:solidFill>
+                  <a:schemeClr val="bg1"/>
+                </a:solidFill>
+              </a:rPr>
+              <a:t>P</a:t>
+            </a:r>
+            <a:endParaRPr lang="en-GB" dirty="0">
+              <a:solidFill>
+                <a:schemeClr val="bg1"/>
+              </a:solidFill>
+            </a:endParaRPr>
+          </a:p>
+        </p:txBody>
+      </p:sp>
+      <p:cxnSp>
+        <p:nvCxnSpPr>
+          <p:cNvPr id="35" name="Straight Arrow Connector 34">
+            <a:extLst>
+              <a:ext uri="{FF2B5EF4-FFF2-40B4-BE49-F238E27FC236}">
+                <a16:creationId xmlns:a16="http://schemas.microsoft.com/office/drawing/2014/main" id="{C18ECB60-EECB-3405-4306-050E70AAA6D2}"/>
+              </a:ext>
+            </a:extLst>
+          </p:cNvPr>
+          <p:cNvCxnSpPr>
+            <a:stCxn id="32" idx="6"/>
+            <a:endCxn id="33" idx="2"/>
+          </p:cNvCxnSpPr>
+          <p:nvPr/>
+        </p:nvCxnSpPr>
+        <p:spPr>
+          <a:xfrm>
+            <a:off x="1875557" y="5721775"/>
+            <a:ext cx="1506747" cy="0"/>
+          </a:xfrm>
+          <a:prstGeom prst="straightConnector1">
+            <a:avLst/>
+          </a:prstGeom>
+          <a:ln w="12700">
+            <a:tailEnd type="triangle"/>
+          </a:ln>
+        </p:spPr>
+        <p:style>
+          <a:lnRef idx="1">
+            <a:schemeClr val="accent1"/>
+          </a:lnRef>
+          <a:fillRef idx="0">
+            <a:schemeClr val="accent1"/>
+          </a:fillRef>
+          <a:effectRef idx="0">
+            <a:schemeClr val="accent1"/>
+          </a:effectRef>
+          <a:fontRef idx="minor">
+            <a:schemeClr val="tx1"/>
+          </a:fontRef>
+        </p:style>
+      </p:cxnSp>
+      <p:sp>
+        <p:nvSpPr>
+          <p:cNvPr id="37" name="TextBox 36">
+            <a:extLst>
+              <a:ext uri="{FF2B5EF4-FFF2-40B4-BE49-F238E27FC236}">
+                <a16:creationId xmlns:a16="http://schemas.microsoft.com/office/drawing/2014/main" id="{F1A1894B-E17A-D62E-1C6D-DF1149052001}"/>
+              </a:ext>
+            </a:extLst>
+          </p:cNvPr>
+          <p:cNvSpPr txBox="1"/>
+          <p:nvPr/>
+        </p:nvSpPr>
+        <p:spPr>
+          <a:xfrm>
+            <a:off x="2211698" y="5583275"/>
+            <a:ext cx="834464" cy="276999"/>
+          </a:xfrm>
+          <a:prstGeom prst="rect">
+            <a:avLst/>
+          </a:prstGeom>
+          <a:solidFill>
+            <a:schemeClr val="bg1"/>
+          </a:solidFill>
+        </p:spPr>
+        <p:txBody>
+          <a:bodyPr wrap="square" rtlCol="0">
+            <a:spAutoFit/>
+          </a:bodyPr>
+          <a:lstStyle/>
+          <a:p>
+            <a:pPr algn="ctr"/>
+            <a:r>
+              <a:rPr lang="cs-CZ" sz="1200" dirty="0">
+                <a:solidFill>
+                  <a:schemeClr val="accent1"/>
+                </a:solidFill>
+              </a:rPr>
+              <a:t>KOUPIL</a:t>
+            </a:r>
+            <a:endParaRPr lang="en-GB" sz="1000" dirty="0">
+              <a:solidFill>
+                <a:schemeClr val="accent1"/>
+              </a:solidFill>
+            </a:endParaRPr>
+          </a:p>
+        </p:txBody>
+      </p:sp>
+      <p:sp>
+        <p:nvSpPr>
+          <p:cNvPr id="38" name="TextBox 37">
+            <a:extLst>
+              <a:ext uri="{FF2B5EF4-FFF2-40B4-BE49-F238E27FC236}">
+                <a16:creationId xmlns:a16="http://schemas.microsoft.com/office/drawing/2014/main" id="{2FE00648-C5A1-AF20-4C00-6B7D7C72D009}"/>
+              </a:ext>
+            </a:extLst>
+          </p:cNvPr>
+          <p:cNvSpPr txBox="1"/>
+          <p:nvPr/>
+        </p:nvSpPr>
+        <p:spPr>
+          <a:xfrm>
+            <a:off x="875181" y="4775361"/>
+            <a:ext cx="664234" cy="738664"/>
+          </a:xfrm>
+          <a:prstGeom prst="rect">
+            <a:avLst/>
+          </a:prstGeom>
+          <a:ln/>
+        </p:spPr>
+        <p:style>
+          <a:lnRef idx="2">
+            <a:schemeClr val="accent1"/>
+          </a:lnRef>
+          <a:fillRef idx="1">
+            <a:schemeClr val="lt1"/>
+          </a:fillRef>
+          <a:effectRef idx="0">
+            <a:schemeClr val="accent1"/>
+          </a:effectRef>
+          <a:fontRef idx="minor">
+            <a:schemeClr val="dk1"/>
+          </a:fontRef>
+        </p:style>
+        <p:txBody>
+          <a:bodyPr wrap="square" rtlCol="0">
+            <a:spAutoFit/>
+          </a:bodyPr>
+          <a:lstStyle/>
+          <a:p>
+            <a:r>
+              <a:rPr lang="cs-CZ" sz="1400" dirty="0"/>
+              <a:t>Id</a:t>
+            </a:r>
+          </a:p>
+          <a:p>
+            <a:r>
+              <a:rPr lang="cs-CZ" sz="1400" dirty="0"/>
+              <a:t>Jméno</a:t>
+            </a:r>
+          </a:p>
+          <a:p>
+            <a:r>
+              <a:rPr lang="cs-CZ" sz="1400" dirty="0"/>
+              <a:t>Email</a:t>
+            </a:r>
+            <a:endParaRPr lang="en-GB" sz="1400" dirty="0"/>
+          </a:p>
+        </p:txBody>
+      </p:sp>
+      <p:sp>
+        <p:nvSpPr>
+          <p:cNvPr id="40" name="TextBox 39">
+            <a:extLst>
+              <a:ext uri="{FF2B5EF4-FFF2-40B4-BE49-F238E27FC236}">
+                <a16:creationId xmlns:a16="http://schemas.microsoft.com/office/drawing/2014/main" id="{9646ADB0-577A-83C2-A32D-92F6B55903F1}"/>
+              </a:ext>
+            </a:extLst>
+          </p:cNvPr>
+          <p:cNvSpPr txBox="1"/>
+          <p:nvPr/>
+        </p:nvSpPr>
+        <p:spPr>
+          <a:xfrm>
+            <a:off x="3718446" y="4775361"/>
+            <a:ext cx="664234" cy="738664"/>
+          </a:xfrm>
+          <a:prstGeom prst="rect">
+            <a:avLst/>
+          </a:prstGeom>
+          <a:ln/>
+        </p:spPr>
+        <p:style>
+          <a:lnRef idx="2">
+            <a:schemeClr val="accent1"/>
+          </a:lnRef>
+          <a:fillRef idx="1">
+            <a:schemeClr val="lt1"/>
+          </a:fillRef>
+          <a:effectRef idx="0">
+            <a:schemeClr val="accent1"/>
+          </a:effectRef>
+          <a:fontRef idx="minor">
+            <a:schemeClr val="dk1"/>
+          </a:fontRef>
+        </p:style>
+        <p:txBody>
+          <a:bodyPr wrap="square" rtlCol="0">
+            <a:spAutoFit/>
+          </a:bodyPr>
+          <a:lstStyle/>
+          <a:p>
+            <a:r>
+              <a:rPr lang="cs-CZ" sz="1400" dirty="0"/>
+              <a:t>Id</a:t>
+            </a:r>
+          </a:p>
+          <a:p>
+            <a:r>
+              <a:rPr lang="cs-CZ" sz="1400" dirty="0"/>
+              <a:t>Jméno</a:t>
+            </a:r>
+          </a:p>
+          <a:p>
+            <a:r>
+              <a:rPr lang="cs-CZ" sz="1400" dirty="0"/>
+              <a:t>Cena</a:t>
+            </a:r>
+            <a:endParaRPr lang="en-GB" sz="1400" dirty="0"/>
+          </a:p>
+        </p:txBody>
+      </p:sp>
+      <p:sp>
+        <p:nvSpPr>
+          <p:cNvPr id="45" name="TextBox 44">
+            <a:extLst>
+              <a:ext uri="{FF2B5EF4-FFF2-40B4-BE49-F238E27FC236}">
+                <a16:creationId xmlns:a16="http://schemas.microsoft.com/office/drawing/2014/main" id="{1C121A66-D78F-38F4-842B-7640C427BC4C}"/>
+              </a:ext>
+            </a:extLst>
+          </p:cNvPr>
+          <p:cNvSpPr txBox="1"/>
+          <p:nvPr/>
+        </p:nvSpPr>
+        <p:spPr>
+          <a:xfrm>
+            <a:off x="2213309" y="5053510"/>
+            <a:ext cx="745385" cy="523220"/>
+          </a:xfrm>
+          <a:prstGeom prst="rect">
+            <a:avLst/>
+          </a:prstGeom>
+          <a:ln/>
+        </p:spPr>
+        <p:style>
+          <a:lnRef idx="2">
+            <a:schemeClr val="accent1"/>
+          </a:lnRef>
+          <a:fillRef idx="1">
+            <a:schemeClr val="lt1"/>
+          </a:fillRef>
+          <a:effectRef idx="0">
+            <a:schemeClr val="accent1"/>
+          </a:effectRef>
+          <a:fontRef idx="minor">
+            <a:schemeClr val="dk1"/>
+          </a:fontRef>
+        </p:style>
+        <p:txBody>
+          <a:bodyPr wrap="square" rtlCol="0">
+            <a:spAutoFit/>
+          </a:bodyPr>
+          <a:lstStyle/>
+          <a:p>
+            <a:r>
+              <a:rPr lang="cs-CZ" sz="1400" dirty="0"/>
+              <a:t>Počet</a:t>
+            </a:r>
+          </a:p>
+          <a:p>
+            <a:r>
+              <a:rPr lang="cs-CZ" sz="1400" dirty="0"/>
+              <a:t>Datum</a:t>
+            </a:r>
+            <a:endParaRPr lang="en-GB" sz="1400" dirty="0"/>
+          </a:p>
+        </p:txBody>
+      </p:sp>
+      <p:sp>
+        <p:nvSpPr>
+          <p:cNvPr id="52" name="TextBox 51">
+            <a:extLst>
+              <a:ext uri="{FF2B5EF4-FFF2-40B4-BE49-F238E27FC236}">
+                <a16:creationId xmlns:a16="http://schemas.microsoft.com/office/drawing/2014/main" id="{1D4D2C06-23B5-14E7-6021-7B250C1E10DA}"/>
+              </a:ext>
+            </a:extLst>
+          </p:cNvPr>
+          <p:cNvSpPr txBox="1"/>
+          <p:nvPr/>
+        </p:nvSpPr>
+        <p:spPr>
+          <a:xfrm>
+            <a:off x="4967504" y="4760408"/>
+            <a:ext cx="805035" cy="366575"/>
+          </a:xfrm>
+          <a:prstGeom prst="rect">
+            <a:avLst/>
+          </a:prstGeom>
+          <a:solidFill>
+            <a:schemeClr val="accent1"/>
+          </a:solidFill>
+          <a:ln w="19050"/>
+        </p:spPr>
+        <p:style>
+          <a:lnRef idx="2">
+            <a:schemeClr val="accent1"/>
+          </a:lnRef>
+          <a:fillRef idx="1">
+            <a:schemeClr val="lt1"/>
+          </a:fillRef>
+          <a:effectRef idx="0">
+            <a:schemeClr val="accent1"/>
+          </a:effectRef>
+          <a:fontRef idx="minor">
+            <a:schemeClr val="dk1"/>
+          </a:fontRef>
+        </p:style>
+        <p:txBody>
+          <a:bodyPr rtlCol="0" anchor="ctr"/>
+          <a:lstStyle>
+            <a:defPPr>
+              <a:defRPr lang="cs-CZ"/>
+            </a:defPPr>
+            <a:lvl1pPr algn="ctr">
+              <a:defRPr>
+                <a:solidFill>
+                  <a:schemeClr val="bg1"/>
+                </a:solidFill>
+              </a:defRPr>
+            </a:lvl1pPr>
+          </a:lstStyle>
+          <a:p>
+            <a:r>
               <a:rPr lang="cs-CZ" dirty="0"/>
-              <a:t>Jan Gaja, 21.3.2024, Katedra informatiky, Přírodovědecká fakulta, Univerzita Palackého v Olomouci</a:t>
-            </a:r>
+              <a:t>Index</a:t>
+            </a:r>
+            <a:endParaRPr lang="en-GB" dirty="0"/>
+          </a:p>
+        </p:txBody>
+      </p:sp>
+      <p:sp>
+        <p:nvSpPr>
+          <p:cNvPr id="53" name="TextBox 52">
+            <a:extLst>
+              <a:ext uri="{FF2B5EF4-FFF2-40B4-BE49-F238E27FC236}">
+                <a16:creationId xmlns:a16="http://schemas.microsoft.com/office/drawing/2014/main" id="{C5F049A3-DC79-9255-8FBD-11B4033C860C}"/>
+              </a:ext>
+            </a:extLst>
+          </p:cNvPr>
+          <p:cNvSpPr txBox="1"/>
+          <p:nvPr/>
+        </p:nvSpPr>
+        <p:spPr>
+          <a:xfrm>
+            <a:off x="4967504" y="5415498"/>
+            <a:ext cx="1561265" cy="366575"/>
+          </a:xfrm>
+          <a:prstGeom prst="rect">
+            <a:avLst/>
+          </a:prstGeom>
+          <a:solidFill>
+            <a:schemeClr val="accent1"/>
+          </a:solidFill>
+          <a:ln w="19050"/>
+        </p:spPr>
+        <p:style>
+          <a:lnRef idx="2">
+            <a:schemeClr val="accent1"/>
+          </a:lnRef>
+          <a:fillRef idx="1">
+            <a:schemeClr val="lt1"/>
+          </a:fillRef>
+          <a:effectRef idx="0">
+            <a:schemeClr val="accent1"/>
+          </a:effectRef>
+          <a:fontRef idx="minor">
+            <a:schemeClr val="dk1"/>
+          </a:fontRef>
+        </p:style>
+        <p:txBody>
+          <a:bodyPr rtlCol="0" anchor="ctr"/>
+          <a:lstStyle>
+            <a:defPPr>
+              <a:defRPr lang="cs-CZ"/>
+            </a:defPPr>
+            <a:lvl1pPr algn="ctr">
+              <a:defRPr>
+                <a:solidFill>
+                  <a:schemeClr val="bg1"/>
+                </a:solidFill>
+              </a:defRPr>
+            </a:lvl1pPr>
+            <a:lvl2pPr>
+              <a:defRPr>
+                <a:solidFill>
+                  <a:schemeClr val="dk1"/>
+                </a:solidFill>
+              </a:defRPr>
+            </a:lvl2pPr>
+            <a:lvl3pPr>
+              <a:defRPr>
+                <a:solidFill>
+                  <a:schemeClr val="dk1"/>
+                </a:solidFill>
+              </a:defRPr>
+            </a:lvl3pPr>
+            <a:lvl4pPr>
+              <a:defRPr>
+                <a:solidFill>
+                  <a:schemeClr val="dk1"/>
+                </a:solidFill>
+              </a:defRPr>
+            </a:lvl4pPr>
+            <a:lvl5pPr>
+              <a:defRPr>
+                <a:solidFill>
+                  <a:schemeClr val="dk1"/>
+                </a:solidFill>
+              </a:defRPr>
+            </a:lvl5pPr>
+            <a:lvl6pPr>
+              <a:defRPr>
+                <a:solidFill>
+                  <a:schemeClr val="dk1"/>
+                </a:solidFill>
+              </a:defRPr>
+            </a:lvl6pPr>
+            <a:lvl7pPr>
+              <a:defRPr>
+                <a:solidFill>
+                  <a:schemeClr val="dk1"/>
+                </a:solidFill>
+              </a:defRPr>
+            </a:lvl7pPr>
+            <a:lvl8pPr>
+              <a:defRPr>
+                <a:solidFill>
+                  <a:schemeClr val="dk1"/>
+                </a:solidFill>
+              </a:defRPr>
+            </a:lvl8pPr>
+            <a:lvl9pPr>
+              <a:defRPr>
+                <a:solidFill>
+                  <a:schemeClr val="dk1"/>
+                </a:solidFill>
+              </a:defRPr>
+            </a:lvl9pPr>
+          </a:lstStyle>
+          <a:p>
+            <a:r>
+              <a:rPr lang="cs-CZ" dirty="0" err="1"/>
+              <a:t>Denormalizace</a:t>
+            </a:r>
+            <a:endParaRPr lang="en-GB" dirty="0"/>
+          </a:p>
+        </p:txBody>
+      </p:sp>
+      <p:sp>
+        <p:nvSpPr>
+          <p:cNvPr id="54" name="TextBox 53">
+            <a:extLst>
+              <a:ext uri="{FF2B5EF4-FFF2-40B4-BE49-F238E27FC236}">
+                <a16:creationId xmlns:a16="http://schemas.microsoft.com/office/drawing/2014/main" id="{7F705697-6003-6CB4-65C9-577903129136}"/>
+              </a:ext>
+            </a:extLst>
+          </p:cNvPr>
+          <p:cNvSpPr txBox="1"/>
+          <p:nvPr/>
+        </p:nvSpPr>
+        <p:spPr>
+          <a:xfrm>
+            <a:off x="7193228" y="4756099"/>
+            <a:ext cx="805035" cy="366575"/>
+          </a:xfrm>
+          <a:prstGeom prst="rect">
+            <a:avLst/>
+          </a:prstGeom>
+          <a:solidFill>
+            <a:schemeClr val="accent1"/>
+          </a:solidFill>
+          <a:ln w="19050"/>
+        </p:spPr>
+        <p:style>
+          <a:lnRef idx="2">
+            <a:schemeClr val="accent1"/>
+          </a:lnRef>
+          <a:fillRef idx="1">
+            <a:schemeClr val="lt1"/>
+          </a:fillRef>
+          <a:effectRef idx="0">
+            <a:schemeClr val="accent1"/>
+          </a:effectRef>
+          <a:fontRef idx="minor">
+            <a:schemeClr val="dk1"/>
+          </a:fontRef>
+        </p:style>
+        <p:txBody>
+          <a:bodyPr rtlCol="0" anchor="ctr"/>
+          <a:lstStyle>
+            <a:defPPr>
+              <a:defRPr lang="cs-CZ"/>
+            </a:defPPr>
+            <a:lvl1pPr algn="ctr">
+              <a:defRPr>
+                <a:solidFill>
+                  <a:schemeClr val="bg1"/>
+                </a:solidFill>
+              </a:defRPr>
+            </a:lvl1pPr>
+            <a:lvl2pPr>
+              <a:defRPr>
+                <a:solidFill>
+                  <a:schemeClr val="dk1"/>
+                </a:solidFill>
+              </a:defRPr>
+            </a:lvl2pPr>
+            <a:lvl3pPr>
+              <a:defRPr>
+                <a:solidFill>
+                  <a:schemeClr val="dk1"/>
+                </a:solidFill>
+              </a:defRPr>
+            </a:lvl3pPr>
+            <a:lvl4pPr>
+              <a:defRPr>
+                <a:solidFill>
+                  <a:schemeClr val="dk1"/>
+                </a:solidFill>
+              </a:defRPr>
+            </a:lvl4pPr>
+            <a:lvl5pPr>
+              <a:defRPr>
+                <a:solidFill>
+                  <a:schemeClr val="dk1"/>
+                </a:solidFill>
+              </a:defRPr>
+            </a:lvl5pPr>
+            <a:lvl6pPr>
+              <a:defRPr>
+                <a:solidFill>
+                  <a:schemeClr val="dk1"/>
+                </a:solidFill>
+              </a:defRPr>
+            </a:lvl6pPr>
+            <a:lvl7pPr>
+              <a:defRPr>
+                <a:solidFill>
+                  <a:schemeClr val="dk1"/>
+                </a:solidFill>
+              </a:defRPr>
+            </a:lvl7pPr>
+            <a:lvl8pPr>
+              <a:defRPr>
+                <a:solidFill>
+                  <a:schemeClr val="dk1"/>
+                </a:solidFill>
+              </a:defRPr>
+            </a:lvl8pPr>
+            <a:lvl9pPr>
+              <a:defRPr>
+                <a:solidFill>
+                  <a:schemeClr val="dk1"/>
+                </a:solidFill>
+              </a:defRPr>
+            </a:lvl9pPr>
+          </a:lstStyle>
+          <a:p>
+            <a:r>
+              <a:rPr lang="cs-CZ" dirty="0"/>
+              <a:t>Profile</a:t>
+            </a:r>
+            <a:endParaRPr lang="en-GB" dirty="0"/>
+          </a:p>
+        </p:txBody>
+      </p:sp>
+      <p:sp>
+        <p:nvSpPr>
+          <p:cNvPr id="57" name="TextBox 56">
+            <a:extLst>
+              <a:ext uri="{FF2B5EF4-FFF2-40B4-BE49-F238E27FC236}">
+                <a16:creationId xmlns:a16="http://schemas.microsoft.com/office/drawing/2014/main" id="{947CA0A9-55CE-5F8B-61A9-BE44DE5EF905}"/>
+              </a:ext>
+            </a:extLst>
+          </p:cNvPr>
+          <p:cNvSpPr txBox="1"/>
+          <p:nvPr/>
+        </p:nvSpPr>
+        <p:spPr>
+          <a:xfrm>
+            <a:off x="6060867" y="4755090"/>
+            <a:ext cx="850225" cy="366575"/>
+          </a:xfrm>
+          <a:prstGeom prst="rect">
+            <a:avLst/>
+          </a:prstGeom>
+          <a:solidFill>
+            <a:schemeClr val="accent1"/>
+          </a:solidFill>
+          <a:ln w="19050"/>
+        </p:spPr>
+        <p:style>
+          <a:lnRef idx="2">
+            <a:schemeClr val="accent1"/>
+          </a:lnRef>
+          <a:fillRef idx="1">
+            <a:schemeClr val="lt1"/>
+          </a:fillRef>
+          <a:effectRef idx="0">
+            <a:schemeClr val="accent1"/>
+          </a:effectRef>
+          <a:fontRef idx="minor">
+            <a:schemeClr val="dk1"/>
+          </a:fontRef>
+        </p:style>
+        <p:txBody>
+          <a:bodyPr rtlCol="0" anchor="ctr"/>
+          <a:lstStyle>
+            <a:defPPr>
+              <a:defRPr lang="cs-CZ"/>
+            </a:defPPr>
+            <a:lvl1pPr algn="ctr">
+              <a:defRPr>
+                <a:solidFill>
+                  <a:schemeClr val="bg1"/>
+                </a:solidFill>
+              </a:defRPr>
+            </a:lvl1pPr>
+          </a:lstStyle>
+          <a:p>
+            <a:r>
+              <a:rPr lang="cs-CZ" dirty="0" err="1"/>
+              <a:t>Explain</a:t>
+            </a:r>
+            <a:endParaRPr lang="en-GB" dirty="0"/>
+          </a:p>
+        </p:txBody>
+      </p:sp>
+      <p:sp>
+        <p:nvSpPr>
+          <p:cNvPr id="58" name="TextBox 57">
+            <a:extLst>
+              <a:ext uri="{FF2B5EF4-FFF2-40B4-BE49-F238E27FC236}">
+                <a16:creationId xmlns:a16="http://schemas.microsoft.com/office/drawing/2014/main" id="{4938A3F1-8B9D-5137-EDB6-575BB01CC782}"/>
+              </a:ext>
+            </a:extLst>
+          </p:cNvPr>
+          <p:cNvSpPr txBox="1"/>
+          <p:nvPr/>
+        </p:nvSpPr>
+        <p:spPr>
+          <a:xfrm>
+            <a:off x="6962232" y="5415497"/>
+            <a:ext cx="1030619" cy="366575"/>
+          </a:xfrm>
+          <a:prstGeom prst="rect">
+            <a:avLst/>
+          </a:prstGeom>
+          <a:solidFill>
+            <a:schemeClr val="accent1"/>
+          </a:solidFill>
+          <a:ln w="19050"/>
+        </p:spPr>
+        <p:style>
+          <a:lnRef idx="2">
+            <a:schemeClr val="accent1"/>
+          </a:lnRef>
+          <a:fillRef idx="1">
+            <a:schemeClr val="lt1"/>
+          </a:fillRef>
+          <a:effectRef idx="0">
+            <a:schemeClr val="accent1"/>
+          </a:effectRef>
+          <a:fontRef idx="minor">
+            <a:schemeClr val="dk1"/>
+          </a:fontRef>
+        </p:style>
+        <p:txBody>
+          <a:bodyPr rtlCol="0" anchor="ctr"/>
+          <a:lstStyle>
+            <a:defPPr>
+              <a:defRPr lang="cs-CZ"/>
+            </a:defPPr>
+            <a:lvl1pPr algn="ctr">
+              <a:defRPr>
+                <a:solidFill>
+                  <a:schemeClr val="bg1"/>
+                </a:solidFill>
+              </a:defRPr>
+            </a:lvl1pPr>
+            <a:lvl2pPr>
+              <a:defRPr>
+                <a:solidFill>
+                  <a:schemeClr val="dk1"/>
+                </a:solidFill>
+              </a:defRPr>
+            </a:lvl2pPr>
+            <a:lvl3pPr>
+              <a:defRPr>
+                <a:solidFill>
+                  <a:schemeClr val="dk1"/>
+                </a:solidFill>
+              </a:defRPr>
+            </a:lvl3pPr>
+            <a:lvl4pPr>
+              <a:defRPr>
+                <a:solidFill>
+                  <a:schemeClr val="dk1"/>
+                </a:solidFill>
+              </a:defRPr>
+            </a:lvl4pPr>
+            <a:lvl5pPr>
+              <a:defRPr>
+                <a:solidFill>
+                  <a:schemeClr val="dk1"/>
+                </a:solidFill>
+              </a:defRPr>
+            </a:lvl5pPr>
+            <a:lvl6pPr>
+              <a:defRPr>
+                <a:solidFill>
+                  <a:schemeClr val="dk1"/>
+                </a:solidFill>
+              </a:defRPr>
+            </a:lvl6pPr>
+            <a:lvl7pPr>
+              <a:defRPr>
+                <a:solidFill>
+                  <a:schemeClr val="dk1"/>
+                </a:solidFill>
+              </a:defRPr>
+            </a:lvl7pPr>
+            <a:lvl8pPr>
+              <a:defRPr>
+                <a:solidFill>
+                  <a:schemeClr val="dk1"/>
+                </a:solidFill>
+              </a:defRPr>
+            </a:lvl8pPr>
+            <a:lvl9pPr>
+              <a:defRPr>
+                <a:solidFill>
+                  <a:schemeClr val="dk1"/>
+                </a:solidFill>
+              </a:defRPr>
+            </a:lvl9pPr>
+          </a:lstStyle>
+          <a:p>
+            <a:r>
+              <a:rPr lang="cs-CZ" dirty="0"/>
+              <a:t>Unit test</a:t>
+            </a:r>
+            <a:endParaRPr lang="en-GB" dirty="0"/>
           </a:p>
         </p:txBody>
       </p:sp>
     </p:spTree>
     <p:extLst>
       <p:ext uri="{BB962C8B-B14F-4D97-AF65-F5344CB8AC3E}">
-        <p14:creationId xmlns:p14="http://schemas.microsoft.com/office/powerpoint/2010/main" val="960543191"/>
+        <p14:creationId xmlns:p14="http://schemas.microsoft.com/office/powerpoint/2010/main" val="3224118620"/>
+      </p:ext>
+    </p:extLst>
+  </p:cSld>
+  <p:clrMapOvr>
+    <a:masterClrMapping/>
+  </p:clrMapOvr>
+</p:sld>
+</file>
+
+<file path=ppt/slides/slide9.xml><?xml version="1.0" encoding="utf-8"?>
+<p:sld xmlns:a="http://schemas.openxmlformats.org/drawingml/2006/main" xmlns:r="http://schemas.openxmlformats.org/officeDocument/2006/relationships" xmlns:p="http://schemas.openxmlformats.org/presentationml/2006/main">
+  <p:cSld>
+    <p:spTree>
+      <p:nvGrpSpPr>
+        <p:cNvPr id="1" name=""/>
+        <p:cNvGrpSpPr/>
+        <p:nvPr/>
+      </p:nvGrpSpPr>
+      <p:grpSpPr>
+        <a:xfrm>
+          <a:off x="0" y="0"/>
+          <a:ext cx="0" cy="0"/>
+          <a:chOff x="0" y="0"/>
+          <a:chExt cx="0" cy="0"/>
+        </a:xfrm>
+      </p:grpSpPr>
+      <p:sp>
+        <p:nvSpPr>
+          <p:cNvPr id="2" name="Title 1">
+            <a:extLst>
+              <a:ext uri="{FF2B5EF4-FFF2-40B4-BE49-F238E27FC236}">
+                <a16:creationId xmlns:a16="http://schemas.microsoft.com/office/drawing/2014/main" id="{29199E41-AB6E-D884-D433-475EA1246AED}"/>
+              </a:ext>
+            </a:extLst>
+          </p:cNvPr>
+          <p:cNvSpPr>
+            <a:spLocks noGrp="1"/>
+          </p:cNvSpPr>
+          <p:nvPr>
+            <p:ph type="title"/>
+          </p:nvPr>
+        </p:nvSpPr>
+        <p:spPr/>
+        <p:txBody>
+          <a:bodyPr/>
+          <a:lstStyle/>
+          <a:p>
+            <a:r>
+              <a:rPr lang="cs-CZ" dirty="0"/>
+              <a:t>Příklad uchovávaného grafu</a:t>
+            </a:r>
+            <a:endParaRPr lang="en-GB" dirty="0"/>
+          </a:p>
+        </p:txBody>
+      </p:sp>
+      <p:sp>
+        <p:nvSpPr>
+          <p:cNvPr id="4" name="Footer Placeholder 3">
+            <a:extLst>
+              <a:ext uri="{FF2B5EF4-FFF2-40B4-BE49-F238E27FC236}">
+                <a16:creationId xmlns:a16="http://schemas.microsoft.com/office/drawing/2014/main" id="{D2B936A4-738B-214C-AEF5-613D37761CE4}"/>
+              </a:ext>
+            </a:extLst>
+          </p:cNvPr>
+          <p:cNvSpPr>
+            <a:spLocks noGrp="1"/>
+          </p:cNvSpPr>
+          <p:nvPr>
+            <p:ph type="ftr" sz="quarter" idx="11"/>
+          </p:nvPr>
+        </p:nvSpPr>
+        <p:spPr/>
+        <p:txBody>
+          <a:bodyPr/>
+          <a:lstStyle/>
+          <a:p>
+            <a:r>
+              <a:rPr lang="cs-CZ" dirty="0"/>
+              <a:t>Jan Gaja, 21.3.2024, Katedra informatiky, Přírodovědecká fakulta, Univerzita Palackého v Olomouci</a:t>
+            </a:r>
+          </a:p>
+        </p:txBody>
+      </p:sp>
+      <p:sp>
+        <p:nvSpPr>
+          <p:cNvPr id="6" name="Flowchart: Connector 5">
+            <a:extLst>
+              <a:ext uri="{FF2B5EF4-FFF2-40B4-BE49-F238E27FC236}">
+                <a16:creationId xmlns:a16="http://schemas.microsoft.com/office/drawing/2014/main" id="{FCB0BF4C-8595-CDBE-BF1D-9E85C4B7E101}"/>
+              </a:ext>
+            </a:extLst>
+          </p:cNvPr>
+          <p:cNvSpPr/>
+          <p:nvPr/>
+        </p:nvSpPr>
+        <p:spPr>
+          <a:xfrm>
+            <a:off x="720000" y="2520269"/>
+            <a:ext cx="900000" cy="900000"/>
+          </a:xfrm>
+          <a:prstGeom prst="flowChartConnector">
+            <a:avLst/>
+          </a:prstGeom>
+          <a:solidFill>
+            <a:schemeClr val="bg1"/>
+          </a:solidFill>
+          <a:ln w="19050">
+            <a:solidFill>
+              <a:schemeClr val="accent1"/>
+            </a:solidFill>
+          </a:ln>
+        </p:spPr>
+        <p:style>
+          <a:lnRef idx="2">
+            <a:schemeClr val="accent1">
+              <a:shade val="15000"/>
+            </a:schemeClr>
+          </a:lnRef>
+          <a:fillRef idx="1">
+            <a:schemeClr val="accent1"/>
+          </a:fillRef>
+          <a:effectRef idx="0">
+            <a:schemeClr val="accent1"/>
+          </a:effectRef>
+          <a:fontRef idx="minor">
+            <a:schemeClr val="lt1"/>
+          </a:fontRef>
+        </p:style>
+        <p:txBody>
+          <a:bodyPr rtlCol="0" anchor="ctr"/>
+          <a:lstStyle/>
+          <a:p>
+            <a:pPr algn="ctr"/>
+            <a:r>
+              <a:rPr lang="cs-CZ" sz="1400" dirty="0">
+                <a:solidFill>
+                  <a:schemeClr val="tx1"/>
+                </a:solidFill>
+              </a:rPr>
+              <a:t>Petr</a:t>
+            </a:r>
+          </a:p>
+          <a:p>
+            <a:pPr algn="ctr"/>
+            <a:r>
+              <a:rPr lang="cs-CZ" sz="1400" dirty="0">
+                <a:solidFill>
+                  <a:schemeClr val="tx1"/>
+                </a:solidFill>
+              </a:rPr>
+              <a:t>Holý</a:t>
+            </a:r>
+          </a:p>
+        </p:txBody>
+      </p:sp>
+      <p:sp>
+        <p:nvSpPr>
+          <p:cNvPr id="7" name="Flowchart: Connector 6">
+            <a:extLst>
+              <a:ext uri="{FF2B5EF4-FFF2-40B4-BE49-F238E27FC236}">
+                <a16:creationId xmlns:a16="http://schemas.microsoft.com/office/drawing/2014/main" id="{6C2FF267-BC39-CB62-AD74-4B0B34C9E4D0}"/>
+              </a:ext>
+            </a:extLst>
+          </p:cNvPr>
+          <p:cNvSpPr/>
+          <p:nvPr/>
+        </p:nvSpPr>
+        <p:spPr>
+          <a:xfrm>
+            <a:off x="7379538" y="2520269"/>
+            <a:ext cx="900000" cy="900000"/>
+          </a:xfrm>
+          <a:prstGeom prst="flowChartConnector">
+            <a:avLst/>
+          </a:prstGeom>
+          <a:solidFill>
+            <a:schemeClr val="bg1"/>
+          </a:solidFill>
+          <a:ln w="19050">
+            <a:solidFill>
+              <a:schemeClr val="accent1"/>
+            </a:solidFill>
+          </a:ln>
+        </p:spPr>
+        <p:style>
+          <a:lnRef idx="2">
+            <a:schemeClr val="accent1">
+              <a:shade val="15000"/>
+            </a:schemeClr>
+          </a:lnRef>
+          <a:fillRef idx="1">
+            <a:schemeClr val="accent1"/>
+          </a:fillRef>
+          <a:effectRef idx="0">
+            <a:schemeClr val="accent1"/>
+          </a:effectRef>
+          <a:fontRef idx="minor">
+            <a:schemeClr val="lt1"/>
+          </a:fontRef>
+        </p:style>
+        <p:txBody>
+          <a:bodyPr rtlCol="0" anchor="ctr"/>
+          <a:lstStyle/>
+          <a:p>
+            <a:pPr algn="ctr"/>
+            <a:r>
+              <a:rPr lang="cs-CZ" sz="1400" dirty="0">
+                <a:solidFill>
+                  <a:schemeClr val="tx1"/>
+                </a:solidFill>
+              </a:rPr>
+              <a:t>Petr</a:t>
+            </a:r>
+          </a:p>
+          <a:p>
+            <a:pPr algn="ctr"/>
+            <a:r>
+              <a:rPr lang="cs-CZ" sz="1400" dirty="0">
+                <a:solidFill>
+                  <a:schemeClr val="tx1"/>
+                </a:solidFill>
+              </a:rPr>
+              <a:t>Novák</a:t>
+            </a:r>
+          </a:p>
+        </p:txBody>
+      </p:sp>
+      <p:sp>
+        <p:nvSpPr>
+          <p:cNvPr id="8" name="Flowchart: Connector 7">
+            <a:extLst>
+              <a:ext uri="{FF2B5EF4-FFF2-40B4-BE49-F238E27FC236}">
+                <a16:creationId xmlns:a16="http://schemas.microsoft.com/office/drawing/2014/main" id="{4251F369-8F48-6573-3F88-B1A1A971D28A}"/>
+              </a:ext>
+            </a:extLst>
+          </p:cNvPr>
+          <p:cNvSpPr/>
+          <p:nvPr/>
+        </p:nvSpPr>
+        <p:spPr>
+          <a:xfrm>
+            <a:off x="3114371" y="5109393"/>
+            <a:ext cx="900000" cy="900000"/>
+          </a:xfrm>
+          <a:prstGeom prst="flowChartConnector">
+            <a:avLst/>
+          </a:prstGeom>
+          <a:solidFill>
+            <a:schemeClr val="bg1"/>
+          </a:solidFill>
+          <a:ln w="19050">
+            <a:solidFill>
+              <a:schemeClr val="accent1"/>
+            </a:solidFill>
+          </a:ln>
+        </p:spPr>
+        <p:style>
+          <a:lnRef idx="2">
+            <a:schemeClr val="accent1">
+              <a:shade val="15000"/>
+            </a:schemeClr>
+          </a:lnRef>
+          <a:fillRef idx="1">
+            <a:schemeClr val="accent1"/>
+          </a:fillRef>
+          <a:effectRef idx="0">
+            <a:schemeClr val="accent1"/>
+          </a:effectRef>
+          <a:fontRef idx="minor">
+            <a:schemeClr val="lt1"/>
+          </a:fontRef>
+        </p:style>
+        <p:txBody>
+          <a:bodyPr rtlCol="0" anchor="ctr"/>
+          <a:lstStyle/>
+          <a:p>
+            <a:pPr algn="ctr"/>
+            <a:r>
+              <a:rPr lang="cs-CZ" sz="1400" dirty="0">
+                <a:solidFill>
+                  <a:schemeClr val="tx1"/>
+                </a:solidFill>
+              </a:rPr>
+              <a:t>Jiří</a:t>
+            </a:r>
+          </a:p>
+          <a:p>
+            <a:pPr algn="ctr"/>
+            <a:r>
+              <a:rPr lang="cs-CZ" sz="1400" dirty="0">
+                <a:solidFill>
+                  <a:schemeClr val="tx1"/>
+                </a:solidFill>
+              </a:rPr>
+              <a:t>Horák</a:t>
+            </a:r>
+          </a:p>
+        </p:txBody>
+      </p:sp>
+      <p:sp>
+        <p:nvSpPr>
+          <p:cNvPr id="9" name="Flowchart: Connector 8">
+            <a:extLst>
+              <a:ext uri="{FF2B5EF4-FFF2-40B4-BE49-F238E27FC236}">
+                <a16:creationId xmlns:a16="http://schemas.microsoft.com/office/drawing/2014/main" id="{D1690ABC-8001-474D-9E93-0B97AAC3DFEC}"/>
+              </a:ext>
+            </a:extLst>
+          </p:cNvPr>
+          <p:cNvSpPr/>
+          <p:nvPr/>
+        </p:nvSpPr>
+        <p:spPr>
+          <a:xfrm>
+            <a:off x="3672919" y="2502174"/>
+            <a:ext cx="900000" cy="900000"/>
+          </a:xfrm>
+          <a:prstGeom prst="flowChartConnector">
+            <a:avLst/>
+          </a:prstGeom>
+          <a:solidFill>
+            <a:schemeClr val="bg1"/>
+          </a:solidFill>
+          <a:ln w="19050">
+            <a:solidFill>
+              <a:srgbClr val="C00000"/>
+            </a:solidFill>
+          </a:ln>
+        </p:spPr>
+        <p:style>
+          <a:lnRef idx="2">
+            <a:schemeClr val="accent1">
+              <a:shade val="15000"/>
+            </a:schemeClr>
+          </a:lnRef>
+          <a:fillRef idx="1">
+            <a:schemeClr val="accent1"/>
+          </a:fillRef>
+          <a:effectRef idx="0">
+            <a:schemeClr val="accent1"/>
+          </a:effectRef>
+          <a:fontRef idx="minor">
+            <a:schemeClr val="lt1"/>
+          </a:fontRef>
+        </p:style>
+        <p:txBody>
+          <a:bodyPr rtlCol="0" anchor="ctr"/>
+          <a:lstStyle/>
+          <a:p>
+            <a:pPr algn="ctr"/>
+            <a:r>
+              <a:rPr lang="cs-CZ" sz="1400" dirty="0">
+                <a:solidFill>
+                  <a:schemeClr val="tx1"/>
+                </a:solidFill>
+              </a:rPr>
+              <a:t>Máslo</a:t>
+            </a:r>
+            <a:endParaRPr lang="en-GB" sz="1400" dirty="0">
+              <a:solidFill>
+                <a:schemeClr val="tx1"/>
+              </a:solidFill>
+            </a:endParaRPr>
+          </a:p>
+        </p:txBody>
+      </p:sp>
+      <p:sp>
+        <p:nvSpPr>
+          <p:cNvPr id="10" name="Flowchart: Connector 9">
+            <a:extLst>
+              <a:ext uri="{FF2B5EF4-FFF2-40B4-BE49-F238E27FC236}">
+                <a16:creationId xmlns:a16="http://schemas.microsoft.com/office/drawing/2014/main" id="{8A19F733-B1A1-B863-ABA0-994F981EDE15}"/>
+              </a:ext>
+            </a:extLst>
+          </p:cNvPr>
+          <p:cNvSpPr/>
+          <p:nvPr/>
+        </p:nvSpPr>
+        <p:spPr>
+          <a:xfrm>
+            <a:off x="5203902" y="3959377"/>
+            <a:ext cx="900000" cy="900000"/>
+          </a:xfrm>
+          <a:prstGeom prst="flowChartConnector">
+            <a:avLst/>
+          </a:prstGeom>
+          <a:solidFill>
+            <a:schemeClr val="bg1"/>
+          </a:solidFill>
+          <a:ln w="19050">
+            <a:solidFill>
+              <a:srgbClr val="C00000"/>
+            </a:solidFill>
+          </a:ln>
+        </p:spPr>
+        <p:style>
+          <a:lnRef idx="2">
+            <a:schemeClr val="accent1">
+              <a:shade val="15000"/>
+            </a:schemeClr>
+          </a:lnRef>
+          <a:fillRef idx="1">
+            <a:schemeClr val="accent1"/>
+          </a:fillRef>
+          <a:effectRef idx="0">
+            <a:schemeClr val="accent1"/>
+          </a:effectRef>
+          <a:fontRef idx="minor">
+            <a:schemeClr val="lt1"/>
+          </a:fontRef>
+        </p:style>
+        <p:txBody>
+          <a:bodyPr rtlCol="0" anchor="ctr"/>
+          <a:lstStyle/>
+          <a:p>
+            <a:pPr algn="ctr"/>
+            <a:r>
+              <a:rPr lang="cs-CZ" sz="1400" dirty="0">
+                <a:solidFill>
+                  <a:schemeClr val="tx1"/>
+                </a:solidFill>
+              </a:rPr>
+              <a:t>Sýr</a:t>
+            </a:r>
+            <a:endParaRPr lang="en-GB" sz="1400" dirty="0">
+              <a:solidFill>
+                <a:schemeClr val="tx1"/>
+              </a:solidFill>
+            </a:endParaRPr>
+          </a:p>
+        </p:txBody>
+      </p:sp>
+      <p:sp>
+        <p:nvSpPr>
+          <p:cNvPr id="11" name="Flowchart: Connector 10">
+            <a:extLst>
+              <a:ext uri="{FF2B5EF4-FFF2-40B4-BE49-F238E27FC236}">
+                <a16:creationId xmlns:a16="http://schemas.microsoft.com/office/drawing/2014/main" id="{0CB1633D-D361-E2BE-2D9D-719231380C1E}"/>
+              </a:ext>
+            </a:extLst>
+          </p:cNvPr>
+          <p:cNvSpPr/>
+          <p:nvPr/>
+        </p:nvSpPr>
+        <p:spPr>
+          <a:xfrm>
+            <a:off x="720000" y="5072563"/>
+            <a:ext cx="900000" cy="900000"/>
+          </a:xfrm>
+          <a:prstGeom prst="flowChartConnector">
+            <a:avLst/>
+          </a:prstGeom>
+          <a:solidFill>
+            <a:schemeClr val="bg1"/>
+          </a:solidFill>
+          <a:ln w="19050">
+            <a:solidFill>
+              <a:srgbClr val="C00000"/>
+            </a:solidFill>
+          </a:ln>
+        </p:spPr>
+        <p:style>
+          <a:lnRef idx="2">
+            <a:schemeClr val="accent1">
+              <a:shade val="15000"/>
+            </a:schemeClr>
+          </a:lnRef>
+          <a:fillRef idx="1">
+            <a:schemeClr val="accent1"/>
+          </a:fillRef>
+          <a:effectRef idx="0">
+            <a:schemeClr val="accent1"/>
+          </a:effectRef>
+          <a:fontRef idx="minor">
+            <a:schemeClr val="lt1"/>
+          </a:fontRef>
+        </p:style>
+        <p:txBody>
+          <a:bodyPr rtlCol="0" anchor="ctr"/>
+          <a:lstStyle/>
+          <a:p>
+            <a:pPr algn="ctr"/>
+            <a:r>
+              <a:rPr lang="cs-CZ" sz="1400" dirty="0">
+                <a:solidFill>
+                  <a:schemeClr val="tx1"/>
+                </a:solidFill>
+              </a:rPr>
+              <a:t>Chléb</a:t>
+            </a:r>
+            <a:endParaRPr lang="en-GB" sz="1400" dirty="0">
+              <a:solidFill>
+                <a:schemeClr val="tx1"/>
+              </a:solidFill>
+            </a:endParaRPr>
+          </a:p>
+        </p:txBody>
+      </p:sp>
+      <p:sp>
+        <p:nvSpPr>
+          <p:cNvPr id="12" name="Flowchart: Connector 11">
+            <a:extLst>
+              <a:ext uri="{FF2B5EF4-FFF2-40B4-BE49-F238E27FC236}">
+                <a16:creationId xmlns:a16="http://schemas.microsoft.com/office/drawing/2014/main" id="{BEE01C27-7DA7-980D-171A-20094A0C0E7C}"/>
+              </a:ext>
+            </a:extLst>
+          </p:cNvPr>
+          <p:cNvSpPr/>
+          <p:nvPr/>
+        </p:nvSpPr>
+        <p:spPr>
+          <a:xfrm>
+            <a:off x="7379538" y="5109393"/>
+            <a:ext cx="900000" cy="900000"/>
+          </a:xfrm>
+          <a:prstGeom prst="flowChartConnector">
+            <a:avLst/>
+          </a:prstGeom>
+          <a:solidFill>
+            <a:schemeClr val="bg1"/>
+          </a:solidFill>
+          <a:ln w="19050">
+            <a:solidFill>
+              <a:srgbClr val="C00000"/>
+            </a:solidFill>
+          </a:ln>
+        </p:spPr>
+        <p:style>
+          <a:lnRef idx="2">
+            <a:schemeClr val="accent1">
+              <a:shade val="15000"/>
+            </a:schemeClr>
+          </a:lnRef>
+          <a:fillRef idx="1">
+            <a:schemeClr val="accent1"/>
+          </a:fillRef>
+          <a:effectRef idx="0">
+            <a:schemeClr val="accent1"/>
+          </a:effectRef>
+          <a:fontRef idx="minor">
+            <a:schemeClr val="lt1"/>
+          </a:fontRef>
+        </p:style>
+        <p:txBody>
+          <a:bodyPr rtlCol="0" anchor="ctr"/>
+          <a:lstStyle/>
+          <a:p>
+            <a:pPr algn="ctr"/>
+            <a:r>
+              <a:rPr lang="cs-CZ" sz="1400" dirty="0">
+                <a:solidFill>
+                  <a:schemeClr val="tx1"/>
+                </a:solidFill>
+              </a:rPr>
+              <a:t>Cukr</a:t>
+            </a:r>
+            <a:endParaRPr lang="en-GB" sz="1400" dirty="0">
+              <a:solidFill>
+                <a:schemeClr val="tx1"/>
+              </a:solidFill>
+            </a:endParaRPr>
+          </a:p>
+        </p:txBody>
+      </p:sp>
+      <p:cxnSp>
+        <p:nvCxnSpPr>
+          <p:cNvPr id="14" name="Straight Arrow Connector 13">
+            <a:extLst>
+              <a:ext uri="{FF2B5EF4-FFF2-40B4-BE49-F238E27FC236}">
+                <a16:creationId xmlns:a16="http://schemas.microsoft.com/office/drawing/2014/main" id="{DB3B0260-7366-5CFF-D792-CB7258F171E9}"/>
+              </a:ext>
+            </a:extLst>
+          </p:cNvPr>
+          <p:cNvCxnSpPr>
+            <a:stCxn id="7" idx="4"/>
+            <a:endCxn id="12" idx="0"/>
+          </p:cNvCxnSpPr>
+          <p:nvPr/>
+        </p:nvCxnSpPr>
+        <p:spPr>
+          <a:xfrm>
+            <a:off x="7829538" y="3420269"/>
+            <a:ext cx="0" cy="1689124"/>
+          </a:xfrm>
+          <a:prstGeom prst="straightConnector1">
+            <a:avLst/>
+          </a:prstGeom>
+          <a:ln w="28575">
+            <a:solidFill>
+              <a:schemeClr val="tx1"/>
+            </a:solidFill>
+            <a:tailEnd type="triangle"/>
+          </a:ln>
+        </p:spPr>
+        <p:style>
+          <a:lnRef idx="1">
+            <a:schemeClr val="accent1"/>
+          </a:lnRef>
+          <a:fillRef idx="0">
+            <a:schemeClr val="accent1"/>
+          </a:fillRef>
+          <a:effectRef idx="0">
+            <a:schemeClr val="accent1"/>
+          </a:effectRef>
+          <a:fontRef idx="minor">
+            <a:schemeClr val="tx1"/>
+          </a:fontRef>
+        </p:style>
+      </p:cxnSp>
+      <p:cxnSp>
+        <p:nvCxnSpPr>
+          <p:cNvPr id="16" name="Straight Arrow Connector 15">
+            <a:extLst>
+              <a:ext uri="{FF2B5EF4-FFF2-40B4-BE49-F238E27FC236}">
+                <a16:creationId xmlns:a16="http://schemas.microsoft.com/office/drawing/2014/main" id="{6CB3BE0C-B678-1E24-B63B-F904703C66E6}"/>
+              </a:ext>
+            </a:extLst>
+          </p:cNvPr>
+          <p:cNvCxnSpPr>
+            <a:stCxn id="7" idx="3"/>
+            <a:endCxn id="10" idx="6"/>
+          </p:cNvCxnSpPr>
+          <p:nvPr/>
+        </p:nvCxnSpPr>
+        <p:spPr>
+          <a:xfrm flipH="1">
+            <a:off x="6103902" y="3288467"/>
+            <a:ext cx="1407438" cy="1120910"/>
+          </a:xfrm>
+          <a:prstGeom prst="straightConnector1">
+            <a:avLst/>
+          </a:prstGeom>
+          <a:ln w="28575">
+            <a:solidFill>
+              <a:schemeClr val="tx1"/>
+            </a:solidFill>
+            <a:tailEnd type="triangle"/>
+          </a:ln>
+        </p:spPr>
+        <p:style>
+          <a:lnRef idx="1">
+            <a:schemeClr val="accent1"/>
+          </a:lnRef>
+          <a:fillRef idx="0">
+            <a:schemeClr val="accent1"/>
+          </a:fillRef>
+          <a:effectRef idx="0">
+            <a:schemeClr val="accent1"/>
+          </a:effectRef>
+          <a:fontRef idx="minor">
+            <a:schemeClr val="tx1"/>
+          </a:fontRef>
+        </p:style>
+      </p:cxnSp>
+      <p:cxnSp>
+        <p:nvCxnSpPr>
+          <p:cNvPr id="20" name="Straight Arrow Connector 19">
+            <a:extLst>
+              <a:ext uri="{FF2B5EF4-FFF2-40B4-BE49-F238E27FC236}">
+                <a16:creationId xmlns:a16="http://schemas.microsoft.com/office/drawing/2014/main" id="{D89CC15C-AECD-C09A-CB0B-891E1CFA606C}"/>
+              </a:ext>
+            </a:extLst>
+          </p:cNvPr>
+          <p:cNvCxnSpPr>
+            <a:cxnSpLocks/>
+            <a:stCxn id="8" idx="7"/>
+            <a:endCxn id="10" idx="3"/>
+          </p:cNvCxnSpPr>
+          <p:nvPr/>
+        </p:nvCxnSpPr>
+        <p:spPr>
+          <a:xfrm flipV="1">
+            <a:off x="3882569" y="4727575"/>
+            <a:ext cx="1453135" cy="513620"/>
+          </a:xfrm>
+          <a:prstGeom prst="straightConnector1">
+            <a:avLst/>
+          </a:prstGeom>
+          <a:ln w="28575">
+            <a:solidFill>
+              <a:schemeClr val="tx1"/>
+            </a:solidFill>
+            <a:tailEnd type="triangle"/>
+          </a:ln>
+        </p:spPr>
+        <p:style>
+          <a:lnRef idx="1">
+            <a:schemeClr val="accent1"/>
+          </a:lnRef>
+          <a:fillRef idx="0">
+            <a:schemeClr val="accent1"/>
+          </a:fillRef>
+          <a:effectRef idx="0">
+            <a:schemeClr val="accent1"/>
+          </a:effectRef>
+          <a:fontRef idx="minor">
+            <a:schemeClr val="tx1"/>
+          </a:fontRef>
+        </p:style>
+      </p:cxnSp>
+      <p:cxnSp>
+        <p:nvCxnSpPr>
+          <p:cNvPr id="23" name="Straight Arrow Connector 22">
+            <a:extLst>
+              <a:ext uri="{FF2B5EF4-FFF2-40B4-BE49-F238E27FC236}">
+                <a16:creationId xmlns:a16="http://schemas.microsoft.com/office/drawing/2014/main" id="{7216CEBD-4453-677B-C40B-C327F809640E}"/>
+              </a:ext>
+            </a:extLst>
+          </p:cNvPr>
+          <p:cNvCxnSpPr>
+            <a:cxnSpLocks/>
+            <a:stCxn id="8" idx="1"/>
+            <a:endCxn id="11" idx="7"/>
+          </p:cNvCxnSpPr>
+          <p:nvPr/>
+        </p:nvCxnSpPr>
+        <p:spPr>
+          <a:xfrm flipH="1" flipV="1">
+            <a:off x="1488198" y="5204365"/>
+            <a:ext cx="1757975" cy="36830"/>
+          </a:xfrm>
+          <a:prstGeom prst="straightConnector1">
+            <a:avLst/>
+          </a:prstGeom>
+          <a:ln w="28575">
+            <a:solidFill>
+              <a:schemeClr val="tx1"/>
+            </a:solidFill>
+            <a:tailEnd type="triangle"/>
+          </a:ln>
+        </p:spPr>
+        <p:style>
+          <a:lnRef idx="1">
+            <a:schemeClr val="accent1"/>
+          </a:lnRef>
+          <a:fillRef idx="0">
+            <a:schemeClr val="accent1"/>
+          </a:fillRef>
+          <a:effectRef idx="0">
+            <a:schemeClr val="accent1"/>
+          </a:effectRef>
+          <a:fontRef idx="minor">
+            <a:schemeClr val="tx1"/>
+          </a:fontRef>
+        </p:style>
+      </p:cxnSp>
+      <p:cxnSp>
+        <p:nvCxnSpPr>
+          <p:cNvPr id="25" name="Straight Arrow Connector 24">
+            <a:extLst>
+              <a:ext uri="{FF2B5EF4-FFF2-40B4-BE49-F238E27FC236}">
+                <a16:creationId xmlns:a16="http://schemas.microsoft.com/office/drawing/2014/main" id="{C6BBD261-7249-BEB5-AB48-33CBC0A005A7}"/>
+              </a:ext>
+            </a:extLst>
+          </p:cNvPr>
+          <p:cNvCxnSpPr>
+            <a:cxnSpLocks/>
+            <a:stCxn id="8" idx="2"/>
+            <a:endCxn id="11" idx="6"/>
+          </p:cNvCxnSpPr>
+          <p:nvPr/>
+        </p:nvCxnSpPr>
+        <p:spPr>
+          <a:xfrm flipH="1" flipV="1">
+            <a:off x="1620000" y="5522563"/>
+            <a:ext cx="1494371" cy="36830"/>
+          </a:xfrm>
+          <a:prstGeom prst="straightConnector1">
+            <a:avLst/>
+          </a:prstGeom>
+          <a:ln w="28575">
+            <a:solidFill>
+              <a:schemeClr val="tx1"/>
+            </a:solidFill>
+            <a:tailEnd type="triangle"/>
+          </a:ln>
+        </p:spPr>
+        <p:style>
+          <a:lnRef idx="1">
+            <a:schemeClr val="accent1"/>
+          </a:lnRef>
+          <a:fillRef idx="0">
+            <a:schemeClr val="accent1"/>
+          </a:fillRef>
+          <a:effectRef idx="0">
+            <a:schemeClr val="accent1"/>
+          </a:effectRef>
+          <a:fontRef idx="minor">
+            <a:schemeClr val="tx1"/>
+          </a:fontRef>
+        </p:style>
+      </p:cxnSp>
+      <p:cxnSp>
+        <p:nvCxnSpPr>
+          <p:cNvPr id="27" name="Straight Arrow Connector 26">
+            <a:extLst>
+              <a:ext uri="{FF2B5EF4-FFF2-40B4-BE49-F238E27FC236}">
+                <a16:creationId xmlns:a16="http://schemas.microsoft.com/office/drawing/2014/main" id="{82D675D4-7D1E-68AE-10EE-2B43A10CBEC8}"/>
+              </a:ext>
+            </a:extLst>
+          </p:cNvPr>
+          <p:cNvCxnSpPr>
+            <a:stCxn id="6" idx="6"/>
+            <a:endCxn id="9" idx="2"/>
+          </p:cNvCxnSpPr>
+          <p:nvPr/>
+        </p:nvCxnSpPr>
+        <p:spPr>
+          <a:xfrm flipV="1">
+            <a:off x="1620000" y="2952174"/>
+            <a:ext cx="2052919" cy="18095"/>
+          </a:xfrm>
+          <a:prstGeom prst="straightConnector1">
+            <a:avLst/>
+          </a:prstGeom>
+          <a:ln w="28575">
+            <a:solidFill>
+              <a:schemeClr val="tx1"/>
+            </a:solidFill>
+            <a:tailEnd type="triangle"/>
+          </a:ln>
+        </p:spPr>
+        <p:style>
+          <a:lnRef idx="1">
+            <a:schemeClr val="accent1"/>
+          </a:lnRef>
+          <a:fillRef idx="0">
+            <a:schemeClr val="accent1"/>
+          </a:fillRef>
+          <a:effectRef idx="0">
+            <a:schemeClr val="accent1"/>
+          </a:effectRef>
+          <a:fontRef idx="minor">
+            <a:schemeClr val="tx1"/>
+          </a:fontRef>
+        </p:style>
+      </p:cxnSp>
+      <p:cxnSp>
+        <p:nvCxnSpPr>
+          <p:cNvPr id="29" name="Straight Arrow Connector 28">
+            <a:extLst>
+              <a:ext uri="{FF2B5EF4-FFF2-40B4-BE49-F238E27FC236}">
+                <a16:creationId xmlns:a16="http://schemas.microsoft.com/office/drawing/2014/main" id="{09967E8B-D7FB-6E75-C2F1-94CD13DCE70F}"/>
+              </a:ext>
+            </a:extLst>
+          </p:cNvPr>
+          <p:cNvCxnSpPr>
+            <a:stCxn id="6" idx="4"/>
+            <a:endCxn id="11" idx="0"/>
+          </p:cNvCxnSpPr>
+          <p:nvPr/>
+        </p:nvCxnSpPr>
+        <p:spPr>
+          <a:xfrm>
+            <a:off x="1170000" y="3420269"/>
+            <a:ext cx="0" cy="1652294"/>
+          </a:xfrm>
+          <a:prstGeom prst="straightConnector1">
+            <a:avLst/>
+          </a:prstGeom>
+          <a:ln w="28575">
+            <a:solidFill>
+              <a:schemeClr val="tx1"/>
+            </a:solidFill>
+            <a:tailEnd type="triangle"/>
+          </a:ln>
+        </p:spPr>
+        <p:style>
+          <a:lnRef idx="1">
+            <a:schemeClr val="accent1"/>
+          </a:lnRef>
+          <a:fillRef idx="0">
+            <a:schemeClr val="accent1"/>
+          </a:fillRef>
+          <a:effectRef idx="0">
+            <a:schemeClr val="accent1"/>
+          </a:effectRef>
+          <a:fontRef idx="minor">
+            <a:schemeClr val="tx1"/>
+          </a:fontRef>
+        </p:style>
+      </p:cxnSp>
+      <p:cxnSp>
+        <p:nvCxnSpPr>
+          <p:cNvPr id="31" name="Straight Arrow Connector 30">
+            <a:extLst>
+              <a:ext uri="{FF2B5EF4-FFF2-40B4-BE49-F238E27FC236}">
+                <a16:creationId xmlns:a16="http://schemas.microsoft.com/office/drawing/2014/main" id="{6D4E1BF3-88E5-1311-983C-3E42C7DF4B81}"/>
+              </a:ext>
+            </a:extLst>
+          </p:cNvPr>
+          <p:cNvCxnSpPr>
+            <a:stCxn id="6" idx="5"/>
+            <a:endCxn id="10" idx="2"/>
+          </p:cNvCxnSpPr>
+          <p:nvPr/>
+        </p:nvCxnSpPr>
+        <p:spPr>
+          <a:xfrm>
+            <a:off x="1488198" y="3288467"/>
+            <a:ext cx="3715704" cy="1120910"/>
+          </a:xfrm>
+          <a:prstGeom prst="straightConnector1">
+            <a:avLst/>
+          </a:prstGeom>
+          <a:ln w="28575">
+            <a:solidFill>
+              <a:schemeClr val="tx1"/>
+            </a:solidFill>
+            <a:tailEnd type="triangle"/>
+          </a:ln>
+        </p:spPr>
+        <p:style>
+          <a:lnRef idx="1">
+            <a:schemeClr val="accent1"/>
+          </a:lnRef>
+          <a:fillRef idx="0">
+            <a:schemeClr val="accent1"/>
+          </a:fillRef>
+          <a:effectRef idx="0">
+            <a:schemeClr val="accent1"/>
+          </a:effectRef>
+          <a:fontRef idx="minor">
+            <a:schemeClr val="tx1"/>
+          </a:fontRef>
+        </p:style>
+      </p:cxnSp>
+      <p:sp>
+        <p:nvSpPr>
+          <p:cNvPr id="32" name="TextBox 31">
+            <a:extLst>
+              <a:ext uri="{FF2B5EF4-FFF2-40B4-BE49-F238E27FC236}">
+                <a16:creationId xmlns:a16="http://schemas.microsoft.com/office/drawing/2014/main" id="{3D8D004A-8C9D-A04B-CCB8-D3FC8D5A7D7D}"/>
+              </a:ext>
+            </a:extLst>
+          </p:cNvPr>
+          <p:cNvSpPr txBox="1"/>
+          <p:nvPr/>
+        </p:nvSpPr>
+        <p:spPr>
+          <a:xfrm>
+            <a:off x="700502" y="3590724"/>
+            <a:ext cx="899996" cy="523220"/>
+          </a:xfrm>
+          <a:prstGeom prst="rect">
+            <a:avLst/>
+          </a:prstGeom>
+          <a:solidFill>
+            <a:schemeClr val="bg1"/>
+          </a:solidFill>
+        </p:spPr>
+        <p:txBody>
+          <a:bodyPr wrap="square" rtlCol="0">
+            <a:spAutoFit/>
+          </a:bodyPr>
+          <a:lstStyle/>
+          <a:p>
+            <a:r>
+              <a:rPr lang="cs-CZ" sz="1400" dirty="0"/>
+              <a:t>4 ks</a:t>
+            </a:r>
+          </a:p>
+          <a:p>
+            <a:r>
+              <a:rPr lang="cs-CZ" sz="1400" dirty="0"/>
+              <a:t>06/01/24</a:t>
+            </a:r>
+            <a:endParaRPr lang="en-GB" sz="1400" dirty="0"/>
+          </a:p>
+        </p:txBody>
+      </p:sp>
+      <p:sp>
+        <p:nvSpPr>
+          <p:cNvPr id="35" name="TextBox 34">
+            <a:extLst>
+              <a:ext uri="{FF2B5EF4-FFF2-40B4-BE49-F238E27FC236}">
+                <a16:creationId xmlns:a16="http://schemas.microsoft.com/office/drawing/2014/main" id="{6B7C2217-D8E8-25CD-3903-0FA5A18C6BAE}"/>
+              </a:ext>
+            </a:extLst>
+          </p:cNvPr>
+          <p:cNvSpPr txBox="1"/>
+          <p:nvPr/>
+        </p:nvSpPr>
+        <p:spPr>
+          <a:xfrm rot="1062652">
+            <a:off x="2424575" y="3502439"/>
+            <a:ext cx="899996" cy="523220"/>
+          </a:xfrm>
+          <a:prstGeom prst="rect">
+            <a:avLst/>
+          </a:prstGeom>
+          <a:solidFill>
+            <a:schemeClr val="bg1"/>
+          </a:solidFill>
+        </p:spPr>
+        <p:txBody>
+          <a:bodyPr wrap="square" rtlCol="0">
+            <a:spAutoFit/>
+          </a:bodyPr>
+          <a:lstStyle/>
+          <a:p>
+            <a:r>
+              <a:rPr lang="cs-CZ" sz="1400" dirty="0"/>
+              <a:t>2 ks</a:t>
+            </a:r>
+          </a:p>
+          <a:p>
+            <a:r>
+              <a:rPr lang="cs-CZ" sz="1400" dirty="0"/>
+              <a:t>06/01/24</a:t>
+            </a:r>
+            <a:endParaRPr lang="en-GB" sz="1400" dirty="0"/>
+          </a:p>
+        </p:txBody>
+      </p:sp>
+      <p:sp>
+        <p:nvSpPr>
+          <p:cNvPr id="36" name="TextBox 35">
+            <a:extLst>
+              <a:ext uri="{FF2B5EF4-FFF2-40B4-BE49-F238E27FC236}">
+                <a16:creationId xmlns:a16="http://schemas.microsoft.com/office/drawing/2014/main" id="{8F9AB825-AA85-2DAD-27CD-2BE9EB2AAC84}"/>
+              </a:ext>
+            </a:extLst>
+          </p:cNvPr>
+          <p:cNvSpPr txBox="1"/>
+          <p:nvPr/>
+        </p:nvSpPr>
+        <p:spPr>
+          <a:xfrm>
+            <a:off x="2196461" y="2759648"/>
+            <a:ext cx="899996" cy="523220"/>
+          </a:xfrm>
+          <a:prstGeom prst="rect">
+            <a:avLst/>
+          </a:prstGeom>
+          <a:solidFill>
+            <a:schemeClr val="bg1"/>
+          </a:solidFill>
+        </p:spPr>
+        <p:txBody>
+          <a:bodyPr wrap="square" rtlCol="0">
+            <a:spAutoFit/>
+          </a:bodyPr>
+          <a:lstStyle/>
+          <a:p>
+            <a:r>
+              <a:rPr lang="cs-CZ" sz="1400" dirty="0"/>
+              <a:t>1 ks</a:t>
+            </a:r>
+          </a:p>
+          <a:p>
+            <a:r>
+              <a:rPr lang="cs-CZ" sz="1400" dirty="0"/>
+              <a:t>14/03/24</a:t>
+            </a:r>
+            <a:endParaRPr lang="en-GB" sz="1400" dirty="0"/>
+          </a:p>
+        </p:txBody>
+      </p:sp>
+      <p:sp>
+        <p:nvSpPr>
+          <p:cNvPr id="37" name="TextBox 36">
+            <a:extLst>
+              <a:ext uri="{FF2B5EF4-FFF2-40B4-BE49-F238E27FC236}">
+                <a16:creationId xmlns:a16="http://schemas.microsoft.com/office/drawing/2014/main" id="{1B0F9278-36E9-85E8-9A70-9A5AB0C04322}"/>
+              </a:ext>
+            </a:extLst>
+          </p:cNvPr>
+          <p:cNvSpPr txBox="1"/>
+          <p:nvPr/>
+        </p:nvSpPr>
+        <p:spPr>
+          <a:xfrm rot="20337978">
+            <a:off x="4117508" y="4732995"/>
+            <a:ext cx="899996" cy="523220"/>
+          </a:xfrm>
+          <a:prstGeom prst="rect">
+            <a:avLst/>
+          </a:prstGeom>
+          <a:solidFill>
+            <a:schemeClr val="bg1"/>
+          </a:solidFill>
+        </p:spPr>
+        <p:txBody>
+          <a:bodyPr wrap="square" rtlCol="0">
+            <a:spAutoFit/>
+          </a:bodyPr>
+          <a:lstStyle/>
+          <a:p>
+            <a:r>
+              <a:rPr lang="cs-CZ" sz="1400" dirty="0"/>
+              <a:t>4 ks</a:t>
+            </a:r>
+          </a:p>
+          <a:p>
+            <a:r>
+              <a:rPr lang="cs-CZ" sz="1400" dirty="0"/>
+              <a:t>14/03/24</a:t>
+            </a:r>
+            <a:endParaRPr lang="en-GB" sz="1400" dirty="0"/>
+          </a:p>
+        </p:txBody>
+      </p:sp>
+      <p:sp>
+        <p:nvSpPr>
+          <p:cNvPr id="38" name="TextBox 37">
+            <a:extLst>
+              <a:ext uri="{FF2B5EF4-FFF2-40B4-BE49-F238E27FC236}">
+                <a16:creationId xmlns:a16="http://schemas.microsoft.com/office/drawing/2014/main" id="{8649BAEF-AC25-F30C-6490-8B60CBE457B8}"/>
+              </a:ext>
+            </a:extLst>
+          </p:cNvPr>
+          <p:cNvSpPr txBox="1"/>
+          <p:nvPr/>
+        </p:nvSpPr>
+        <p:spPr>
+          <a:xfrm>
+            <a:off x="1987285" y="5486173"/>
+            <a:ext cx="899996" cy="523220"/>
+          </a:xfrm>
+          <a:prstGeom prst="rect">
+            <a:avLst/>
+          </a:prstGeom>
+          <a:solidFill>
+            <a:schemeClr val="bg1"/>
+          </a:solidFill>
+        </p:spPr>
+        <p:txBody>
+          <a:bodyPr wrap="square" rtlCol="0">
+            <a:spAutoFit/>
+          </a:bodyPr>
+          <a:lstStyle/>
+          <a:p>
+            <a:r>
+              <a:rPr lang="cs-CZ" sz="1400" dirty="0"/>
+              <a:t>1 ks</a:t>
+            </a:r>
+          </a:p>
+          <a:p>
+            <a:r>
+              <a:rPr lang="cs-CZ" sz="1400" dirty="0"/>
+              <a:t>12/03/24</a:t>
+            </a:r>
+            <a:endParaRPr lang="en-GB" sz="1400" dirty="0"/>
+          </a:p>
+        </p:txBody>
+      </p:sp>
+      <p:sp>
+        <p:nvSpPr>
+          <p:cNvPr id="39" name="TextBox 38">
+            <a:extLst>
+              <a:ext uri="{FF2B5EF4-FFF2-40B4-BE49-F238E27FC236}">
+                <a16:creationId xmlns:a16="http://schemas.microsoft.com/office/drawing/2014/main" id="{0134F62A-96E6-6E0B-13F9-67BBDB6D3BE5}"/>
+              </a:ext>
+            </a:extLst>
+          </p:cNvPr>
+          <p:cNvSpPr txBox="1"/>
+          <p:nvPr/>
+        </p:nvSpPr>
+        <p:spPr>
+          <a:xfrm>
+            <a:off x="1987285" y="4760287"/>
+            <a:ext cx="899996" cy="523220"/>
+          </a:xfrm>
+          <a:prstGeom prst="rect">
+            <a:avLst/>
+          </a:prstGeom>
+          <a:solidFill>
+            <a:schemeClr val="bg1"/>
+          </a:solidFill>
+        </p:spPr>
+        <p:txBody>
+          <a:bodyPr wrap="square" rtlCol="0">
+            <a:spAutoFit/>
+          </a:bodyPr>
+          <a:lstStyle/>
+          <a:p>
+            <a:r>
+              <a:rPr lang="cs-CZ" sz="1400" dirty="0"/>
+              <a:t>3 ks</a:t>
+            </a:r>
+          </a:p>
+          <a:p>
+            <a:r>
+              <a:rPr lang="cs-CZ" sz="1400" dirty="0"/>
+              <a:t>14/03/24</a:t>
+            </a:r>
+            <a:endParaRPr lang="en-GB" sz="1400" dirty="0"/>
+          </a:p>
+        </p:txBody>
+      </p:sp>
+      <p:sp>
+        <p:nvSpPr>
+          <p:cNvPr id="42" name="TextBox 41">
+            <a:extLst>
+              <a:ext uri="{FF2B5EF4-FFF2-40B4-BE49-F238E27FC236}">
+                <a16:creationId xmlns:a16="http://schemas.microsoft.com/office/drawing/2014/main" id="{AA17E2EC-6F41-FDEE-BA16-1D2B16243FDE}"/>
+              </a:ext>
+            </a:extLst>
+          </p:cNvPr>
+          <p:cNvSpPr txBox="1"/>
+          <p:nvPr/>
+        </p:nvSpPr>
+        <p:spPr>
+          <a:xfrm>
+            <a:off x="7379538" y="3882054"/>
+            <a:ext cx="899996" cy="523220"/>
+          </a:xfrm>
+          <a:prstGeom prst="rect">
+            <a:avLst/>
+          </a:prstGeom>
+          <a:solidFill>
+            <a:schemeClr val="bg1"/>
+          </a:solidFill>
+        </p:spPr>
+        <p:txBody>
+          <a:bodyPr wrap="square" rtlCol="0">
+            <a:spAutoFit/>
+          </a:bodyPr>
+          <a:lstStyle/>
+          <a:p>
+            <a:r>
+              <a:rPr lang="cs-CZ" sz="1400" dirty="0"/>
+              <a:t>6 ks</a:t>
+            </a:r>
+          </a:p>
+          <a:p>
+            <a:r>
+              <a:rPr lang="cs-CZ" sz="1400" dirty="0"/>
+              <a:t>31/08/22</a:t>
+            </a:r>
+            <a:endParaRPr lang="en-GB" sz="1400" dirty="0"/>
+          </a:p>
+        </p:txBody>
+      </p:sp>
+      <p:sp>
+        <p:nvSpPr>
+          <p:cNvPr id="43" name="TextBox 42">
+            <a:extLst>
+              <a:ext uri="{FF2B5EF4-FFF2-40B4-BE49-F238E27FC236}">
+                <a16:creationId xmlns:a16="http://schemas.microsoft.com/office/drawing/2014/main" id="{C0F359B0-559A-3612-2535-0E3FDE392CEC}"/>
+              </a:ext>
+            </a:extLst>
+          </p:cNvPr>
+          <p:cNvSpPr txBox="1"/>
+          <p:nvPr/>
+        </p:nvSpPr>
+        <p:spPr>
+          <a:xfrm rot="19252011">
+            <a:off x="6449812" y="3508668"/>
+            <a:ext cx="899996" cy="523220"/>
+          </a:xfrm>
+          <a:prstGeom prst="rect">
+            <a:avLst/>
+          </a:prstGeom>
+          <a:solidFill>
+            <a:schemeClr val="bg1"/>
+          </a:solidFill>
+        </p:spPr>
+        <p:txBody>
+          <a:bodyPr wrap="square" rtlCol="0">
+            <a:spAutoFit/>
+          </a:bodyPr>
+          <a:lstStyle/>
+          <a:p>
+            <a:r>
+              <a:rPr lang="cs-CZ" sz="1400" dirty="0"/>
+              <a:t>2 ks</a:t>
+            </a:r>
+          </a:p>
+          <a:p>
+            <a:r>
+              <a:rPr lang="cs-CZ" sz="1400" dirty="0"/>
+              <a:t>22/02/23</a:t>
+            </a:r>
+            <a:endParaRPr lang="en-GB" sz="1400" dirty="0"/>
+          </a:p>
+        </p:txBody>
+      </p:sp>
+      <p:cxnSp>
+        <p:nvCxnSpPr>
+          <p:cNvPr id="45" name="Straight Arrow Connector 44">
+            <a:extLst>
+              <a:ext uri="{FF2B5EF4-FFF2-40B4-BE49-F238E27FC236}">
+                <a16:creationId xmlns:a16="http://schemas.microsoft.com/office/drawing/2014/main" id="{40823093-E736-DA7A-1FC5-2FF7A469EBF7}"/>
+              </a:ext>
+            </a:extLst>
+          </p:cNvPr>
+          <p:cNvCxnSpPr>
+            <a:cxnSpLocks/>
+            <a:stCxn id="8" idx="6"/>
+            <a:endCxn id="12" idx="2"/>
+          </p:cNvCxnSpPr>
+          <p:nvPr/>
+        </p:nvCxnSpPr>
+        <p:spPr>
+          <a:xfrm>
+            <a:off x="4014371" y="5559393"/>
+            <a:ext cx="3365167" cy="0"/>
+          </a:xfrm>
+          <a:prstGeom prst="straightConnector1">
+            <a:avLst/>
+          </a:prstGeom>
+          <a:ln w="28575">
+            <a:solidFill>
+              <a:schemeClr val="tx1"/>
+            </a:solidFill>
+            <a:tailEnd type="triangle"/>
+          </a:ln>
+        </p:spPr>
+        <p:style>
+          <a:lnRef idx="1">
+            <a:schemeClr val="accent1"/>
+          </a:lnRef>
+          <a:fillRef idx="0">
+            <a:schemeClr val="accent1"/>
+          </a:fillRef>
+          <a:effectRef idx="0">
+            <a:schemeClr val="accent1"/>
+          </a:effectRef>
+          <a:fontRef idx="minor">
+            <a:schemeClr val="tx1"/>
+          </a:fontRef>
+        </p:style>
+      </p:cxnSp>
+      <p:sp>
+        <p:nvSpPr>
+          <p:cNvPr id="46" name="TextBox 45">
+            <a:extLst>
+              <a:ext uri="{FF2B5EF4-FFF2-40B4-BE49-F238E27FC236}">
+                <a16:creationId xmlns:a16="http://schemas.microsoft.com/office/drawing/2014/main" id="{63F004B6-1CD1-93E6-016F-3BFEB7F8D2B0}"/>
+              </a:ext>
+            </a:extLst>
+          </p:cNvPr>
+          <p:cNvSpPr txBox="1"/>
+          <p:nvPr/>
+        </p:nvSpPr>
+        <p:spPr>
+          <a:xfrm>
+            <a:off x="4967244" y="5336268"/>
+            <a:ext cx="899996" cy="523220"/>
+          </a:xfrm>
+          <a:prstGeom prst="rect">
+            <a:avLst/>
+          </a:prstGeom>
+          <a:solidFill>
+            <a:schemeClr val="bg1"/>
+          </a:solidFill>
+        </p:spPr>
+        <p:txBody>
+          <a:bodyPr wrap="square" rtlCol="0">
+            <a:spAutoFit/>
+          </a:bodyPr>
+          <a:lstStyle/>
+          <a:p>
+            <a:r>
+              <a:rPr lang="cs-CZ" sz="1400" dirty="0"/>
+              <a:t>1 ks</a:t>
+            </a:r>
+          </a:p>
+          <a:p>
+            <a:r>
+              <a:rPr lang="cs-CZ" sz="1400" dirty="0"/>
+              <a:t>06/02/24</a:t>
+            </a:r>
+            <a:endParaRPr lang="en-GB" sz="1400" dirty="0"/>
+          </a:p>
+        </p:txBody>
+      </p:sp>
+      <p:sp>
+        <p:nvSpPr>
+          <p:cNvPr id="50" name="Flowchart: Connector 49">
+            <a:extLst>
+              <a:ext uri="{FF2B5EF4-FFF2-40B4-BE49-F238E27FC236}">
+                <a16:creationId xmlns:a16="http://schemas.microsoft.com/office/drawing/2014/main" id="{2A5859EA-1928-C692-C254-53D142C270D3}"/>
+              </a:ext>
+            </a:extLst>
+          </p:cNvPr>
+          <p:cNvSpPr/>
+          <p:nvPr/>
+        </p:nvSpPr>
+        <p:spPr>
+          <a:xfrm>
+            <a:off x="5166720" y="2520269"/>
+            <a:ext cx="900000" cy="900000"/>
+          </a:xfrm>
+          <a:prstGeom prst="flowChartConnector">
+            <a:avLst/>
+          </a:prstGeom>
+          <a:solidFill>
+            <a:schemeClr val="bg1"/>
+          </a:solidFill>
+          <a:ln w="19050">
+            <a:solidFill>
+              <a:srgbClr val="C00000"/>
+            </a:solidFill>
+          </a:ln>
+        </p:spPr>
+        <p:style>
+          <a:lnRef idx="2">
+            <a:schemeClr val="accent1">
+              <a:shade val="15000"/>
+            </a:schemeClr>
+          </a:lnRef>
+          <a:fillRef idx="1">
+            <a:schemeClr val="accent1"/>
+          </a:fillRef>
+          <a:effectRef idx="0">
+            <a:schemeClr val="accent1"/>
+          </a:effectRef>
+          <a:fontRef idx="minor">
+            <a:schemeClr val="lt1"/>
+          </a:fontRef>
+        </p:style>
+        <p:txBody>
+          <a:bodyPr rtlCol="0" anchor="ctr"/>
+          <a:lstStyle/>
+          <a:p>
+            <a:pPr algn="ctr"/>
+            <a:r>
+              <a:rPr lang="cs-CZ" sz="1400" dirty="0">
+                <a:solidFill>
+                  <a:schemeClr val="tx1"/>
+                </a:solidFill>
+              </a:rPr>
+              <a:t>Pepř</a:t>
+            </a:r>
+            <a:endParaRPr lang="en-GB" sz="1400" dirty="0">
+              <a:solidFill>
+                <a:schemeClr val="tx1"/>
+              </a:solidFill>
+            </a:endParaRPr>
+          </a:p>
+        </p:txBody>
+      </p:sp>
+      <p:cxnSp>
+        <p:nvCxnSpPr>
+          <p:cNvPr id="52" name="Straight Arrow Connector 51">
+            <a:extLst>
+              <a:ext uri="{FF2B5EF4-FFF2-40B4-BE49-F238E27FC236}">
+                <a16:creationId xmlns:a16="http://schemas.microsoft.com/office/drawing/2014/main" id="{D5475714-BFDC-B94F-14C1-DC5E846334DA}"/>
+              </a:ext>
+            </a:extLst>
+          </p:cNvPr>
+          <p:cNvCxnSpPr>
+            <a:stCxn id="7" idx="2"/>
+            <a:endCxn id="50" idx="6"/>
+          </p:cNvCxnSpPr>
+          <p:nvPr/>
+        </p:nvCxnSpPr>
+        <p:spPr>
+          <a:xfrm flipH="1">
+            <a:off x="6066720" y="2970269"/>
+            <a:ext cx="1312818" cy="0"/>
+          </a:xfrm>
+          <a:prstGeom prst="straightConnector1">
+            <a:avLst/>
+          </a:prstGeom>
+          <a:ln w="28575">
+            <a:solidFill>
+              <a:schemeClr val="tx1"/>
+            </a:solidFill>
+            <a:tailEnd type="triangle"/>
+          </a:ln>
+        </p:spPr>
+        <p:style>
+          <a:lnRef idx="1">
+            <a:schemeClr val="accent1"/>
+          </a:lnRef>
+          <a:fillRef idx="0">
+            <a:schemeClr val="accent1"/>
+          </a:fillRef>
+          <a:effectRef idx="0">
+            <a:schemeClr val="accent1"/>
+          </a:effectRef>
+          <a:fontRef idx="minor">
+            <a:schemeClr val="tx1"/>
+          </a:fontRef>
+        </p:style>
+      </p:cxnSp>
+      <p:sp>
+        <p:nvSpPr>
+          <p:cNvPr id="55" name="TextBox 54">
+            <a:extLst>
+              <a:ext uri="{FF2B5EF4-FFF2-40B4-BE49-F238E27FC236}">
+                <a16:creationId xmlns:a16="http://schemas.microsoft.com/office/drawing/2014/main" id="{CEAB63AC-27AB-E6E6-79EC-EBD12F046D1E}"/>
+              </a:ext>
+            </a:extLst>
+          </p:cNvPr>
+          <p:cNvSpPr txBox="1"/>
+          <p:nvPr/>
+        </p:nvSpPr>
+        <p:spPr>
+          <a:xfrm>
+            <a:off x="6291722" y="2708659"/>
+            <a:ext cx="899996" cy="523220"/>
+          </a:xfrm>
+          <a:prstGeom prst="rect">
+            <a:avLst/>
+          </a:prstGeom>
+          <a:solidFill>
+            <a:schemeClr val="bg1"/>
+          </a:solidFill>
+        </p:spPr>
+        <p:txBody>
+          <a:bodyPr wrap="square" rtlCol="0">
+            <a:spAutoFit/>
+          </a:bodyPr>
+          <a:lstStyle/>
+          <a:p>
+            <a:r>
+              <a:rPr lang="cs-CZ" sz="1400" dirty="0"/>
+              <a:t>1 ks</a:t>
+            </a:r>
+          </a:p>
+          <a:p>
+            <a:r>
+              <a:rPr lang="cs-CZ" sz="1400" dirty="0"/>
+              <a:t>11/12/23</a:t>
+            </a:r>
+            <a:endParaRPr lang="en-GB" sz="1400" dirty="0"/>
+          </a:p>
+        </p:txBody>
+      </p:sp>
+      <p:sp>
+        <p:nvSpPr>
+          <p:cNvPr id="56" name="TextBox 55">
+            <a:extLst>
+              <a:ext uri="{FF2B5EF4-FFF2-40B4-BE49-F238E27FC236}">
+                <a16:creationId xmlns:a16="http://schemas.microsoft.com/office/drawing/2014/main" id="{5F036A11-E6B6-6F38-8EC6-6D60A9215F15}"/>
+              </a:ext>
+            </a:extLst>
+          </p:cNvPr>
+          <p:cNvSpPr txBox="1"/>
+          <p:nvPr/>
+        </p:nvSpPr>
+        <p:spPr>
+          <a:xfrm>
+            <a:off x="776532" y="2441131"/>
+            <a:ext cx="747935" cy="276999"/>
+          </a:xfrm>
+          <a:prstGeom prst="rect">
+            <a:avLst/>
+          </a:prstGeom>
+        </p:spPr>
+        <p:style>
+          <a:lnRef idx="3">
+            <a:schemeClr val="lt1"/>
+          </a:lnRef>
+          <a:fillRef idx="1">
+            <a:schemeClr val="accent1"/>
+          </a:fillRef>
+          <a:effectRef idx="1">
+            <a:schemeClr val="accent1"/>
+          </a:effectRef>
+          <a:fontRef idx="minor">
+            <a:schemeClr val="lt1"/>
+          </a:fontRef>
+        </p:style>
+        <p:txBody>
+          <a:bodyPr wrap="square" rtlCol="0">
+            <a:spAutoFit/>
+          </a:bodyPr>
+          <a:lstStyle/>
+          <a:p>
+            <a:pPr algn="ctr"/>
+            <a:r>
+              <a:rPr lang="cs-CZ" sz="1200" dirty="0"/>
+              <a:t>Zákazník</a:t>
+            </a:r>
+            <a:endParaRPr lang="en-GB" sz="1200" dirty="0"/>
+          </a:p>
+        </p:txBody>
+      </p:sp>
+      <p:sp>
+        <p:nvSpPr>
+          <p:cNvPr id="57" name="TextBox 56">
+            <a:extLst>
+              <a:ext uri="{FF2B5EF4-FFF2-40B4-BE49-F238E27FC236}">
+                <a16:creationId xmlns:a16="http://schemas.microsoft.com/office/drawing/2014/main" id="{9A6EF341-453E-46E9-6B31-1A9B8F3C58B5}"/>
+              </a:ext>
+            </a:extLst>
+          </p:cNvPr>
+          <p:cNvSpPr txBox="1"/>
+          <p:nvPr/>
+        </p:nvSpPr>
+        <p:spPr>
+          <a:xfrm>
+            <a:off x="3190403" y="5827994"/>
+            <a:ext cx="747935" cy="276999"/>
+          </a:xfrm>
+          <a:prstGeom prst="rect">
+            <a:avLst/>
+          </a:prstGeom>
+        </p:spPr>
+        <p:style>
+          <a:lnRef idx="3">
+            <a:schemeClr val="lt1"/>
+          </a:lnRef>
+          <a:fillRef idx="1">
+            <a:schemeClr val="accent1"/>
+          </a:fillRef>
+          <a:effectRef idx="1">
+            <a:schemeClr val="accent1"/>
+          </a:effectRef>
+          <a:fontRef idx="minor">
+            <a:schemeClr val="lt1"/>
+          </a:fontRef>
+        </p:style>
+        <p:txBody>
+          <a:bodyPr wrap="square" rtlCol="0">
+            <a:spAutoFit/>
+          </a:bodyPr>
+          <a:lstStyle/>
+          <a:p>
+            <a:pPr algn="ctr"/>
+            <a:r>
+              <a:rPr lang="cs-CZ" sz="1200" dirty="0"/>
+              <a:t>Zákazník</a:t>
+            </a:r>
+            <a:endParaRPr lang="en-GB" sz="1200" dirty="0"/>
+          </a:p>
+        </p:txBody>
+      </p:sp>
+      <p:sp>
+        <p:nvSpPr>
+          <p:cNvPr id="58" name="TextBox 57">
+            <a:extLst>
+              <a:ext uri="{FF2B5EF4-FFF2-40B4-BE49-F238E27FC236}">
+                <a16:creationId xmlns:a16="http://schemas.microsoft.com/office/drawing/2014/main" id="{F66DA6F4-EAC6-8D69-F8EB-84B4935D15CE}"/>
+              </a:ext>
+            </a:extLst>
+          </p:cNvPr>
+          <p:cNvSpPr txBox="1"/>
+          <p:nvPr/>
+        </p:nvSpPr>
+        <p:spPr>
+          <a:xfrm>
+            <a:off x="7455567" y="2424668"/>
+            <a:ext cx="747935" cy="276999"/>
+          </a:xfrm>
+          <a:prstGeom prst="rect">
+            <a:avLst/>
+          </a:prstGeom>
+        </p:spPr>
+        <p:style>
+          <a:lnRef idx="3">
+            <a:schemeClr val="lt1"/>
+          </a:lnRef>
+          <a:fillRef idx="1">
+            <a:schemeClr val="accent1"/>
+          </a:fillRef>
+          <a:effectRef idx="1">
+            <a:schemeClr val="accent1"/>
+          </a:effectRef>
+          <a:fontRef idx="minor">
+            <a:schemeClr val="lt1"/>
+          </a:fontRef>
+        </p:style>
+        <p:txBody>
+          <a:bodyPr wrap="square" rtlCol="0">
+            <a:spAutoFit/>
+          </a:bodyPr>
+          <a:lstStyle/>
+          <a:p>
+            <a:pPr algn="ctr"/>
+            <a:r>
+              <a:rPr lang="cs-CZ" sz="1200" dirty="0"/>
+              <a:t>Zákazník</a:t>
+            </a:r>
+            <a:endParaRPr lang="en-GB" sz="1200" dirty="0"/>
+          </a:p>
+        </p:txBody>
+      </p:sp>
+      <p:sp>
+        <p:nvSpPr>
+          <p:cNvPr id="59" name="TextBox 58">
+            <a:extLst>
+              <a:ext uri="{FF2B5EF4-FFF2-40B4-BE49-F238E27FC236}">
+                <a16:creationId xmlns:a16="http://schemas.microsoft.com/office/drawing/2014/main" id="{3F4AAB1E-FA05-E76A-2847-049FFA894360}"/>
+              </a:ext>
+            </a:extLst>
+          </p:cNvPr>
+          <p:cNvSpPr txBox="1"/>
+          <p:nvPr/>
+        </p:nvSpPr>
+        <p:spPr>
+          <a:xfrm>
+            <a:off x="3762376" y="2425364"/>
+            <a:ext cx="747935" cy="276999"/>
+          </a:xfrm>
+          <a:prstGeom prst="rect">
+            <a:avLst/>
+          </a:prstGeom>
+          <a:solidFill>
+            <a:srgbClr val="C00000"/>
+          </a:solidFill>
+        </p:spPr>
+        <p:style>
+          <a:lnRef idx="3">
+            <a:schemeClr val="lt1"/>
+          </a:lnRef>
+          <a:fillRef idx="1">
+            <a:schemeClr val="accent1"/>
+          </a:fillRef>
+          <a:effectRef idx="1">
+            <a:schemeClr val="accent1"/>
+          </a:effectRef>
+          <a:fontRef idx="minor">
+            <a:schemeClr val="lt1"/>
+          </a:fontRef>
+        </p:style>
+        <p:txBody>
+          <a:bodyPr wrap="square" rtlCol="0">
+            <a:spAutoFit/>
+          </a:bodyPr>
+          <a:lstStyle/>
+          <a:p>
+            <a:pPr algn="ctr"/>
+            <a:r>
+              <a:rPr lang="cs-CZ" sz="1200" dirty="0"/>
+              <a:t>Produkt</a:t>
+            </a:r>
+            <a:endParaRPr lang="en-GB" sz="1200" dirty="0"/>
+          </a:p>
+        </p:txBody>
+      </p:sp>
+      <p:sp>
+        <p:nvSpPr>
+          <p:cNvPr id="60" name="TextBox 59">
+            <a:extLst>
+              <a:ext uri="{FF2B5EF4-FFF2-40B4-BE49-F238E27FC236}">
+                <a16:creationId xmlns:a16="http://schemas.microsoft.com/office/drawing/2014/main" id="{B9C81CCD-5178-4876-A5F1-76C1C190F026}"/>
+              </a:ext>
+            </a:extLst>
+          </p:cNvPr>
+          <p:cNvSpPr txBox="1"/>
+          <p:nvPr/>
+        </p:nvSpPr>
+        <p:spPr>
+          <a:xfrm>
+            <a:off x="5239687" y="2447135"/>
+            <a:ext cx="747935" cy="276999"/>
+          </a:xfrm>
+          <a:prstGeom prst="rect">
+            <a:avLst/>
+          </a:prstGeom>
+          <a:solidFill>
+            <a:srgbClr val="C00000"/>
+          </a:solidFill>
+        </p:spPr>
+        <p:style>
+          <a:lnRef idx="3">
+            <a:schemeClr val="lt1"/>
+          </a:lnRef>
+          <a:fillRef idx="1">
+            <a:schemeClr val="accent1"/>
+          </a:fillRef>
+          <a:effectRef idx="1">
+            <a:schemeClr val="accent1"/>
+          </a:effectRef>
+          <a:fontRef idx="minor">
+            <a:schemeClr val="lt1"/>
+          </a:fontRef>
+        </p:style>
+        <p:txBody>
+          <a:bodyPr wrap="square" rtlCol="0">
+            <a:spAutoFit/>
+          </a:bodyPr>
+          <a:lstStyle/>
+          <a:p>
+            <a:pPr algn="ctr"/>
+            <a:r>
+              <a:rPr lang="cs-CZ" sz="1200" dirty="0"/>
+              <a:t>Produkt</a:t>
+            </a:r>
+            <a:endParaRPr lang="en-GB" sz="1200" dirty="0"/>
+          </a:p>
+        </p:txBody>
+      </p:sp>
+      <p:sp>
+        <p:nvSpPr>
+          <p:cNvPr id="61" name="TextBox 60">
+            <a:extLst>
+              <a:ext uri="{FF2B5EF4-FFF2-40B4-BE49-F238E27FC236}">
+                <a16:creationId xmlns:a16="http://schemas.microsoft.com/office/drawing/2014/main" id="{AF755A35-688F-C340-9A68-7F9AA6087CB7}"/>
+              </a:ext>
+            </a:extLst>
+          </p:cNvPr>
+          <p:cNvSpPr txBox="1"/>
+          <p:nvPr/>
+        </p:nvSpPr>
+        <p:spPr>
+          <a:xfrm>
+            <a:off x="796032" y="5827468"/>
+            <a:ext cx="747935" cy="276999"/>
+          </a:xfrm>
+          <a:prstGeom prst="rect">
+            <a:avLst/>
+          </a:prstGeom>
+          <a:solidFill>
+            <a:srgbClr val="C00000"/>
+          </a:solidFill>
+        </p:spPr>
+        <p:style>
+          <a:lnRef idx="3">
+            <a:schemeClr val="lt1"/>
+          </a:lnRef>
+          <a:fillRef idx="1">
+            <a:schemeClr val="accent1"/>
+          </a:fillRef>
+          <a:effectRef idx="1">
+            <a:schemeClr val="accent1"/>
+          </a:effectRef>
+          <a:fontRef idx="minor">
+            <a:schemeClr val="lt1"/>
+          </a:fontRef>
+        </p:style>
+        <p:txBody>
+          <a:bodyPr wrap="square" rtlCol="0">
+            <a:spAutoFit/>
+          </a:bodyPr>
+          <a:lstStyle/>
+          <a:p>
+            <a:pPr algn="ctr"/>
+            <a:r>
+              <a:rPr lang="cs-CZ" sz="1200" dirty="0"/>
+              <a:t>Produkt</a:t>
+            </a:r>
+            <a:endParaRPr lang="en-GB" sz="1200" dirty="0"/>
+          </a:p>
+        </p:txBody>
+      </p:sp>
+      <p:sp>
+        <p:nvSpPr>
+          <p:cNvPr id="62" name="TextBox 61">
+            <a:extLst>
+              <a:ext uri="{FF2B5EF4-FFF2-40B4-BE49-F238E27FC236}">
+                <a16:creationId xmlns:a16="http://schemas.microsoft.com/office/drawing/2014/main" id="{FD987851-E38C-CED3-97B5-D048ED978E23}"/>
+              </a:ext>
+            </a:extLst>
+          </p:cNvPr>
+          <p:cNvSpPr txBox="1"/>
+          <p:nvPr/>
+        </p:nvSpPr>
+        <p:spPr>
+          <a:xfrm>
+            <a:off x="5278854" y="3861551"/>
+            <a:ext cx="747935" cy="276999"/>
+          </a:xfrm>
+          <a:prstGeom prst="rect">
+            <a:avLst/>
+          </a:prstGeom>
+          <a:solidFill>
+            <a:srgbClr val="C00000"/>
+          </a:solidFill>
+        </p:spPr>
+        <p:style>
+          <a:lnRef idx="3">
+            <a:schemeClr val="lt1"/>
+          </a:lnRef>
+          <a:fillRef idx="1">
+            <a:schemeClr val="accent1"/>
+          </a:fillRef>
+          <a:effectRef idx="1">
+            <a:schemeClr val="accent1"/>
+          </a:effectRef>
+          <a:fontRef idx="minor">
+            <a:schemeClr val="lt1"/>
+          </a:fontRef>
+        </p:style>
+        <p:txBody>
+          <a:bodyPr wrap="square" rtlCol="0">
+            <a:spAutoFit/>
+          </a:bodyPr>
+          <a:lstStyle/>
+          <a:p>
+            <a:pPr algn="ctr"/>
+            <a:r>
+              <a:rPr lang="cs-CZ" sz="1200" dirty="0"/>
+              <a:t>Produkt</a:t>
+            </a:r>
+            <a:endParaRPr lang="en-GB" sz="1200" dirty="0"/>
+          </a:p>
+        </p:txBody>
+      </p:sp>
+      <p:sp>
+        <p:nvSpPr>
+          <p:cNvPr id="63" name="TextBox 62">
+            <a:extLst>
+              <a:ext uri="{FF2B5EF4-FFF2-40B4-BE49-F238E27FC236}">
+                <a16:creationId xmlns:a16="http://schemas.microsoft.com/office/drawing/2014/main" id="{9D9BAC82-839E-8E59-DFF0-69E6E5A23A6E}"/>
+              </a:ext>
+            </a:extLst>
+          </p:cNvPr>
+          <p:cNvSpPr txBox="1"/>
+          <p:nvPr/>
+        </p:nvSpPr>
+        <p:spPr>
+          <a:xfrm>
+            <a:off x="7455566" y="5827995"/>
+            <a:ext cx="747935" cy="276999"/>
+          </a:xfrm>
+          <a:prstGeom prst="rect">
+            <a:avLst/>
+          </a:prstGeom>
+          <a:solidFill>
+            <a:srgbClr val="C00000"/>
+          </a:solidFill>
+        </p:spPr>
+        <p:style>
+          <a:lnRef idx="3">
+            <a:schemeClr val="lt1"/>
+          </a:lnRef>
+          <a:fillRef idx="1">
+            <a:schemeClr val="accent1"/>
+          </a:fillRef>
+          <a:effectRef idx="1">
+            <a:schemeClr val="accent1"/>
+          </a:effectRef>
+          <a:fontRef idx="minor">
+            <a:schemeClr val="lt1"/>
+          </a:fontRef>
+        </p:style>
+        <p:txBody>
+          <a:bodyPr wrap="square" rtlCol="0">
+            <a:spAutoFit/>
+          </a:bodyPr>
+          <a:lstStyle/>
+          <a:p>
+            <a:pPr algn="ctr"/>
+            <a:r>
+              <a:rPr lang="cs-CZ" sz="1200" dirty="0"/>
+              <a:t>Produkt</a:t>
+            </a:r>
+            <a:endParaRPr lang="en-GB" sz="1200" dirty="0"/>
+          </a:p>
+        </p:txBody>
+      </p:sp>
+    </p:spTree>
+    <p:extLst>
+      <p:ext uri="{BB962C8B-B14F-4D97-AF65-F5344CB8AC3E}">
+        <p14:creationId xmlns:p14="http://schemas.microsoft.com/office/powerpoint/2010/main" val="1864091842"/>
       </p:ext>
     </p:extLst>
   </p:cSld>

--- a/Grafové databáze – přehled a srovnání.pptx
+++ b/Grafové databáze – přehled a srovnání.pptx
@@ -5,21 +5,22 @@
     <p:sldMasterId id="2147483672" r:id="rId1"/>
   </p:sldMasterIdLst>
   <p:notesMasterIdLst>
-    <p:notesMasterId r:id="rId14"/>
+    <p:notesMasterId r:id="rId15"/>
   </p:notesMasterIdLst>
   <p:sldIdLst>
     <p:sldId id="258" r:id="rId2"/>
     <p:sldId id="259" r:id="rId3"/>
-    <p:sldId id="262" r:id="rId4"/>
-    <p:sldId id="263" r:id="rId5"/>
-    <p:sldId id="264" r:id="rId6"/>
-    <p:sldId id="265" r:id="rId7"/>
-    <p:sldId id="266" r:id="rId8"/>
-    <p:sldId id="267" r:id="rId9"/>
-    <p:sldId id="270" r:id="rId10"/>
-    <p:sldId id="268" r:id="rId11"/>
-    <p:sldId id="269" r:id="rId12"/>
-    <p:sldId id="260" r:id="rId13"/>
+    <p:sldId id="271" r:id="rId4"/>
+    <p:sldId id="262" r:id="rId5"/>
+    <p:sldId id="263" r:id="rId6"/>
+    <p:sldId id="264" r:id="rId7"/>
+    <p:sldId id="265" r:id="rId8"/>
+    <p:sldId id="266" r:id="rId9"/>
+    <p:sldId id="267" r:id="rId10"/>
+    <p:sldId id="270" r:id="rId11"/>
+    <p:sldId id="268" r:id="rId12"/>
+    <p:sldId id="269" r:id="rId13"/>
+    <p:sldId id="260" r:id="rId14"/>
   </p:sldIdLst>
   <p:sldSz cx="8999538" cy="6840538"/>
   <p:notesSz cx="6858000" cy="9144000"/>
@@ -219,7 +220,7 @@
           <a:p>
             <a:fld id="{17DC1901-92BB-4FDD-BA03-8B5D36861ACA}" type="datetimeFigureOut">
               <a:rPr lang="cs-CZ" smtClean="0"/>
-              <a:t>09.03.2024</a:t>
+              <a:t>19.03.2024</a:t>
             </a:fld>
             <a:endParaRPr lang="cs-CZ"/>
           </a:p>
@@ -570,6 +571,114 @@
 </p:notes>
 </file>
 
+<file path=ppt/notesSlides/notesSlide10.xml><?xml version="1.0" encoding="utf-8"?>
+<p:notes xmlns:a="http://schemas.openxmlformats.org/drawingml/2006/main" xmlns:r="http://schemas.openxmlformats.org/officeDocument/2006/relationships" xmlns:p="http://schemas.openxmlformats.org/presentationml/2006/main">
+  <p:cSld>
+    <p:spTree>
+      <p:nvGrpSpPr>
+        <p:cNvPr id="1" name="">
+          <a:extLst>
+            <a:ext uri="{FF2B5EF4-FFF2-40B4-BE49-F238E27FC236}">
+              <a16:creationId xmlns:a16="http://schemas.microsoft.com/office/drawing/2014/main" id="{07906907-2D51-CCF4-8B9B-2D50FC718C19}"/>
+            </a:ext>
+          </a:extLst>
+        </p:cNvPr>
+        <p:cNvGrpSpPr/>
+        <p:nvPr/>
+      </p:nvGrpSpPr>
+      <p:grpSpPr>
+        <a:xfrm>
+          <a:off x="0" y="0"/>
+          <a:ext cx="0" cy="0"/>
+          <a:chOff x="0" y="0"/>
+          <a:chExt cx="0" cy="0"/>
+        </a:xfrm>
+      </p:grpSpPr>
+      <p:sp>
+        <p:nvSpPr>
+          <p:cNvPr id="2" name="Zástupný symbol pro obrázek snímku 1">
+            <a:extLst>
+              <a:ext uri="{FF2B5EF4-FFF2-40B4-BE49-F238E27FC236}">
+                <a16:creationId xmlns:a16="http://schemas.microsoft.com/office/drawing/2014/main" id="{F7C0F50A-D6B6-FB62-21E8-3A94EB939486}"/>
+              </a:ext>
+            </a:extLst>
+          </p:cNvPr>
+          <p:cNvSpPr>
+            <a:spLocks noGrp="1" noRot="1" noChangeAspect="1"/>
+          </p:cNvSpPr>
+          <p:nvPr>
+            <p:ph type="sldImg"/>
+          </p:nvPr>
+        </p:nvSpPr>
+        <p:spPr/>
+      </p:sp>
+      <p:sp>
+        <p:nvSpPr>
+          <p:cNvPr id="3" name="Zástupný symbol pro poznámky 2">
+            <a:extLst>
+              <a:ext uri="{FF2B5EF4-FFF2-40B4-BE49-F238E27FC236}">
+                <a16:creationId xmlns:a16="http://schemas.microsoft.com/office/drawing/2014/main" id="{036B4BD9-3BFE-174D-6324-21B7F89D7C95}"/>
+              </a:ext>
+            </a:extLst>
+          </p:cNvPr>
+          <p:cNvSpPr>
+            <a:spLocks noGrp="1"/>
+          </p:cNvSpPr>
+          <p:nvPr>
+            <p:ph type="body" idx="1"/>
+          </p:nvPr>
+        </p:nvSpPr>
+        <p:spPr/>
+        <p:txBody>
+          <a:bodyPr/>
+          <a:lstStyle/>
+          <a:p>
+            <a:endParaRPr lang="cs-CZ"/>
+          </a:p>
+        </p:txBody>
+      </p:sp>
+      <p:sp>
+        <p:nvSpPr>
+          <p:cNvPr id="4" name="Zástupný symbol pro číslo snímku 3">
+            <a:extLst>
+              <a:ext uri="{FF2B5EF4-FFF2-40B4-BE49-F238E27FC236}">
+                <a16:creationId xmlns:a16="http://schemas.microsoft.com/office/drawing/2014/main" id="{EEAE2BFE-1A93-5A5B-4C88-8BEF8372155B}"/>
+              </a:ext>
+            </a:extLst>
+          </p:cNvPr>
+          <p:cNvSpPr>
+            <a:spLocks noGrp="1"/>
+          </p:cNvSpPr>
+          <p:nvPr>
+            <p:ph type="sldNum" sz="quarter" idx="10"/>
+          </p:nvPr>
+        </p:nvSpPr>
+        <p:spPr/>
+        <p:txBody>
+          <a:bodyPr/>
+          <a:lstStyle/>
+          <a:p>
+            <a:fld id="{228EE4EC-FC1D-4A5C-A5BA-DA124659C1D1}" type="slidenum">
+              <a:rPr lang="cs-CZ" smtClean="0"/>
+              <a:t>13</a:t>
+            </a:fld>
+            <a:endParaRPr lang="cs-CZ"/>
+          </a:p>
+        </p:txBody>
+      </p:sp>
+    </p:spTree>
+    <p:extLst>
+      <p:ext uri="{BB962C8B-B14F-4D97-AF65-F5344CB8AC3E}">
+        <p14:creationId xmlns:p14="http://schemas.microsoft.com/office/powerpoint/2010/main" val="2178750102"/>
+      </p:ext>
+    </p:extLst>
+  </p:cSld>
+  <p:clrMapOvr>
+    <a:masterClrMapping/>
+  </p:clrMapOvr>
+</p:notes>
+</file>
+
 <file path=ppt/notesSlides/notesSlide2.xml><?xml version="1.0" encoding="utf-8"?>
 <p:notes xmlns:a="http://schemas.openxmlformats.org/drawingml/2006/main" xmlns:r="http://schemas.openxmlformats.org/officeDocument/2006/relationships" xmlns:p="http://schemas.openxmlformats.org/presentationml/2006/main">
   <p:cSld>
@@ -614,7 +723,7 @@
           <a:bodyPr/>
           <a:lstStyle/>
           <a:p>
-            <a:endParaRPr lang="cs-CZ"/>
+            <a:endParaRPr lang="cs-CZ" dirty="0"/>
           </a:p>
         </p:txBody>
       </p:sp>
@@ -743,7 +852,7 @@
           <a:p>
             <a:fld id="{228EE4EC-FC1D-4A5C-A5BA-DA124659C1D1}" type="slidenum">
               <a:rPr lang="cs-CZ" smtClean="0"/>
-              <a:t>3</a:t>
+              <a:t>4</a:t>
             </a:fld>
             <a:endParaRPr lang="cs-CZ"/>
           </a:p>
@@ -851,7 +960,7 @@
           <a:p>
             <a:fld id="{228EE4EC-FC1D-4A5C-A5BA-DA124659C1D1}" type="slidenum">
               <a:rPr lang="cs-CZ" smtClean="0"/>
-              <a:t>4</a:t>
+              <a:t>5</a:t>
             </a:fld>
             <a:endParaRPr lang="cs-CZ"/>
           </a:p>
@@ -959,7 +1068,7 @@
           <a:p>
             <a:fld id="{228EE4EC-FC1D-4A5C-A5BA-DA124659C1D1}" type="slidenum">
               <a:rPr lang="cs-CZ" smtClean="0"/>
-              <a:t>5</a:t>
+              <a:t>6</a:t>
             </a:fld>
             <a:endParaRPr lang="cs-CZ"/>
           </a:p>
@@ -1067,7 +1176,7 @@
           <a:p>
             <a:fld id="{228EE4EC-FC1D-4A5C-A5BA-DA124659C1D1}" type="slidenum">
               <a:rPr lang="cs-CZ" smtClean="0"/>
-              <a:t>6</a:t>
+              <a:t>7</a:t>
             </a:fld>
             <a:endParaRPr lang="cs-CZ"/>
           </a:p>
@@ -1175,7 +1284,7 @@
           <a:p>
             <a:fld id="{228EE4EC-FC1D-4A5C-A5BA-DA124659C1D1}" type="slidenum">
               <a:rPr lang="cs-CZ" smtClean="0"/>
-              <a:t>7</a:t>
+              <a:t>8</a:t>
             </a:fld>
             <a:endParaRPr lang="cs-CZ"/>
           </a:p>
@@ -1195,6 +1304,97 @@
 </file>
 
 <file path=ppt/notesSlides/notesSlide8.xml><?xml version="1.0" encoding="utf-8"?>
+<p:notes xmlns:a="http://schemas.openxmlformats.org/drawingml/2006/main" xmlns:r="http://schemas.openxmlformats.org/officeDocument/2006/relationships" xmlns:p="http://schemas.openxmlformats.org/presentationml/2006/main">
+  <p:cSld>
+    <p:spTree>
+      <p:nvGrpSpPr>
+        <p:cNvPr id="1" name=""/>
+        <p:cNvGrpSpPr/>
+        <p:nvPr/>
+      </p:nvGrpSpPr>
+      <p:grpSpPr>
+        <a:xfrm>
+          <a:off x="0" y="0"/>
+          <a:ext cx="0" cy="0"/>
+          <a:chOff x="0" y="0"/>
+          <a:chExt cx="0" cy="0"/>
+        </a:xfrm>
+      </p:grpSpPr>
+      <p:sp>
+        <p:nvSpPr>
+          <p:cNvPr id="2" name="Slide Image Placeholder 1"/>
+          <p:cNvSpPr>
+            <a:spLocks noGrp="1" noRot="1" noChangeAspect="1"/>
+          </p:cNvSpPr>
+          <p:nvPr>
+            <p:ph type="sldImg"/>
+          </p:nvPr>
+        </p:nvSpPr>
+        <p:spPr/>
+      </p:sp>
+      <p:sp>
+        <p:nvSpPr>
+          <p:cNvPr id="3" name="Notes Placeholder 2"/>
+          <p:cNvSpPr>
+            <a:spLocks noGrp="1"/>
+          </p:cNvSpPr>
+          <p:nvPr>
+            <p:ph type="body" idx="1"/>
+          </p:nvPr>
+        </p:nvSpPr>
+        <p:spPr/>
+        <p:txBody>
+          <a:bodyPr/>
+          <a:lstStyle/>
+          <a:p>
+            <a:pPr marL="171450" indent="-171450">
+              <a:buFont typeface="Arial" panose="020B0604020202020204" pitchFamily="34" charset="0"/>
+              <a:buChar char="•"/>
+            </a:pPr>
+            <a:r>
+              <a:rPr lang="cs-CZ" dirty="0"/>
+              <a:t>Pro přehlednost některé vlastnosti vynechány</a:t>
+            </a:r>
+          </a:p>
+        </p:txBody>
+      </p:sp>
+      <p:sp>
+        <p:nvSpPr>
+          <p:cNvPr id="4" name="Slide Number Placeholder 3"/>
+          <p:cNvSpPr>
+            <a:spLocks noGrp="1"/>
+          </p:cNvSpPr>
+          <p:nvPr>
+            <p:ph type="sldNum" sz="quarter" idx="5"/>
+          </p:nvPr>
+        </p:nvSpPr>
+        <p:spPr/>
+        <p:txBody>
+          <a:bodyPr/>
+          <a:lstStyle/>
+          <a:p>
+            <a:fld id="{228EE4EC-FC1D-4A5C-A5BA-DA124659C1D1}" type="slidenum">
+              <a:rPr lang="cs-CZ" smtClean="0"/>
+              <a:t>10</a:t>
+            </a:fld>
+            <a:endParaRPr lang="cs-CZ"/>
+          </a:p>
+        </p:txBody>
+      </p:sp>
+    </p:spTree>
+    <p:extLst>
+      <p:ext uri="{BB962C8B-B14F-4D97-AF65-F5344CB8AC3E}">
+        <p14:creationId xmlns:p14="http://schemas.microsoft.com/office/powerpoint/2010/main" val="103115371"/>
+      </p:ext>
+    </p:extLst>
+  </p:cSld>
+  <p:clrMapOvr>
+    <a:masterClrMapping/>
+  </p:clrMapOvr>
+</p:notes>
+</file>
+
+<file path=ppt/notesSlides/notesSlide9.xml><?xml version="1.0" encoding="utf-8"?>
 <p:notes xmlns:a="http://schemas.openxmlformats.org/drawingml/2006/main" xmlns:r="http://schemas.openxmlformats.org/officeDocument/2006/relationships" xmlns:p="http://schemas.openxmlformats.org/presentationml/2006/main">
   <p:cSld>
     <p:spTree>
@@ -1283,7 +1483,7 @@
           <a:p>
             <a:fld id="{228EE4EC-FC1D-4A5C-A5BA-DA124659C1D1}" type="slidenum">
               <a:rPr lang="cs-CZ" smtClean="0"/>
-              <a:t>10</a:t>
+              <a:t>11</a:t>
             </a:fld>
             <a:endParaRPr lang="cs-CZ"/>
           </a:p>
@@ -1293,114 +1493,6 @@
     <p:extLst>
       <p:ext uri="{BB962C8B-B14F-4D97-AF65-F5344CB8AC3E}">
         <p14:creationId xmlns:p14="http://schemas.microsoft.com/office/powerpoint/2010/main" val="2389698998"/>
-      </p:ext>
-    </p:extLst>
-  </p:cSld>
-  <p:clrMapOvr>
-    <a:masterClrMapping/>
-  </p:clrMapOvr>
-</p:notes>
-</file>
-
-<file path=ppt/notesSlides/notesSlide9.xml><?xml version="1.0" encoding="utf-8"?>
-<p:notes xmlns:a="http://schemas.openxmlformats.org/drawingml/2006/main" xmlns:r="http://schemas.openxmlformats.org/officeDocument/2006/relationships" xmlns:p="http://schemas.openxmlformats.org/presentationml/2006/main">
-  <p:cSld>
-    <p:spTree>
-      <p:nvGrpSpPr>
-        <p:cNvPr id="1" name="">
-          <a:extLst>
-            <a:ext uri="{FF2B5EF4-FFF2-40B4-BE49-F238E27FC236}">
-              <a16:creationId xmlns:a16="http://schemas.microsoft.com/office/drawing/2014/main" id="{07906907-2D51-CCF4-8B9B-2D50FC718C19}"/>
-            </a:ext>
-          </a:extLst>
-        </p:cNvPr>
-        <p:cNvGrpSpPr/>
-        <p:nvPr/>
-      </p:nvGrpSpPr>
-      <p:grpSpPr>
-        <a:xfrm>
-          <a:off x="0" y="0"/>
-          <a:ext cx="0" cy="0"/>
-          <a:chOff x="0" y="0"/>
-          <a:chExt cx="0" cy="0"/>
-        </a:xfrm>
-      </p:grpSpPr>
-      <p:sp>
-        <p:nvSpPr>
-          <p:cNvPr id="2" name="Zástupný symbol pro obrázek snímku 1">
-            <a:extLst>
-              <a:ext uri="{FF2B5EF4-FFF2-40B4-BE49-F238E27FC236}">
-                <a16:creationId xmlns:a16="http://schemas.microsoft.com/office/drawing/2014/main" id="{F7C0F50A-D6B6-FB62-21E8-3A94EB939486}"/>
-              </a:ext>
-            </a:extLst>
-          </p:cNvPr>
-          <p:cNvSpPr>
-            <a:spLocks noGrp="1" noRot="1" noChangeAspect="1"/>
-          </p:cNvSpPr>
-          <p:nvPr>
-            <p:ph type="sldImg"/>
-          </p:nvPr>
-        </p:nvSpPr>
-        <p:spPr/>
-      </p:sp>
-      <p:sp>
-        <p:nvSpPr>
-          <p:cNvPr id="3" name="Zástupný symbol pro poznámky 2">
-            <a:extLst>
-              <a:ext uri="{FF2B5EF4-FFF2-40B4-BE49-F238E27FC236}">
-                <a16:creationId xmlns:a16="http://schemas.microsoft.com/office/drawing/2014/main" id="{036B4BD9-3BFE-174D-6324-21B7F89D7C95}"/>
-              </a:ext>
-            </a:extLst>
-          </p:cNvPr>
-          <p:cNvSpPr>
-            <a:spLocks noGrp="1"/>
-          </p:cNvSpPr>
-          <p:nvPr>
-            <p:ph type="body" idx="1"/>
-          </p:nvPr>
-        </p:nvSpPr>
-        <p:spPr/>
-        <p:txBody>
-          <a:bodyPr/>
-          <a:lstStyle/>
-          <a:p>
-            <a:endParaRPr lang="cs-CZ"/>
-          </a:p>
-        </p:txBody>
-      </p:sp>
-      <p:sp>
-        <p:nvSpPr>
-          <p:cNvPr id="4" name="Zástupný symbol pro číslo snímku 3">
-            <a:extLst>
-              <a:ext uri="{FF2B5EF4-FFF2-40B4-BE49-F238E27FC236}">
-                <a16:creationId xmlns:a16="http://schemas.microsoft.com/office/drawing/2014/main" id="{EEAE2BFE-1A93-5A5B-4C88-8BEF8372155B}"/>
-              </a:ext>
-            </a:extLst>
-          </p:cNvPr>
-          <p:cNvSpPr>
-            <a:spLocks noGrp="1"/>
-          </p:cNvSpPr>
-          <p:nvPr>
-            <p:ph type="sldNum" sz="quarter" idx="10"/>
-          </p:nvPr>
-        </p:nvSpPr>
-        <p:spPr/>
-        <p:txBody>
-          <a:bodyPr/>
-          <a:lstStyle/>
-          <a:p>
-            <a:fld id="{228EE4EC-FC1D-4A5C-A5BA-DA124659C1D1}" type="slidenum">
-              <a:rPr lang="cs-CZ" smtClean="0"/>
-              <a:t>12</a:t>
-            </a:fld>
-            <a:endParaRPr lang="cs-CZ"/>
-          </a:p>
-        </p:txBody>
-      </p:sp>
-    </p:spTree>
-    <p:extLst>
-      <p:ext uri="{BB962C8B-B14F-4D97-AF65-F5344CB8AC3E}">
-        <p14:creationId xmlns:p14="http://schemas.microsoft.com/office/powerpoint/2010/main" val="2178750102"/>
       </p:ext>
     </p:extLst>
   </p:cSld>
@@ -3714,6 +3806,1948 @@
 <file path=ppt/slides/slide10.xml><?xml version="1.0" encoding="utf-8"?>
 <p:sld xmlns:a="http://schemas.openxmlformats.org/drawingml/2006/main" xmlns:r="http://schemas.openxmlformats.org/officeDocument/2006/relationships" xmlns:p="http://schemas.openxmlformats.org/presentationml/2006/main">
   <p:cSld>
+    <p:spTree>
+      <p:nvGrpSpPr>
+        <p:cNvPr id="1" name=""/>
+        <p:cNvGrpSpPr/>
+        <p:nvPr/>
+      </p:nvGrpSpPr>
+      <p:grpSpPr>
+        <a:xfrm>
+          <a:off x="0" y="0"/>
+          <a:ext cx="0" cy="0"/>
+          <a:chOff x="0" y="0"/>
+          <a:chExt cx="0" cy="0"/>
+        </a:xfrm>
+      </p:grpSpPr>
+      <p:sp>
+        <p:nvSpPr>
+          <p:cNvPr id="2" name="Title 1">
+            <a:extLst>
+              <a:ext uri="{FF2B5EF4-FFF2-40B4-BE49-F238E27FC236}">
+                <a16:creationId xmlns:a16="http://schemas.microsoft.com/office/drawing/2014/main" id="{29199E41-AB6E-D884-D433-475EA1246AED}"/>
+              </a:ext>
+            </a:extLst>
+          </p:cNvPr>
+          <p:cNvSpPr>
+            <a:spLocks noGrp="1"/>
+          </p:cNvSpPr>
+          <p:nvPr>
+            <p:ph type="title"/>
+          </p:nvPr>
+        </p:nvSpPr>
+        <p:spPr/>
+        <p:txBody>
+          <a:bodyPr/>
+          <a:lstStyle/>
+          <a:p>
+            <a:r>
+              <a:rPr lang="cs-CZ" dirty="0"/>
+              <a:t>Příklad uchovávaného grafu</a:t>
+            </a:r>
+            <a:endParaRPr lang="en-GB" dirty="0"/>
+          </a:p>
+        </p:txBody>
+      </p:sp>
+      <p:sp>
+        <p:nvSpPr>
+          <p:cNvPr id="4" name="Footer Placeholder 3">
+            <a:extLst>
+              <a:ext uri="{FF2B5EF4-FFF2-40B4-BE49-F238E27FC236}">
+                <a16:creationId xmlns:a16="http://schemas.microsoft.com/office/drawing/2014/main" id="{D2B936A4-738B-214C-AEF5-613D37761CE4}"/>
+              </a:ext>
+            </a:extLst>
+          </p:cNvPr>
+          <p:cNvSpPr>
+            <a:spLocks noGrp="1"/>
+          </p:cNvSpPr>
+          <p:nvPr>
+            <p:ph type="ftr" sz="quarter" idx="11"/>
+          </p:nvPr>
+        </p:nvSpPr>
+        <p:spPr/>
+        <p:txBody>
+          <a:bodyPr/>
+          <a:lstStyle/>
+          <a:p>
+            <a:r>
+              <a:rPr lang="cs-CZ" dirty="0"/>
+              <a:t>Jan Gaja, 21.3.2024, Katedra informatiky, Přírodovědecká fakulta, Univerzita Palackého v Olomouci</a:t>
+            </a:r>
+          </a:p>
+        </p:txBody>
+      </p:sp>
+      <p:sp>
+        <p:nvSpPr>
+          <p:cNvPr id="6" name="Flowchart: Connector 5">
+            <a:extLst>
+              <a:ext uri="{FF2B5EF4-FFF2-40B4-BE49-F238E27FC236}">
+                <a16:creationId xmlns:a16="http://schemas.microsoft.com/office/drawing/2014/main" id="{FCB0BF4C-8595-CDBE-BF1D-9E85C4B7E101}"/>
+              </a:ext>
+            </a:extLst>
+          </p:cNvPr>
+          <p:cNvSpPr/>
+          <p:nvPr/>
+        </p:nvSpPr>
+        <p:spPr>
+          <a:xfrm>
+            <a:off x="720000" y="2520269"/>
+            <a:ext cx="900000" cy="900000"/>
+          </a:xfrm>
+          <a:prstGeom prst="flowChartConnector">
+            <a:avLst/>
+          </a:prstGeom>
+          <a:solidFill>
+            <a:schemeClr val="bg1"/>
+          </a:solidFill>
+          <a:ln w="19050">
+            <a:solidFill>
+              <a:schemeClr val="accent1"/>
+            </a:solidFill>
+          </a:ln>
+        </p:spPr>
+        <p:style>
+          <a:lnRef idx="2">
+            <a:schemeClr val="accent1">
+              <a:shade val="15000"/>
+            </a:schemeClr>
+          </a:lnRef>
+          <a:fillRef idx="1">
+            <a:schemeClr val="accent1"/>
+          </a:fillRef>
+          <a:effectRef idx="0">
+            <a:schemeClr val="accent1"/>
+          </a:effectRef>
+          <a:fontRef idx="minor">
+            <a:schemeClr val="lt1"/>
+          </a:fontRef>
+        </p:style>
+        <p:txBody>
+          <a:bodyPr rtlCol="0" anchor="ctr"/>
+          <a:lstStyle/>
+          <a:p>
+            <a:pPr algn="ctr"/>
+            <a:r>
+              <a:rPr lang="cs-CZ" sz="1400" dirty="0">
+                <a:solidFill>
+                  <a:schemeClr val="tx1"/>
+                </a:solidFill>
+              </a:rPr>
+              <a:t>Petr</a:t>
+            </a:r>
+          </a:p>
+          <a:p>
+            <a:pPr algn="ctr"/>
+            <a:r>
+              <a:rPr lang="cs-CZ" sz="1400" dirty="0">
+                <a:solidFill>
+                  <a:schemeClr val="tx1"/>
+                </a:solidFill>
+              </a:rPr>
+              <a:t>Holý</a:t>
+            </a:r>
+          </a:p>
+        </p:txBody>
+      </p:sp>
+      <p:sp>
+        <p:nvSpPr>
+          <p:cNvPr id="7" name="Flowchart: Connector 6">
+            <a:extLst>
+              <a:ext uri="{FF2B5EF4-FFF2-40B4-BE49-F238E27FC236}">
+                <a16:creationId xmlns:a16="http://schemas.microsoft.com/office/drawing/2014/main" id="{6C2FF267-BC39-CB62-AD74-4B0B34C9E4D0}"/>
+              </a:ext>
+            </a:extLst>
+          </p:cNvPr>
+          <p:cNvSpPr/>
+          <p:nvPr/>
+        </p:nvSpPr>
+        <p:spPr>
+          <a:xfrm>
+            <a:off x="7379538" y="2520269"/>
+            <a:ext cx="900000" cy="900000"/>
+          </a:xfrm>
+          <a:prstGeom prst="flowChartConnector">
+            <a:avLst/>
+          </a:prstGeom>
+          <a:solidFill>
+            <a:schemeClr val="bg1"/>
+          </a:solidFill>
+          <a:ln w="19050">
+            <a:solidFill>
+              <a:schemeClr val="accent1"/>
+            </a:solidFill>
+          </a:ln>
+        </p:spPr>
+        <p:style>
+          <a:lnRef idx="2">
+            <a:schemeClr val="accent1">
+              <a:shade val="15000"/>
+            </a:schemeClr>
+          </a:lnRef>
+          <a:fillRef idx="1">
+            <a:schemeClr val="accent1"/>
+          </a:fillRef>
+          <a:effectRef idx="0">
+            <a:schemeClr val="accent1"/>
+          </a:effectRef>
+          <a:fontRef idx="minor">
+            <a:schemeClr val="lt1"/>
+          </a:fontRef>
+        </p:style>
+        <p:txBody>
+          <a:bodyPr rtlCol="0" anchor="ctr"/>
+          <a:lstStyle/>
+          <a:p>
+            <a:pPr algn="ctr"/>
+            <a:r>
+              <a:rPr lang="cs-CZ" sz="1400" dirty="0">
+                <a:solidFill>
+                  <a:schemeClr val="tx1"/>
+                </a:solidFill>
+              </a:rPr>
+              <a:t>Petr</a:t>
+            </a:r>
+          </a:p>
+          <a:p>
+            <a:pPr algn="ctr"/>
+            <a:r>
+              <a:rPr lang="cs-CZ" sz="1400" dirty="0">
+                <a:solidFill>
+                  <a:schemeClr val="tx1"/>
+                </a:solidFill>
+              </a:rPr>
+              <a:t>Novák</a:t>
+            </a:r>
+          </a:p>
+        </p:txBody>
+      </p:sp>
+      <p:sp>
+        <p:nvSpPr>
+          <p:cNvPr id="8" name="Flowchart: Connector 7">
+            <a:extLst>
+              <a:ext uri="{FF2B5EF4-FFF2-40B4-BE49-F238E27FC236}">
+                <a16:creationId xmlns:a16="http://schemas.microsoft.com/office/drawing/2014/main" id="{4251F369-8F48-6573-3F88-B1A1A971D28A}"/>
+              </a:ext>
+            </a:extLst>
+          </p:cNvPr>
+          <p:cNvSpPr/>
+          <p:nvPr/>
+        </p:nvSpPr>
+        <p:spPr>
+          <a:xfrm>
+            <a:off x="3114371" y="5109393"/>
+            <a:ext cx="900000" cy="900000"/>
+          </a:xfrm>
+          <a:prstGeom prst="flowChartConnector">
+            <a:avLst/>
+          </a:prstGeom>
+          <a:solidFill>
+            <a:schemeClr val="bg1"/>
+          </a:solidFill>
+          <a:ln w="19050">
+            <a:solidFill>
+              <a:schemeClr val="accent1"/>
+            </a:solidFill>
+          </a:ln>
+        </p:spPr>
+        <p:style>
+          <a:lnRef idx="2">
+            <a:schemeClr val="accent1">
+              <a:shade val="15000"/>
+            </a:schemeClr>
+          </a:lnRef>
+          <a:fillRef idx="1">
+            <a:schemeClr val="accent1"/>
+          </a:fillRef>
+          <a:effectRef idx="0">
+            <a:schemeClr val="accent1"/>
+          </a:effectRef>
+          <a:fontRef idx="minor">
+            <a:schemeClr val="lt1"/>
+          </a:fontRef>
+        </p:style>
+        <p:txBody>
+          <a:bodyPr rtlCol="0" anchor="ctr"/>
+          <a:lstStyle/>
+          <a:p>
+            <a:pPr algn="ctr"/>
+            <a:r>
+              <a:rPr lang="cs-CZ" sz="1400" dirty="0">
+                <a:solidFill>
+                  <a:schemeClr val="tx1"/>
+                </a:solidFill>
+              </a:rPr>
+              <a:t>Jiří</a:t>
+            </a:r>
+          </a:p>
+          <a:p>
+            <a:pPr algn="ctr"/>
+            <a:r>
+              <a:rPr lang="cs-CZ" sz="1400" dirty="0">
+                <a:solidFill>
+                  <a:schemeClr val="tx1"/>
+                </a:solidFill>
+              </a:rPr>
+              <a:t>Horák</a:t>
+            </a:r>
+          </a:p>
+        </p:txBody>
+      </p:sp>
+      <p:sp>
+        <p:nvSpPr>
+          <p:cNvPr id="9" name="Flowchart: Connector 8">
+            <a:extLst>
+              <a:ext uri="{FF2B5EF4-FFF2-40B4-BE49-F238E27FC236}">
+                <a16:creationId xmlns:a16="http://schemas.microsoft.com/office/drawing/2014/main" id="{D1690ABC-8001-474D-9E93-0B97AAC3DFEC}"/>
+              </a:ext>
+            </a:extLst>
+          </p:cNvPr>
+          <p:cNvSpPr/>
+          <p:nvPr/>
+        </p:nvSpPr>
+        <p:spPr>
+          <a:xfrm>
+            <a:off x="3672919" y="2502174"/>
+            <a:ext cx="900000" cy="900000"/>
+          </a:xfrm>
+          <a:prstGeom prst="flowChartConnector">
+            <a:avLst/>
+          </a:prstGeom>
+          <a:solidFill>
+            <a:schemeClr val="bg1"/>
+          </a:solidFill>
+          <a:ln w="19050">
+            <a:solidFill>
+              <a:srgbClr val="C00000"/>
+            </a:solidFill>
+          </a:ln>
+        </p:spPr>
+        <p:style>
+          <a:lnRef idx="2">
+            <a:schemeClr val="accent1">
+              <a:shade val="15000"/>
+            </a:schemeClr>
+          </a:lnRef>
+          <a:fillRef idx="1">
+            <a:schemeClr val="accent1"/>
+          </a:fillRef>
+          <a:effectRef idx="0">
+            <a:schemeClr val="accent1"/>
+          </a:effectRef>
+          <a:fontRef idx="minor">
+            <a:schemeClr val="lt1"/>
+          </a:fontRef>
+        </p:style>
+        <p:txBody>
+          <a:bodyPr rtlCol="0" anchor="ctr"/>
+          <a:lstStyle/>
+          <a:p>
+            <a:pPr algn="ctr"/>
+            <a:r>
+              <a:rPr lang="cs-CZ" sz="1400" dirty="0">
+                <a:solidFill>
+                  <a:schemeClr val="tx1"/>
+                </a:solidFill>
+              </a:rPr>
+              <a:t>Máslo</a:t>
+            </a:r>
+            <a:endParaRPr lang="en-GB" sz="1400" dirty="0">
+              <a:solidFill>
+                <a:schemeClr val="tx1"/>
+              </a:solidFill>
+            </a:endParaRPr>
+          </a:p>
+        </p:txBody>
+      </p:sp>
+      <p:sp>
+        <p:nvSpPr>
+          <p:cNvPr id="10" name="Flowchart: Connector 9">
+            <a:extLst>
+              <a:ext uri="{FF2B5EF4-FFF2-40B4-BE49-F238E27FC236}">
+                <a16:creationId xmlns:a16="http://schemas.microsoft.com/office/drawing/2014/main" id="{8A19F733-B1A1-B863-ABA0-994F981EDE15}"/>
+              </a:ext>
+            </a:extLst>
+          </p:cNvPr>
+          <p:cNvSpPr/>
+          <p:nvPr/>
+        </p:nvSpPr>
+        <p:spPr>
+          <a:xfrm>
+            <a:off x="5203902" y="3959377"/>
+            <a:ext cx="900000" cy="900000"/>
+          </a:xfrm>
+          <a:prstGeom prst="flowChartConnector">
+            <a:avLst/>
+          </a:prstGeom>
+          <a:solidFill>
+            <a:schemeClr val="bg1"/>
+          </a:solidFill>
+          <a:ln w="19050">
+            <a:solidFill>
+              <a:srgbClr val="C00000"/>
+            </a:solidFill>
+          </a:ln>
+        </p:spPr>
+        <p:style>
+          <a:lnRef idx="2">
+            <a:schemeClr val="accent1">
+              <a:shade val="15000"/>
+            </a:schemeClr>
+          </a:lnRef>
+          <a:fillRef idx="1">
+            <a:schemeClr val="accent1"/>
+          </a:fillRef>
+          <a:effectRef idx="0">
+            <a:schemeClr val="accent1"/>
+          </a:effectRef>
+          <a:fontRef idx="minor">
+            <a:schemeClr val="lt1"/>
+          </a:fontRef>
+        </p:style>
+        <p:txBody>
+          <a:bodyPr rtlCol="0" anchor="ctr"/>
+          <a:lstStyle/>
+          <a:p>
+            <a:pPr algn="ctr"/>
+            <a:r>
+              <a:rPr lang="cs-CZ" sz="1400" dirty="0">
+                <a:solidFill>
+                  <a:schemeClr val="tx1"/>
+                </a:solidFill>
+              </a:rPr>
+              <a:t>Sýr</a:t>
+            </a:r>
+            <a:endParaRPr lang="en-GB" sz="1400" dirty="0">
+              <a:solidFill>
+                <a:schemeClr val="tx1"/>
+              </a:solidFill>
+            </a:endParaRPr>
+          </a:p>
+        </p:txBody>
+      </p:sp>
+      <p:sp>
+        <p:nvSpPr>
+          <p:cNvPr id="11" name="Flowchart: Connector 10">
+            <a:extLst>
+              <a:ext uri="{FF2B5EF4-FFF2-40B4-BE49-F238E27FC236}">
+                <a16:creationId xmlns:a16="http://schemas.microsoft.com/office/drawing/2014/main" id="{0CB1633D-D361-E2BE-2D9D-719231380C1E}"/>
+              </a:ext>
+            </a:extLst>
+          </p:cNvPr>
+          <p:cNvSpPr/>
+          <p:nvPr/>
+        </p:nvSpPr>
+        <p:spPr>
+          <a:xfrm>
+            <a:off x="720000" y="5072563"/>
+            <a:ext cx="900000" cy="900000"/>
+          </a:xfrm>
+          <a:prstGeom prst="flowChartConnector">
+            <a:avLst/>
+          </a:prstGeom>
+          <a:solidFill>
+            <a:schemeClr val="bg1"/>
+          </a:solidFill>
+          <a:ln w="19050">
+            <a:solidFill>
+              <a:srgbClr val="C00000"/>
+            </a:solidFill>
+          </a:ln>
+        </p:spPr>
+        <p:style>
+          <a:lnRef idx="2">
+            <a:schemeClr val="accent1">
+              <a:shade val="15000"/>
+            </a:schemeClr>
+          </a:lnRef>
+          <a:fillRef idx="1">
+            <a:schemeClr val="accent1"/>
+          </a:fillRef>
+          <a:effectRef idx="0">
+            <a:schemeClr val="accent1"/>
+          </a:effectRef>
+          <a:fontRef idx="minor">
+            <a:schemeClr val="lt1"/>
+          </a:fontRef>
+        </p:style>
+        <p:txBody>
+          <a:bodyPr rtlCol="0" anchor="ctr"/>
+          <a:lstStyle/>
+          <a:p>
+            <a:pPr algn="ctr"/>
+            <a:r>
+              <a:rPr lang="cs-CZ" sz="1400" dirty="0">
+                <a:solidFill>
+                  <a:schemeClr val="tx1"/>
+                </a:solidFill>
+              </a:rPr>
+              <a:t>Chléb</a:t>
+            </a:r>
+            <a:endParaRPr lang="en-GB" sz="1400" dirty="0">
+              <a:solidFill>
+                <a:schemeClr val="tx1"/>
+              </a:solidFill>
+            </a:endParaRPr>
+          </a:p>
+        </p:txBody>
+      </p:sp>
+      <p:sp>
+        <p:nvSpPr>
+          <p:cNvPr id="12" name="Flowchart: Connector 11">
+            <a:extLst>
+              <a:ext uri="{FF2B5EF4-FFF2-40B4-BE49-F238E27FC236}">
+                <a16:creationId xmlns:a16="http://schemas.microsoft.com/office/drawing/2014/main" id="{BEE01C27-7DA7-980D-171A-20094A0C0E7C}"/>
+              </a:ext>
+            </a:extLst>
+          </p:cNvPr>
+          <p:cNvSpPr/>
+          <p:nvPr/>
+        </p:nvSpPr>
+        <p:spPr>
+          <a:xfrm>
+            <a:off x="7379538" y="5109393"/>
+            <a:ext cx="900000" cy="900000"/>
+          </a:xfrm>
+          <a:prstGeom prst="flowChartConnector">
+            <a:avLst/>
+          </a:prstGeom>
+          <a:solidFill>
+            <a:schemeClr val="bg1"/>
+          </a:solidFill>
+          <a:ln w="19050">
+            <a:solidFill>
+              <a:srgbClr val="C00000"/>
+            </a:solidFill>
+          </a:ln>
+        </p:spPr>
+        <p:style>
+          <a:lnRef idx="2">
+            <a:schemeClr val="accent1">
+              <a:shade val="15000"/>
+            </a:schemeClr>
+          </a:lnRef>
+          <a:fillRef idx="1">
+            <a:schemeClr val="accent1"/>
+          </a:fillRef>
+          <a:effectRef idx="0">
+            <a:schemeClr val="accent1"/>
+          </a:effectRef>
+          <a:fontRef idx="minor">
+            <a:schemeClr val="lt1"/>
+          </a:fontRef>
+        </p:style>
+        <p:txBody>
+          <a:bodyPr rtlCol="0" anchor="ctr"/>
+          <a:lstStyle/>
+          <a:p>
+            <a:pPr algn="ctr"/>
+            <a:r>
+              <a:rPr lang="cs-CZ" sz="1400" dirty="0">
+                <a:solidFill>
+                  <a:schemeClr val="tx1"/>
+                </a:solidFill>
+              </a:rPr>
+              <a:t>Cukr</a:t>
+            </a:r>
+            <a:endParaRPr lang="en-GB" sz="1400" dirty="0">
+              <a:solidFill>
+                <a:schemeClr val="tx1"/>
+              </a:solidFill>
+            </a:endParaRPr>
+          </a:p>
+        </p:txBody>
+      </p:sp>
+      <p:cxnSp>
+        <p:nvCxnSpPr>
+          <p:cNvPr id="14" name="Straight Arrow Connector 13">
+            <a:extLst>
+              <a:ext uri="{FF2B5EF4-FFF2-40B4-BE49-F238E27FC236}">
+                <a16:creationId xmlns:a16="http://schemas.microsoft.com/office/drawing/2014/main" id="{DB3B0260-7366-5CFF-D792-CB7258F171E9}"/>
+              </a:ext>
+            </a:extLst>
+          </p:cNvPr>
+          <p:cNvCxnSpPr>
+            <a:stCxn id="7" idx="4"/>
+            <a:endCxn id="12" idx="0"/>
+          </p:cNvCxnSpPr>
+          <p:nvPr/>
+        </p:nvCxnSpPr>
+        <p:spPr>
+          <a:xfrm>
+            <a:off x="7829538" y="3420269"/>
+            <a:ext cx="0" cy="1689124"/>
+          </a:xfrm>
+          <a:prstGeom prst="straightConnector1">
+            <a:avLst/>
+          </a:prstGeom>
+          <a:ln w="28575">
+            <a:solidFill>
+              <a:schemeClr val="tx1"/>
+            </a:solidFill>
+            <a:tailEnd type="triangle"/>
+          </a:ln>
+        </p:spPr>
+        <p:style>
+          <a:lnRef idx="1">
+            <a:schemeClr val="accent1"/>
+          </a:lnRef>
+          <a:fillRef idx="0">
+            <a:schemeClr val="accent1"/>
+          </a:fillRef>
+          <a:effectRef idx="0">
+            <a:schemeClr val="accent1"/>
+          </a:effectRef>
+          <a:fontRef idx="minor">
+            <a:schemeClr val="tx1"/>
+          </a:fontRef>
+        </p:style>
+      </p:cxnSp>
+      <p:cxnSp>
+        <p:nvCxnSpPr>
+          <p:cNvPr id="16" name="Straight Arrow Connector 15">
+            <a:extLst>
+              <a:ext uri="{FF2B5EF4-FFF2-40B4-BE49-F238E27FC236}">
+                <a16:creationId xmlns:a16="http://schemas.microsoft.com/office/drawing/2014/main" id="{6CB3BE0C-B678-1E24-B63B-F904703C66E6}"/>
+              </a:ext>
+            </a:extLst>
+          </p:cNvPr>
+          <p:cNvCxnSpPr>
+            <a:stCxn id="7" idx="3"/>
+            <a:endCxn id="10" idx="6"/>
+          </p:cNvCxnSpPr>
+          <p:nvPr/>
+        </p:nvCxnSpPr>
+        <p:spPr>
+          <a:xfrm flipH="1">
+            <a:off x="6103902" y="3288467"/>
+            <a:ext cx="1407438" cy="1120910"/>
+          </a:xfrm>
+          <a:prstGeom prst="straightConnector1">
+            <a:avLst/>
+          </a:prstGeom>
+          <a:ln w="28575">
+            <a:solidFill>
+              <a:schemeClr val="tx1"/>
+            </a:solidFill>
+            <a:tailEnd type="triangle"/>
+          </a:ln>
+        </p:spPr>
+        <p:style>
+          <a:lnRef idx="1">
+            <a:schemeClr val="accent1"/>
+          </a:lnRef>
+          <a:fillRef idx="0">
+            <a:schemeClr val="accent1"/>
+          </a:fillRef>
+          <a:effectRef idx="0">
+            <a:schemeClr val="accent1"/>
+          </a:effectRef>
+          <a:fontRef idx="minor">
+            <a:schemeClr val="tx1"/>
+          </a:fontRef>
+        </p:style>
+      </p:cxnSp>
+      <p:cxnSp>
+        <p:nvCxnSpPr>
+          <p:cNvPr id="20" name="Straight Arrow Connector 19">
+            <a:extLst>
+              <a:ext uri="{FF2B5EF4-FFF2-40B4-BE49-F238E27FC236}">
+                <a16:creationId xmlns:a16="http://schemas.microsoft.com/office/drawing/2014/main" id="{D89CC15C-AECD-C09A-CB0B-891E1CFA606C}"/>
+              </a:ext>
+            </a:extLst>
+          </p:cNvPr>
+          <p:cNvCxnSpPr>
+            <a:cxnSpLocks/>
+            <a:stCxn id="8" idx="7"/>
+            <a:endCxn id="10" idx="3"/>
+          </p:cNvCxnSpPr>
+          <p:nvPr/>
+        </p:nvCxnSpPr>
+        <p:spPr>
+          <a:xfrm flipV="1">
+            <a:off x="3882569" y="4727575"/>
+            <a:ext cx="1453135" cy="513620"/>
+          </a:xfrm>
+          <a:prstGeom prst="straightConnector1">
+            <a:avLst/>
+          </a:prstGeom>
+          <a:ln w="28575">
+            <a:solidFill>
+              <a:schemeClr val="tx1"/>
+            </a:solidFill>
+            <a:tailEnd type="triangle"/>
+          </a:ln>
+        </p:spPr>
+        <p:style>
+          <a:lnRef idx="1">
+            <a:schemeClr val="accent1"/>
+          </a:lnRef>
+          <a:fillRef idx="0">
+            <a:schemeClr val="accent1"/>
+          </a:fillRef>
+          <a:effectRef idx="0">
+            <a:schemeClr val="accent1"/>
+          </a:effectRef>
+          <a:fontRef idx="minor">
+            <a:schemeClr val="tx1"/>
+          </a:fontRef>
+        </p:style>
+      </p:cxnSp>
+      <p:cxnSp>
+        <p:nvCxnSpPr>
+          <p:cNvPr id="23" name="Straight Arrow Connector 22">
+            <a:extLst>
+              <a:ext uri="{FF2B5EF4-FFF2-40B4-BE49-F238E27FC236}">
+                <a16:creationId xmlns:a16="http://schemas.microsoft.com/office/drawing/2014/main" id="{7216CEBD-4453-677B-C40B-C327F809640E}"/>
+              </a:ext>
+            </a:extLst>
+          </p:cNvPr>
+          <p:cNvCxnSpPr>
+            <a:cxnSpLocks/>
+            <a:stCxn id="8" idx="1"/>
+            <a:endCxn id="11" idx="7"/>
+          </p:cNvCxnSpPr>
+          <p:nvPr/>
+        </p:nvCxnSpPr>
+        <p:spPr>
+          <a:xfrm flipH="1" flipV="1">
+            <a:off x="1488198" y="5204365"/>
+            <a:ext cx="1757975" cy="36830"/>
+          </a:xfrm>
+          <a:prstGeom prst="straightConnector1">
+            <a:avLst/>
+          </a:prstGeom>
+          <a:ln w="28575">
+            <a:solidFill>
+              <a:schemeClr val="tx1"/>
+            </a:solidFill>
+            <a:tailEnd type="triangle"/>
+          </a:ln>
+        </p:spPr>
+        <p:style>
+          <a:lnRef idx="1">
+            <a:schemeClr val="accent1"/>
+          </a:lnRef>
+          <a:fillRef idx="0">
+            <a:schemeClr val="accent1"/>
+          </a:fillRef>
+          <a:effectRef idx="0">
+            <a:schemeClr val="accent1"/>
+          </a:effectRef>
+          <a:fontRef idx="minor">
+            <a:schemeClr val="tx1"/>
+          </a:fontRef>
+        </p:style>
+      </p:cxnSp>
+      <p:cxnSp>
+        <p:nvCxnSpPr>
+          <p:cNvPr id="25" name="Straight Arrow Connector 24">
+            <a:extLst>
+              <a:ext uri="{FF2B5EF4-FFF2-40B4-BE49-F238E27FC236}">
+                <a16:creationId xmlns:a16="http://schemas.microsoft.com/office/drawing/2014/main" id="{C6BBD261-7249-BEB5-AB48-33CBC0A005A7}"/>
+              </a:ext>
+            </a:extLst>
+          </p:cNvPr>
+          <p:cNvCxnSpPr>
+            <a:cxnSpLocks/>
+            <a:stCxn id="8" idx="2"/>
+            <a:endCxn id="11" idx="6"/>
+          </p:cNvCxnSpPr>
+          <p:nvPr/>
+        </p:nvCxnSpPr>
+        <p:spPr>
+          <a:xfrm flipH="1" flipV="1">
+            <a:off x="1620000" y="5522563"/>
+            <a:ext cx="1494371" cy="36830"/>
+          </a:xfrm>
+          <a:prstGeom prst="straightConnector1">
+            <a:avLst/>
+          </a:prstGeom>
+          <a:ln w="28575">
+            <a:solidFill>
+              <a:schemeClr val="tx1"/>
+            </a:solidFill>
+            <a:tailEnd type="triangle"/>
+          </a:ln>
+        </p:spPr>
+        <p:style>
+          <a:lnRef idx="1">
+            <a:schemeClr val="accent1"/>
+          </a:lnRef>
+          <a:fillRef idx="0">
+            <a:schemeClr val="accent1"/>
+          </a:fillRef>
+          <a:effectRef idx="0">
+            <a:schemeClr val="accent1"/>
+          </a:effectRef>
+          <a:fontRef idx="minor">
+            <a:schemeClr val="tx1"/>
+          </a:fontRef>
+        </p:style>
+      </p:cxnSp>
+      <p:cxnSp>
+        <p:nvCxnSpPr>
+          <p:cNvPr id="27" name="Straight Arrow Connector 26">
+            <a:extLst>
+              <a:ext uri="{FF2B5EF4-FFF2-40B4-BE49-F238E27FC236}">
+                <a16:creationId xmlns:a16="http://schemas.microsoft.com/office/drawing/2014/main" id="{82D675D4-7D1E-68AE-10EE-2B43A10CBEC8}"/>
+              </a:ext>
+            </a:extLst>
+          </p:cNvPr>
+          <p:cNvCxnSpPr>
+            <a:stCxn id="6" idx="6"/>
+            <a:endCxn id="9" idx="2"/>
+          </p:cNvCxnSpPr>
+          <p:nvPr/>
+        </p:nvCxnSpPr>
+        <p:spPr>
+          <a:xfrm flipV="1">
+            <a:off x="1620000" y="2952174"/>
+            <a:ext cx="2052919" cy="18095"/>
+          </a:xfrm>
+          <a:prstGeom prst="straightConnector1">
+            <a:avLst/>
+          </a:prstGeom>
+          <a:ln w="28575">
+            <a:solidFill>
+              <a:schemeClr val="tx1"/>
+            </a:solidFill>
+            <a:tailEnd type="triangle"/>
+          </a:ln>
+        </p:spPr>
+        <p:style>
+          <a:lnRef idx="1">
+            <a:schemeClr val="accent1"/>
+          </a:lnRef>
+          <a:fillRef idx="0">
+            <a:schemeClr val="accent1"/>
+          </a:fillRef>
+          <a:effectRef idx="0">
+            <a:schemeClr val="accent1"/>
+          </a:effectRef>
+          <a:fontRef idx="minor">
+            <a:schemeClr val="tx1"/>
+          </a:fontRef>
+        </p:style>
+      </p:cxnSp>
+      <p:cxnSp>
+        <p:nvCxnSpPr>
+          <p:cNvPr id="29" name="Straight Arrow Connector 28">
+            <a:extLst>
+              <a:ext uri="{FF2B5EF4-FFF2-40B4-BE49-F238E27FC236}">
+                <a16:creationId xmlns:a16="http://schemas.microsoft.com/office/drawing/2014/main" id="{09967E8B-D7FB-6E75-C2F1-94CD13DCE70F}"/>
+              </a:ext>
+            </a:extLst>
+          </p:cNvPr>
+          <p:cNvCxnSpPr>
+            <a:stCxn id="6" idx="4"/>
+            <a:endCxn id="11" idx="0"/>
+          </p:cNvCxnSpPr>
+          <p:nvPr/>
+        </p:nvCxnSpPr>
+        <p:spPr>
+          <a:xfrm>
+            <a:off x="1170000" y="3420269"/>
+            <a:ext cx="0" cy="1652294"/>
+          </a:xfrm>
+          <a:prstGeom prst="straightConnector1">
+            <a:avLst/>
+          </a:prstGeom>
+          <a:ln w="28575">
+            <a:solidFill>
+              <a:schemeClr val="tx1"/>
+            </a:solidFill>
+            <a:tailEnd type="triangle"/>
+          </a:ln>
+        </p:spPr>
+        <p:style>
+          <a:lnRef idx="1">
+            <a:schemeClr val="accent1"/>
+          </a:lnRef>
+          <a:fillRef idx="0">
+            <a:schemeClr val="accent1"/>
+          </a:fillRef>
+          <a:effectRef idx="0">
+            <a:schemeClr val="accent1"/>
+          </a:effectRef>
+          <a:fontRef idx="minor">
+            <a:schemeClr val="tx1"/>
+          </a:fontRef>
+        </p:style>
+      </p:cxnSp>
+      <p:cxnSp>
+        <p:nvCxnSpPr>
+          <p:cNvPr id="31" name="Straight Arrow Connector 30">
+            <a:extLst>
+              <a:ext uri="{FF2B5EF4-FFF2-40B4-BE49-F238E27FC236}">
+                <a16:creationId xmlns:a16="http://schemas.microsoft.com/office/drawing/2014/main" id="{6D4E1BF3-88E5-1311-983C-3E42C7DF4B81}"/>
+              </a:ext>
+            </a:extLst>
+          </p:cNvPr>
+          <p:cNvCxnSpPr>
+            <a:stCxn id="6" idx="5"/>
+            <a:endCxn id="10" idx="2"/>
+          </p:cNvCxnSpPr>
+          <p:nvPr/>
+        </p:nvCxnSpPr>
+        <p:spPr>
+          <a:xfrm>
+            <a:off x="1488198" y="3288467"/>
+            <a:ext cx="3715704" cy="1120910"/>
+          </a:xfrm>
+          <a:prstGeom prst="straightConnector1">
+            <a:avLst/>
+          </a:prstGeom>
+          <a:ln w="28575">
+            <a:solidFill>
+              <a:schemeClr val="tx1"/>
+            </a:solidFill>
+            <a:tailEnd type="triangle"/>
+          </a:ln>
+        </p:spPr>
+        <p:style>
+          <a:lnRef idx="1">
+            <a:schemeClr val="accent1"/>
+          </a:lnRef>
+          <a:fillRef idx="0">
+            <a:schemeClr val="accent1"/>
+          </a:fillRef>
+          <a:effectRef idx="0">
+            <a:schemeClr val="accent1"/>
+          </a:effectRef>
+          <a:fontRef idx="minor">
+            <a:schemeClr val="tx1"/>
+          </a:fontRef>
+        </p:style>
+      </p:cxnSp>
+      <p:sp>
+        <p:nvSpPr>
+          <p:cNvPr id="32" name="TextBox 31">
+            <a:extLst>
+              <a:ext uri="{FF2B5EF4-FFF2-40B4-BE49-F238E27FC236}">
+                <a16:creationId xmlns:a16="http://schemas.microsoft.com/office/drawing/2014/main" id="{3D8D004A-8C9D-A04B-CCB8-D3FC8D5A7D7D}"/>
+              </a:ext>
+            </a:extLst>
+          </p:cNvPr>
+          <p:cNvSpPr txBox="1"/>
+          <p:nvPr/>
+        </p:nvSpPr>
+        <p:spPr>
+          <a:xfrm>
+            <a:off x="700502" y="3590724"/>
+            <a:ext cx="899996" cy="523220"/>
+          </a:xfrm>
+          <a:prstGeom prst="rect">
+            <a:avLst/>
+          </a:prstGeom>
+          <a:solidFill>
+            <a:schemeClr val="bg1"/>
+          </a:solidFill>
+        </p:spPr>
+        <p:txBody>
+          <a:bodyPr wrap="square" rtlCol="0">
+            <a:spAutoFit/>
+          </a:bodyPr>
+          <a:lstStyle/>
+          <a:p>
+            <a:r>
+              <a:rPr lang="cs-CZ" sz="1400" dirty="0"/>
+              <a:t>4 ks</a:t>
+            </a:r>
+          </a:p>
+          <a:p>
+            <a:r>
+              <a:rPr lang="cs-CZ" sz="1400" dirty="0"/>
+              <a:t>06/01/24</a:t>
+            </a:r>
+            <a:endParaRPr lang="en-GB" sz="1400" dirty="0"/>
+          </a:p>
+        </p:txBody>
+      </p:sp>
+      <p:sp>
+        <p:nvSpPr>
+          <p:cNvPr id="35" name="TextBox 34">
+            <a:extLst>
+              <a:ext uri="{FF2B5EF4-FFF2-40B4-BE49-F238E27FC236}">
+                <a16:creationId xmlns:a16="http://schemas.microsoft.com/office/drawing/2014/main" id="{6B7C2217-D8E8-25CD-3903-0FA5A18C6BAE}"/>
+              </a:ext>
+            </a:extLst>
+          </p:cNvPr>
+          <p:cNvSpPr txBox="1"/>
+          <p:nvPr/>
+        </p:nvSpPr>
+        <p:spPr>
+          <a:xfrm rot="1062652">
+            <a:off x="2424575" y="3502439"/>
+            <a:ext cx="899996" cy="523220"/>
+          </a:xfrm>
+          <a:prstGeom prst="rect">
+            <a:avLst/>
+          </a:prstGeom>
+          <a:solidFill>
+            <a:schemeClr val="bg1"/>
+          </a:solidFill>
+        </p:spPr>
+        <p:txBody>
+          <a:bodyPr wrap="square" rtlCol="0">
+            <a:spAutoFit/>
+          </a:bodyPr>
+          <a:lstStyle/>
+          <a:p>
+            <a:r>
+              <a:rPr lang="cs-CZ" sz="1400" dirty="0"/>
+              <a:t>2 ks</a:t>
+            </a:r>
+          </a:p>
+          <a:p>
+            <a:r>
+              <a:rPr lang="cs-CZ" sz="1400" dirty="0"/>
+              <a:t>06/01/24</a:t>
+            </a:r>
+            <a:endParaRPr lang="en-GB" sz="1400" dirty="0"/>
+          </a:p>
+        </p:txBody>
+      </p:sp>
+      <p:sp>
+        <p:nvSpPr>
+          <p:cNvPr id="36" name="TextBox 35">
+            <a:extLst>
+              <a:ext uri="{FF2B5EF4-FFF2-40B4-BE49-F238E27FC236}">
+                <a16:creationId xmlns:a16="http://schemas.microsoft.com/office/drawing/2014/main" id="{8F9AB825-AA85-2DAD-27CD-2BE9EB2AAC84}"/>
+              </a:ext>
+            </a:extLst>
+          </p:cNvPr>
+          <p:cNvSpPr txBox="1"/>
+          <p:nvPr/>
+        </p:nvSpPr>
+        <p:spPr>
+          <a:xfrm>
+            <a:off x="2196461" y="2759648"/>
+            <a:ext cx="899996" cy="523220"/>
+          </a:xfrm>
+          <a:prstGeom prst="rect">
+            <a:avLst/>
+          </a:prstGeom>
+          <a:solidFill>
+            <a:schemeClr val="bg1"/>
+          </a:solidFill>
+        </p:spPr>
+        <p:txBody>
+          <a:bodyPr wrap="square" rtlCol="0">
+            <a:spAutoFit/>
+          </a:bodyPr>
+          <a:lstStyle/>
+          <a:p>
+            <a:r>
+              <a:rPr lang="cs-CZ" sz="1400" dirty="0"/>
+              <a:t>1 ks</a:t>
+            </a:r>
+          </a:p>
+          <a:p>
+            <a:r>
+              <a:rPr lang="cs-CZ" sz="1400" dirty="0"/>
+              <a:t>14/03/24</a:t>
+            </a:r>
+            <a:endParaRPr lang="en-GB" sz="1400" dirty="0"/>
+          </a:p>
+        </p:txBody>
+      </p:sp>
+      <p:sp>
+        <p:nvSpPr>
+          <p:cNvPr id="37" name="TextBox 36">
+            <a:extLst>
+              <a:ext uri="{FF2B5EF4-FFF2-40B4-BE49-F238E27FC236}">
+                <a16:creationId xmlns:a16="http://schemas.microsoft.com/office/drawing/2014/main" id="{1B0F9278-36E9-85E8-9A70-9A5AB0C04322}"/>
+              </a:ext>
+            </a:extLst>
+          </p:cNvPr>
+          <p:cNvSpPr txBox="1"/>
+          <p:nvPr/>
+        </p:nvSpPr>
+        <p:spPr>
+          <a:xfrm rot="20337978">
+            <a:off x="4117508" y="4732995"/>
+            <a:ext cx="899996" cy="523220"/>
+          </a:xfrm>
+          <a:prstGeom prst="rect">
+            <a:avLst/>
+          </a:prstGeom>
+          <a:solidFill>
+            <a:schemeClr val="bg1"/>
+          </a:solidFill>
+        </p:spPr>
+        <p:txBody>
+          <a:bodyPr wrap="square" rtlCol="0">
+            <a:spAutoFit/>
+          </a:bodyPr>
+          <a:lstStyle/>
+          <a:p>
+            <a:r>
+              <a:rPr lang="cs-CZ" sz="1400" dirty="0"/>
+              <a:t>4 ks</a:t>
+            </a:r>
+          </a:p>
+          <a:p>
+            <a:r>
+              <a:rPr lang="cs-CZ" sz="1400" dirty="0"/>
+              <a:t>14/03/24</a:t>
+            </a:r>
+            <a:endParaRPr lang="en-GB" sz="1400" dirty="0"/>
+          </a:p>
+        </p:txBody>
+      </p:sp>
+      <p:sp>
+        <p:nvSpPr>
+          <p:cNvPr id="38" name="TextBox 37">
+            <a:extLst>
+              <a:ext uri="{FF2B5EF4-FFF2-40B4-BE49-F238E27FC236}">
+                <a16:creationId xmlns:a16="http://schemas.microsoft.com/office/drawing/2014/main" id="{8649BAEF-AC25-F30C-6490-8B60CBE457B8}"/>
+              </a:ext>
+            </a:extLst>
+          </p:cNvPr>
+          <p:cNvSpPr txBox="1"/>
+          <p:nvPr/>
+        </p:nvSpPr>
+        <p:spPr>
+          <a:xfrm>
+            <a:off x="1987285" y="5486173"/>
+            <a:ext cx="899996" cy="523220"/>
+          </a:xfrm>
+          <a:prstGeom prst="rect">
+            <a:avLst/>
+          </a:prstGeom>
+          <a:solidFill>
+            <a:schemeClr val="bg1"/>
+          </a:solidFill>
+        </p:spPr>
+        <p:txBody>
+          <a:bodyPr wrap="square" rtlCol="0">
+            <a:spAutoFit/>
+          </a:bodyPr>
+          <a:lstStyle/>
+          <a:p>
+            <a:r>
+              <a:rPr lang="cs-CZ" sz="1400" dirty="0"/>
+              <a:t>1 ks</a:t>
+            </a:r>
+          </a:p>
+          <a:p>
+            <a:r>
+              <a:rPr lang="cs-CZ" sz="1400" dirty="0"/>
+              <a:t>12/03/24</a:t>
+            </a:r>
+            <a:endParaRPr lang="en-GB" sz="1400" dirty="0"/>
+          </a:p>
+        </p:txBody>
+      </p:sp>
+      <p:sp>
+        <p:nvSpPr>
+          <p:cNvPr id="39" name="TextBox 38">
+            <a:extLst>
+              <a:ext uri="{FF2B5EF4-FFF2-40B4-BE49-F238E27FC236}">
+                <a16:creationId xmlns:a16="http://schemas.microsoft.com/office/drawing/2014/main" id="{0134F62A-96E6-6E0B-13F9-67BBDB6D3BE5}"/>
+              </a:ext>
+            </a:extLst>
+          </p:cNvPr>
+          <p:cNvSpPr txBox="1"/>
+          <p:nvPr/>
+        </p:nvSpPr>
+        <p:spPr>
+          <a:xfrm>
+            <a:off x="1987285" y="4760287"/>
+            <a:ext cx="899996" cy="523220"/>
+          </a:xfrm>
+          <a:prstGeom prst="rect">
+            <a:avLst/>
+          </a:prstGeom>
+          <a:solidFill>
+            <a:schemeClr val="bg1"/>
+          </a:solidFill>
+        </p:spPr>
+        <p:txBody>
+          <a:bodyPr wrap="square" rtlCol="0">
+            <a:spAutoFit/>
+          </a:bodyPr>
+          <a:lstStyle/>
+          <a:p>
+            <a:r>
+              <a:rPr lang="cs-CZ" sz="1400" dirty="0"/>
+              <a:t>3 ks</a:t>
+            </a:r>
+          </a:p>
+          <a:p>
+            <a:r>
+              <a:rPr lang="cs-CZ" sz="1400" dirty="0"/>
+              <a:t>14/03/24</a:t>
+            </a:r>
+            <a:endParaRPr lang="en-GB" sz="1400" dirty="0"/>
+          </a:p>
+        </p:txBody>
+      </p:sp>
+      <p:sp>
+        <p:nvSpPr>
+          <p:cNvPr id="42" name="TextBox 41">
+            <a:extLst>
+              <a:ext uri="{FF2B5EF4-FFF2-40B4-BE49-F238E27FC236}">
+                <a16:creationId xmlns:a16="http://schemas.microsoft.com/office/drawing/2014/main" id="{AA17E2EC-6F41-FDEE-BA16-1D2B16243FDE}"/>
+              </a:ext>
+            </a:extLst>
+          </p:cNvPr>
+          <p:cNvSpPr txBox="1"/>
+          <p:nvPr/>
+        </p:nvSpPr>
+        <p:spPr>
+          <a:xfrm>
+            <a:off x="7379538" y="3882054"/>
+            <a:ext cx="899996" cy="523220"/>
+          </a:xfrm>
+          <a:prstGeom prst="rect">
+            <a:avLst/>
+          </a:prstGeom>
+          <a:solidFill>
+            <a:schemeClr val="bg1"/>
+          </a:solidFill>
+        </p:spPr>
+        <p:txBody>
+          <a:bodyPr wrap="square" rtlCol="0">
+            <a:spAutoFit/>
+          </a:bodyPr>
+          <a:lstStyle/>
+          <a:p>
+            <a:r>
+              <a:rPr lang="cs-CZ" sz="1400" dirty="0"/>
+              <a:t>6 ks</a:t>
+            </a:r>
+          </a:p>
+          <a:p>
+            <a:r>
+              <a:rPr lang="cs-CZ" sz="1400" dirty="0"/>
+              <a:t>31/08/22</a:t>
+            </a:r>
+            <a:endParaRPr lang="en-GB" sz="1400" dirty="0"/>
+          </a:p>
+        </p:txBody>
+      </p:sp>
+      <p:sp>
+        <p:nvSpPr>
+          <p:cNvPr id="43" name="TextBox 42">
+            <a:extLst>
+              <a:ext uri="{FF2B5EF4-FFF2-40B4-BE49-F238E27FC236}">
+                <a16:creationId xmlns:a16="http://schemas.microsoft.com/office/drawing/2014/main" id="{C0F359B0-559A-3612-2535-0E3FDE392CEC}"/>
+              </a:ext>
+            </a:extLst>
+          </p:cNvPr>
+          <p:cNvSpPr txBox="1"/>
+          <p:nvPr/>
+        </p:nvSpPr>
+        <p:spPr>
+          <a:xfrm rot="19252011">
+            <a:off x="6449812" y="3508668"/>
+            <a:ext cx="899996" cy="523220"/>
+          </a:xfrm>
+          <a:prstGeom prst="rect">
+            <a:avLst/>
+          </a:prstGeom>
+          <a:solidFill>
+            <a:schemeClr val="bg1"/>
+          </a:solidFill>
+        </p:spPr>
+        <p:txBody>
+          <a:bodyPr wrap="square" rtlCol="0">
+            <a:spAutoFit/>
+          </a:bodyPr>
+          <a:lstStyle/>
+          <a:p>
+            <a:r>
+              <a:rPr lang="cs-CZ" sz="1400" dirty="0"/>
+              <a:t>2 ks</a:t>
+            </a:r>
+          </a:p>
+          <a:p>
+            <a:r>
+              <a:rPr lang="cs-CZ" sz="1400" dirty="0"/>
+              <a:t>22/02/23</a:t>
+            </a:r>
+            <a:endParaRPr lang="en-GB" sz="1400" dirty="0"/>
+          </a:p>
+        </p:txBody>
+      </p:sp>
+      <p:cxnSp>
+        <p:nvCxnSpPr>
+          <p:cNvPr id="45" name="Straight Arrow Connector 44">
+            <a:extLst>
+              <a:ext uri="{FF2B5EF4-FFF2-40B4-BE49-F238E27FC236}">
+                <a16:creationId xmlns:a16="http://schemas.microsoft.com/office/drawing/2014/main" id="{40823093-E736-DA7A-1FC5-2FF7A469EBF7}"/>
+              </a:ext>
+            </a:extLst>
+          </p:cNvPr>
+          <p:cNvCxnSpPr>
+            <a:cxnSpLocks/>
+            <a:stCxn id="8" idx="6"/>
+            <a:endCxn id="12" idx="2"/>
+          </p:cNvCxnSpPr>
+          <p:nvPr/>
+        </p:nvCxnSpPr>
+        <p:spPr>
+          <a:xfrm>
+            <a:off x="4014371" y="5559393"/>
+            <a:ext cx="3365167" cy="0"/>
+          </a:xfrm>
+          <a:prstGeom prst="straightConnector1">
+            <a:avLst/>
+          </a:prstGeom>
+          <a:ln w="28575">
+            <a:solidFill>
+              <a:schemeClr val="tx1"/>
+            </a:solidFill>
+            <a:tailEnd type="triangle"/>
+          </a:ln>
+        </p:spPr>
+        <p:style>
+          <a:lnRef idx="1">
+            <a:schemeClr val="accent1"/>
+          </a:lnRef>
+          <a:fillRef idx="0">
+            <a:schemeClr val="accent1"/>
+          </a:fillRef>
+          <a:effectRef idx="0">
+            <a:schemeClr val="accent1"/>
+          </a:effectRef>
+          <a:fontRef idx="minor">
+            <a:schemeClr val="tx1"/>
+          </a:fontRef>
+        </p:style>
+      </p:cxnSp>
+      <p:sp>
+        <p:nvSpPr>
+          <p:cNvPr id="46" name="TextBox 45">
+            <a:extLst>
+              <a:ext uri="{FF2B5EF4-FFF2-40B4-BE49-F238E27FC236}">
+                <a16:creationId xmlns:a16="http://schemas.microsoft.com/office/drawing/2014/main" id="{63F004B6-1CD1-93E6-016F-3BFEB7F8D2B0}"/>
+              </a:ext>
+            </a:extLst>
+          </p:cNvPr>
+          <p:cNvSpPr txBox="1"/>
+          <p:nvPr/>
+        </p:nvSpPr>
+        <p:spPr>
+          <a:xfrm>
+            <a:off x="4967244" y="5336268"/>
+            <a:ext cx="899996" cy="523220"/>
+          </a:xfrm>
+          <a:prstGeom prst="rect">
+            <a:avLst/>
+          </a:prstGeom>
+          <a:solidFill>
+            <a:schemeClr val="bg1"/>
+          </a:solidFill>
+        </p:spPr>
+        <p:txBody>
+          <a:bodyPr wrap="square" rtlCol="0">
+            <a:spAutoFit/>
+          </a:bodyPr>
+          <a:lstStyle/>
+          <a:p>
+            <a:r>
+              <a:rPr lang="cs-CZ" sz="1400" dirty="0"/>
+              <a:t>1 ks</a:t>
+            </a:r>
+          </a:p>
+          <a:p>
+            <a:r>
+              <a:rPr lang="cs-CZ" sz="1400" dirty="0"/>
+              <a:t>06/02/24</a:t>
+            </a:r>
+            <a:endParaRPr lang="en-GB" sz="1400" dirty="0"/>
+          </a:p>
+        </p:txBody>
+      </p:sp>
+      <p:sp>
+        <p:nvSpPr>
+          <p:cNvPr id="50" name="Flowchart: Connector 49">
+            <a:extLst>
+              <a:ext uri="{FF2B5EF4-FFF2-40B4-BE49-F238E27FC236}">
+                <a16:creationId xmlns:a16="http://schemas.microsoft.com/office/drawing/2014/main" id="{2A5859EA-1928-C692-C254-53D142C270D3}"/>
+              </a:ext>
+            </a:extLst>
+          </p:cNvPr>
+          <p:cNvSpPr/>
+          <p:nvPr/>
+        </p:nvSpPr>
+        <p:spPr>
+          <a:xfrm>
+            <a:off x="5166720" y="2520269"/>
+            <a:ext cx="900000" cy="900000"/>
+          </a:xfrm>
+          <a:prstGeom prst="flowChartConnector">
+            <a:avLst/>
+          </a:prstGeom>
+          <a:solidFill>
+            <a:schemeClr val="bg1"/>
+          </a:solidFill>
+          <a:ln w="19050">
+            <a:solidFill>
+              <a:srgbClr val="C00000"/>
+            </a:solidFill>
+          </a:ln>
+        </p:spPr>
+        <p:style>
+          <a:lnRef idx="2">
+            <a:schemeClr val="accent1">
+              <a:shade val="15000"/>
+            </a:schemeClr>
+          </a:lnRef>
+          <a:fillRef idx="1">
+            <a:schemeClr val="accent1"/>
+          </a:fillRef>
+          <a:effectRef idx="0">
+            <a:schemeClr val="accent1"/>
+          </a:effectRef>
+          <a:fontRef idx="minor">
+            <a:schemeClr val="lt1"/>
+          </a:fontRef>
+        </p:style>
+        <p:txBody>
+          <a:bodyPr rtlCol="0" anchor="ctr"/>
+          <a:lstStyle/>
+          <a:p>
+            <a:pPr algn="ctr"/>
+            <a:r>
+              <a:rPr lang="cs-CZ" sz="1400" dirty="0">
+                <a:solidFill>
+                  <a:schemeClr val="tx1"/>
+                </a:solidFill>
+              </a:rPr>
+              <a:t>Pepř</a:t>
+            </a:r>
+            <a:endParaRPr lang="en-GB" sz="1400" dirty="0">
+              <a:solidFill>
+                <a:schemeClr val="tx1"/>
+              </a:solidFill>
+            </a:endParaRPr>
+          </a:p>
+        </p:txBody>
+      </p:sp>
+      <p:cxnSp>
+        <p:nvCxnSpPr>
+          <p:cNvPr id="52" name="Straight Arrow Connector 51">
+            <a:extLst>
+              <a:ext uri="{FF2B5EF4-FFF2-40B4-BE49-F238E27FC236}">
+                <a16:creationId xmlns:a16="http://schemas.microsoft.com/office/drawing/2014/main" id="{D5475714-BFDC-B94F-14C1-DC5E846334DA}"/>
+              </a:ext>
+            </a:extLst>
+          </p:cNvPr>
+          <p:cNvCxnSpPr>
+            <a:stCxn id="7" idx="2"/>
+            <a:endCxn id="50" idx="6"/>
+          </p:cNvCxnSpPr>
+          <p:nvPr/>
+        </p:nvCxnSpPr>
+        <p:spPr>
+          <a:xfrm flipH="1">
+            <a:off x="6066720" y="2970269"/>
+            <a:ext cx="1312818" cy="0"/>
+          </a:xfrm>
+          <a:prstGeom prst="straightConnector1">
+            <a:avLst/>
+          </a:prstGeom>
+          <a:ln w="28575">
+            <a:solidFill>
+              <a:schemeClr val="tx1"/>
+            </a:solidFill>
+            <a:tailEnd type="triangle"/>
+          </a:ln>
+        </p:spPr>
+        <p:style>
+          <a:lnRef idx="1">
+            <a:schemeClr val="accent1"/>
+          </a:lnRef>
+          <a:fillRef idx="0">
+            <a:schemeClr val="accent1"/>
+          </a:fillRef>
+          <a:effectRef idx="0">
+            <a:schemeClr val="accent1"/>
+          </a:effectRef>
+          <a:fontRef idx="minor">
+            <a:schemeClr val="tx1"/>
+          </a:fontRef>
+        </p:style>
+      </p:cxnSp>
+      <p:sp>
+        <p:nvSpPr>
+          <p:cNvPr id="55" name="TextBox 54">
+            <a:extLst>
+              <a:ext uri="{FF2B5EF4-FFF2-40B4-BE49-F238E27FC236}">
+                <a16:creationId xmlns:a16="http://schemas.microsoft.com/office/drawing/2014/main" id="{CEAB63AC-27AB-E6E6-79EC-EBD12F046D1E}"/>
+              </a:ext>
+            </a:extLst>
+          </p:cNvPr>
+          <p:cNvSpPr txBox="1"/>
+          <p:nvPr/>
+        </p:nvSpPr>
+        <p:spPr>
+          <a:xfrm>
+            <a:off x="6291722" y="2708659"/>
+            <a:ext cx="899996" cy="523220"/>
+          </a:xfrm>
+          <a:prstGeom prst="rect">
+            <a:avLst/>
+          </a:prstGeom>
+          <a:solidFill>
+            <a:schemeClr val="bg1"/>
+          </a:solidFill>
+        </p:spPr>
+        <p:txBody>
+          <a:bodyPr wrap="square" rtlCol="0">
+            <a:spAutoFit/>
+          </a:bodyPr>
+          <a:lstStyle/>
+          <a:p>
+            <a:r>
+              <a:rPr lang="cs-CZ" sz="1400" dirty="0"/>
+              <a:t>1 ks</a:t>
+            </a:r>
+          </a:p>
+          <a:p>
+            <a:r>
+              <a:rPr lang="cs-CZ" sz="1400" dirty="0"/>
+              <a:t>11/12/23</a:t>
+            </a:r>
+            <a:endParaRPr lang="en-GB" sz="1400" dirty="0"/>
+          </a:p>
+        </p:txBody>
+      </p:sp>
+      <p:sp>
+        <p:nvSpPr>
+          <p:cNvPr id="56" name="TextBox 55">
+            <a:extLst>
+              <a:ext uri="{FF2B5EF4-FFF2-40B4-BE49-F238E27FC236}">
+                <a16:creationId xmlns:a16="http://schemas.microsoft.com/office/drawing/2014/main" id="{5F036A11-E6B6-6F38-8EC6-6D60A9215F15}"/>
+              </a:ext>
+            </a:extLst>
+          </p:cNvPr>
+          <p:cNvSpPr txBox="1"/>
+          <p:nvPr/>
+        </p:nvSpPr>
+        <p:spPr>
+          <a:xfrm>
+            <a:off x="776532" y="2441131"/>
+            <a:ext cx="747935" cy="276999"/>
+          </a:xfrm>
+          <a:prstGeom prst="rect">
+            <a:avLst/>
+          </a:prstGeom>
+        </p:spPr>
+        <p:style>
+          <a:lnRef idx="3">
+            <a:schemeClr val="lt1"/>
+          </a:lnRef>
+          <a:fillRef idx="1">
+            <a:schemeClr val="accent1"/>
+          </a:fillRef>
+          <a:effectRef idx="1">
+            <a:schemeClr val="accent1"/>
+          </a:effectRef>
+          <a:fontRef idx="minor">
+            <a:schemeClr val="lt1"/>
+          </a:fontRef>
+        </p:style>
+        <p:txBody>
+          <a:bodyPr wrap="square" rtlCol="0">
+            <a:spAutoFit/>
+          </a:bodyPr>
+          <a:lstStyle/>
+          <a:p>
+            <a:pPr algn="ctr"/>
+            <a:r>
+              <a:rPr lang="cs-CZ" sz="1200" dirty="0"/>
+              <a:t>Zákazník</a:t>
+            </a:r>
+            <a:endParaRPr lang="en-GB" sz="1200" dirty="0"/>
+          </a:p>
+        </p:txBody>
+      </p:sp>
+      <p:sp>
+        <p:nvSpPr>
+          <p:cNvPr id="57" name="TextBox 56">
+            <a:extLst>
+              <a:ext uri="{FF2B5EF4-FFF2-40B4-BE49-F238E27FC236}">
+                <a16:creationId xmlns:a16="http://schemas.microsoft.com/office/drawing/2014/main" id="{9A6EF341-453E-46E9-6B31-1A9B8F3C58B5}"/>
+              </a:ext>
+            </a:extLst>
+          </p:cNvPr>
+          <p:cNvSpPr txBox="1"/>
+          <p:nvPr/>
+        </p:nvSpPr>
+        <p:spPr>
+          <a:xfrm>
+            <a:off x="3190403" y="5827994"/>
+            <a:ext cx="747935" cy="276999"/>
+          </a:xfrm>
+          <a:prstGeom prst="rect">
+            <a:avLst/>
+          </a:prstGeom>
+        </p:spPr>
+        <p:style>
+          <a:lnRef idx="3">
+            <a:schemeClr val="lt1"/>
+          </a:lnRef>
+          <a:fillRef idx="1">
+            <a:schemeClr val="accent1"/>
+          </a:fillRef>
+          <a:effectRef idx="1">
+            <a:schemeClr val="accent1"/>
+          </a:effectRef>
+          <a:fontRef idx="minor">
+            <a:schemeClr val="lt1"/>
+          </a:fontRef>
+        </p:style>
+        <p:txBody>
+          <a:bodyPr wrap="square" rtlCol="0">
+            <a:spAutoFit/>
+          </a:bodyPr>
+          <a:lstStyle/>
+          <a:p>
+            <a:pPr algn="ctr"/>
+            <a:r>
+              <a:rPr lang="cs-CZ" sz="1200" dirty="0"/>
+              <a:t>Zákazník</a:t>
+            </a:r>
+            <a:endParaRPr lang="en-GB" sz="1200" dirty="0"/>
+          </a:p>
+        </p:txBody>
+      </p:sp>
+      <p:sp>
+        <p:nvSpPr>
+          <p:cNvPr id="58" name="TextBox 57">
+            <a:extLst>
+              <a:ext uri="{FF2B5EF4-FFF2-40B4-BE49-F238E27FC236}">
+                <a16:creationId xmlns:a16="http://schemas.microsoft.com/office/drawing/2014/main" id="{F66DA6F4-EAC6-8D69-F8EB-84B4935D15CE}"/>
+              </a:ext>
+            </a:extLst>
+          </p:cNvPr>
+          <p:cNvSpPr txBox="1"/>
+          <p:nvPr/>
+        </p:nvSpPr>
+        <p:spPr>
+          <a:xfrm>
+            <a:off x="7455567" y="2424668"/>
+            <a:ext cx="747935" cy="276999"/>
+          </a:xfrm>
+          <a:prstGeom prst="rect">
+            <a:avLst/>
+          </a:prstGeom>
+        </p:spPr>
+        <p:style>
+          <a:lnRef idx="3">
+            <a:schemeClr val="lt1"/>
+          </a:lnRef>
+          <a:fillRef idx="1">
+            <a:schemeClr val="accent1"/>
+          </a:fillRef>
+          <a:effectRef idx="1">
+            <a:schemeClr val="accent1"/>
+          </a:effectRef>
+          <a:fontRef idx="minor">
+            <a:schemeClr val="lt1"/>
+          </a:fontRef>
+        </p:style>
+        <p:txBody>
+          <a:bodyPr wrap="square" rtlCol="0">
+            <a:spAutoFit/>
+          </a:bodyPr>
+          <a:lstStyle/>
+          <a:p>
+            <a:pPr algn="ctr"/>
+            <a:r>
+              <a:rPr lang="cs-CZ" sz="1200" dirty="0"/>
+              <a:t>Zákazník</a:t>
+            </a:r>
+            <a:endParaRPr lang="en-GB" sz="1200" dirty="0"/>
+          </a:p>
+        </p:txBody>
+      </p:sp>
+      <p:sp>
+        <p:nvSpPr>
+          <p:cNvPr id="59" name="TextBox 58">
+            <a:extLst>
+              <a:ext uri="{FF2B5EF4-FFF2-40B4-BE49-F238E27FC236}">
+                <a16:creationId xmlns:a16="http://schemas.microsoft.com/office/drawing/2014/main" id="{3F4AAB1E-FA05-E76A-2847-049FFA894360}"/>
+              </a:ext>
+            </a:extLst>
+          </p:cNvPr>
+          <p:cNvSpPr txBox="1"/>
+          <p:nvPr/>
+        </p:nvSpPr>
+        <p:spPr>
+          <a:xfrm>
+            <a:off x="3762376" y="2425364"/>
+            <a:ext cx="747935" cy="276999"/>
+          </a:xfrm>
+          <a:prstGeom prst="rect">
+            <a:avLst/>
+          </a:prstGeom>
+          <a:solidFill>
+            <a:srgbClr val="C00000"/>
+          </a:solidFill>
+        </p:spPr>
+        <p:style>
+          <a:lnRef idx="3">
+            <a:schemeClr val="lt1"/>
+          </a:lnRef>
+          <a:fillRef idx="1">
+            <a:schemeClr val="accent1"/>
+          </a:fillRef>
+          <a:effectRef idx="1">
+            <a:schemeClr val="accent1"/>
+          </a:effectRef>
+          <a:fontRef idx="minor">
+            <a:schemeClr val="lt1"/>
+          </a:fontRef>
+        </p:style>
+        <p:txBody>
+          <a:bodyPr wrap="square" rtlCol="0">
+            <a:spAutoFit/>
+          </a:bodyPr>
+          <a:lstStyle/>
+          <a:p>
+            <a:pPr algn="ctr"/>
+            <a:r>
+              <a:rPr lang="cs-CZ" sz="1200" dirty="0"/>
+              <a:t>Produkt</a:t>
+            </a:r>
+            <a:endParaRPr lang="en-GB" sz="1200" dirty="0"/>
+          </a:p>
+        </p:txBody>
+      </p:sp>
+      <p:sp>
+        <p:nvSpPr>
+          <p:cNvPr id="60" name="TextBox 59">
+            <a:extLst>
+              <a:ext uri="{FF2B5EF4-FFF2-40B4-BE49-F238E27FC236}">
+                <a16:creationId xmlns:a16="http://schemas.microsoft.com/office/drawing/2014/main" id="{B9C81CCD-5178-4876-A5F1-76C1C190F026}"/>
+              </a:ext>
+            </a:extLst>
+          </p:cNvPr>
+          <p:cNvSpPr txBox="1"/>
+          <p:nvPr/>
+        </p:nvSpPr>
+        <p:spPr>
+          <a:xfrm>
+            <a:off x="5239687" y="2447135"/>
+            <a:ext cx="747935" cy="276999"/>
+          </a:xfrm>
+          <a:prstGeom prst="rect">
+            <a:avLst/>
+          </a:prstGeom>
+          <a:solidFill>
+            <a:srgbClr val="C00000"/>
+          </a:solidFill>
+        </p:spPr>
+        <p:style>
+          <a:lnRef idx="3">
+            <a:schemeClr val="lt1"/>
+          </a:lnRef>
+          <a:fillRef idx="1">
+            <a:schemeClr val="accent1"/>
+          </a:fillRef>
+          <a:effectRef idx="1">
+            <a:schemeClr val="accent1"/>
+          </a:effectRef>
+          <a:fontRef idx="minor">
+            <a:schemeClr val="lt1"/>
+          </a:fontRef>
+        </p:style>
+        <p:txBody>
+          <a:bodyPr wrap="square" rtlCol="0">
+            <a:spAutoFit/>
+          </a:bodyPr>
+          <a:lstStyle/>
+          <a:p>
+            <a:pPr algn="ctr"/>
+            <a:r>
+              <a:rPr lang="cs-CZ" sz="1200" dirty="0"/>
+              <a:t>Produkt</a:t>
+            </a:r>
+            <a:endParaRPr lang="en-GB" sz="1200" dirty="0"/>
+          </a:p>
+        </p:txBody>
+      </p:sp>
+      <p:sp>
+        <p:nvSpPr>
+          <p:cNvPr id="61" name="TextBox 60">
+            <a:extLst>
+              <a:ext uri="{FF2B5EF4-FFF2-40B4-BE49-F238E27FC236}">
+                <a16:creationId xmlns:a16="http://schemas.microsoft.com/office/drawing/2014/main" id="{AF755A35-688F-C340-9A68-7F9AA6087CB7}"/>
+              </a:ext>
+            </a:extLst>
+          </p:cNvPr>
+          <p:cNvSpPr txBox="1"/>
+          <p:nvPr/>
+        </p:nvSpPr>
+        <p:spPr>
+          <a:xfrm>
+            <a:off x="796032" y="5827468"/>
+            <a:ext cx="747935" cy="276999"/>
+          </a:xfrm>
+          <a:prstGeom prst="rect">
+            <a:avLst/>
+          </a:prstGeom>
+          <a:solidFill>
+            <a:srgbClr val="C00000"/>
+          </a:solidFill>
+        </p:spPr>
+        <p:style>
+          <a:lnRef idx="3">
+            <a:schemeClr val="lt1"/>
+          </a:lnRef>
+          <a:fillRef idx="1">
+            <a:schemeClr val="accent1"/>
+          </a:fillRef>
+          <a:effectRef idx="1">
+            <a:schemeClr val="accent1"/>
+          </a:effectRef>
+          <a:fontRef idx="minor">
+            <a:schemeClr val="lt1"/>
+          </a:fontRef>
+        </p:style>
+        <p:txBody>
+          <a:bodyPr wrap="square" rtlCol="0">
+            <a:spAutoFit/>
+          </a:bodyPr>
+          <a:lstStyle/>
+          <a:p>
+            <a:pPr algn="ctr"/>
+            <a:r>
+              <a:rPr lang="cs-CZ" sz="1200" dirty="0"/>
+              <a:t>Produkt</a:t>
+            </a:r>
+            <a:endParaRPr lang="en-GB" sz="1200" dirty="0"/>
+          </a:p>
+        </p:txBody>
+      </p:sp>
+      <p:sp>
+        <p:nvSpPr>
+          <p:cNvPr id="62" name="TextBox 61">
+            <a:extLst>
+              <a:ext uri="{FF2B5EF4-FFF2-40B4-BE49-F238E27FC236}">
+                <a16:creationId xmlns:a16="http://schemas.microsoft.com/office/drawing/2014/main" id="{FD987851-E38C-CED3-97B5-D048ED978E23}"/>
+              </a:ext>
+            </a:extLst>
+          </p:cNvPr>
+          <p:cNvSpPr txBox="1"/>
+          <p:nvPr/>
+        </p:nvSpPr>
+        <p:spPr>
+          <a:xfrm>
+            <a:off x="5278854" y="3861551"/>
+            <a:ext cx="747935" cy="276999"/>
+          </a:xfrm>
+          <a:prstGeom prst="rect">
+            <a:avLst/>
+          </a:prstGeom>
+          <a:solidFill>
+            <a:srgbClr val="C00000"/>
+          </a:solidFill>
+        </p:spPr>
+        <p:style>
+          <a:lnRef idx="3">
+            <a:schemeClr val="lt1"/>
+          </a:lnRef>
+          <a:fillRef idx="1">
+            <a:schemeClr val="accent1"/>
+          </a:fillRef>
+          <a:effectRef idx="1">
+            <a:schemeClr val="accent1"/>
+          </a:effectRef>
+          <a:fontRef idx="minor">
+            <a:schemeClr val="lt1"/>
+          </a:fontRef>
+        </p:style>
+        <p:txBody>
+          <a:bodyPr wrap="square" rtlCol="0">
+            <a:spAutoFit/>
+          </a:bodyPr>
+          <a:lstStyle/>
+          <a:p>
+            <a:pPr algn="ctr"/>
+            <a:r>
+              <a:rPr lang="cs-CZ" sz="1200" dirty="0"/>
+              <a:t>Produkt</a:t>
+            </a:r>
+            <a:endParaRPr lang="en-GB" sz="1200" dirty="0"/>
+          </a:p>
+        </p:txBody>
+      </p:sp>
+      <p:sp>
+        <p:nvSpPr>
+          <p:cNvPr id="63" name="TextBox 62">
+            <a:extLst>
+              <a:ext uri="{FF2B5EF4-FFF2-40B4-BE49-F238E27FC236}">
+                <a16:creationId xmlns:a16="http://schemas.microsoft.com/office/drawing/2014/main" id="{9D9BAC82-839E-8E59-DFF0-69E6E5A23A6E}"/>
+              </a:ext>
+            </a:extLst>
+          </p:cNvPr>
+          <p:cNvSpPr txBox="1"/>
+          <p:nvPr/>
+        </p:nvSpPr>
+        <p:spPr>
+          <a:xfrm>
+            <a:off x="7455566" y="5827995"/>
+            <a:ext cx="747935" cy="276999"/>
+          </a:xfrm>
+          <a:prstGeom prst="rect">
+            <a:avLst/>
+          </a:prstGeom>
+          <a:solidFill>
+            <a:srgbClr val="C00000"/>
+          </a:solidFill>
+        </p:spPr>
+        <p:style>
+          <a:lnRef idx="3">
+            <a:schemeClr val="lt1"/>
+          </a:lnRef>
+          <a:fillRef idx="1">
+            <a:schemeClr val="accent1"/>
+          </a:fillRef>
+          <a:effectRef idx="1">
+            <a:schemeClr val="accent1"/>
+          </a:effectRef>
+          <a:fontRef idx="minor">
+            <a:schemeClr val="lt1"/>
+          </a:fontRef>
+        </p:style>
+        <p:txBody>
+          <a:bodyPr wrap="square" rtlCol="0">
+            <a:spAutoFit/>
+          </a:bodyPr>
+          <a:lstStyle/>
+          <a:p>
+            <a:pPr algn="ctr"/>
+            <a:r>
+              <a:rPr lang="cs-CZ" sz="1200" dirty="0"/>
+              <a:t>Produkt</a:t>
+            </a:r>
+            <a:endParaRPr lang="en-GB" sz="1200" dirty="0"/>
+          </a:p>
+        </p:txBody>
+      </p:sp>
+    </p:spTree>
+    <p:extLst>
+      <p:ext uri="{BB962C8B-B14F-4D97-AF65-F5344CB8AC3E}">
+        <p14:creationId xmlns:p14="http://schemas.microsoft.com/office/powerpoint/2010/main" val="1864091842"/>
+      </p:ext>
+    </p:extLst>
+  </p:cSld>
+  <p:clrMapOvr>
+    <a:masterClrMapping/>
+  </p:clrMapOvr>
+</p:sld>
+</file>
+
+<file path=ppt/slides/slide11.xml><?xml version="1.0" encoding="utf-8"?>
+<p:sld xmlns:a="http://schemas.openxmlformats.org/drawingml/2006/main" xmlns:r="http://schemas.openxmlformats.org/officeDocument/2006/relationships" xmlns:p="http://schemas.openxmlformats.org/presentationml/2006/main">
+  <p:cSld>
     <p:bg>
       <p:bgPr>
         <a:blipFill dpi="0" rotWithShape="1">
@@ -4655,7 +6689,7 @@
           <a:p>
             <a:r>
               <a:rPr lang="cs-CZ" dirty="0"/>
-              <a:t>Které produkty zakoupil jistý zákazník?</a:t>
+              <a:t>Které produkty zakoupil daný zákazník?</a:t>
             </a:r>
             <a:endParaRPr lang="en-GB" dirty="0"/>
           </a:p>
@@ -5019,7 +7053,7 @@
 </p:sld>
 </file>
 
-<file path=ppt/slides/slide11.xml><?xml version="1.0" encoding="utf-8"?>
+<file path=ppt/slides/slide12.xml><?xml version="1.0" encoding="utf-8"?>
 <p:sld xmlns:a="http://schemas.openxmlformats.org/drawingml/2006/main" xmlns:r="http://schemas.openxmlformats.org/officeDocument/2006/relationships" xmlns:p="http://schemas.openxmlformats.org/presentationml/2006/main">
   <p:cSld>
     <p:spTree>
@@ -5851,7 +7885,7 @@
 </p:sld>
 </file>
 
-<file path=ppt/slides/slide12.xml><?xml version="1.0" encoding="utf-8"?>
+<file path=ppt/slides/slide13.xml><?xml version="1.0" encoding="utf-8"?>
 <p:sld xmlns:a="http://schemas.openxmlformats.org/drawingml/2006/main" xmlns:r="http://schemas.openxmlformats.org/officeDocument/2006/relationships" xmlns:p="http://schemas.openxmlformats.org/presentationml/2006/main">
   <p:cSld>
     <p:spTree>
@@ -6172,6 +8206,522 @@
 <file path=ppt/slides/slide3.xml><?xml version="1.0" encoding="utf-8"?>
 <p:sld xmlns:a="http://schemas.openxmlformats.org/drawingml/2006/main" xmlns:r="http://schemas.openxmlformats.org/officeDocument/2006/relationships" xmlns:p="http://schemas.openxmlformats.org/presentationml/2006/main">
   <p:cSld>
+    <p:spTree>
+      <p:nvGrpSpPr>
+        <p:cNvPr id="1" name=""/>
+        <p:cNvGrpSpPr/>
+        <p:nvPr/>
+      </p:nvGrpSpPr>
+      <p:grpSpPr>
+        <a:xfrm>
+          <a:off x="0" y="0"/>
+          <a:ext cx="0" cy="0"/>
+          <a:chOff x="0" y="0"/>
+          <a:chExt cx="0" cy="0"/>
+        </a:xfrm>
+      </p:grpSpPr>
+      <p:sp>
+        <p:nvSpPr>
+          <p:cNvPr id="2" name="Title 1">
+            <a:extLst>
+              <a:ext uri="{FF2B5EF4-FFF2-40B4-BE49-F238E27FC236}">
+                <a16:creationId xmlns:a16="http://schemas.microsoft.com/office/drawing/2014/main" id="{B8C55879-ADE7-C065-9158-4611373FDC4E}"/>
+              </a:ext>
+            </a:extLst>
+          </p:cNvPr>
+          <p:cNvSpPr>
+            <a:spLocks noGrp="1"/>
+          </p:cNvSpPr>
+          <p:nvPr>
+            <p:ph type="title"/>
+          </p:nvPr>
+        </p:nvSpPr>
+        <p:spPr/>
+        <p:txBody>
+          <a:bodyPr/>
+          <a:lstStyle/>
+          <a:p>
+            <a:r>
+              <a:rPr lang="cs-CZ" dirty="0"/>
+              <a:t>Popularita grafových databází</a:t>
+            </a:r>
+            <a:endParaRPr lang="en-GB" dirty="0"/>
+          </a:p>
+        </p:txBody>
+      </p:sp>
+      <p:pic>
+        <p:nvPicPr>
+          <p:cNvPr id="6" name="Content Placeholder 5">
+            <a:extLst>
+              <a:ext uri="{FF2B5EF4-FFF2-40B4-BE49-F238E27FC236}">
+                <a16:creationId xmlns:a16="http://schemas.microsoft.com/office/drawing/2014/main" id="{838EDBD0-4F5D-B249-77B0-71768BC9A406}"/>
+              </a:ext>
+            </a:extLst>
+          </p:cNvPr>
+          <p:cNvPicPr>
+            <a:picLocks noGrp="1" noChangeAspect="1"/>
+          </p:cNvPicPr>
+          <p:nvPr>
+            <p:ph idx="1"/>
+          </p:nvPr>
+        </p:nvPicPr>
+        <p:blipFill rotWithShape="1">
+          <a:blip r:embed="rId2"/>
+          <a:srcRect r="16902"/>
+          <a:stretch/>
+        </p:blipFill>
+        <p:spPr>
+          <a:xfrm>
+            <a:off x="719538" y="2323581"/>
+            <a:ext cx="7559213" cy="4132469"/>
+          </a:xfrm>
+          <a:ln>
+            <a:solidFill>
+              <a:schemeClr val="bg1"/>
+            </a:solidFill>
+          </a:ln>
+        </p:spPr>
+      </p:pic>
+      <p:sp>
+        <p:nvSpPr>
+          <p:cNvPr id="4" name="Footer Placeholder 3">
+            <a:extLst>
+              <a:ext uri="{FF2B5EF4-FFF2-40B4-BE49-F238E27FC236}">
+                <a16:creationId xmlns:a16="http://schemas.microsoft.com/office/drawing/2014/main" id="{880FE5F0-34B2-02DE-0A6F-CAB46D85CAC5}"/>
+              </a:ext>
+            </a:extLst>
+          </p:cNvPr>
+          <p:cNvSpPr>
+            <a:spLocks noGrp="1"/>
+          </p:cNvSpPr>
+          <p:nvPr>
+            <p:ph type="ftr" sz="quarter" idx="11"/>
+          </p:nvPr>
+        </p:nvSpPr>
+        <p:spPr/>
+        <p:txBody>
+          <a:bodyPr/>
+          <a:lstStyle/>
+          <a:p>
+            <a:r>
+              <a:rPr lang="cs-CZ" dirty="0"/>
+              <a:t>Jan Gaja, 21.3.2024, Katedra informatiky, Přírodovědecká fakulta, </a:t>
+            </a:r>
+            <a:r>
+              <a:rPr lang="en-GB" dirty="0" err="1"/>
+              <a:t>Univerzita</a:t>
+            </a:r>
+            <a:r>
+              <a:rPr lang="en-GB" dirty="0"/>
+              <a:t> </a:t>
+            </a:r>
+            <a:r>
+              <a:rPr lang="en-GB" dirty="0" err="1"/>
+              <a:t>Palackého</a:t>
+            </a:r>
+            <a:r>
+              <a:rPr lang="en-GB" dirty="0"/>
+              <a:t> v </a:t>
+            </a:r>
+            <a:r>
+              <a:rPr lang="en-GB" dirty="0" err="1"/>
+              <a:t>Olomouci</a:t>
+            </a:r>
+            <a:endParaRPr lang="cs-CZ" dirty="0"/>
+          </a:p>
+        </p:txBody>
+      </p:sp>
+      <p:sp>
+        <p:nvSpPr>
+          <p:cNvPr id="7" name="TextBox 6">
+            <a:extLst>
+              <a:ext uri="{FF2B5EF4-FFF2-40B4-BE49-F238E27FC236}">
+                <a16:creationId xmlns:a16="http://schemas.microsoft.com/office/drawing/2014/main" id="{A552A430-BFA7-C36A-3FE8-6C0DD557EF00}"/>
+              </a:ext>
+            </a:extLst>
+          </p:cNvPr>
+          <p:cNvSpPr txBox="1"/>
+          <p:nvPr/>
+        </p:nvSpPr>
+        <p:spPr>
+          <a:xfrm>
+            <a:off x="718289" y="2057894"/>
+            <a:ext cx="7632827" cy="276999"/>
+          </a:xfrm>
+          <a:prstGeom prst="rect">
+            <a:avLst/>
+          </a:prstGeom>
+          <a:noFill/>
+        </p:spPr>
+        <p:txBody>
+          <a:bodyPr wrap="square" rtlCol="0">
+            <a:spAutoFit/>
+          </a:bodyPr>
+          <a:lstStyle/>
+          <a:p>
+            <a:pPr algn="ctr"/>
+            <a:r>
+              <a:rPr lang="cs-CZ" sz="1200" dirty="0"/>
+              <a:t>Zdroj: </a:t>
+            </a:r>
+            <a:r>
+              <a:rPr lang="en-GB" sz="1200" dirty="0"/>
+              <a:t>DB-Engines</a:t>
+            </a:r>
+            <a:r>
+              <a:rPr lang="cs-CZ" sz="1200" dirty="0"/>
+              <a:t>.</a:t>
+            </a:r>
+            <a:r>
+              <a:rPr lang="en-GB" sz="1200" dirty="0"/>
+              <a:t> </a:t>
+            </a:r>
+            <a:r>
+              <a:rPr lang="en-GB" sz="1200" i="1" dirty="0"/>
+              <a:t>Ranking per database model category</a:t>
+            </a:r>
+            <a:r>
+              <a:rPr lang="cs-CZ" sz="1200" dirty="0"/>
+              <a:t>. 2024. &lt;</a:t>
+            </a:r>
+            <a:r>
+              <a:rPr lang="cs-CZ" sz="1200" dirty="0">
+                <a:hlinkClick r:id="rId3"/>
+              </a:rPr>
+              <a:t>db-engines.com/en/</a:t>
+            </a:r>
+            <a:r>
+              <a:rPr lang="cs-CZ" sz="1200" dirty="0" err="1">
+                <a:hlinkClick r:id="rId3"/>
+              </a:rPr>
+              <a:t>ranking_categories</a:t>
+            </a:r>
+            <a:r>
+              <a:rPr lang="cs-CZ" sz="1200" dirty="0"/>
+              <a:t>&gt;</a:t>
+            </a:r>
+            <a:endParaRPr lang="en-GB" sz="1200" dirty="0"/>
+          </a:p>
+        </p:txBody>
+      </p:sp>
+      <p:sp>
+        <p:nvSpPr>
+          <p:cNvPr id="3" name="TextBox 2">
+            <a:extLst>
+              <a:ext uri="{FF2B5EF4-FFF2-40B4-BE49-F238E27FC236}">
+                <a16:creationId xmlns:a16="http://schemas.microsoft.com/office/drawing/2014/main" id="{A73F458A-FD74-1E74-6ACC-602771B3FE99}"/>
+              </a:ext>
+            </a:extLst>
+          </p:cNvPr>
+          <p:cNvSpPr txBox="1"/>
+          <p:nvPr/>
+        </p:nvSpPr>
+        <p:spPr>
+          <a:xfrm>
+            <a:off x="718289" y="2319504"/>
+            <a:ext cx="1158115" cy="307777"/>
+          </a:xfrm>
+          <a:prstGeom prst="rect">
+            <a:avLst/>
+          </a:prstGeom>
+          <a:solidFill>
+            <a:srgbClr val="8ABB1E"/>
+          </a:solidFill>
+        </p:spPr>
+        <p:txBody>
+          <a:bodyPr wrap="square" rtlCol="0">
+            <a:spAutoFit/>
+          </a:bodyPr>
+          <a:lstStyle/>
+          <a:p>
+            <a:r>
+              <a:rPr lang="cs-CZ" sz="1400" dirty="0" err="1">
+                <a:solidFill>
+                  <a:schemeClr val="bg1"/>
+                </a:solidFill>
+              </a:rPr>
+              <a:t>Graph</a:t>
+            </a:r>
+            <a:r>
+              <a:rPr lang="cs-CZ" sz="1400" dirty="0">
+                <a:solidFill>
+                  <a:schemeClr val="bg1"/>
+                </a:solidFill>
+              </a:rPr>
+              <a:t> DBMS</a:t>
+            </a:r>
+            <a:endParaRPr lang="en-GB" sz="1400" dirty="0">
+              <a:solidFill>
+                <a:schemeClr val="bg1"/>
+              </a:solidFill>
+            </a:endParaRPr>
+          </a:p>
+        </p:txBody>
+      </p:sp>
+      <p:sp>
+        <p:nvSpPr>
+          <p:cNvPr id="5" name="TextBox 4">
+            <a:extLst>
+              <a:ext uri="{FF2B5EF4-FFF2-40B4-BE49-F238E27FC236}">
+                <a16:creationId xmlns:a16="http://schemas.microsoft.com/office/drawing/2014/main" id="{BA7F9E62-E29F-6918-2A6A-2A224C2D37AC}"/>
+              </a:ext>
+            </a:extLst>
+          </p:cNvPr>
+          <p:cNvSpPr txBox="1"/>
+          <p:nvPr/>
+        </p:nvSpPr>
+        <p:spPr>
+          <a:xfrm>
+            <a:off x="1948768" y="2319501"/>
+            <a:ext cx="1424241" cy="307777"/>
+          </a:xfrm>
+          <a:prstGeom prst="rect">
+            <a:avLst/>
+          </a:prstGeom>
+          <a:solidFill>
+            <a:srgbClr val="1B3046"/>
+          </a:solidFill>
+        </p:spPr>
+        <p:txBody>
+          <a:bodyPr wrap="square" rtlCol="0">
+            <a:spAutoFit/>
+          </a:bodyPr>
+          <a:lstStyle/>
+          <a:p>
+            <a:r>
+              <a:rPr lang="cs-CZ" sz="1400" dirty="0" err="1">
+                <a:solidFill>
+                  <a:schemeClr val="bg1"/>
+                </a:solidFill>
+              </a:rPr>
+              <a:t>Document</a:t>
+            </a:r>
+            <a:r>
+              <a:rPr lang="cs-CZ" sz="1400" dirty="0">
+                <a:solidFill>
+                  <a:schemeClr val="bg1"/>
+                </a:solidFill>
+              </a:rPr>
+              <a:t> </a:t>
+            </a:r>
+            <a:r>
+              <a:rPr lang="cs-CZ" sz="1400" dirty="0" err="1">
+                <a:solidFill>
+                  <a:schemeClr val="bg1"/>
+                </a:solidFill>
+              </a:rPr>
+              <a:t>store</a:t>
+            </a:r>
+            <a:endParaRPr lang="en-GB" sz="1400" dirty="0">
+              <a:solidFill>
+                <a:schemeClr val="bg1"/>
+              </a:solidFill>
+            </a:endParaRPr>
+          </a:p>
+        </p:txBody>
+      </p:sp>
+      <p:sp>
+        <p:nvSpPr>
+          <p:cNvPr id="8" name="TextBox 7">
+            <a:extLst>
+              <a:ext uri="{FF2B5EF4-FFF2-40B4-BE49-F238E27FC236}">
+                <a16:creationId xmlns:a16="http://schemas.microsoft.com/office/drawing/2014/main" id="{F886A9E1-ED68-B41F-AF8B-58E22030EBD3}"/>
+              </a:ext>
+            </a:extLst>
+          </p:cNvPr>
+          <p:cNvSpPr txBox="1"/>
+          <p:nvPr/>
+        </p:nvSpPr>
+        <p:spPr>
+          <a:xfrm>
+            <a:off x="3445375" y="2319501"/>
+            <a:ext cx="1376726" cy="307777"/>
+          </a:xfrm>
+          <a:prstGeom prst="rect">
+            <a:avLst/>
+          </a:prstGeom>
+          <a:solidFill>
+            <a:srgbClr val="9E1D1D"/>
+          </a:solidFill>
+        </p:spPr>
+        <p:txBody>
+          <a:bodyPr wrap="square" rtlCol="0">
+            <a:spAutoFit/>
+          </a:bodyPr>
+          <a:lstStyle/>
+          <a:p>
+            <a:r>
+              <a:rPr lang="cs-CZ" sz="1400" dirty="0" err="1">
+                <a:solidFill>
+                  <a:schemeClr val="bg1"/>
+                </a:solidFill>
+              </a:rPr>
+              <a:t>Key-value</a:t>
+            </a:r>
+            <a:r>
+              <a:rPr lang="cs-CZ" sz="1400" dirty="0">
+                <a:solidFill>
+                  <a:schemeClr val="bg1"/>
+                </a:solidFill>
+              </a:rPr>
+              <a:t> </a:t>
+            </a:r>
+            <a:r>
+              <a:rPr lang="cs-CZ" sz="1400" dirty="0" err="1">
+                <a:solidFill>
+                  <a:schemeClr val="bg1"/>
+                </a:solidFill>
+              </a:rPr>
+              <a:t>store</a:t>
+            </a:r>
+            <a:endParaRPr lang="en-GB" sz="1400" dirty="0">
+              <a:solidFill>
+                <a:schemeClr val="bg1"/>
+              </a:solidFill>
+            </a:endParaRPr>
+          </a:p>
+        </p:txBody>
+      </p:sp>
+      <p:sp>
+        <p:nvSpPr>
+          <p:cNvPr id="9" name="TextBox 8">
+            <a:extLst>
+              <a:ext uri="{FF2B5EF4-FFF2-40B4-BE49-F238E27FC236}">
+                <a16:creationId xmlns:a16="http://schemas.microsoft.com/office/drawing/2014/main" id="{7CB31F21-0D4F-F23B-CE67-778451F22B87}"/>
+              </a:ext>
+            </a:extLst>
+          </p:cNvPr>
+          <p:cNvSpPr txBox="1"/>
+          <p:nvPr/>
+        </p:nvSpPr>
+        <p:spPr>
+          <a:xfrm>
+            <a:off x="4894467" y="2319501"/>
+            <a:ext cx="1847426" cy="307777"/>
+          </a:xfrm>
+          <a:prstGeom prst="rect">
+            <a:avLst/>
+          </a:prstGeom>
+          <a:solidFill>
+            <a:srgbClr val="6F9CE3"/>
+          </a:solidFill>
+        </p:spPr>
+        <p:txBody>
+          <a:bodyPr wrap="square" rtlCol="0">
+            <a:spAutoFit/>
+          </a:bodyPr>
+          <a:lstStyle/>
+          <a:p>
+            <a:r>
+              <a:rPr lang="cs-CZ" sz="1400" dirty="0" err="1">
+                <a:solidFill>
+                  <a:schemeClr val="bg1"/>
+                </a:solidFill>
+              </a:rPr>
+              <a:t>Object</a:t>
+            </a:r>
+            <a:r>
+              <a:rPr lang="cs-CZ" sz="1400" dirty="0">
+                <a:solidFill>
+                  <a:schemeClr val="bg1"/>
+                </a:solidFill>
+              </a:rPr>
+              <a:t> </a:t>
+            </a:r>
+            <a:r>
+              <a:rPr lang="cs-CZ" sz="1400" dirty="0" err="1">
+                <a:solidFill>
+                  <a:schemeClr val="bg1"/>
+                </a:solidFill>
+              </a:rPr>
+              <a:t>oriented</a:t>
+            </a:r>
+            <a:r>
+              <a:rPr lang="cs-CZ" sz="1400" dirty="0">
+                <a:solidFill>
+                  <a:schemeClr val="bg1"/>
+                </a:solidFill>
+              </a:rPr>
+              <a:t> DBMS</a:t>
+            </a:r>
+            <a:endParaRPr lang="en-GB" sz="1400" dirty="0">
+              <a:solidFill>
+                <a:schemeClr val="bg1"/>
+              </a:solidFill>
+            </a:endParaRPr>
+          </a:p>
+        </p:txBody>
+      </p:sp>
+      <p:sp>
+        <p:nvSpPr>
+          <p:cNvPr id="10" name="TextBox 9">
+            <a:extLst>
+              <a:ext uri="{FF2B5EF4-FFF2-40B4-BE49-F238E27FC236}">
+                <a16:creationId xmlns:a16="http://schemas.microsoft.com/office/drawing/2014/main" id="{C211008F-3B95-67DA-2BB6-85B7C0F2EB25}"/>
+              </a:ext>
+            </a:extLst>
+          </p:cNvPr>
+          <p:cNvSpPr txBox="1"/>
+          <p:nvPr/>
+        </p:nvSpPr>
+        <p:spPr>
+          <a:xfrm>
+            <a:off x="6814258" y="2319501"/>
+            <a:ext cx="1465118" cy="307777"/>
+          </a:xfrm>
+          <a:prstGeom prst="rect">
+            <a:avLst/>
+          </a:prstGeom>
+          <a:solidFill>
+            <a:srgbClr val="F41D1D"/>
+          </a:solidFill>
+        </p:spPr>
+        <p:txBody>
+          <a:bodyPr wrap="square" rtlCol="0">
+            <a:spAutoFit/>
+          </a:bodyPr>
+          <a:lstStyle/>
+          <a:p>
+            <a:r>
+              <a:rPr lang="cs-CZ" sz="1400" dirty="0" err="1">
+                <a:solidFill>
+                  <a:schemeClr val="bg1"/>
+                </a:solidFill>
+              </a:rPr>
+              <a:t>Relational</a:t>
+            </a:r>
+            <a:r>
+              <a:rPr lang="cs-CZ" sz="1400" dirty="0">
+                <a:solidFill>
+                  <a:schemeClr val="bg1"/>
+                </a:solidFill>
+              </a:rPr>
+              <a:t> DBMS</a:t>
+            </a:r>
+            <a:endParaRPr lang="en-GB" sz="1400" dirty="0">
+              <a:solidFill>
+                <a:schemeClr val="bg1"/>
+              </a:solidFill>
+            </a:endParaRPr>
+          </a:p>
+        </p:txBody>
+      </p:sp>
+    </p:spTree>
+    <p:extLst>
+      <p:ext uri="{BB962C8B-B14F-4D97-AF65-F5344CB8AC3E}">
+        <p14:creationId xmlns:p14="http://schemas.microsoft.com/office/powerpoint/2010/main" val="3043914469"/>
+      </p:ext>
+    </p:extLst>
+  </p:cSld>
+  <p:clrMapOvr>
+    <a:masterClrMapping/>
+  </p:clrMapOvr>
+</p:sld>
+</file>
+
+<file path=ppt/slides/slide4.xml><?xml version="1.0" encoding="utf-8"?>
+<p:sld xmlns:a="http://schemas.openxmlformats.org/drawingml/2006/main" xmlns:r="http://schemas.openxmlformats.org/officeDocument/2006/relationships" xmlns:p="http://schemas.openxmlformats.org/presentationml/2006/main">
+  <p:cSld>
     <p:bg>
       <p:bgPr>
         <a:blipFill dpi="0" rotWithShape="1">
@@ -6351,7 +8901,7 @@
 </p:sld>
 </file>
 
-<file path=ppt/slides/slide4.xml><?xml version="1.0" encoding="utf-8"?>
+<file path=ppt/slides/slide5.xml><?xml version="1.0" encoding="utf-8"?>
 <p:sld xmlns:a="http://schemas.openxmlformats.org/drawingml/2006/main" xmlns:r="http://schemas.openxmlformats.org/officeDocument/2006/relationships" xmlns:p="http://schemas.openxmlformats.org/presentationml/2006/main">
   <p:cSld>
     <p:bg>
@@ -6449,24 +8999,6 @@
               <a:t>Problémem jsou operace agregování a filtrování</a:t>
             </a:r>
           </a:p>
-          <a:p>
-            <a:r>
-              <a:rPr lang="cs-CZ" dirty="0"/>
-              <a:t>Problematické </a:t>
-            </a:r>
-            <a:r>
-              <a:rPr lang="cs-CZ" dirty="0" err="1"/>
-              <a:t>shardování</a:t>
-            </a:r>
-            <a:endParaRPr lang="cs-CZ" dirty="0"/>
-          </a:p>
-          <a:p>
-            <a:pPr lvl="1"/>
-            <a:r>
-              <a:rPr lang="cs-CZ" dirty="0"/>
-              <a:t>Jak data rozdělit mezi více strojů?</a:t>
-            </a:r>
-          </a:p>
         </p:txBody>
       </p:sp>
       <p:sp>
@@ -6531,7 +9063,7 @@
 </p:sld>
 </file>
 
-<file path=ppt/slides/slide5.xml><?xml version="1.0" encoding="utf-8"?>
+<file path=ppt/slides/slide6.xml><?xml version="1.0" encoding="utf-8"?>
 <p:sld xmlns:a="http://schemas.openxmlformats.org/drawingml/2006/main" xmlns:r="http://schemas.openxmlformats.org/officeDocument/2006/relationships" xmlns:p="http://schemas.openxmlformats.org/presentationml/2006/main">
   <p:cSld>
     <p:bg>
@@ -6641,14 +9173,14 @@
           <a:p>
             <a:r>
               <a:rPr lang="cs-CZ" dirty="0"/>
-              <a:t>Vybrané implementace</a:t>
+              <a:t>Vybrané implementace:</a:t>
             </a:r>
           </a:p>
           <a:p>
             <a:pPr lvl="1"/>
             <a:r>
               <a:rPr lang="cs-CZ" dirty="0"/>
-              <a:t>Neo4j</a:t>
+              <a:t>neo4j</a:t>
             </a:r>
           </a:p>
           <a:p>
@@ -6665,6 +9197,10 @@
               <a:rPr lang="cs-CZ" dirty="0" err="1"/>
               <a:t>ArangoDB</a:t>
             </a:r>
+            <a:endParaRPr lang="cs-CZ" dirty="0"/>
+          </a:p>
+          <a:p>
+            <a:pPr lvl="1"/>
             <a:endParaRPr lang="cs-CZ" dirty="0"/>
           </a:p>
         </p:txBody>
@@ -6731,7 +9267,7 @@
 </p:sld>
 </file>
 
-<file path=ppt/slides/slide6.xml><?xml version="1.0" encoding="utf-8"?>
+<file path=ppt/slides/slide7.xml><?xml version="1.0" encoding="utf-8"?>
 <p:sld xmlns:a="http://schemas.openxmlformats.org/drawingml/2006/main" xmlns:r="http://schemas.openxmlformats.org/officeDocument/2006/relationships" xmlns:p="http://schemas.openxmlformats.org/presentationml/2006/main">
   <p:cSld>
     <p:bg>
@@ -6791,9 +9327,10 @@
           <a:lstStyle/>
           <a:p>
             <a:r>
-              <a:rPr lang="cs-CZ" dirty="0"/>
+              <a:rPr lang="cs-CZ"/>
               <a:t>Dotazovací jazyky v grafových databázích</a:t>
             </a:r>
+            <a:endParaRPr lang="cs-CZ" dirty="0"/>
           </a:p>
         </p:txBody>
       </p:sp>
@@ -6830,76 +9367,39 @@
           <a:p>
             <a:pPr lvl="1"/>
             <a:r>
+              <a:rPr lang="cs-CZ"/>
+              <a:t>Ty popisují, jakým způsobem grafem procházíme</a:t>
+            </a:r>
+          </a:p>
+          <a:p>
+            <a:r>
+              <a:rPr lang="cs-CZ"/>
+              <a:t>Používané </a:t>
+            </a:r>
+            <a:r>
               <a:rPr lang="cs-CZ" dirty="0"/>
-              <a:t>Ty popisují, jakým způsobem grafem procházíme</a:t>
-            </a:r>
-          </a:p>
-          <a:p>
-            <a:r>
-              <a:rPr lang="cs-CZ" dirty="0"/>
-              <a:t>Používané dotazovací jazyky</a:t>
+              <a:t>dotazovací jazyky</a:t>
             </a:r>
           </a:p>
           <a:p>
             <a:pPr lvl="1"/>
             <a:r>
-              <a:rPr lang="cs-CZ" dirty="0" err="1"/>
-              <a:t>Cypher</a:t>
-            </a:r>
-            <a:r>
-              <a:rPr lang="cs-CZ" dirty="0"/>
-              <a:t> – v databázi Neo4j</a:t>
+              <a:rPr lang="cs-CZ"/>
+              <a:t>Cypher – v databázi Neo4j</a:t>
             </a:r>
           </a:p>
           <a:p>
             <a:pPr lvl="1"/>
             <a:r>
-              <a:rPr lang="cs-CZ" dirty="0" err="1"/>
-              <a:t>Gremlin</a:t>
-            </a:r>
-            <a:r>
-              <a:rPr lang="cs-CZ" dirty="0"/>
-              <a:t> – v databázi </a:t>
-            </a:r>
-            <a:r>
-              <a:rPr lang="cs-CZ" dirty="0" err="1"/>
-              <a:t>OrientDB</a:t>
-            </a:r>
-            <a:endParaRPr lang="cs-CZ" dirty="0"/>
+              <a:rPr lang="cs-CZ"/>
+              <a:t>Gremlin – v databázi OrientDB</a:t>
+            </a:r>
           </a:p>
           <a:p>
             <a:pPr lvl="1"/>
             <a:r>
-              <a:rPr lang="cs-CZ" dirty="0"/>
-              <a:t>AQL (</a:t>
-            </a:r>
-            <a:r>
-              <a:rPr lang="cs-CZ" dirty="0" err="1"/>
-              <a:t>ArangoDB</a:t>
-            </a:r>
-            <a:r>
-              <a:rPr lang="cs-CZ" dirty="0"/>
-              <a:t> </a:t>
-            </a:r>
-            <a:r>
-              <a:rPr lang="cs-CZ" dirty="0" err="1"/>
-              <a:t>Query</a:t>
-            </a:r>
-            <a:r>
-              <a:rPr lang="cs-CZ" dirty="0"/>
-              <a:t> </a:t>
-            </a:r>
-            <a:r>
-              <a:rPr lang="cs-CZ" dirty="0" err="1"/>
-              <a:t>Language</a:t>
-            </a:r>
-            <a:r>
-              <a:rPr lang="cs-CZ" dirty="0"/>
-              <a:t>) – v databázi </a:t>
-            </a:r>
-            <a:r>
-              <a:rPr lang="cs-CZ" dirty="0" err="1"/>
-              <a:t>ArangoDB</a:t>
+              <a:rPr lang="cs-CZ"/>
+              <a:t>AQL (ArangoDB Query Language) – v databázi ArangoDB</a:t>
             </a:r>
             <a:endParaRPr lang="cs-CZ" dirty="0"/>
           </a:p>
@@ -6927,28 +9427,12 @@
           <a:lstStyle/>
           <a:p>
             <a:r>
-              <a:rPr lang="cs-CZ" dirty="0"/>
+              <a:rPr lang="cs-CZ"/>
               <a:t>Jan Gaja, 21.3.2024, Katedra informatiky, Přírodovědecká fakulta, </a:t>
             </a:r>
             <a:r>
-              <a:rPr lang="en-GB" dirty="0" err="1"/>
-              <a:t>Univerzita</a:t>
-            </a:r>
-            <a:r>
-              <a:rPr lang="en-GB" dirty="0"/>
-              <a:t> </a:t>
-            </a:r>
-            <a:r>
-              <a:rPr lang="en-GB" dirty="0" err="1"/>
-              <a:t>Palackého</a:t>
-            </a:r>
-            <a:r>
-              <a:rPr lang="en-GB" dirty="0"/>
-              <a:t> v </a:t>
-            </a:r>
-            <a:r>
-              <a:rPr lang="en-GB" dirty="0" err="1"/>
-              <a:t>Olomouci</a:t>
+              <a:rPr lang="en-GB"/>
+              <a:t>Univerzita Palackého v Olomouci</a:t>
             </a:r>
             <a:endParaRPr lang="cs-CZ" dirty="0"/>
           </a:p>
@@ -6967,7 +9451,7 @@
 </p:sld>
 </file>
 
-<file path=ppt/slides/slide7.xml><?xml version="1.0" encoding="utf-8"?>
+<file path=ppt/slides/slide8.xml><?xml version="1.0" encoding="utf-8"?>
 <p:sld xmlns:a="http://schemas.openxmlformats.org/drawingml/2006/main" xmlns:r="http://schemas.openxmlformats.org/officeDocument/2006/relationships" xmlns:p="http://schemas.openxmlformats.org/presentationml/2006/main">
   <p:cSld>
     <p:bg>
@@ -7241,7 +9725,7 @@
 </p:sld>
 </file>
 
-<file path=ppt/slides/slide8.xml><?xml version="1.0" encoding="utf-8"?>
+<file path=ppt/slides/slide9.xml><?xml version="1.0" encoding="utf-8"?>
 <p:sld xmlns:a="http://schemas.openxmlformats.org/drawingml/2006/main" xmlns:r="http://schemas.openxmlformats.org/officeDocument/2006/relationships" xmlns:p="http://schemas.openxmlformats.org/presentationml/2006/main">
   <p:cSld>
     <p:spTree>
@@ -7303,7 +9787,7 @@
             <p:ph idx="1"/>
             <p:extLst>
               <p:ext uri="{D42A27DB-BD31-4B8C-83A1-F6EECF244321}">
-                <p14:modId xmlns:p14="http://schemas.microsoft.com/office/powerpoint/2010/main" val="1446578492"/>
+                <p14:modId xmlns:p14="http://schemas.microsoft.com/office/powerpoint/2010/main" val="633102695"/>
               </p:ext>
             </p:extLst>
           </p:nvPr>
@@ -7344,6 +9828,14 @@
                         <a:rPr lang="cs-CZ" dirty="0"/>
                         <a:t>1. Definice problému</a:t>
                       </a:r>
+                      <a:endParaRPr lang="cs-CZ" sz="1770" kern="1200" dirty="0">
+                        <a:solidFill>
+                          <a:schemeClr val="tx1"/>
+                        </a:solidFill>
+                        <a:latin typeface="+mn-lt"/>
+                        <a:ea typeface="+mn-ea"/>
+                        <a:cs typeface="Arial" panose="020B0604020202020204" pitchFamily="34" charset="0"/>
+                      </a:endParaRPr>
                     </a:p>
                     <a:p>
                       <a:pPr marL="285750" indent="-285750" algn="l" defTabSz="899952" rtl="0" eaLnBrk="1" latinLnBrk="0" hangingPunct="1">
@@ -7354,7 +9846,7 @@
                         <a:buChar char="−"/>
                       </a:pPr>
                       <a:r>
-                        <a:rPr lang="cs-CZ" sz="1770" kern="1200" dirty="0">
+                        <a:rPr lang="cs-CZ" sz="1600" kern="1200" dirty="0">
                           <a:solidFill>
                             <a:schemeClr val="tx1"/>
                           </a:solidFill>
@@ -7374,7 +9866,7 @@
                         <a:buChar char="−"/>
                       </a:pPr>
                       <a:r>
-                        <a:rPr lang="cs-CZ" sz="1770" b="1" kern="1200" dirty="0">
+                        <a:rPr lang="cs-CZ" sz="1600" kern="1200" dirty="0">
                           <a:solidFill>
                             <a:schemeClr val="tx1"/>
                           </a:solidFill>
@@ -7382,10 +9874,10 @@
                           <a:ea typeface="+mn-ea"/>
                           <a:cs typeface="Arial" panose="020B0604020202020204" pitchFamily="34" charset="0"/>
                         </a:rPr>
-                        <a:t>Entity</a:t>
+                        <a:t>Zákazníkovi </a:t>
                       </a:r>
                       <a:r>
-                        <a:rPr lang="cs-CZ" sz="1770" kern="1200" dirty="0">
+                        <a:rPr lang="cs-CZ" sz="1600" i="1" kern="1200" dirty="0">
                           <a:solidFill>
                             <a:schemeClr val="tx1"/>
                           </a:solidFill>
@@ -7393,10 +9885,10 @@
                           <a:ea typeface="+mn-ea"/>
                           <a:cs typeface="Arial" panose="020B0604020202020204" pitchFamily="34" charset="0"/>
                         </a:rPr>
-                        <a:t>: </a:t>
+                        <a:t>X</a:t>
                       </a:r>
                       <a:r>
-                        <a:rPr lang="cs-CZ" sz="1770" b="0" i="1" kern="1200" dirty="0">
+                        <a:rPr lang="cs-CZ" sz="1600" kern="1200" dirty="0">
                           <a:solidFill>
                             <a:schemeClr val="tx1"/>
                           </a:solidFill>
@@ -7404,10 +9896,10 @@
                           <a:ea typeface="+mn-ea"/>
                           <a:cs typeface="Arial" panose="020B0604020202020204" pitchFamily="34" charset="0"/>
                         </a:rPr>
-                        <a:t>Zákazník</a:t>
+                        <a:t> chceme doporučovat produkty, které nakoupili zákazníci, kteří nakoupili stejný produkt jako </a:t>
                       </a:r>
                       <a:r>
-                        <a:rPr lang="cs-CZ" sz="1770" kern="1200" dirty="0">
+                        <a:rPr lang="cs-CZ" sz="1600" i="1" kern="1200" dirty="0">
                           <a:solidFill>
                             <a:schemeClr val="tx1"/>
                           </a:solidFill>
@@ -7415,10 +9907,10 @@
                           <a:ea typeface="+mn-ea"/>
                           <a:cs typeface="Arial" panose="020B0604020202020204" pitchFamily="34" charset="0"/>
                         </a:rPr>
-                        <a:t>, </a:t>
+                        <a:t>X</a:t>
                       </a:r>
                       <a:r>
-                        <a:rPr lang="cs-CZ" sz="1770" b="0" i="1" kern="1200" dirty="0">
+                        <a:rPr lang="cs-CZ" sz="1600" kern="1200" dirty="0">
                           <a:solidFill>
                             <a:schemeClr val="tx1"/>
                           </a:solidFill>
@@ -7426,60 +9918,7 @@
                           <a:ea typeface="+mn-ea"/>
                           <a:cs typeface="Arial" panose="020B0604020202020204" pitchFamily="34" charset="0"/>
                         </a:rPr>
-                        <a:t>Produkt</a:t>
-                      </a:r>
-                    </a:p>
-                    <a:p>
-                      <a:pPr marL="285750" indent="-285750" algn="l" defTabSz="899952" rtl="0" eaLnBrk="1" latinLnBrk="0" hangingPunct="1">
-                        <a:lnSpc>
-                          <a:spcPct val="90000"/>
-                        </a:lnSpc>
-                        <a:buFont typeface="Arial" panose="020B0604020202020204" pitchFamily="34" charset="0"/>
-                        <a:buChar char="−"/>
-                      </a:pPr>
-                      <a:r>
-                        <a:rPr lang="cs-CZ" sz="1770" b="1" kern="1200" dirty="0">
-                          <a:solidFill>
-                            <a:schemeClr val="tx1"/>
-                          </a:solidFill>
-                          <a:latin typeface="+mn-lt"/>
-                          <a:ea typeface="+mn-ea"/>
-                          <a:cs typeface="Arial" panose="020B0604020202020204" pitchFamily="34" charset="0"/>
-                        </a:rPr>
-                        <a:t>Vztahy</a:t>
-                      </a:r>
-                      <a:r>
-                        <a:rPr lang="cs-CZ" sz="1770" kern="1200" dirty="0">
-                          <a:solidFill>
-                            <a:schemeClr val="tx1"/>
-                          </a:solidFill>
-                          <a:latin typeface="+mn-lt"/>
-                          <a:ea typeface="+mn-ea"/>
-                          <a:cs typeface="Arial" panose="020B0604020202020204" pitchFamily="34" charset="0"/>
-                        </a:rPr>
-                        <a:t>: Zákazník </a:t>
-                      </a:r>
-                      <a:r>
-                        <a:rPr lang="cs-CZ" sz="1770" b="0" i="1" kern="1200" dirty="0">
-                          <a:solidFill>
-                            <a:schemeClr val="tx1"/>
-                          </a:solidFill>
-                          <a:latin typeface="+mn-lt"/>
-                          <a:ea typeface="+mn-ea"/>
-                          <a:cs typeface="Arial" panose="020B0604020202020204" pitchFamily="34" charset="0"/>
-                        </a:rPr>
-                        <a:t>koupil</a:t>
-                      </a:r>
-                      <a:r>
-                        <a:rPr lang="cs-CZ" sz="1770" kern="1200" dirty="0">
-                          <a:solidFill>
-                            <a:schemeClr val="tx1"/>
-                          </a:solidFill>
-                          <a:latin typeface="+mn-lt"/>
-                          <a:ea typeface="+mn-ea"/>
-                          <a:cs typeface="Arial" panose="020B0604020202020204" pitchFamily="34" charset="0"/>
-                        </a:rPr>
-                        <a:t> produkt</a:t>
+                        <a:t>.</a:t>
                       </a:r>
                     </a:p>
                   </a:txBody>
@@ -7607,8 +10046,8 @@
         </p:nvSpPr>
         <p:spPr>
           <a:xfrm>
-            <a:off x="4848046" y="3126046"/>
-            <a:ext cx="805035" cy="720000"/>
+            <a:off x="4693183" y="3017914"/>
+            <a:ext cx="900000" cy="720000"/>
           </a:xfrm>
           <a:prstGeom prst="flowChartProcess">
             <a:avLst/>
@@ -7635,10 +10074,10 @@
           <a:p>
             <a:pPr algn="ctr"/>
             <a:r>
-              <a:rPr lang="cs-CZ" sz="1400" dirty="0"/>
+              <a:rPr lang="cs-CZ" sz="1600" dirty="0"/>
               <a:t>Zákazník</a:t>
             </a:r>
-            <a:endParaRPr lang="en-GB" dirty="0"/>
+            <a:endParaRPr lang="en-GB" sz="1600" dirty="0"/>
           </a:p>
         </p:txBody>
       </p:sp>
@@ -7656,8 +10095,8 @@
         </p:nvSpPr>
         <p:spPr>
           <a:xfrm>
-            <a:off x="7139669" y="3126046"/>
-            <a:ext cx="805035" cy="720000"/>
+            <a:off x="7193228" y="3017914"/>
+            <a:ext cx="900000" cy="720000"/>
           </a:xfrm>
           <a:prstGeom prst="flowChartProcess">
             <a:avLst/>
@@ -7684,7 +10123,7 @@
           <a:p>
             <a:pPr algn="ctr"/>
             <a:r>
-              <a:rPr lang="cs-CZ" sz="1400" dirty="0"/>
+              <a:rPr lang="cs-CZ" sz="1600" dirty="0"/>
               <a:t>Produkt</a:t>
             </a:r>
             <a:endParaRPr lang="en-GB" dirty="0"/>
@@ -7707,13 +10146,13 @@
         </p:nvCxnSpPr>
         <p:spPr>
           <a:xfrm>
-            <a:off x="5653081" y="3514960"/>
+            <a:off x="5653081" y="3376460"/>
             <a:ext cx="1486588" cy="0"/>
           </a:xfrm>
           <a:prstGeom prst="straightConnector1">
             <a:avLst/>
           </a:prstGeom>
-          <a:ln w="12700">
+          <a:ln w="38100">
             <a:tailEnd type="triangle"/>
           </a:ln>
         </p:spPr>
@@ -7746,8 +10185,8 @@
         </p:nvSpPr>
         <p:spPr>
           <a:xfrm>
-            <a:off x="6051286" y="3376460"/>
-            <a:ext cx="685865" cy="276999"/>
+            <a:off x="6050273" y="3202021"/>
+            <a:ext cx="685865" cy="338554"/>
           </a:xfrm>
           <a:prstGeom prst="rect">
             <a:avLst/>
@@ -7764,7 +10203,7 @@
           <a:p>
             <a:pPr algn="ctr"/>
             <a:r>
-              <a:rPr lang="cs-CZ" sz="1200" dirty="0"/>
+              <a:rPr lang="cs-CZ" sz="1600" dirty="0"/>
               <a:t>koupil</a:t>
             </a:r>
             <a:endParaRPr lang="en-GB" sz="1000" dirty="0"/>
@@ -8638,1952 +11077,121 @@
           </a:p>
         </p:txBody>
       </p:sp>
+      <p:sp>
+        <p:nvSpPr>
+          <p:cNvPr id="3" name="TextBox 2">
+            <a:extLst>
+              <a:ext uri="{FF2B5EF4-FFF2-40B4-BE49-F238E27FC236}">
+                <a16:creationId xmlns:a16="http://schemas.microsoft.com/office/drawing/2014/main" id="{7315950A-2645-601F-B364-8EC249BFF6FE}"/>
+              </a:ext>
+            </a:extLst>
+          </p:cNvPr>
+          <p:cNvSpPr txBox="1"/>
+          <p:nvPr/>
+        </p:nvSpPr>
+        <p:spPr>
+          <a:xfrm>
+            <a:off x="4848046" y="3846046"/>
+            <a:ext cx="805035" cy="366575"/>
+          </a:xfrm>
+          <a:prstGeom prst="rect">
+            <a:avLst/>
+          </a:prstGeom>
+          <a:noFill/>
+        </p:spPr>
+        <p:txBody>
+          <a:bodyPr wrap="square" rtlCol="0">
+            <a:spAutoFit/>
+          </a:bodyPr>
+          <a:lstStyle/>
+          <a:p>
+            <a:pPr algn="ctr"/>
+            <a:r>
+              <a:rPr lang="cs-CZ" dirty="0"/>
+              <a:t>entita</a:t>
+            </a:r>
+            <a:endParaRPr lang="en-GB" dirty="0"/>
+          </a:p>
+        </p:txBody>
+      </p:sp>
+      <p:sp>
+        <p:nvSpPr>
+          <p:cNvPr id="7" name="TextBox 6">
+            <a:extLst>
+              <a:ext uri="{FF2B5EF4-FFF2-40B4-BE49-F238E27FC236}">
+                <a16:creationId xmlns:a16="http://schemas.microsoft.com/office/drawing/2014/main" id="{D888ECE3-7556-8748-9B2C-FC759BD9B1BF}"/>
+              </a:ext>
+            </a:extLst>
+          </p:cNvPr>
+          <p:cNvSpPr txBox="1"/>
+          <p:nvPr/>
+        </p:nvSpPr>
+        <p:spPr>
+          <a:xfrm>
+            <a:off x="7139668" y="3847536"/>
+            <a:ext cx="805035" cy="366575"/>
+          </a:xfrm>
+          <a:prstGeom prst="rect">
+            <a:avLst/>
+          </a:prstGeom>
+          <a:noFill/>
+        </p:spPr>
+        <p:txBody>
+          <a:bodyPr wrap="square" rtlCol="0">
+            <a:spAutoFit/>
+          </a:bodyPr>
+          <a:lstStyle/>
+          <a:p>
+            <a:pPr algn="ctr"/>
+            <a:r>
+              <a:rPr lang="cs-CZ" dirty="0"/>
+              <a:t>entita</a:t>
+            </a:r>
+            <a:endParaRPr lang="en-GB" dirty="0"/>
+          </a:p>
+        </p:txBody>
+      </p:sp>
+      <p:sp>
+        <p:nvSpPr>
+          <p:cNvPr id="8" name="TextBox 7">
+            <a:extLst>
+              <a:ext uri="{FF2B5EF4-FFF2-40B4-BE49-F238E27FC236}">
+                <a16:creationId xmlns:a16="http://schemas.microsoft.com/office/drawing/2014/main" id="{90961E1D-1126-9588-9FD8-959920CC74B5}"/>
+              </a:ext>
+            </a:extLst>
+          </p:cNvPr>
+          <p:cNvSpPr txBox="1"/>
+          <p:nvPr/>
+        </p:nvSpPr>
+        <p:spPr>
+          <a:xfrm>
+            <a:off x="5991700" y="3846045"/>
+            <a:ext cx="805035" cy="366575"/>
+          </a:xfrm>
+          <a:prstGeom prst="rect">
+            <a:avLst/>
+          </a:prstGeom>
+          <a:noFill/>
+        </p:spPr>
+        <p:txBody>
+          <a:bodyPr wrap="square" rtlCol="0">
+            <a:spAutoFit/>
+          </a:bodyPr>
+          <a:lstStyle/>
+          <a:p>
+            <a:pPr algn="ctr"/>
+            <a:r>
+              <a:rPr lang="cs-CZ" dirty="0"/>
+              <a:t>vztah</a:t>
+            </a:r>
+            <a:endParaRPr lang="en-GB" dirty="0"/>
+          </a:p>
+        </p:txBody>
+      </p:sp>
     </p:spTree>
     <p:extLst>
       <p:ext uri="{BB962C8B-B14F-4D97-AF65-F5344CB8AC3E}">
         <p14:creationId xmlns:p14="http://schemas.microsoft.com/office/powerpoint/2010/main" val="3224118620"/>
-      </p:ext>
-    </p:extLst>
-  </p:cSld>
-  <p:clrMapOvr>
-    <a:masterClrMapping/>
-  </p:clrMapOvr>
-</p:sld>
-</file>
-
-<file path=ppt/slides/slide9.xml><?xml version="1.0" encoding="utf-8"?>
-<p:sld xmlns:a="http://schemas.openxmlformats.org/drawingml/2006/main" xmlns:r="http://schemas.openxmlformats.org/officeDocument/2006/relationships" xmlns:p="http://schemas.openxmlformats.org/presentationml/2006/main">
-  <p:cSld>
-    <p:spTree>
-      <p:nvGrpSpPr>
-        <p:cNvPr id="1" name=""/>
-        <p:cNvGrpSpPr/>
-        <p:nvPr/>
-      </p:nvGrpSpPr>
-      <p:grpSpPr>
-        <a:xfrm>
-          <a:off x="0" y="0"/>
-          <a:ext cx="0" cy="0"/>
-          <a:chOff x="0" y="0"/>
-          <a:chExt cx="0" cy="0"/>
-        </a:xfrm>
-      </p:grpSpPr>
-      <p:sp>
-        <p:nvSpPr>
-          <p:cNvPr id="2" name="Title 1">
-            <a:extLst>
-              <a:ext uri="{FF2B5EF4-FFF2-40B4-BE49-F238E27FC236}">
-                <a16:creationId xmlns:a16="http://schemas.microsoft.com/office/drawing/2014/main" id="{29199E41-AB6E-D884-D433-475EA1246AED}"/>
-              </a:ext>
-            </a:extLst>
-          </p:cNvPr>
-          <p:cNvSpPr>
-            <a:spLocks noGrp="1"/>
-          </p:cNvSpPr>
-          <p:nvPr>
-            <p:ph type="title"/>
-          </p:nvPr>
-        </p:nvSpPr>
-        <p:spPr/>
-        <p:txBody>
-          <a:bodyPr/>
-          <a:lstStyle/>
-          <a:p>
-            <a:r>
-              <a:rPr lang="cs-CZ" dirty="0"/>
-              <a:t>Příklad uchovávaného grafu</a:t>
-            </a:r>
-            <a:endParaRPr lang="en-GB" dirty="0"/>
-          </a:p>
-        </p:txBody>
-      </p:sp>
-      <p:sp>
-        <p:nvSpPr>
-          <p:cNvPr id="4" name="Footer Placeholder 3">
-            <a:extLst>
-              <a:ext uri="{FF2B5EF4-FFF2-40B4-BE49-F238E27FC236}">
-                <a16:creationId xmlns:a16="http://schemas.microsoft.com/office/drawing/2014/main" id="{D2B936A4-738B-214C-AEF5-613D37761CE4}"/>
-              </a:ext>
-            </a:extLst>
-          </p:cNvPr>
-          <p:cNvSpPr>
-            <a:spLocks noGrp="1"/>
-          </p:cNvSpPr>
-          <p:nvPr>
-            <p:ph type="ftr" sz="quarter" idx="11"/>
-          </p:nvPr>
-        </p:nvSpPr>
-        <p:spPr/>
-        <p:txBody>
-          <a:bodyPr/>
-          <a:lstStyle/>
-          <a:p>
-            <a:r>
-              <a:rPr lang="cs-CZ" dirty="0"/>
-              <a:t>Jan Gaja, 21.3.2024, Katedra informatiky, Přírodovědecká fakulta, Univerzita Palackého v Olomouci</a:t>
-            </a:r>
-          </a:p>
-        </p:txBody>
-      </p:sp>
-      <p:sp>
-        <p:nvSpPr>
-          <p:cNvPr id="6" name="Flowchart: Connector 5">
-            <a:extLst>
-              <a:ext uri="{FF2B5EF4-FFF2-40B4-BE49-F238E27FC236}">
-                <a16:creationId xmlns:a16="http://schemas.microsoft.com/office/drawing/2014/main" id="{FCB0BF4C-8595-CDBE-BF1D-9E85C4B7E101}"/>
-              </a:ext>
-            </a:extLst>
-          </p:cNvPr>
-          <p:cNvSpPr/>
-          <p:nvPr/>
-        </p:nvSpPr>
-        <p:spPr>
-          <a:xfrm>
-            <a:off x="720000" y="2520269"/>
-            <a:ext cx="900000" cy="900000"/>
-          </a:xfrm>
-          <a:prstGeom prst="flowChartConnector">
-            <a:avLst/>
-          </a:prstGeom>
-          <a:solidFill>
-            <a:schemeClr val="bg1"/>
-          </a:solidFill>
-          <a:ln w="19050">
-            <a:solidFill>
-              <a:schemeClr val="accent1"/>
-            </a:solidFill>
-          </a:ln>
-        </p:spPr>
-        <p:style>
-          <a:lnRef idx="2">
-            <a:schemeClr val="accent1">
-              <a:shade val="15000"/>
-            </a:schemeClr>
-          </a:lnRef>
-          <a:fillRef idx="1">
-            <a:schemeClr val="accent1"/>
-          </a:fillRef>
-          <a:effectRef idx="0">
-            <a:schemeClr val="accent1"/>
-          </a:effectRef>
-          <a:fontRef idx="minor">
-            <a:schemeClr val="lt1"/>
-          </a:fontRef>
-        </p:style>
-        <p:txBody>
-          <a:bodyPr rtlCol="0" anchor="ctr"/>
-          <a:lstStyle/>
-          <a:p>
-            <a:pPr algn="ctr"/>
-            <a:r>
-              <a:rPr lang="cs-CZ" sz="1400" dirty="0">
-                <a:solidFill>
-                  <a:schemeClr val="tx1"/>
-                </a:solidFill>
-              </a:rPr>
-              <a:t>Petr</a:t>
-            </a:r>
-          </a:p>
-          <a:p>
-            <a:pPr algn="ctr"/>
-            <a:r>
-              <a:rPr lang="cs-CZ" sz="1400" dirty="0">
-                <a:solidFill>
-                  <a:schemeClr val="tx1"/>
-                </a:solidFill>
-              </a:rPr>
-              <a:t>Holý</a:t>
-            </a:r>
-          </a:p>
-        </p:txBody>
-      </p:sp>
-      <p:sp>
-        <p:nvSpPr>
-          <p:cNvPr id="7" name="Flowchart: Connector 6">
-            <a:extLst>
-              <a:ext uri="{FF2B5EF4-FFF2-40B4-BE49-F238E27FC236}">
-                <a16:creationId xmlns:a16="http://schemas.microsoft.com/office/drawing/2014/main" id="{6C2FF267-BC39-CB62-AD74-4B0B34C9E4D0}"/>
-              </a:ext>
-            </a:extLst>
-          </p:cNvPr>
-          <p:cNvSpPr/>
-          <p:nvPr/>
-        </p:nvSpPr>
-        <p:spPr>
-          <a:xfrm>
-            <a:off x="7379538" y="2520269"/>
-            <a:ext cx="900000" cy="900000"/>
-          </a:xfrm>
-          <a:prstGeom prst="flowChartConnector">
-            <a:avLst/>
-          </a:prstGeom>
-          <a:solidFill>
-            <a:schemeClr val="bg1"/>
-          </a:solidFill>
-          <a:ln w="19050">
-            <a:solidFill>
-              <a:schemeClr val="accent1"/>
-            </a:solidFill>
-          </a:ln>
-        </p:spPr>
-        <p:style>
-          <a:lnRef idx="2">
-            <a:schemeClr val="accent1">
-              <a:shade val="15000"/>
-            </a:schemeClr>
-          </a:lnRef>
-          <a:fillRef idx="1">
-            <a:schemeClr val="accent1"/>
-          </a:fillRef>
-          <a:effectRef idx="0">
-            <a:schemeClr val="accent1"/>
-          </a:effectRef>
-          <a:fontRef idx="minor">
-            <a:schemeClr val="lt1"/>
-          </a:fontRef>
-        </p:style>
-        <p:txBody>
-          <a:bodyPr rtlCol="0" anchor="ctr"/>
-          <a:lstStyle/>
-          <a:p>
-            <a:pPr algn="ctr"/>
-            <a:r>
-              <a:rPr lang="cs-CZ" sz="1400" dirty="0">
-                <a:solidFill>
-                  <a:schemeClr val="tx1"/>
-                </a:solidFill>
-              </a:rPr>
-              <a:t>Petr</a:t>
-            </a:r>
-          </a:p>
-          <a:p>
-            <a:pPr algn="ctr"/>
-            <a:r>
-              <a:rPr lang="cs-CZ" sz="1400" dirty="0">
-                <a:solidFill>
-                  <a:schemeClr val="tx1"/>
-                </a:solidFill>
-              </a:rPr>
-              <a:t>Novák</a:t>
-            </a:r>
-          </a:p>
-        </p:txBody>
-      </p:sp>
-      <p:sp>
-        <p:nvSpPr>
-          <p:cNvPr id="8" name="Flowchart: Connector 7">
-            <a:extLst>
-              <a:ext uri="{FF2B5EF4-FFF2-40B4-BE49-F238E27FC236}">
-                <a16:creationId xmlns:a16="http://schemas.microsoft.com/office/drawing/2014/main" id="{4251F369-8F48-6573-3F88-B1A1A971D28A}"/>
-              </a:ext>
-            </a:extLst>
-          </p:cNvPr>
-          <p:cNvSpPr/>
-          <p:nvPr/>
-        </p:nvSpPr>
-        <p:spPr>
-          <a:xfrm>
-            <a:off x="3114371" y="5109393"/>
-            <a:ext cx="900000" cy="900000"/>
-          </a:xfrm>
-          <a:prstGeom prst="flowChartConnector">
-            <a:avLst/>
-          </a:prstGeom>
-          <a:solidFill>
-            <a:schemeClr val="bg1"/>
-          </a:solidFill>
-          <a:ln w="19050">
-            <a:solidFill>
-              <a:schemeClr val="accent1"/>
-            </a:solidFill>
-          </a:ln>
-        </p:spPr>
-        <p:style>
-          <a:lnRef idx="2">
-            <a:schemeClr val="accent1">
-              <a:shade val="15000"/>
-            </a:schemeClr>
-          </a:lnRef>
-          <a:fillRef idx="1">
-            <a:schemeClr val="accent1"/>
-          </a:fillRef>
-          <a:effectRef idx="0">
-            <a:schemeClr val="accent1"/>
-          </a:effectRef>
-          <a:fontRef idx="minor">
-            <a:schemeClr val="lt1"/>
-          </a:fontRef>
-        </p:style>
-        <p:txBody>
-          <a:bodyPr rtlCol="0" anchor="ctr"/>
-          <a:lstStyle/>
-          <a:p>
-            <a:pPr algn="ctr"/>
-            <a:r>
-              <a:rPr lang="cs-CZ" sz="1400" dirty="0">
-                <a:solidFill>
-                  <a:schemeClr val="tx1"/>
-                </a:solidFill>
-              </a:rPr>
-              <a:t>Jiří</a:t>
-            </a:r>
-          </a:p>
-          <a:p>
-            <a:pPr algn="ctr"/>
-            <a:r>
-              <a:rPr lang="cs-CZ" sz="1400" dirty="0">
-                <a:solidFill>
-                  <a:schemeClr val="tx1"/>
-                </a:solidFill>
-              </a:rPr>
-              <a:t>Horák</a:t>
-            </a:r>
-          </a:p>
-        </p:txBody>
-      </p:sp>
-      <p:sp>
-        <p:nvSpPr>
-          <p:cNvPr id="9" name="Flowchart: Connector 8">
-            <a:extLst>
-              <a:ext uri="{FF2B5EF4-FFF2-40B4-BE49-F238E27FC236}">
-                <a16:creationId xmlns:a16="http://schemas.microsoft.com/office/drawing/2014/main" id="{D1690ABC-8001-474D-9E93-0B97AAC3DFEC}"/>
-              </a:ext>
-            </a:extLst>
-          </p:cNvPr>
-          <p:cNvSpPr/>
-          <p:nvPr/>
-        </p:nvSpPr>
-        <p:spPr>
-          <a:xfrm>
-            <a:off x="3672919" y="2502174"/>
-            <a:ext cx="900000" cy="900000"/>
-          </a:xfrm>
-          <a:prstGeom prst="flowChartConnector">
-            <a:avLst/>
-          </a:prstGeom>
-          <a:solidFill>
-            <a:schemeClr val="bg1"/>
-          </a:solidFill>
-          <a:ln w="19050">
-            <a:solidFill>
-              <a:srgbClr val="C00000"/>
-            </a:solidFill>
-          </a:ln>
-        </p:spPr>
-        <p:style>
-          <a:lnRef idx="2">
-            <a:schemeClr val="accent1">
-              <a:shade val="15000"/>
-            </a:schemeClr>
-          </a:lnRef>
-          <a:fillRef idx="1">
-            <a:schemeClr val="accent1"/>
-          </a:fillRef>
-          <a:effectRef idx="0">
-            <a:schemeClr val="accent1"/>
-          </a:effectRef>
-          <a:fontRef idx="minor">
-            <a:schemeClr val="lt1"/>
-          </a:fontRef>
-        </p:style>
-        <p:txBody>
-          <a:bodyPr rtlCol="0" anchor="ctr"/>
-          <a:lstStyle/>
-          <a:p>
-            <a:pPr algn="ctr"/>
-            <a:r>
-              <a:rPr lang="cs-CZ" sz="1400" dirty="0">
-                <a:solidFill>
-                  <a:schemeClr val="tx1"/>
-                </a:solidFill>
-              </a:rPr>
-              <a:t>Máslo</a:t>
-            </a:r>
-            <a:endParaRPr lang="en-GB" sz="1400" dirty="0">
-              <a:solidFill>
-                <a:schemeClr val="tx1"/>
-              </a:solidFill>
-            </a:endParaRPr>
-          </a:p>
-        </p:txBody>
-      </p:sp>
-      <p:sp>
-        <p:nvSpPr>
-          <p:cNvPr id="10" name="Flowchart: Connector 9">
-            <a:extLst>
-              <a:ext uri="{FF2B5EF4-FFF2-40B4-BE49-F238E27FC236}">
-                <a16:creationId xmlns:a16="http://schemas.microsoft.com/office/drawing/2014/main" id="{8A19F733-B1A1-B863-ABA0-994F981EDE15}"/>
-              </a:ext>
-            </a:extLst>
-          </p:cNvPr>
-          <p:cNvSpPr/>
-          <p:nvPr/>
-        </p:nvSpPr>
-        <p:spPr>
-          <a:xfrm>
-            <a:off x="5203902" y="3959377"/>
-            <a:ext cx="900000" cy="900000"/>
-          </a:xfrm>
-          <a:prstGeom prst="flowChartConnector">
-            <a:avLst/>
-          </a:prstGeom>
-          <a:solidFill>
-            <a:schemeClr val="bg1"/>
-          </a:solidFill>
-          <a:ln w="19050">
-            <a:solidFill>
-              <a:srgbClr val="C00000"/>
-            </a:solidFill>
-          </a:ln>
-        </p:spPr>
-        <p:style>
-          <a:lnRef idx="2">
-            <a:schemeClr val="accent1">
-              <a:shade val="15000"/>
-            </a:schemeClr>
-          </a:lnRef>
-          <a:fillRef idx="1">
-            <a:schemeClr val="accent1"/>
-          </a:fillRef>
-          <a:effectRef idx="0">
-            <a:schemeClr val="accent1"/>
-          </a:effectRef>
-          <a:fontRef idx="minor">
-            <a:schemeClr val="lt1"/>
-          </a:fontRef>
-        </p:style>
-        <p:txBody>
-          <a:bodyPr rtlCol="0" anchor="ctr"/>
-          <a:lstStyle/>
-          <a:p>
-            <a:pPr algn="ctr"/>
-            <a:r>
-              <a:rPr lang="cs-CZ" sz="1400" dirty="0">
-                <a:solidFill>
-                  <a:schemeClr val="tx1"/>
-                </a:solidFill>
-              </a:rPr>
-              <a:t>Sýr</a:t>
-            </a:r>
-            <a:endParaRPr lang="en-GB" sz="1400" dirty="0">
-              <a:solidFill>
-                <a:schemeClr val="tx1"/>
-              </a:solidFill>
-            </a:endParaRPr>
-          </a:p>
-        </p:txBody>
-      </p:sp>
-      <p:sp>
-        <p:nvSpPr>
-          <p:cNvPr id="11" name="Flowchart: Connector 10">
-            <a:extLst>
-              <a:ext uri="{FF2B5EF4-FFF2-40B4-BE49-F238E27FC236}">
-                <a16:creationId xmlns:a16="http://schemas.microsoft.com/office/drawing/2014/main" id="{0CB1633D-D361-E2BE-2D9D-719231380C1E}"/>
-              </a:ext>
-            </a:extLst>
-          </p:cNvPr>
-          <p:cNvSpPr/>
-          <p:nvPr/>
-        </p:nvSpPr>
-        <p:spPr>
-          <a:xfrm>
-            <a:off x="720000" y="5072563"/>
-            <a:ext cx="900000" cy="900000"/>
-          </a:xfrm>
-          <a:prstGeom prst="flowChartConnector">
-            <a:avLst/>
-          </a:prstGeom>
-          <a:solidFill>
-            <a:schemeClr val="bg1"/>
-          </a:solidFill>
-          <a:ln w="19050">
-            <a:solidFill>
-              <a:srgbClr val="C00000"/>
-            </a:solidFill>
-          </a:ln>
-        </p:spPr>
-        <p:style>
-          <a:lnRef idx="2">
-            <a:schemeClr val="accent1">
-              <a:shade val="15000"/>
-            </a:schemeClr>
-          </a:lnRef>
-          <a:fillRef idx="1">
-            <a:schemeClr val="accent1"/>
-          </a:fillRef>
-          <a:effectRef idx="0">
-            <a:schemeClr val="accent1"/>
-          </a:effectRef>
-          <a:fontRef idx="minor">
-            <a:schemeClr val="lt1"/>
-          </a:fontRef>
-        </p:style>
-        <p:txBody>
-          <a:bodyPr rtlCol="0" anchor="ctr"/>
-          <a:lstStyle/>
-          <a:p>
-            <a:pPr algn="ctr"/>
-            <a:r>
-              <a:rPr lang="cs-CZ" sz="1400" dirty="0">
-                <a:solidFill>
-                  <a:schemeClr val="tx1"/>
-                </a:solidFill>
-              </a:rPr>
-              <a:t>Chléb</a:t>
-            </a:r>
-            <a:endParaRPr lang="en-GB" sz="1400" dirty="0">
-              <a:solidFill>
-                <a:schemeClr val="tx1"/>
-              </a:solidFill>
-            </a:endParaRPr>
-          </a:p>
-        </p:txBody>
-      </p:sp>
-      <p:sp>
-        <p:nvSpPr>
-          <p:cNvPr id="12" name="Flowchart: Connector 11">
-            <a:extLst>
-              <a:ext uri="{FF2B5EF4-FFF2-40B4-BE49-F238E27FC236}">
-                <a16:creationId xmlns:a16="http://schemas.microsoft.com/office/drawing/2014/main" id="{BEE01C27-7DA7-980D-171A-20094A0C0E7C}"/>
-              </a:ext>
-            </a:extLst>
-          </p:cNvPr>
-          <p:cNvSpPr/>
-          <p:nvPr/>
-        </p:nvSpPr>
-        <p:spPr>
-          <a:xfrm>
-            <a:off x="7379538" y="5109393"/>
-            <a:ext cx="900000" cy="900000"/>
-          </a:xfrm>
-          <a:prstGeom prst="flowChartConnector">
-            <a:avLst/>
-          </a:prstGeom>
-          <a:solidFill>
-            <a:schemeClr val="bg1"/>
-          </a:solidFill>
-          <a:ln w="19050">
-            <a:solidFill>
-              <a:srgbClr val="C00000"/>
-            </a:solidFill>
-          </a:ln>
-        </p:spPr>
-        <p:style>
-          <a:lnRef idx="2">
-            <a:schemeClr val="accent1">
-              <a:shade val="15000"/>
-            </a:schemeClr>
-          </a:lnRef>
-          <a:fillRef idx="1">
-            <a:schemeClr val="accent1"/>
-          </a:fillRef>
-          <a:effectRef idx="0">
-            <a:schemeClr val="accent1"/>
-          </a:effectRef>
-          <a:fontRef idx="minor">
-            <a:schemeClr val="lt1"/>
-          </a:fontRef>
-        </p:style>
-        <p:txBody>
-          <a:bodyPr rtlCol="0" anchor="ctr"/>
-          <a:lstStyle/>
-          <a:p>
-            <a:pPr algn="ctr"/>
-            <a:r>
-              <a:rPr lang="cs-CZ" sz="1400" dirty="0">
-                <a:solidFill>
-                  <a:schemeClr val="tx1"/>
-                </a:solidFill>
-              </a:rPr>
-              <a:t>Cukr</a:t>
-            </a:r>
-            <a:endParaRPr lang="en-GB" sz="1400" dirty="0">
-              <a:solidFill>
-                <a:schemeClr val="tx1"/>
-              </a:solidFill>
-            </a:endParaRPr>
-          </a:p>
-        </p:txBody>
-      </p:sp>
-      <p:cxnSp>
-        <p:nvCxnSpPr>
-          <p:cNvPr id="14" name="Straight Arrow Connector 13">
-            <a:extLst>
-              <a:ext uri="{FF2B5EF4-FFF2-40B4-BE49-F238E27FC236}">
-                <a16:creationId xmlns:a16="http://schemas.microsoft.com/office/drawing/2014/main" id="{DB3B0260-7366-5CFF-D792-CB7258F171E9}"/>
-              </a:ext>
-            </a:extLst>
-          </p:cNvPr>
-          <p:cNvCxnSpPr>
-            <a:stCxn id="7" idx="4"/>
-            <a:endCxn id="12" idx="0"/>
-          </p:cNvCxnSpPr>
-          <p:nvPr/>
-        </p:nvCxnSpPr>
-        <p:spPr>
-          <a:xfrm>
-            <a:off x="7829538" y="3420269"/>
-            <a:ext cx="0" cy="1689124"/>
-          </a:xfrm>
-          <a:prstGeom prst="straightConnector1">
-            <a:avLst/>
-          </a:prstGeom>
-          <a:ln w="28575">
-            <a:solidFill>
-              <a:schemeClr val="tx1"/>
-            </a:solidFill>
-            <a:tailEnd type="triangle"/>
-          </a:ln>
-        </p:spPr>
-        <p:style>
-          <a:lnRef idx="1">
-            <a:schemeClr val="accent1"/>
-          </a:lnRef>
-          <a:fillRef idx="0">
-            <a:schemeClr val="accent1"/>
-          </a:fillRef>
-          <a:effectRef idx="0">
-            <a:schemeClr val="accent1"/>
-          </a:effectRef>
-          <a:fontRef idx="minor">
-            <a:schemeClr val="tx1"/>
-          </a:fontRef>
-        </p:style>
-      </p:cxnSp>
-      <p:cxnSp>
-        <p:nvCxnSpPr>
-          <p:cNvPr id="16" name="Straight Arrow Connector 15">
-            <a:extLst>
-              <a:ext uri="{FF2B5EF4-FFF2-40B4-BE49-F238E27FC236}">
-                <a16:creationId xmlns:a16="http://schemas.microsoft.com/office/drawing/2014/main" id="{6CB3BE0C-B678-1E24-B63B-F904703C66E6}"/>
-              </a:ext>
-            </a:extLst>
-          </p:cNvPr>
-          <p:cNvCxnSpPr>
-            <a:stCxn id="7" idx="3"/>
-            <a:endCxn id="10" idx="6"/>
-          </p:cNvCxnSpPr>
-          <p:nvPr/>
-        </p:nvCxnSpPr>
-        <p:spPr>
-          <a:xfrm flipH="1">
-            <a:off x="6103902" y="3288467"/>
-            <a:ext cx="1407438" cy="1120910"/>
-          </a:xfrm>
-          <a:prstGeom prst="straightConnector1">
-            <a:avLst/>
-          </a:prstGeom>
-          <a:ln w="28575">
-            <a:solidFill>
-              <a:schemeClr val="tx1"/>
-            </a:solidFill>
-            <a:tailEnd type="triangle"/>
-          </a:ln>
-        </p:spPr>
-        <p:style>
-          <a:lnRef idx="1">
-            <a:schemeClr val="accent1"/>
-          </a:lnRef>
-          <a:fillRef idx="0">
-            <a:schemeClr val="accent1"/>
-          </a:fillRef>
-          <a:effectRef idx="0">
-            <a:schemeClr val="accent1"/>
-          </a:effectRef>
-          <a:fontRef idx="minor">
-            <a:schemeClr val="tx1"/>
-          </a:fontRef>
-        </p:style>
-      </p:cxnSp>
-      <p:cxnSp>
-        <p:nvCxnSpPr>
-          <p:cNvPr id="20" name="Straight Arrow Connector 19">
-            <a:extLst>
-              <a:ext uri="{FF2B5EF4-FFF2-40B4-BE49-F238E27FC236}">
-                <a16:creationId xmlns:a16="http://schemas.microsoft.com/office/drawing/2014/main" id="{D89CC15C-AECD-C09A-CB0B-891E1CFA606C}"/>
-              </a:ext>
-            </a:extLst>
-          </p:cNvPr>
-          <p:cNvCxnSpPr>
-            <a:cxnSpLocks/>
-            <a:stCxn id="8" idx="7"/>
-            <a:endCxn id="10" idx="3"/>
-          </p:cNvCxnSpPr>
-          <p:nvPr/>
-        </p:nvCxnSpPr>
-        <p:spPr>
-          <a:xfrm flipV="1">
-            <a:off x="3882569" y="4727575"/>
-            <a:ext cx="1453135" cy="513620"/>
-          </a:xfrm>
-          <a:prstGeom prst="straightConnector1">
-            <a:avLst/>
-          </a:prstGeom>
-          <a:ln w="28575">
-            <a:solidFill>
-              <a:schemeClr val="tx1"/>
-            </a:solidFill>
-            <a:tailEnd type="triangle"/>
-          </a:ln>
-        </p:spPr>
-        <p:style>
-          <a:lnRef idx="1">
-            <a:schemeClr val="accent1"/>
-          </a:lnRef>
-          <a:fillRef idx="0">
-            <a:schemeClr val="accent1"/>
-          </a:fillRef>
-          <a:effectRef idx="0">
-            <a:schemeClr val="accent1"/>
-          </a:effectRef>
-          <a:fontRef idx="minor">
-            <a:schemeClr val="tx1"/>
-          </a:fontRef>
-        </p:style>
-      </p:cxnSp>
-      <p:cxnSp>
-        <p:nvCxnSpPr>
-          <p:cNvPr id="23" name="Straight Arrow Connector 22">
-            <a:extLst>
-              <a:ext uri="{FF2B5EF4-FFF2-40B4-BE49-F238E27FC236}">
-                <a16:creationId xmlns:a16="http://schemas.microsoft.com/office/drawing/2014/main" id="{7216CEBD-4453-677B-C40B-C327F809640E}"/>
-              </a:ext>
-            </a:extLst>
-          </p:cNvPr>
-          <p:cNvCxnSpPr>
-            <a:cxnSpLocks/>
-            <a:stCxn id="8" idx="1"/>
-            <a:endCxn id="11" idx="7"/>
-          </p:cNvCxnSpPr>
-          <p:nvPr/>
-        </p:nvCxnSpPr>
-        <p:spPr>
-          <a:xfrm flipH="1" flipV="1">
-            <a:off x="1488198" y="5204365"/>
-            <a:ext cx="1757975" cy="36830"/>
-          </a:xfrm>
-          <a:prstGeom prst="straightConnector1">
-            <a:avLst/>
-          </a:prstGeom>
-          <a:ln w="28575">
-            <a:solidFill>
-              <a:schemeClr val="tx1"/>
-            </a:solidFill>
-            <a:tailEnd type="triangle"/>
-          </a:ln>
-        </p:spPr>
-        <p:style>
-          <a:lnRef idx="1">
-            <a:schemeClr val="accent1"/>
-          </a:lnRef>
-          <a:fillRef idx="0">
-            <a:schemeClr val="accent1"/>
-          </a:fillRef>
-          <a:effectRef idx="0">
-            <a:schemeClr val="accent1"/>
-          </a:effectRef>
-          <a:fontRef idx="minor">
-            <a:schemeClr val="tx1"/>
-          </a:fontRef>
-        </p:style>
-      </p:cxnSp>
-      <p:cxnSp>
-        <p:nvCxnSpPr>
-          <p:cNvPr id="25" name="Straight Arrow Connector 24">
-            <a:extLst>
-              <a:ext uri="{FF2B5EF4-FFF2-40B4-BE49-F238E27FC236}">
-                <a16:creationId xmlns:a16="http://schemas.microsoft.com/office/drawing/2014/main" id="{C6BBD261-7249-BEB5-AB48-33CBC0A005A7}"/>
-              </a:ext>
-            </a:extLst>
-          </p:cNvPr>
-          <p:cNvCxnSpPr>
-            <a:cxnSpLocks/>
-            <a:stCxn id="8" idx="2"/>
-            <a:endCxn id="11" idx="6"/>
-          </p:cNvCxnSpPr>
-          <p:nvPr/>
-        </p:nvCxnSpPr>
-        <p:spPr>
-          <a:xfrm flipH="1" flipV="1">
-            <a:off x="1620000" y="5522563"/>
-            <a:ext cx="1494371" cy="36830"/>
-          </a:xfrm>
-          <a:prstGeom prst="straightConnector1">
-            <a:avLst/>
-          </a:prstGeom>
-          <a:ln w="28575">
-            <a:solidFill>
-              <a:schemeClr val="tx1"/>
-            </a:solidFill>
-            <a:tailEnd type="triangle"/>
-          </a:ln>
-        </p:spPr>
-        <p:style>
-          <a:lnRef idx="1">
-            <a:schemeClr val="accent1"/>
-          </a:lnRef>
-          <a:fillRef idx="0">
-            <a:schemeClr val="accent1"/>
-          </a:fillRef>
-          <a:effectRef idx="0">
-            <a:schemeClr val="accent1"/>
-          </a:effectRef>
-          <a:fontRef idx="minor">
-            <a:schemeClr val="tx1"/>
-          </a:fontRef>
-        </p:style>
-      </p:cxnSp>
-      <p:cxnSp>
-        <p:nvCxnSpPr>
-          <p:cNvPr id="27" name="Straight Arrow Connector 26">
-            <a:extLst>
-              <a:ext uri="{FF2B5EF4-FFF2-40B4-BE49-F238E27FC236}">
-                <a16:creationId xmlns:a16="http://schemas.microsoft.com/office/drawing/2014/main" id="{82D675D4-7D1E-68AE-10EE-2B43A10CBEC8}"/>
-              </a:ext>
-            </a:extLst>
-          </p:cNvPr>
-          <p:cNvCxnSpPr>
-            <a:stCxn id="6" idx="6"/>
-            <a:endCxn id="9" idx="2"/>
-          </p:cNvCxnSpPr>
-          <p:nvPr/>
-        </p:nvCxnSpPr>
-        <p:spPr>
-          <a:xfrm flipV="1">
-            <a:off x="1620000" y="2952174"/>
-            <a:ext cx="2052919" cy="18095"/>
-          </a:xfrm>
-          <a:prstGeom prst="straightConnector1">
-            <a:avLst/>
-          </a:prstGeom>
-          <a:ln w="28575">
-            <a:solidFill>
-              <a:schemeClr val="tx1"/>
-            </a:solidFill>
-            <a:tailEnd type="triangle"/>
-          </a:ln>
-        </p:spPr>
-        <p:style>
-          <a:lnRef idx="1">
-            <a:schemeClr val="accent1"/>
-          </a:lnRef>
-          <a:fillRef idx="0">
-            <a:schemeClr val="accent1"/>
-          </a:fillRef>
-          <a:effectRef idx="0">
-            <a:schemeClr val="accent1"/>
-          </a:effectRef>
-          <a:fontRef idx="minor">
-            <a:schemeClr val="tx1"/>
-          </a:fontRef>
-        </p:style>
-      </p:cxnSp>
-      <p:cxnSp>
-        <p:nvCxnSpPr>
-          <p:cNvPr id="29" name="Straight Arrow Connector 28">
-            <a:extLst>
-              <a:ext uri="{FF2B5EF4-FFF2-40B4-BE49-F238E27FC236}">
-                <a16:creationId xmlns:a16="http://schemas.microsoft.com/office/drawing/2014/main" id="{09967E8B-D7FB-6E75-C2F1-94CD13DCE70F}"/>
-              </a:ext>
-            </a:extLst>
-          </p:cNvPr>
-          <p:cNvCxnSpPr>
-            <a:stCxn id="6" idx="4"/>
-            <a:endCxn id="11" idx="0"/>
-          </p:cNvCxnSpPr>
-          <p:nvPr/>
-        </p:nvCxnSpPr>
-        <p:spPr>
-          <a:xfrm>
-            <a:off x="1170000" y="3420269"/>
-            <a:ext cx="0" cy="1652294"/>
-          </a:xfrm>
-          <a:prstGeom prst="straightConnector1">
-            <a:avLst/>
-          </a:prstGeom>
-          <a:ln w="28575">
-            <a:solidFill>
-              <a:schemeClr val="tx1"/>
-            </a:solidFill>
-            <a:tailEnd type="triangle"/>
-          </a:ln>
-        </p:spPr>
-        <p:style>
-          <a:lnRef idx="1">
-            <a:schemeClr val="accent1"/>
-          </a:lnRef>
-          <a:fillRef idx="0">
-            <a:schemeClr val="accent1"/>
-          </a:fillRef>
-          <a:effectRef idx="0">
-            <a:schemeClr val="accent1"/>
-          </a:effectRef>
-          <a:fontRef idx="minor">
-            <a:schemeClr val="tx1"/>
-          </a:fontRef>
-        </p:style>
-      </p:cxnSp>
-      <p:cxnSp>
-        <p:nvCxnSpPr>
-          <p:cNvPr id="31" name="Straight Arrow Connector 30">
-            <a:extLst>
-              <a:ext uri="{FF2B5EF4-FFF2-40B4-BE49-F238E27FC236}">
-                <a16:creationId xmlns:a16="http://schemas.microsoft.com/office/drawing/2014/main" id="{6D4E1BF3-88E5-1311-983C-3E42C7DF4B81}"/>
-              </a:ext>
-            </a:extLst>
-          </p:cNvPr>
-          <p:cNvCxnSpPr>
-            <a:stCxn id="6" idx="5"/>
-            <a:endCxn id="10" idx="2"/>
-          </p:cNvCxnSpPr>
-          <p:nvPr/>
-        </p:nvCxnSpPr>
-        <p:spPr>
-          <a:xfrm>
-            <a:off x="1488198" y="3288467"/>
-            <a:ext cx="3715704" cy="1120910"/>
-          </a:xfrm>
-          <a:prstGeom prst="straightConnector1">
-            <a:avLst/>
-          </a:prstGeom>
-          <a:ln w="28575">
-            <a:solidFill>
-              <a:schemeClr val="tx1"/>
-            </a:solidFill>
-            <a:tailEnd type="triangle"/>
-          </a:ln>
-        </p:spPr>
-        <p:style>
-          <a:lnRef idx="1">
-            <a:schemeClr val="accent1"/>
-          </a:lnRef>
-          <a:fillRef idx="0">
-            <a:schemeClr val="accent1"/>
-          </a:fillRef>
-          <a:effectRef idx="0">
-            <a:schemeClr val="accent1"/>
-          </a:effectRef>
-          <a:fontRef idx="minor">
-            <a:schemeClr val="tx1"/>
-          </a:fontRef>
-        </p:style>
-      </p:cxnSp>
-      <p:sp>
-        <p:nvSpPr>
-          <p:cNvPr id="32" name="TextBox 31">
-            <a:extLst>
-              <a:ext uri="{FF2B5EF4-FFF2-40B4-BE49-F238E27FC236}">
-                <a16:creationId xmlns:a16="http://schemas.microsoft.com/office/drawing/2014/main" id="{3D8D004A-8C9D-A04B-CCB8-D3FC8D5A7D7D}"/>
-              </a:ext>
-            </a:extLst>
-          </p:cNvPr>
-          <p:cNvSpPr txBox="1"/>
-          <p:nvPr/>
-        </p:nvSpPr>
-        <p:spPr>
-          <a:xfrm>
-            <a:off x="700502" y="3590724"/>
-            <a:ext cx="899996" cy="523220"/>
-          </a:xfrm>
-          <a:prstGeom prst="rect">
-            <a:avLst/>
-          </a:prstGeom>
-          <a:solidFill>
-            <a:schemeClr val="bg1"/>
-          </a:solidFill>
-        </p:spPr>
-        <p:txBody>
-          <a:bodyPr wrap="square" rtlCol="0">
-            <a:spAutoFit/>
-          </a:bodyPr>
-          <a:lstStyle/>
-          <a:p>
-            <a:r>
-              <a:rPr lang="cs-CZ" sz="1400" dirty="0"/>
-              <a:t>4 ks</a:t>
-            </a:r>
-          </a:p>
-          <a:p>
-            <a:r>
-              <a:rPr lang="cs-CZ" sz="1400" dirty="0"/>
-              <a:t>06/01/24</a:t>
-            </a:r>
-            <a:endParaRPr lang="en-GB" sz="1400" dirty="0"/>
-          </a:p>
-        </p:txBody>
-      </p:sp>
-      <p:sp>
-        <p:nvSpPr>
-          <p:cNvPr id="35" name="TextBox 34">
-            <a:extLst>
-              <a:ext uri="{FF2B5EF4-FFF2-40B4-BE49-F238E27FC236}">
-                <a16:creationId xmlns:a16="http://schemas.microsoft.com/office/drawing/2014/main" id="{6B7C2217-D8E8-25CD-3903-0FA5A18C6BAE}"/>
-              </a:ext>
-            </a:extLst>
-          </p:cNvPr>
-          <p:cNvSpPr txBox="1"/>
-          <p:nvPr/>
-        </p:nvSpPr>
-        <p:spPr>
-          <a:xfrm rot="1062652">
-            <a:off x="2424575" y="3502439"/>
-            <a:ext cx="899996" cy="523220"/>
-          </a:xfrm>
-          <a:prstGeom prst="rect">
-            <a:avLst/>
-          </a:prstGeom>
-          <a:solidFill>
-            <a:schemeClr val="bg1"/>
-          </a:solidFill>
-        </p:spPr>
-        <p:txBody>
-          <a:bodyPr wrap="square" rtlCol="0">
-            <a:spAutoFit/>
-          </a:bodyPr>
-          <a:lstStyle/>
-          <a:p>
-            <a:r>
-              <a:rPr lang="cs-CZ" sz="1400" dirty="0"/>
-              <a:t>2 ks</a:t>
-            </a:r>
-          </a:p>
-          <a:p>
-            <a:r>
-              <a:rPr lang="cs-CZ" sz="1400" dirty="0"/>
-              <a:t>06/01/24</a:t>
-            </a:r>
-            <a:endParaRPr lang="en-GB" sz="1400" dirty="0"/>
-          </a:p>
-        </p:txBody>
-      </p:sp>
-      <p:sp>
-        <p:nvSpPr>
-          <p:cNvPr id="36" name="TextBox 35">
-            <a:extLst>
-              <a:ext uri="{FF2B5EF4-FFF2-40B4-BE49-F238E27FC236}">
-                <a16:creationId xmlns:a16="http://schemas.microsoft.com/office/drawing/2014/main" id="{8F9AB825-AA85-2DAD-27CD-2BE9EB2AAC84}"/>
-              </a:ext>
-            </a:extLst>
-          </p:cNvPr>
-          <p:cNvSpPr txBox="1"/>
-          <p:nvPr/>
-        </p:nvSpPr>
-        <p:spPr>
-          <a:xfrm>
-            <a:off x="2196461" y="2759648"/>
-            <a:ext cx="899996" cy="523220"/>
-          </a:xfrm>
-          <a:prstGeom prst="rect">
-            <a:avLst/>
-          </a:prstGeom>
-          <a:solidFill>
-            <a:schemeClr val="bg1"/>
-          </a:solidFill>
-        </p:spPr>
-        <p:txBody>
-          <a:bodyPr wrap="square" rtlCol="0">
-            <a:spAutoFit/>
-          </a:bodyPr>
-          <a:lstStyle/>
-          <a:p>
-            <a:r>
-              <a:rPr lang="cs-CZ" sz="1400" dirty="0"/>
-              <a:t>1 ks</a:t>
-            </a:r>
-          </a:p>
-          <a:p>
-            <a:r>
-              <a:rPr lang="cs-CZ" sz="1400" dirty="0"/>
-              <a:t>14/03/24</a:t>
-            </a:r>
-            <a:endParaRPr lang="en-GB" sz="1400" dirty="0"/>
-          </a:p>
-        </p:txBody>
-      </p:sp>
-      <p:sp>
-        <p:nvSpPr>
-          <p:cNvPr id="37" name="TextBox 36">
-            <a:extLst>
-              <a:ext uri="{FF2B5EF4-FFF2-40B4-BE49-F238E27FC236}">
-                <a16:creationId xmlns:a16="http://schemas.microsoft.com/office/drawing/2014/main" id="{1B0F9278-36E9-85E8-9A70-9A5AB0C04322}"/>
-              </a:ext>
-            </a:extLst>
-          </p:cNvPr>
-          <p:cNvSpPr txBox="1"/>
-          <p:nvPr/>
-        </p:nvSpPr>
-        <p:spPr>
-          <a:xfrm rot="20337978">
-            <a:off x="4117508" y="4732995"/>
-            <a:ext cx="899996" cy="523220"/>
-          </a:xfrm>
-          <a:prstGeom prst="rect">
-            <a:avLst/>
-          </a:prstGeom>
-          <a:solidFill>
-            <a:schemeClr val="bg1"/>
-          </a:solidFill>
-        </p:spPr>
-        <p:txBody>
-          <a:bodyPr wrap="square" rtlCol="0">
-            <a:spAutoFit/>
-          </a:bodyPr>
-          <a:lstStyle/>
-          <a:p>
-            <a:r>
-              <a:rPr lang="cs-CZ" sz="1400" dirty="0"/>
-              <a:t>4 ks</a:t>
-            </a:r>
-          </a:p>
-          <a:p>
-            <a:r>
-              <a:rPr lang="cs-CZ" sz="1400" dirty="0"/>
-              <a:t>14/03/24</a:t>
-            </a:r>
-            <a:endParaRPr lang="en-GB" sz="1400" dirty="0"/>
-          </a:p>
-        </p:txBody>
-      </p:sp>
-      <p:sp>
-        <p:nvSpPr>
-          <p:cNvPr id="38" name="TextBox 37">
-            <a:extLst>
-              <a:ext uri="{FF2B5EF4-FFF2-40B4-BE49-F238E27FC236}">
-                <a16:creationId xmlns:a16="http://schemas.microsoft.com/office/drawing/2014/main" id="{8649BAEF-AC25-F30C-6490-8B60CBE457B8}"/>
-              </a:ext>
-            </a:extLst>
-          </p:cNvPr>
-          <p:cNvSpPr txBox="1"/>
-          <p:nvPr/>
-        </p:nvSpPr>
-        <p:spPr>
-          <a:xfrm>
-            <a:off x="1987285" y="5486173"/>
-            <a:ext cx="899996" cy="523220"/>
-          </a:xfrm>
-          <a:prstGeom prst="rect">
-            <a:avLst/>
-          </a:prstGeom>
-          <a:solidFill>
-            <a:schemeClr val="bg1"/>
-          </a:solidFill>
-        </p:spPr>
-        <p:txBody>
-          <a:bodyPr wrap="square" rtlCol="0">
-            <a:spAutoFit/>
-          </a:bodyPr>
-          <a:lstStyle/>
-          <a:p>
-            <a:r>
-              <a:rPr lang="cs-CZ" sz="1400" dirty="0"/>
-              <a:t>1 ks</a:t>
-            </a:r>
-          </a:p>
-          <a:p>
-            <a:r>
-              <a:rPr lang="cs-CZ" sz="1400" dirty="0"/>
-              <a:t>12/03/24</a:t>
-            </a:r>
-            <a:endParaRPr lang="en-GB" sz="1400" dirty="0"/>
-          </a:p>
-        </p:txBody>
-      </p:sp>
-      <p:sp>
-        <p:nvSpPr>
-          <p:cNvPr id="39" name="TextBox 38">
-            <a:extLst>
-              <a:ext uri="{FF2B5EF4-FFF2-40B4-BE49-F238E27FC236}">
-                <a16:creationId xmlns:a16="http://schemas.microsoft.com/office/drawing/2014/main" id="{0134F62A-96E6-6E0B-13F9-67BBDB6D3BE5}"/>
-              </a:ext>
-            </a:extLst>
-          </p:cNvPr>
-          <p:cNvSpPr txBox="1"/>
-          <p:nvPr/>
-        </p:nvSpPr>
-        <p:spPr>
-          <a:xfrm>
-            <a:off x="1987285" y="4760287"/>
-            <a:ext cx="899996" cy="523220"/>
-          </a:xfrm>
-          <a:prstGeom prst="rect">
-            <a:avLst/>
-          </a:prstGeom>
-          <a:solidFill>
-            <a:schemeClr val="bg1"/>
-          </a:solidFill>
-        </p:spPr>
-        <p:txBody>
-          <a:bodyPr wrap="square" rtlCol="0">
-            <a:spAutoFit/>
-          </a:bodyPr>
-          <a:lstStyle/>
-          <a:p>
-            <a:r>
-              <a:rPr lang="cs-CZ" sz="1400" dirty="0"/>
-              <a:t>3 ks</a:t>
-            </a:r>
-          </a:p>
-          <a:p>
-            <a:r>
-              <a:rPr lang="cs-CZ" sz="1400" dirty="0"/>
-              <a:t>14/03/24</a:t>
-            </a:r>
-            <a:endParaRPr lang="en-GB" sz="1400" dirty="0"/>
-          </a:p>
-        </p:txBody>
-      </p:sp>
-      <p:sp>
-        <p:nvSpPr>
-          <p:cNvPr id="42" name="TextBox 41">
-            <a:extLst>
-              <a:ext uri="{FF2B5EF4-FFF2-40B4-BE49-F238E27FC236}">
-                <a16:creationId xmlns:a16="http://schemas.microsoft.com/office/drawing/2014/main" id="{AA17E2EC-6F41-FDEE-BA16-1D2B16243FDE}"/>
-              </a:ext>
-            </a:extLst>
-          </p:cNvPr>
-          <p:cNvSpPr txBox="1"/>
-          <p:nvPr/>
-        </p:nvSpPr>
-        <p:spPr>
-          <a:xfrm>
-            <a:off x="7379538" y="3882054"/>
-            <a:ext cx="899996" cy="523220"/>
-          </a:xfrm>
-          <a:prstGeom prst="rect">
-            <a:avLst/>
-          </a:prstGeom>
-          <a:solidFill>
-            <a:schemeClr val="bg1"/>
-          </a:solidFill>
-        </p:spPr>
-        <p:txBody>
-          <a:bodyPr wrap="square" rtlCol="0">
-            <a:spAutoFit/>
-          </a:bodyPr>
-          <a:lstStyle/>
-          <a:p>
-            <a:r>
-              <a:rPr lang="cs-CZ" sz="1400" dirty="0"/>
-              <a:t>6 ks</a:t>
-            </a:r>
-          </a:p>
-          <a:p>
-            <a:r>
-              <a:rPr lang="cs-CZ" sz="1400" dirty="0"/>
-              <a:t>31/08/22</a:t>
-            </a:r>
-            <a:endParaRPr lang="en-GB" sz="1400" dirty="0"/>
-          </a:p>
-        </p:txBody>
-      </p:sp>
-      <p:sp>
-        <p:nvSpPr>
-          <p:cNvPr id="43" name="TextBox 42">
-            <a:extLst>
-              <a:ext uri="{FF2B5EF4-FFF2-40B4-BE49-F238E27FC236}">
-                <a16:creationId xmlns:a16="http://schemas.microsoft.com/office/drawing/2014/main" id="{C0F359B0-559A-3612-2535-0E3FDE392CEC}"/>
-              </a:ext>
-            </a:extLst>
-          </p:cNvPr>
-          <p:cNvSpPr txBox="1"/>
-          <p:nvPr/>
-        </p:nvSpPr>
-        <p:spPr>
-          <a:xfrm rot="19252011">
-            <a:off x="6449812" y="3508668"/>
-            <a:ext cx="899996" cy="523220"/>
-          </a:xfrm>
-          <a:prstGeom prst="rect">
-            <a:avLst/>
-          </a:prstGeom>
-          <a:solidFill>
-            <a:schemeClr val="bg1"/>
-          </a:solidFill>
-        </p:spPr>
-        <p:txBody>
-          <a:bodyPr wrap="square" rtlCol="0">
-            <a:spAutoFit/>
-          </a:bodyPr>
-          <a:lstStyle/>
-          <a:p>
-            <a:r>
-              <a:rPr lang="cs-CZ" sz="1400" dirty="0"/>
-              <a:t>2 ks</a:t>
-            </a:r>
-          </a:p>
-          <a:p>
-            <a:r>
-              <a:rPr lang="cs-CZ" sz="1400" dirty="0"/>
-              <a:t>22/02/23</a:t>
-            </a:r>
-            <a:endParaRPr lang="en-GB" sz="1400" dirty="0"/>
-          </a:p>
-        </p:txBody>
-      </p:sp>
-      <p:cxnSp>
-        <p:nvCxnSpPr>
-          <p:cNvPr id="45" name="Straight Arrow Connector 44">
-            <a:extLst>
-              <a:ext uri="{FF2B5EF4-FFF2-40B4-BE49-F238E27FC236}">
-                <a16:creationId xmlns:a16="http://schemas.microsoft.com/office/drawing/2014/main" id="{40823093-E736-DA7A-1FC5-2FF7A469EBF7}"/>
-              </a:ext>
-            </a:extLst>
-          </p:cNvPr>
-          <p:cNvCxnSpPr>
-            <a:cxnSpLocks/>
-            <a:stCxn id="8" idx="6"/>
-            <a:endCxn id="12" idx="2"/>
-          </p:cNvCxnSpPr>
-          <p:nvPr/>
-        </p:nvCxnSpPr>
-        <p:spPr>
-          <a:xfrm>
-            <a:off x="4014371" y="5559393"/>
-            <a:ext cx="3365167" cy="0"/>
-          </a:xfrm>
-          <a:prstGeom prst="straightConnector1">
-            <a:avLst/>
-          </a:prstGeom>
-          <a:ln w="28575">
-            <a:solidFill>
-              <a:schemeClr val="tx1"/>
-            </a:solidFill>
-            <a:tailEnd type="triangle"/>
-          </a:ln>
-        </p:spPr>
-        <p:style>
-          <a:lnRef idx="1">
-            <a:schemeClr val="accent1"/>
-          </a:lnRef>
-          <a:fillRef idx="0">
-            <a:schemeClr val="accent1"/>
-          </a:fillRef>
-          <a:effectRef idx="0">
-            <a:schemeClr val="accent1"/>
-          </a:effectRef>
-          <a:fontRef idx="minor">
-            <a:schemeClr val="tx1"/>
-          </a:fontRef>
-        </p:style>
-      </p:cxnSp>
-      <p:sp>
-        <p:nvSpPr>
-          <p:cNvPr id="46" name="TextBox 45">
-            <a:extLst>
-              <a:ext uri="{FF2B5EF4-FFF2-40B4-BE49-F238E27FC236}">
-                <a16:creationId xmlns:a16="http://schemas.microsoft.com/office/drawing/2014/main" id="{63F004B6-1CD1-93E6-016F-3BFEB7F8D2B0}"/>
-              </a:ext>
-            </a:extLst>
-          </p:cNvPr>
-          <p:cNvSpPr txBox="1"/>
-          <p:nvPr/>
-        </p:nvSpPr>
-        <p:spPr>
-          <a:xfrm>
-            <a:off x="4967244" y="5336268"/>
-            <a:ext cx="899996" cy="523220"/>
-          </a:xfrm>
-          <a:prstGeom prst="rect">
-            <a:avLst/>
-          </a:prstGeom>
-          <a:solidFill>
-            <a:schemeClr val="bg1"/>
-          </a:solidFill>
-        </p:spPr>
-        <p:txBody>
-          <a:bodyPr wrap="square" rtlCol="0">
-            <a:spAutoFit/>
-          </a:bodyPr>
-          <a:lstStyle/>
-          <a:p>
-            <a:r>
-              <a:rPr lang="cs-CZ" sz="1400" dirty="0"/>
-              <a:t>1 ks</a:t>
-            </a:r>
-          </a:p>
-          <a:p>
-            <a:r>
-              <a:rPr lang="cs-CZ" sz="1400" dirty="0"/>
-              <a:t>06/02/24</a:t>
-            </a:r>
-            <a:endParaRPr lang="en-GB" sz="1400" dirty="0"/>
-          </a:p>
-        </p:txBody>
-      </p:sp>
-      <p:sp>
-        <p:nvSpPr>
-          <p:cNvPr id="50" name="Flowchart: Connector 49">
-            <a:extLst>
-              <a:ext uri="{FF2B5EF4-FFF2-40B4-BE49-F238E27FC236}">
-                <a16:creationId xmlns:a16="http://schemas.microsoft.com/office/drawing/2014/main" id="{2A5859EA-1928-C692-C254-53D142C270D3}"/>
-              </a:ext>
-            </a:extLst>
-          </p:cNvPr>
-          <p:cNvSpPr/>
-          <p:nvPr/>
-        </p:nvSpPr>
-        <p:spPr>
-          <a:xfrm>
-            <a:off x="5166720" y="2520269"/>
-            <a:ext cx="900000" cy="900000"/>
-          </a:xfrm>
-          <a:prstGeom prst="flowChartConnector">
-            <a:avLst/>
-          </a:prstGeom>
-          <a:solidFill>
-            <a:schemeClr val="bg1"/>
-          </a:solidFill>
-          <a:ln w="19050">
-            <a:solidFill>
-              <a:srgbClr val="C00000"/>
-            </a:solidFill>
-          </a:ln>
-        </p:spPr>
-        <p:style>
-          <a:lnRef idx="2">
-            <a:schemeClr val="accent1">
-              <a:shade val="15000"/>
-            </a:schemeClr>
-          </a:lnRef>
-          <a:fillRef idx="1">
-            <a:schemeClr val="accent1"/>
-          </a:fillRef>
-          <a:effectRef idx="0">
-            <a:schemeClr val="accent1"/>
-          </a:effectRef>
-          <a:fontRef idx="minor">
-            <a:schemeClr val="lt1"/>
-          </a:fontRef>
-        </p:style>
-        <p:txBody>
-          <a:bodyPr rtlCol="0" anchor="ctr"/>
-          <a:lstStyle/>
-          <a:p>
-            <a:pPr algn="ctr"/>
-            <a:r>
-              <a:rPr lang="cs-CZ" sz="1400" dirty="0">
-                <a:solidFill>
-                  <a:schemeClr val="tx1"/>
-                </a:solidFill>
-              </a:rPr>
-              <a:t>Pepř</a:t>
-            </a:r>
-            <a:endParaRPr lang="en-GB" sz="1400" dirty="0">
-              <a:solidFill>
-                <a:schemeClr val="tx1"/>
-              </a:solidFill>
-            </a:endParaRPr>
-          </a:p>
-        </p:txBody>
-      </p:sp>
-      <p:cxnSp>
-        <p:nvCxnSpPr>
-          <p:cNvPr id="52" name="Straight Arrow Connector 51">
-            <a:extLst>
-              <a:ext uri="{FF2B5EF4-FFF2-40B4-BE49-F238E27FC236}">
-                <a16:creationId xmlns:a16="http://schemas.microsoft.com/office/drawing/2014/main" id="{D5475714-BFDC-B94F-14C1-DC5E846334DA}"/>
-              </a:ext>
-            </a:extLst>
-          </p:cNvPr>
-          <p:cNvCxnSpPr>
-            <a:stCxn id="7" idx="2"/>
-            <a:endCxn id="50" idx="6"/>
-          </p:cNvCxnSpPr>
-          <p:nvPr/>
-        </p:nvCxnSpPr>
-        <p:spPr>
-          <a:xfrm flipH="1">
-            <a:off x="6066720" y="2970269"/>
-            <a:ext cx="1312818" cy="0"/>
-          </a:xfrm>
-          <a:prstGeom prst="straightConnector1">
-            <a:avLst/>
-          </a:prstGeom>
-          <a:ln w="28575">
-            <a:solidFill>
-              <a:schemeClr val="tx1"/>
-            </a:solidFill>
-            <a:tailEnd type="triangle"/>
-          </a:ln>
-        </p:spPr>
-        <p:style>
-          <a:lnRef idx="1">
-            <a:schemeClr val="accent1"/>
-          </a:lnRef>
-          <a:fillRef idx="0">
-            <a:schemeClr val="accent1"/>
-          </a:fillRef>
-          <a:effectRef idx="0">
-            <a:schemeClr val="accent1"/>
-          </a:effectRef>
-          <a:fontRef idx="minor">
-            <a:schemeClr val="tx1"/>
-          </a:fontRef>
-        </p:style>
-      </p:cxnSp>
-      <p:sp>
-        <p:nvSpPr>
-          <p:cNvPr id="55" name="TextBox 54">
-            <a:extLst>
-              <a:ext uri="{FF2B5EF4-FFF2-40B4-BE49-F238E27FC236}">
-                <a16:creationId xmlns:a16="http://schemas.microsoft.com/office/drawing/2014/main" id="{CEAB63AC-27AB-E6E6-79EC-EBD12F046D1E}"/>
-              </a:ext>
-            </a:extLst>
-          </p:cNvPr>
-          <p:cNvSpPr txBox="1"/>
-          <p:nvPr/>
-        </p:nvSpPr>
-        <p:spPr>
-          <a:xfrm>
-            <a:off x="6291722" y="2708659"/>
-            <a:ext cx="899996" cy="523220"/>
-          </a:xfrm>
-          <a:prstGeom prst="rect">
-            <a:avLst/>
-          </a:prstGeom>
-          <a:solidFill>
-            <a:schemeClr val="bg1"/>
-          </a:solidFill>
-        </p:spPr>
-        <p:txBody>
-          <a:bodyPr wrap="square" rtlCol="0">
-            <a:spAutoFit/>
-          </a:bodyPr>
-          <a:lstStyle/>
-          <a:p>
-            <a:r>
-              <a:rPr lang="cs-CZ" sz="1400" dirty="0"/>
-              <a:t>1 ks</a:t>
-            </a:r>
-          </a:p>
-          <a:p>
-            <a:r>
-              <a:rPr lang="cs-CZ" sz="1400" dirty="0"/>
-              <a:t>11/12/23</a:t>
-            </a:r>
-            <a:endParaRPr lang="en-GB" sz="1400" dirty="0"/>
-          </a:p>
-        </p:txBody>
-      </p:sp>
-      <p:sp>
-        <p:nvSpPr>
-          <p:cNvPr id="56" name="TextBox 55">
-            <a:extLst>
-              <a:ext uri="{FF2B5EF4-FFF2-40B4-BE49-F238E27FC236}">
-                <a16:creationId xmlns:a16="http://schemas.microsoft.com/office/drawing/2014/main" id="{5F036A11-E6B6-6F38-8EC6-6D60A9215F15}"/>
-              </a:ext>
-            </a:extLst>
-          </p:cNvPr>
-          <p:cNvSpPr txBox="1"/>
-          <p:nvPr/>
-        </p:nvSpPr>
-        <p:spPr>
-          <a:xfrm>
-            <a:off x="776532" y="2441131"/>
-            <a:ext cx="747935" cy="276999"/>
-          </a:xfrm>
-          <a:prstGeom prst="rect">
-            <a:avLst/>
-          </a:prstGeom>
-        </p:spPr>
-        <p:style>
-          <a:lnRef idx="3">
-            <a:schemeClr val="lt1"/>
-          </a:lnRef>
-          <a:fillRef idx="1">
-            <a:schemeClr val="accent1"/>
-          </a:fillRef>
-          <a:effectRef idx="1">
-            <a:schemeClr val="accent1"/>
-          </a:effectRef>
-          <a:fontRef idx="minor">
-            <a:schemeClr val="lt1"/>
-          </a:fontRef>
-        </p:style>
-        <p:txBody>
-          <a:bodyPr wrap="square" rtlCol="0">
-            <a:spAutoFit/>
-          </a:bodyPr>
-          <a:lstStyle/>
-          <a:p>
-            <a:pPr algn="ctr"/>
-            <a:r>
-              <a:rPr lang="cs-CZ" sz="1200" dirty="0"/>
-              <a:t>Zákazník</a:t>
-            </a:r>
-            <a:endParaRPr lang="en-GB" sz="1200" dirty="0"/>
-          </a:p>
-        </p:txBody>
-      </p:sp>
-      <p:sp>
-        <p:nvSpPr>
-          <p:cNvPr id="57" name="TextBox 56">
-            <a:extLst>
-              <a:ext uri="{FF2B5EF4-FFF2-40B4-BE49-F238E27FC236}">
-                <a16:creationId xmlns:a16="http://schemas.microsoft.com/office/drawing/2014/main" id="{9A6EF341-453E-46E9-6B31-1A9B8F3C58B5}"/>
-              </a:ext>
-            </a:extLst>
-          </p:cNvPr>
-          <p:cNvSpPr txBox="1"/>
-          <p:nvPr/>
-        </p:nvSpPr>
-        <p:spPr>
-          <a:xfrm>
-            <a:off x="3190403" y="5827994"/>
-            <a:ext cx="747935" cy="276999"/>
-          </a:xfrm>
-          <a:prstGeom prst="rect">
-            <a:avLst/>
-          </a:prstGeom>
-        </p:spPr>
-        <p:style>
-          <a:lnRef idx="3">
-            <a:schemeClr val="lt1"/>
-          </a:lnRef>
-          <a:fillRef idx="1">
-            <a:schemeClr val="accent1"/>
-          </a:fillRef>
-          <a:effectRef idx="1">
-            <a:schemeClr val="accent1"/>
-          </a:effectRef>
-          <a:fontRef idx="minor">
-            <a:schemeClr val="lt1"/>
-          </a:fontRef>
-        </p:style>
-        <p:txBody>
-          <a:bodyPr wrap="square" rtlCol="0">
-            <a:spAutoFit/>
-          </a:bodyPr>
-          <a:lstStyle/>
-          <a:p>
-            <a:pPr algn="ctr"/>
-            <a:r>
-              <a:rPr lang="cs-CZ" sz="1200" dirty="0"/>
-              <a:t>Zákazník</a:t>
-            </a:r>
-            <a:endParaRPr lang="en-GB" sz="1200" dirty="0"/>
-          </a:p>
-        </p:txBody>
-      </p:sp>
-      <p:sp>
-        <p:nvSpPr>
-          <p:cNvPr id="58" name="TextBox 57">
-            <a:extLst>
-              <a:ext uri="{FF2B5EF4-FFF2-40B4-BE49-F238E27FC236}">
-                <a16:creationId xmlns:a16="http://schemas.microsoft.com/office/drawing/2014/main" id="{F66DA6F4-EAC6-8D69-F8EB-84B4935D15CE}"/>
-              </a:ext>
-            </a:extLst>
-          </p:cNvPr>
-          <p:cNvSpPr txBox="1"/>
-          <p:nvPr/>
-        </p:nvSpPr>
-        <p:spPr>
-          <a:xfrm>
-            <a:off x="7455567" y="2424668"/>
-            <a:ext cx="747935" cy="276999"/>
-          </a:xfrm>
-          <a:prstGeom prst="rect">
-            <a:avLst/>
-          </a:prstGeom>
-        </p:spPr>
-        <p:style>
-          <a:lnRef idx="3">
-            <a:schemeClr val="lt1"/>
-          </a:lnRef>
-          <a:fillRef idx="1">
-            <a:schemeClr val="accent1"/>
-          </a:fillRef>
-          <a:effectRef idx="1">
-            <a:schemeClr val="accent1"/>
-          </a:effectRef>
-          <a:fontRef idx="minor">
-            <a:schemeClr val="lt1"/>
-          </a:fontRef>
-        </p:style>
-        <p:txBody>
-          <a:bodyPr wrap="square" rtlCol="0">
-            <a:spAutoFit/>
-          </a:bodyPr>
-          <a:lstStyle/>
-          <a:p>
-            <a:pPr algn="ctr"/>
-            <a:r>
-              <a:rPr lang="cs-CZ" sz="1200" dirty="0"/>
-              <a:t>Zákazník</a:t>
-            </a:r>
-            <a:endParaRPr lang="en-GB" sz="1200" dirty="0"/>
-          </a:p>
-        </p:txBody>
-      </p:sp>
-      <p:sp>
-        <p:nvSpPr>
-          <p:cNvPr id="59" name="TextBox 58">
-            <a:extLst>
-              <a:ext uri="{FF2B5EF4-FFF2-40B4-BE49-F238E27FC236}">
-                <a16:creationId xmlns:a16="http://schemas.microsoft.com/office/drawing/2014/main" id="{3F4AAB1E-FA05-E76A-2847-049FFA894360}"/>
-              </a:ext>
-            </a:extLst>
-          </p:cNvPr>
-          <p:cNvSpPr txBox="1"/>
-          <p:nvPr/>
-        </p:nvSpPr>
-        <p:spPr>
-          <a:xfrm>
-            <a:off x="3762376" y="2425364"/>
-            <a:ext cx="747935" cy="276999"/>
-          </a:xfrm>
-          <a:prstGeom prst="rect">
-            <a:avLst/>
-          </a:prstGeom>
-          <a:solidFill>
-            <a:srgbClr val="C00000"/>
-          </a:solidFill>
-        </p:spPr>
-        <p:style>
-          <a:lnRef idx="3">
-            <a:schemeClr val="lt1"/>
-          </a:lnRef>
-          <a:fillRef idx="1">
-            <a:schemeClr val="accent1"/>
-          </a:fillRef>
-          <a:effectRef idx="1">
-            <a:schemeClr val="accent1"/>
-          </a:effectRef>
-          <a:fontRef idx="minor">
-            <a:schemeClr val="lt1"/>
-          </a:fontRef>
-        </p:style>
-        <p:txBody>
-          <a:bodyPr wrap="square" rtlCol="0">
-            <a:spAutoFit/>
-          </a:bodyPr>
-          <a:lstStyle/>
-          <a:p>
-            <a:pPr algn="ctr"/>
-            <a:r>
-              <a:rPr lang="cs-CZ" sz="1200" dirty="0"/>
-              <a:t>Produkt</a:t>
-            </a:r>
-            <a:endParaRPr lang="en-GB" sz="1200" dirty="0"/>
-          </a:p>
-        </p:txBody>
-      </p:sp>
-      <p:sp>
-        <p:nvSpPr>
-          <p:cNvPr id="60" name="TextBox 59">
-            <a:extLst>
-              <a:ext uri="{FF2B5EF4-FFF2-40B4-BE49-F238E27FC236}">
-                <a16:creationId xmlns:a16="http://schemas.microsoft.com/office/drawing/2014/main" id="{B9C81CCD-5178-4876-A5F1-76C1C190F026}"/>
-              </a:ext>
-            </a:extLst>
-          </p:cNvPr>
-          <p:cNvSpPr txBox="1"/>
-          <p:nvPr/>
-        </p:nvSpPr>
-        <p:spPr>
-          <a:xfrm>
-            <a:off x="5239687" y="2447135"/>
-            <a:ext cx="747935" cy="276999"/>
-          </a:xfrm>
-          <a:prstGeom prst="rect">
-            <a:avLst/>
-          </a:prstGeom>
-          <a:solidFill>
-            <a:srgbClr val="C00000"/>
-          </a:solidFill>
-        </p:spPr>
-        <p:style>
-          <a:lnRef idx="3">
-            <a:schemeClr val="lt1"/>
-          </a:lnRef>
-          <a:fillRef idx="1">
-            <a:schemeClr val="accent1"/>
-          </a:fillRef>
-          <a:effectRef idx="1">
-            <a:schemeClr val="accent1"/>
-          </a:effectRef>
-          <a:fontRef idx="minor">
-            <a:schemeClr val="lt1"/>
-          </a:fontRef>
-        </p:style>
-        <p:txBody>
-          <a:bodyPr wrap="square" rtlCol="0">
-            <a:spAutoFit/>
-          </a:bodyPr>
-          <a:lstStyle/>
-          <a:p>
-            <a:pPr algn="ctr"/>
-            <a:r>
-              <a:rPr lang="cs-CZ" sz="1200" dirty="0"/>
-              <a:t>Produkt</a:t>
-            </a:r>
-            <a:endParaRPr lang="en-GB" sz="1200" dirty="0"/>
-          </a:p>
-        </p:txBody>
-      </p:sp>
-      <p:sp>
-        <p:nvSpPr>
-          <p:cNvPr id="61" name="TextBox 60">
-            <a:extLst>
-              <a:ext uri="{FF2B5EF4-FFF2-40B4-BE49-F238E27FC236}">
-                <a16:creationId xmlns:a16="http://schemas.microsoft.com/office/drawing/2014/main" id="{AF755A35-688F-C340-9A68-7F9AA6087CB7}"/>
-              </a:ext>
-            </a:extLst>
-          </p:cNvPr>
-          <p:cNvSpPr txBox="1"/>
-          <p:nvPr/>
-        </p:nvSpPr>
-        <p:spPr>
-          <a:xfrm>
-            <a:off x="796032" y="5827468"/>
-            <a:ext cx="747935" cy="276999"/>
-          </a:xfrm>
-          <a:prstGeom prst="rect">
-            <a:avLst/>
-          </a:prstGeom>
-          <a:solidFill>
-            <a:srgbClr val="C00000"/>
-          </a:solidFill>
-        </p:spPr>
-        <p:style>
-          <a:lnRef idx="3">
-            <a:schemeClr val="lt1"/>
-          </a:lnRef>
-          <a:fillRef idx="1">
-            <a:schemeClr val="accent1"/>
-          </a:fillRef>
-          <a:effectRef idx="1">
-            <a:schemeClr val="accent1"/>
-          </a:effectRef>
-          <a:fontRef idx="minor">
-            <a:schemeClr val="lt1"/>
-          </a:fontRef>
-        </p:style>
-        <p:txBody>
-          <a:bodyPr wrap="square" rtlCol="0">
-            <a:spAutoFit/>
-          </a:bodyPr>
-          <a:lstStyle/>
-          <a:p>
-            <a:pPr algn="ctr"/>
-            <a:r>
-              <a:rPr lang="cs-CZ" sz="1200" dirty="0"/>
-              <a:t>Produkt</a:t>
-            </a:r>
-            <a:endParaRPr lang="en-GB" sz="1200" dirty="0"/>
-          </a:p>
-        </p:txBody>
-      </p:sp>
-      <p:sp>
-        <p:nvSpPr>
-          <p:cNvPr id="62" name="TextBox 61">
-            <a:extLst>
-              <a:ext uri="{FF2B5EF4-FFF2-40B4-BE49-F238E27FC236}">
-                <a16:creationId xmlns:a16="http://schemas.microsoft.com/office/drawing/2014/main" id="{FD987851-E38C-CED3-97B5-D048ED978E23}"/>
-              </a:ext>
-            </a:extLst>
-          </p:cNvPr>
-          <p:cNvSpPr txBox="1"/>
-          <p:nvPr/>
-        </p:nvSpPr>
-        <p:spPr>
-          <a:xfrm>
-            <a:off x="5278854" y="3861551"/>
-            <a:ext cx="747935" cy="276999"/>
-          </a:xfrm>
-          <a:prstGeom prst="rect">
-            <a:avLst/>
-          </a:prstGeom>
-          <a:solidFill>
-            <a:srgbClr val="C00000"/>
-          </a:solidFill>
-        </p:spPr>
-        <p:style>
-          <a:lnRef idx="3">
-            <a:schemeClr val="lt1"/>
-          </a:lnRef>
-          <a:fillRef idx="1">
-            <a:schemeClr val="accent1"/>
-          </a:fillRef>
-          <a:effectRef idx="1">
-            <a:schemeClr val="accent1"/>
-          </a:effectRef>
-          <a:fontRef idx="minor">
-            <a:schemeClr val="lt1"/>
-          </a:fontRef>
-        </p:style>
-        <p:txBody>
-          <a:bodyPr wrap="square" rtlCol="0">
-            <a:spAutoFit/>
-          </a:bodyPr>
-          <a:lstStyle/>
-          <a:p>
-            <a:pPr algn="ctr"/>
-            <a:r>
-              <a:rPr lang="cs-CZ" sz="1200" dirty="0"/>
-              <a:t>Produkt</a:t>
-            </a:r>
-            <a:endParaRPr lang="en-GB" sz="1200" dirty="0"/>
-          </a:p>
-        </p:txBody>
-      </p:sp>
-      <p:sp>
-        <p:nvSpPr>
-          <p:cNvPr id="63" name="TextBox 62">
-            <a:extLst>
-              <a:ext uri="{FF2B5EF4-FFF2-40B4-BE49-F238E27FC236}">
-                <a16:creationId xmlns:a16="http://schemas.microsoft.com/office/drawing/2014/main" id="{9D9BAC82-839E-8E59-DFF0-69E6E5A23A6E}"/>
-              </a:ext>
-            </a:extLst>
-          </p:cNvPr>
-          <p:cNvSpPr txBox="1"/>
-          <p:nvPr/>
-        </p:nvSpPr>
-        <p:spPr>
-          <a:xfrm>
-            <a:off x="7455566" y="5827995"/>
-            <a:ext cx="747935" cy="276999"/>
-          </a:xfrm>
-          <a:prstGeom prst="rect">
-            <a:avLst/>
-          </a:prstGeom>
-          <a:solidFill>
-            <a:srgbClr val="C00000"/>
-          </a:solidFill>
-        </p:spPr>
-        <p:style>
-          <a:lnRef idx="3">
-            <a:schemeClr val="lt1"/>
-          </a:lnRef>
-          <a:fillRef idx="1">
-            <a:schemeClr val="accent1"/>
-          </a:fillRef>
-          <a:effectRef idx="1">
-            <a:schemeClr val="accent1"/>
-          </a:effectRef>
-          <a:fontRef idx="minor">
-            <a:schemeClr val="lt1"/>
-          </a:fontRef>
-        </p:style>
-        <p:txBody>
-          <a:bodyPr wrap="square" rtlCol="0">
-            <a:spAutoFit/>
-          </a:bodyPr>
-          <a:lstStyle/>
-          <a:p>
-            <a:pPr algn="ctr"/>
-            <a:r>
-              <a:rPr lang="cs-CZ" sz="1200" dirty="0"/>
-              <a:t>Produkt</a:t>
-            </a:r>
-            <a:endParaRPr lang="en-GB" sz="1200" dirty="0"/>
-          </a:p>
-        </p:txBody>
-      </p:sp>
-    </p:spTree>
-    <p:extLst>
-      <p:ext uri="{BB962C8B-B14F-4D97-AF65-F5344CB8AC3E}">
-        <p14:creationId xmlns:p14="http://schemas.microsoft.com/office/powerpoint/2010/main" val="1864091842"/>
       </p:ext>
     </p:extLst>
   </p:cSld>
